--- a/CorpSec-Bank-Sumut-Presentasi.pptx
+++ b/CorpSec-Bank-Sumut-Presentasi.pptx
@@ -3118,8 +3118,8 @@
         </p:nvSpPr>
         <p:spPr>
           <a:xfrm>
-            <a:off x="0" y="0"/>
-            <a:ext cx="12191695" cy="109728"/>
+            <a:off x="7498079" y="0"/>
+            <a:ext cx="4754880" cy="6446520"/>
           </a:xfrm>
           <a:prstGeom prst="rect">
             <a:avLst/>
@@ -3155,16 +3155,16 @@
       </p:sp>
       <p:sp>
         <p:nvSpPr>
-          <p:cNvPr id="3" name="Oval 2"/>
+          <p:cNvPr id="3" name="Rounded Rectangle 2"/>
           <p:cNvSpPr/>
           <p:nvPr/>
         </p:nvSpPr>
         <p:spPr>
           <a:xfrm>
-            <a:off x="8686800" y="-914400"/>
-            <a:ext cx="4572000" cy="4572000"/>
-          </a:xfrm>
-          <a:prstGeom prst="ellipse">
+            <a:off x="640080" y="640080"/>
+            <a:ext cx="1005840" cy="1005840"/>
+          </a:xfrm>
+          <a:prstGeom prst="roundRect">
             <a:avLst/>
           </a:prstGeom>
           <a:solidFill>
@@ -3204,8 +3204,8 @@
         </p:nvSpPr>
         <p:spPr>
           <a:xfrm>
-            <a:off x="731520" y="2011680"/>
-            <a:ext cx="10058400" cy="1371600"/>
+            <a:off x="777240" y="804672"/>
+            <a:ext cx="731520" cy="548640"/>
           </a:xfrm>
           <a:prstGeom prst="rect">
             <a:avLst/>
@@ -3218,15 +3218,15 @@
           </a:bodyPr>
           <a:lstStyle/>
           <a:p>
-            <a:pPr>
-              <a:defRPr sz="4000" b="1">
+            <a:pPr algn="ctr">
+              <a:defRPr sz="2800" b="1">
                 <a:solidFill>
                   <a:srgbClr val="FFFFFF"/>
                 </a:solidFill>
               </a:defRPr>
             </a:pPr>
             <a:r>
-              <a:t>CorpSec Bank Sumut</a:t>
+              <a:t>BS</a:t>
             </a:r>
           </a:p>
         </p:txBody>
@@ -3239,8 +3239,8 @@
         </p:nvSpPr>
         <p:spPr>
           <a:xfrm>
-            <a:off x="731520" y="3474720"/>
-            <a:ext cx="9144000" cy="914400"/>
+            <a:off x="640080" y="2103120"/>
+            <a:ext cx="6858000" cy="1280160"/>
           </a:xfrm>
           <a:prstGeom prst="rect">
             <a:avLst/>
@@ -3254,14 +3254,14 @@
           <a:lstStyle/>
           <a:p>
             <a:pPr>
-              <a:defRPr sz="2000">
-                <a:solidFill>
-                  <a:srgbClr val="F58220"/>
-                </a:solidFill>
-              </a:defRPr>
-            </a:pPr>
-            <a:r>
-              <a:t>Corporate Secretary Digital Platform</a:t>
+              <a:defRPr sz="4600" b="1">
+                <a:solidFill>
+                  <a:srgbClr val="FFFFFF"/>
+                </a:solidFill>
+              </a:defRPr>
+            </a:pPr>
+            <a:r>
+              <a:t>CorpSec Bank Sumut</a:t>
             </a:r>
           </a:p>
         </p:txBody>
@@ -3274,8 +3274,8 @@
         </p:nvSpPr>
         <p:spPr>
           <a:xfrm>
-            <a:off x="731520" y="4572000"/>
-            <a:ext cx="9144000" cy="731520"/>
+            <a:off x="640080" y="3429000"/>
+            <a:ext cx="6858000" cy="731520"/>
           </a:xfrm>
           <a:prstGeom prst="rect">
             <a:avLst/>
@@ -3289,14 +3289,14 @@
           <a:lstStyle/>
           <a:p>
             <a:pPr>
-              <a:defRPr sz="1400">
-                <a:solidFill>
-                  <a:srgbClr val="BCCDDC"/>
-                </a:solidFill>
-              </a:defRPr>
-            </a:pPr>
-            <a:r>
-              <a:t>Presentasi Produk — PRD Discovery v0.1 | Juli 2026</a:t>
+              <a:defRPr sz="2400">
+                <a:solidFill>
+                  <a:srgbClr val="F58220"/>
+                </a:solidFill>
+              </a:defRPr>
+            </a:pPr>
+            <a:r>
+              <a:t>Platform Corporate Secretary Digital</a:t>
             </a:r>
           </a:p>
         </p:txBody>
@@ -3309,8 +3309,8 @@
         </p:nvSpPr>
         <p:spPr>
           <a:xfrm>
-            <a:off x="457200" y="6400800"/>
-            <a:ext cx="11247120" cy="365760"/>
+            <a:off x="640080" y="4389120"/>
+            <a:ext cx="6858000" cy="1097280"/>
           </a:xfrm>
           <a:prstGeom prst="rect">
             <a:avLst/>
@@ -3323,15 +3323,140 @@
           </a:bodyPr>
           <a:lstStyle/>
           <a:p>
+            <a:pPr>
+              <a:defRPr sz="1800">
+                <a:solidFill>
+                  <a:srgbClr val="BCCDDC"/>
+                </a:solidFill>
+              </a:defRPr>
+            </a:pPr>
+            <a:r>
+              <a:t>Presentasi Sistem</a:t>
+            </a:r>
+          </a:p>
+          <a:p>
+            <a:pPr>
+              <a:defRPr sz="1800">
+                <a:solidFill>
+                  <a:srgbClr val="BCCDDC"/>
+                </a:solidFill>
+              </a:defRPr>
+            </a:pPr>
+            <a:r>
+              <a:t>Juli 2026</a:t>
+            </a:r>
+          </a:p>
+        </p:txBody>
+      </p:sp>
+      <p:sp>
+        <p:nvSpPr>
+          <p:cNvPr id="8" name="Rectangle 7"/>
+          <p:cNvSpPr/>
+          <p:nvPr/>
+        </p:nvSpPr>
+        <p:spPr>
+          <a:xfrm>
+            <a:off x="0" y="6446520"/>
+            <a:ext cx="12191695" cy="411480"/>
+          </a:xfrm>
+          <a:prstGeom prst="rect">
+            <a:avLst/>
+          </a:prstGeom>
+          <a:solidFill>
+            <a:srgbClr val="0C2340"/>
+          </a:solidFill>
+          <a:ln>
+            <a:noFill/>
+          </a:ln>
+        </p:spPr>
+        <p:style>
+          <a:lnRef idx="1">
+            <a:schemeClr val="accent1"/>
+          </a:lnRef>
+          <a:fillRef idx="3">
+            <a:schemeClr val="accent1"/>
+          </a:fillRef>
+          <a:effectRef idx="2">
+            <a:schemeClr val="accent1"/>
+          </a:effectRef>
+          <a:fontRef idx="minor">
+            <a:schemeClr val="lt1"/>
+          </a:fontRef>
+        </p:style>
+        <p:txBody>
+          <a:bodyPr rtlCol="0" anchor="ctr"/>
+          <a:lstStyle/>
+          <a:p>
+            <a:pPr algn="ctr"/>
+          </a:p>
+        </p:txBody>
+      </p:sp>
+      <p:sp>
+        <p:nvSpPr>
+          <p:cNvPr id="9" name="TextBox 8"/>
+          <p:cNvSpPr txBox="1"/>
+          <p:nvPr/>
+        </p:nvSpPr>
+        <p:spPr>
+          <a:xfrm>
+            <a:off x="457200" y="6492240"/>
+            <a:ext cx="5486400" cy="320040"/>
+          </a:xfrm>
+          <a:prstGeom prst="rect">
+            <a:avLst/>
+          </a:prstGeom>
+          <a:noFill/>
+        </p:spPr>
+        <p:txBody>
+          <a:bodyPr wrap="none">
+            <a:spAutoFit/>
+          </a:bodyPr>
+          <a:lstStyle/>
+          <a:p>
+            <a:pPr>
+              <a:defRPr sz="1100" b="1">
+                <a:solidFill>
+                  <a:srgbClr val="F58220"/>
+                </a:solidFill>
+              </a:defRPr>
+            </a:pPr>
+            <a:r>
+              <a:t>CorpSec Bank Sumut</a:t>
+            </a:r>
+          </a:p>
+        </p:txBody>
+      </p:sp>
+      <p:sp>
+        <p:nvSpPr>
+          <p:cNvPr id="10" name="TextBox 9"/>
+          <p:cNvSpPr txBox="1"/>
+          <p:nvPr/>
+        </p:nvSpPr>
+        <p:spPr>
+          <a:xfrm>
+            <a:off x="10515600" y="6492240"/>
+            <a:ext cx="1371600" cy="320040"/>
+          </a:xfrm>
+          <a:prstGeom prst="rect">
+            <a:avLst/>
+          </a:prstGeom>
+          <a:noFill/>
+        </p:spPr>
+        <p:txBody>
+          <a:bodyPr wrap="none">
+            <a:spAutoFit/>
+          </a:bodyPr>
+          <a:lstStyle/>
+          <a:p>
             <a:pPr algn="r">
-              <a:defRPr sz="900">
-                <a:solidFill>
-                  <a:srgbClr val="64748B"/>
-                </a:solidFill>
-              </a:defRPr>
-            </a:pPr>
-            <a:r>
-              <a:t>Bank Sumut — Corporate Secretary Digital Platform | PRD v0.1</a:t>
+              <a:defRPr sz="1100">
+                <a:solidFill>
+                  <a:srgbClr val="FFFFFF"/>
+                </a:solidFill>
+              </a:defRPr>
+            </a:pPr>
+            <a:r>
+              <a:t>1</a:t>
             </a:r>
           </a:p>
         </p:txBody>
@@ -3350,7 +3475,7 @@
     <p:bg>
       <p:bgPr>
         <a:solidFill>
-          <a:srgbClr val="FFFFFF"/>
+          <a:srgbClr val="F8FAFC"/>
         </a:solidFill>
         <a:effectLst/>
       </p:bgPr>
@@ -3371,7 +3496,7 @@
         <p:spPr>
           <a:xfrm>
             <a:off x="0" y="0"/>
-            <a:ext cx="12191695" cy="73152"/>
+            <a:ext cx="164592" cy="6446520"/>
           </a:xfrm>
           <a:prstGeom prst="rect">
             <a:avLst/>
@@ -3413,8 +3538,8 @@
         </p:nvSpPr>
         <p:spPr>
           <a:xfrm>
-            <a:off x="548640" y="320040"/>
-            <a:ext cx="10972800" cy="640080"/>
+            <a:off x="502920" y="320040"/>
+            <a:ext cx="11155680" cy="1005840"/>
           </a:xfrm>
           <a:prstGeom prst="rect">
             <a:avLst/>
@@ -3428,34 +3553,180 @@
           <a:lstStyle/>
           <a:p>
             <a:pPr>
-              <a:defRPr sz="2800" b="1">
+              <a:defRPr sz="3400" b="1">
                 <a:solidFill>
                   <a:srgbClr val="0C2340"/>
                 </a:solidFill>
               </a:defRPr>
             </a:pPr>
             <a:r>
-              <a:t>AI Compliance Review</a:t>
-            </a:r>
-          </a:p>
-        </p:txBody>
-      </p:sp>
-      <p:sp>
-        <p:nvSpPr>
-          <p:cNvPr id="4" name="Rectangle 3"/>
+              <a:t>Bantuan Tinjauan Memorandum</a:t>
+            </a:r>
+          </a:p>
+          <a:p>
+            <a:pPr>
+              <a:spcBef>
+                <a:spcPts val="600"/>
+              </a:spcBef>
+              <a:defRPr sz="1700">
+                <a:solidFill>
+                  <a:srgbClr val="64748B"/>
+                </a:solidFill>
+              </a:defRPr>
+            </a:pPr>
+            <a:r>
+              <a:t>Fitur pendukung agar CorpSec lebih cepat bekerja</a:t>
+            </a:r>
+          </a:p>
+        </p:txBody>
+      </p:sp>
+      <p:sp>
+        <p:nvSpPr>
+          <p:cNvPr id="4" name="TextBox 3"/>
+          <p:cNvSpPr txBox="1"/>
+          <p:nvPr/>
+        </p:nvSpPr>
+        <p:spPr>
+          <a:xfrm>
+            <a:off x="502920" y="1417320"/>
+            <a:ext cx="11155680" cy="4754880"/>
+          </a:xfrm>
+          <a:prstGeom prst="rect">
+            <a:avLst/>
+          </a:prstGeom>
+          <a:noFill/>
+        </p:spPr>
+        <p:txBody>
+          <a:bodyPr wrap="square">
+            <a:spAutoFit/>
+          </a:bodyPr>
+          <a:lstStyle/>
+          <a:p>
+            <a:pPr>
+              <a:lnSpc>
+                <a:spcPct val="125000"/>
+              </a:lnSpc>
+              <a:spcAft>
+                <a:spcPts val="1400"/>
+              </a:spcAft>
+              <a:defRPr sz="2100">
+                <a:solidFill>
+                  <a:srgbClr val="1E293B"/>
+                </a:solidFill>
+              </a:defRPr>
+            </a:pPr>
+            <a:r>
+              <a:t>Saat PDF diunggah, sistem membaca isi dokumen secara otomatis.</a:t>
+            </a:r>
+          </a:p>
+          <a:p>
+            <a:pPr>
+              <a:lnSpc>
+                <a:spcPct val="125000"/>
+              </a:lnSpc>
+              <a:spcAft>
+                <a:spcPts val="1400"/>
+              </a:spcAft>
+              <a:defRPr sz="2100">
+                <a:solidFill>
+                  <a:srgbClr val="1E293B"/>
+                </a:solidFill>
+              </a:defRPr>
+            </a:pPr>
+            <a:r>
+              <a:t>CorpSec mendapat ringkasan singkat isi memorandum.</a:t>
+            </a:r>
+          </a:p>
+          <a:p>
+            <a:pPr>
+              <a:lnSpc>
+                <a:spcPct val="125000"/>
+              </a:lnSpc>
+              <a:spcAft>
+                <a:spcPts val="1400"/>
+              </a:spcAft>
+              <a:defRPr sz="2100">
+                <a:solidFill>
+                  <a:srgbClr val="1E293B"/>
+                </a:solidFill>
+              </a:defRPr>
+            </a:pPr>
+            <a:r>
+              <a:t>Sistem menandai poin penting dan hal yang perlu diperhatikan.</a:t>
+            </a:r>
+          </a:p>
+          <a:p>
+            <a:pPr>
+              <a:lnSpc>
+                <a:spcPct val="125000"/>
+              </a:lnSpc>
+              <a:spcAft>
+                <a:spcPts val="1400"/>
+              </a:spcAft>
+              <a:defRPr sz="2100">
+                <a:solidFill>
+                  <a:srgbClr val="1E293B"/>
+                </a:solidFill>
+              </a:defRPr>
+            </a:pPr>
+            <a:r>
+              <a:t>Referensi regulasi yang relevan ditampilkan sebagai acuan.</a:t>
+            </a:r>
+          </a:p>
+          <a:p>
+            <a:pPr>
+              <a:lnSpc>
+                <a:spcPct val="125000"/>
+              </a:lnSpc>
+              <a:spcAft>
+                <a:spcPts val="1400"/>
+              </a:spcAft>
+              <a:defRPr sz="2100">
+                <a:solidFill>
+                  <a:srgbClr val="1E293B"/>
+                </a:solidFill>
+              </a:defRPr>
+            </a:pPr>
+            <a:r>
+              <a:t>CorpSec tetap bisa mengubah ringkasan sebelum dokumen dilanjutkan.</a:t>
+            </a:r>
+          </a:p>
+          <a:p>
+            <a:pPr>
+              <a:lnSpc>
+                <a:spcPct val="125000"/>
+              </a:lnSpc>
+              <a:spcAft>
+                <a:spcPts val="1400"/>
+              </a:spcAft>
+              <a:defRPr sz="2100">
+                <a:solidFill>
+                  <a:srgbClr val="1E293B"/>
+                </a:solidFill>
+              </a:defRPr>
+            </a:pPr>
+            <a:r>
+              <a:t>Tujuannya: mempercepat peninjauan, bukan menggantikan keputusan manusia.</a:t>
+            </a:r>
+          </a:p>
+        </p:txBody>
+      </p:sp>
+      <p:sp>
+        <p:nvSpPr>
+          <p:cNvPr id="5" name="Rectangle 4"/>
           <p:cNvSpPr/>
           <p:nvPr/>
         </p:nvSpPr>
         <p:spPr>
           <a:xfrm>
-            <a:off x="548640" y="960120"/>
-            <a:ext cx="1371600" cy="45720"/>
+            <a:off x="0" y="6446520"/>
+            <a:ext cx="12191695" cy="411480"/>
           </a:xfrm>
           <a:prstGeom prst="rect">
             <a:avLst/>
           </a:prstGeom>
           <a:solidFill>
-            <a:srgbClr val="F58220"/>
+            <a:srgbClr val="0C2340"/>
           </a:solidFill>
           <a:ln>
             <a:noFill/>
@@ -3485,157 +3756,14 @@
       </p:sp>
       <p:sp>
         <p:nvSpPr>
-          <p:cNvPr id="5" name="TextBox 4"/>
-          <p:cNvSpPr txBox="1"/>
-          <p:nvPr/>
-        </p:nvSpPr>
-        <p:spPr>
-          <a:xfrm>
-            <a:off x="548640" y="1234440"/>
-            <a:ext cx="10972800" cy="5303520"/>
-          </a:xfrm>
-          <a:prstGeom prst="rect">
-            <a:avLst/>
-          </a:prstGeom>
-          <a:noFill/>
-        </p:spPr>
-        <p:txBody>
-          <a:bodyPr wrap="square">
-            <a:spAutoFit/>
-          </a:bodyPr>
-          <a:lstStyle/>
-          <a:p>
-            <a:pPr>
-              <a:spcAft>
-                <a:spcPts val="800"/>
-              </a:spcAft>
-              <a:defRPr sz="1500">
-                <a:solidFill>
-                  <a:srgbClr val="1E293B"/>
-                </a:solidFill>
-              </a:defRPr>
-            </a:pPr>
-            <a:r>
-              <a:t>Otomatis saat upload PDF — ekstraksi teks via pdf-parse.</a:t>
-            </a:r>
-          </a:p>
-          <a:p>
-            <a:pPr>
-              <a:spcAft>
-                <a:spcPts val="800"/>
-              </a:spcAft>
-              <a:defRPr sz="1500">
-                <a:solidFill>
-                  <a:srgbClr val="1E293B"/>
-                </a:solidFill>
-              </a:defRPr>
-            </a:pPr>
-            <a:r>
-              <a:t>Output analisa AI:</a:t>
-            </a:r>
-          </a:p>
-          <a:p>
-            <a:pPr lvl="1">
-              <a:spcAft>
-                <a:spcPts val="800"/>
-              </a:spcAft>
-              <a:defRPr sz="1300">
-                <a:solidFill>
-                  <a:srgbClr val="64748B"/>
-                </a:solidFill>
-              </a:defRPr>
-            </a:pPr>
-            <a:r>
-              <a:t>  • SMD Document ID (SMD-BSM-{tahun}-{seq})</a:t>
-            </a:r>
-          </a:p>
-          <a:p>
-            <a:pPr lvl="1">
-              <a:spcAft>
-                <a:spcPts val="800"/>
-              </a:spcAft>
-              <a:defRPr sz="1300">
-                <a:solidFill>
-                  <a:srgbClr val="64748B"/>
-                </a:solidFill>
-              </a:defRPr>
-            </a:pPr>
-            <a:r>
-              <a:t>  • Ringkasan eksekutif terstruktur</a:t>
-            </a:r>
-          </a:p>
-          <a:p>
-            <a:pPr lvl="1">
-              <a:spcAft>
-                <a:spcPts val="800"/>
-              </a:spcAft>
-              <a:defRPr sz="1300">
-                <a:solidFill>
-                  <a:srgbClr val="64748B"/>
-                </a:solidFill>
-              </a:defRPr>
-            </a:pPr>
-            <a:r>
-              <a:t>  • Risk Score (0–90) &amp; Compliance Score (85–99%)</a:t>
-            </a:r>
-          </a:p>
-          <a:p>
-            <a:pPr lvl="1">
-              <a:spcAft>
-                <a:spcPts val="800"/>
-              </a:spcAft>
-              <a:defRPr sz="1300">
-                <a:solidFill>
-                  <a:srgbClr val="64748B"/>
-                </a:solidFill>
-              </a:defRPr>
-            </a:pPr>
-            <a:r>
-              <a:t>  • Referensi regulasi dari Knowledge Base (RAG)</a:t>
-            </a:r>
-          </a:p>
-          <a:p>
-            <a:pPr>
-              <a:spcAft>
-                <a:spcPts val="800"/>
-              </a:spcAft>
-              <a:defRPr sz="1500">
-                <a:solidFill>
-                  <a:srgbClr val="1E293B"/>
-                </a:solidFill>
-              </a:defRPr>
-            </a:pPr>
-            <a:r>
-              <a:t>CorpSec dapat edit ringkasan, download review, &amp; re-upload dokumen.</a:t>
-            </a:r>
-          </a:p>
-          <a:p>
-            <a:pPr>
-              <a:spcAft>
-                <a:spcPts val="800"/>
-              </a:spcAft>
-              <a:defRPr sz="1500">
-                <a:solidFill>
-                  <a:srgbClr val="1E293B"/>
-                </a:solidFill>
-              </a:defRPr>
-            </a:pPr>
-            <a:r>
-              <a:t>Knowledge Base: SK/SE/SOP internal + regulasi OJK/BI sebagai corpus RAG.</a:t>
-            </a:r>
-          </a:p>
-        </p:txBody>
-      </p:sp>
-      <p:sp>
-        <p:nvSpPr>
           <p:cNvPr id="6" name="TextBox 5"/>
           <p:cNvSpPr txBox="1"/>
           <p:nvPr/>
         </p:nvSpPr>
         <p:spPr>
           <a:xfrm>
-            <a:off x="457200" y="6400800"/>
-            <a:ext cx="11247120" cy="365760"/>
+            <a:off x="457200" y="6492240"/>
+            <a:ext cx="5486400" cy="320040"/>
           </a:xfrm>
           <a:prstGeom prst="rect">
             <a:avLst/>
@@ -3648,15 +3776,50 @@
           </a:bodyPr>
           <a:lstStyle/>
           <a:p>
+            <a:pPr>
+              <a:defRPr sz="1100" b="1">
+                <a:solidFill>
+                  <a:srgbClr val="F58220"/>
+                </a:solidFill>
+              </a:defRPr>
+            </a:pPr>
+            <a:r>
+              <a:t>CorpSec Bank Sumut</a:t>
+            </a:r>
+          </a:p>
+        </p:txBody>
+      </p:sp>
+      <p:sp>
+        <p:nvSpPr>
+          <p:cNvPr id="7" name="TextBox 6"/>
+          <p:cNvSpPr txBox="1"/>
+          <p:nvPr/>
+        </p:nvSpPr>
+        <p:spPr>
+          <a:xfrm>
+            <a:off x="10515600" y="6492240"/>
+            <a:ext cx="1371600" cy="320040"/>
+          </a:xfrm>
+          <a:prstGeom prst="rect">
+            <a:avLst/>
+          </a:prstGeom>
+          <a:noFill/>
+        </p:spPr>
+        <p:txBody>
+          <a:bodyPr wrap="none">
+            <a:spAutoFit/>
+          </a:bodyPr>
+          <a:lstStyle/>
+          <a:p>
             <a:pPr algn="r">
-              <a:defRPr sz="900">
-                <a:solidFill>
-                  <a:srgbClr val="64748B"/>
-                </a:solidFill>
-              </a:defRPr>
-            </a:pPr>
-            <a:r>
-              <a:t>CorpSec Bank Sumut — PRD Discovery v0.1</a:t>
+              <a:defRPr sz="1100">
+                <a:solidFill>
+                  <a:srgbClr val="FFFFFF"/>
+                </a:solidFill>
+              </a:defRPr>
+            </a:pPr>
+            <a:r>
+              <a:t>10</a:t>
             </a:r>
           </a:p>
         </p:txBody>
@@ -3675,7 +3838,7 @@
     <p:bg>
       <p:bgPr>
         <a:solidFill>
-          <a:srgbClr val="FFFFFF"/>
+          <a:srgbClr val="F8FAFC"/>
         </a:solidFill>
         <a:effectLst/>
       </p:bgPr>
@@ -3696,7 +3859,7 @@
         <p:spPr>
           <a:xfrm>
             <a:off x="0" y="0"/>
-            <a:ext cx="12191695" cy="73152"/>
+            <a:ext cx="164592" cy="6446520"/>
           </a:xfrm>
           <a:prstGeom prst="rect">
             <a:avLst/>
@@ -3738,8 +3901,8 @@
         </p:nvSpPr>
         <p:spPr>
           <a:xfrm>
-            <a:off x="548640" y="320040"/>
-            <a:ext cx="10972800" cy="640080"/>
+            <a:off x="502920" y="320040"/>
+            <a:ext cx="11155680" cy="1005840"/>
           </a:xfrm>
           <a:prstGeom prst="rect">
             <a:avLst/>
@@ -3753,37 +3916,39 @@
           <a:lstStyle/>
           <a:p>
             <a:pPr>
-              <a:defRPr sz="2800" b="1">
+              <a:defRPr sz="3400" b="1">
                 <a:solidFill>
                   <a:srgbClr val="0C2340"/>
                 </a:solidFill>
               </a:defRPr>
             </a:pPr>
             <a:r>
-              <a:t>Agenda, Rapat &amp; Media Monitoring</a:t>
-            </a:r>
-          </a:p>
-        </p:txBody>
-      </p:sp>
-      <p:sp>
-        <p:nvSpPr>
-          <p:cNvPr id="4" name="Rectangle 3"/>
+              <a:t>Modul Pendukung Lainnya</a:t>
+            </a:r>
+          </a:p>
+        </p:txBody>
+      </p:sp>
+      <p:sp>
+        <p:nvSpPr>
+          <p:cNvPr id="4" name="Rounded Rectangle 3"/>
           <p:cNvSpPr/>
           <p:nvPr/>
         </p:nvSpPr>
         <p:spPr>
           <a:xfrm>
-            <a:off x="548640" y="960120"/>
-            <a:ext cx="1371600" cy="45720"/>
-          </a:xfrm>
-          <a:prstGeom prst="rect">
+            <a:off x="502920" y="1417320"/>
+            <a:ext cx="5394960" cy="4663440"/>
+          </a:xfrm>
+          <a:prstGeom prst="roundRect">
             <a:avLst/>
           </a:prstGeom>
           <a:solidFill>
-            <a:srgbClr val="F58220"/>
+            <a:srgbClr val="FFFFFF"/>
           </a:solidFill>
           <a:ln>
-            <a:noFill/>
+            <a:solidFill>
+              <a:srgbClr val="E2E8F0"/>
+            </a:solidFill>
           </a:ln>
         </p:spPr>
         <p:style>
@@ -3810,14 +3975,92 @@
       </p:sp>
       <p:sp>
         <p:nvSpPr>
-          <p:cNvPr id="5" name="TextBox 4"/>
+          <p:cNvPr id="5" name="Rectangle 4"/>
+          <p:cNvSpPr/>
+          <p:nvPr/>
+        </p:nvSpPr>
+        <p:spPr>
+          <a:xfrm>
+            <a:off x="502920" y="1417320"/>
+            <a:ext cx="5394960" cy="502920"/>
+          </a:xfrm>
+          <a:prstGeom prst="rect">
+            <a:avLst/>
+          </a:prstGeom>
+          <a:solidFill>
+            <a:srgbClr val="0C2340"/>
+          </a:solidFill>
+          <a:ln>
+            <a:noFill/>
+          </a:ln>
+        </p:spPr>
+        <p:style>
+          <a:lnRef idx="1">
+            <a:schemeClr val="accent1"/>
+          </a:lnRef>
+          <a:fillRef idx="3">
+            <a:schemeClr val="accent1"/>
+          </a:fillRef>
+          <a:effectRef idx="2">
+            <a:schemeClr val="accent1"/>
+          </a:effectRef>
+          <a:fontRef idx="minor">
+            <a:schemeClr val="lt1"/>
+          </a:fontRef>
+        </p:style>
+        <p:txBody>
+          <a:bodyPr rtlCol="0" anchor="ctr"/>
+          <a:lstStyle/>
+          <a:p>
+            <a:pPr algn="ctr"/>
+          </a:p>
+        </p:txBody>
+      </p:sp>
+      <p:sp>
+        <p:nvSpPr>
+          <p:cNvPr id="6" name="TextBox 5"/>
           <p:cNvSpPr txBox="1"/>
           <p:nvPr/>
         </p:nvSpPr>
         <p:spPr>
           <a:xfrm>
-            <a:off x="548640" y="1234440"/>
-            <a:ext cx="10972800" cy="5303520"/>
+            <a:off x="731520" y="1481328"/>
+            <a:ext cx="4937760" cy="411480"/>
+          </a:xfrm>
+          <a:prstGeom prst="rect">
+            <a:avLst/>
+          </a:prstGeom>
+          <a:noFill/>
+        </p:spPr>
+        <p:txBody>
+          <a:bodyPr wrap="none">
+            <a:spAutoFit/>
+          </a:bodyPr>
+          <a:lstStyle/>
+          <a:p>
+            <a:pPr>
+              <a:defRPr sz="1800" b="1">
+                <a:solidFill>
+                  <a:srgbClr val="FFFFFF"/>
+                </a:solidFill>
+              </a:defRPr>
+            </a:pPr>
+            <a:r>
+              <a:t>Agenda &amp; Rapat</a:t>
+            </a:r>
+          </a:p>
+        </p:txBody>
+      </p:sp>
+      <p:sp>
+        <p:nvSpPr>
+          <p:cNvPr id="7" name="TextBox 6"/>
+          <p:cNvSpPr txBox="1"/>
+          <p:nvPr/>
+        </p:nvSpPr>
+        <p:spPr>
+          <a:xfrm>
+            <a:off x="777240" y="2103120"/>
+            <a:ext cx="4846320" cy="4754880"/>
           </a:xfrm>
           <a:prstGeom prst="rect">
             <a:avLst/>
@@ -3831,106 +4074,176 @@
           <a:lstStyle/>
           <a:p>
             <a:pPr>
+              <a:lnSpc>
+                <a:spcPct val="125000"/>
+              </a:lnSpc>
               <a:spcAft>
-                <a:spcPts val="800"/>
+                <a:spcPts val="1400"/>
               </a:spcAft>
-              <a:defRPr sz="1500">
+              <a:defRPr sz="1800">
                 <a:solidFill>
                   <a:srgbClr val="1E293B"/>
                 </a:solidFill>
               </a:defRPr>
             </a:pPr>
             <a:r>
-              <a:t>Agenda Direksi — CRUD jadwal kegiatan, prioritas, catatan persiapan.</a:t>
+              <a:t>Buat jadwal kegiatan Direksi</a:t>
             </a:r>
           </a:p>
           <a:p>
             <a:pPr>
+              <a:lnSpc>
+                <a:spcPct val="125000"/>
+              </a:lnSpc>
               <a:spcAft>
-                <a:spcPts val="800"/>
+                <a:spcPts val="1400"/>
               </a:spcAft>
-              <a:defRPr sz="1500">
+              <a:defRPr sz="1800">
                 <a:solidFill>
                   <a:srgbClr val="1E293B"/>
                 </a:solidFill>
               </a:defRPr>
             </a:pPr>
             <a:r>
-              <a:t>Meeting Management — daftar rapat, notulen, tindak lanjut dengan assignee &amp; due date.</a:t>
+              <a:t>Catat lokasi, waktu, dan prioritas</a:t>
             </a:r>
           </a:p>
           <a:p>
             <a:pPr>
+              <a:lnSpc>
+                <a:spcPct val="125000"/>
+              </a:lnSpc>
               <a:spcAft>
-                <a:spcPts val="800"/>
+                <a:spcPts val="1400"/>
               </a:spcAft>
-              <a:defRPr sz="1500">
+              <a:defRPr sz="1800">
                 <a:solidFill>
                   <a:srgbClr val="1E293B"/>
                 </a:solidFill>
               </a:defRPr>
             </a:pPr>
             <a:r>
-              <a:t>Media Monitoring — berita Bank Sumut, regulasi, makroekonomi, perbankan.</a:t>
-            </a:r>
-          </a:p>
-          <a:p>
-            <a:pPr lvl="1">
+              <a:t>Simpan notulen rapat</a:t>
+            </a:r>
+          </a:p>
+          <a:p>
+            <a:pPr>
+              <a:lnSpc>
+                <a:spcPct val="125000"/>
+              </a:lnSpc>
               <a:spcAft>
-                <a:spcPts val="800"/>
+                <a:spcPts val="1400"/>
               </a:spcAft>
-              <a:defRPr sz="1300">
-                <a:solidFill>
-                  <a:srgbClr val="64748B"/>
-                </a:solidFill>
-              </a:defRPr>
-            </a:pPr>
-            <a:r>
-              <a:t>  • Analisis sentimen: Positif / Netral / Negatif</a:t>
-            </a:r>
-          </a:p>
-          <a:p>
-            <a:pPr lvl="1">
-              <a:spcAft>
-                <a:spcPts val="800"/>
-              </a:spcAft>
-              <a:defRPr sz="1300">
-                <a:solidFill>
-                  <a:srgbClr val="64748B"/>
-                </a:solidFill>
-              </a:defRPr>
-            </a:pPr>
-            <a:r>
-              <a:t>  • Sumber: Bisnis Indonesia, Kontan, Reuters, dll.</a:t>
-            </a:r>
-          </a:p>
-          <a:p>
-            <a:pPr>
-              <a:spcAft>
-                <a:spcPts val="800"/>
-              </a:spcAft>
-              <a:defRPr sz="1500">
+              <a:defRPr sz="1800">
                 <a:solidFill>
                   <a:srgbClr val="1E293B"/>
                 </a:solidFill>
               </a:defRPr>
             </a:pPr>
             <a:r>
-              <a:t>Notifikasi regulator OJK/BI ditampilkan di dashboard CorpSec.</a:t>
-            </a:r>
-          </a:p>
-        </p:txBody>
-      </p:sp>
-      <p:sp>
-        <p:nvSpPr>
-          <p:cNvPr id="6" name="TextBox 5"/>
+              <a:t>Pantau tindak lanjut beserta penanggung jawab</a:t>
+            </a:r>
+          </a:p>
+        </p:txBody>
+      </p:sp>
+      <p:sp>
+        <p:nvSpPr>
+          <p:cNvPr id="8" name="Rounded Rectangle 7"/>
+          <p:cNvSpPr/>
+          <p:nvPr/>
+        </p:nvSpPr>
+        <p:spPr>
+          <a:xfrm>
+            <a:off x="6263640" y="1417320"/>
+            <a:ext cx="5394960" cy="4663440"/>
+          </a:xfrm>
+          <a:prstGeom prst="roundRect">
+            <a:avLst/>
+          </a:prstGeom>
+          <a:solidFill>
+            <a:srgbClr val="FFFFFF"/>
+          </a:solidFill>
+          <a:ln>
+            <a:solidFill>
+              <a:srgbClr val="E2E8F0"/>
+            </a:solidFill>
+          </a:ln>
+        </p:spPr>
+        <p:style>
+          <a:lnRef idx="1">
+            <a:schemeClr val="accent1"/>
+          </a:lnRef>
+          <a:fillRef idx="3">
+            <a:schemeClr val="accent1"/>
+          </a:fillRef>
+          <a:effectRef idx="2">
+            <a:schemeClr val="accent1"/>
+          </a:effectRef>
+          <a:fontRef idx="minor">
+            <a:schemeClr val="lt1"/>
+          </a:fontRef>
+        </p:style>
+        <p:txBody>
+          <a:bodyPr rtlCol="0" anchor="ctr"/>
+          <a:lstStyle/>
+          <a:p>
+            <a:pPr algn="ctr"/>
+          </a:p>
+        </p:txBody>
+      </p:sp>
+      <p:sp>
+        <p:nvSpPr>
+          <p:cNvPr id="9" name="Rectangle 8"/>
+          <p:cNvSpPr/>
+          <p:nvPr/>
+        </p:nvSpPr>
+        <p:spPr>
+          <a:xfrm>
+            <a:off x="6263640" y="1417320"/>
+            <a:ext cx="5394960" cy="502920"/>
+          </a:xfrm>
+          <a:prstGeom prst="rect">
+            <a:avLst/>
+          </a:prstGeom>
+          <a:solidFill>
+            <a:srgbClr val="0C2340"/>
+          </a:solidFill>
+          <a:ln>
+            <a:noFill/>
+          </a:ln>
+        </p:spPr>
+        <p:style>
+          <a:lnRef idx="1">
+            <a:schemeClr val="accent1"/>
+          </a:lnRef>
+          <a:fillRef idx="3">
+            <a:schemeClr val="accent1"/>
+          </a:fillRef>
+          <a:effectRef idx="2">
+            <a:schemeClr val="accent1"/>
+          </a:effectRef>
+          <a:fontRef idx="minor">
+            <a:schemeClr val="lt1"/>
+          </a:fontRef>
+        </p:style>
+        <p:txBody>
+          <a:bodyPr rtlCol="0" anchor="ctr"/>
+          <a:lstStyle/>
+          <a:p>
+            <a:pPr algn="ctr"/>
+          </a:p>
+        </p:txBody>
+      </p:sp>
+      <p:sp>
+        <p:nvSpPr>
+          <p:cNvPr id="10" name="TextBox 9"/>
           <p:cNvSpPr txBox="1"/>
           <p:nvPr/>
         </p:nvSpPr>
         <p:spPr>
           <a:xfrm>
-            <a:off x="457200" y="6400800"/>
-            <a:ext cx="11247120" cy="365760"/>
+            <a:off x="6492240" y="1481328"/>
+            <a:ext cx="4937760" cy="411480"/>
           </a:xfrm>
           <a:prstGeom prst="rect">
             <a:avLst/>
@@ -3943,15 +4256,223 @@
           </a:bodyPr>
           <a:lstStyle/>
           <a:p>
+            <a:pPr>
+              <a:defRPr sz="1800" b="1">
+                <a:solidFill>
+                  <a:srgbClr val="FFFFFF"/>
+                </a:solidFill>
+              </a:defRPr>
+            </a:pPr>
+            <a:r>
+              <a:t>Media &amp; Arsip Dokumen</a:t>
+            </a:r>
+          </a:p>
+        </p:txBody>
+      </p:sp>
+      <p:sp>
+        <p:nvSpPr>
+          <p:cNvPr id="11" name="TextBox 10"/>
+          <p:cNvSpPr txBox="1"/>
+          <p:nvPr/>
+        </p:nvSpPr>
+        <p:spPr>
+          <a:xfrm>
+            <a:off x="6537959" y="2103120"/>
+            <a:ext cx="4846320" cy="4754880"/>
+          </a:xfrm>
+          <a:prstGeom prst="rect">
+            <a:avLst/>
+          </a:prstGeom>
+          <a:noFill/>
+        </p:spPr>
+        <p:txBody>
+          <a:bodyPr wrap="square">
+            <a:spAutoFit/>
+          </a:bodyPr>
+          <a:lstStyle/>
+          <a:p>
+            <a:pPr>
+              <a:lnSpc>
+                <a:spcPct val="125000"/>
+              </a:lnSpc>
+              <a:spcAft>
+                <a:spcPts val="1400"/>
+              </a:spcAft>
+              <a:defRPr sz="1800">
+                <a:solidFill>
+                  <a:srgbClr val="1E293B"/>
+                </a:solidFill>
+              </a:defRPr>
+            </a:pPr>
+            <a:r>
+              <a:t>Pantau berita seputar Bank Sumut</a:t>
+            </a:r>
+          </a:p>
+          <a:p>
+            <a:pPr>
+              <a:lnSpc>
+                <a:spcPct val="125000"/>
+              </a:lnSpc>
+              <a:spcAft>
+                <a:spcPts val="1400"/>
+              </a:spcAft>
+              <a:defRPr sz="1800">
+                <a:solidFill>
+                  <a:srgbClr val="1E293B"/>
+                </a:solidFill>
+              </a:defRPr>
+            </a:pPr>
+            <a:r>
+              <a:t>Lihat sentimen berita: positif, netral, negatif</a:t>
+            </a:r>
+          </a:p>
+          <a:p>
+            <a:pPr>
+              <a:lnSpc>
+                <a:spcPct val="125000"/>
+              </a:lnSpc>
+              <a:spcAft>
+                <a:spcPts val="1400"/>
+              </a:spcAft>
+              <a:defRPr sz="1800">
+                <a:solidFill>
+                  <a:srgbClr val="1E293B"/>
+                </a:solidFill>
+              </a:defRPr>
+            </a:pPr>
+            <a:r>
+              <a:t>Simpan SK, SE, SOP, dan regulasi</a:t>
+            </a:r>
+          </a:p>
+          <a:p>
+            <a:pPr>
+              <a:lnSpc>
+                <a:spcPct val="125000"/>
+              </a:lnSpc>
+              <a:spcAft>
+                <a:spcPts val="1400"/>
+              </a:spcAft>
+              <a:defRPr sz="1800">
+                <a:solidFill>
+                  <a:srgbClr val="1E293B"/>
+                </a:solidFill>
+              </a:defRPr>
+            </a:pPr>
+            <a:r>
+              <a:t>Jadi acuan saat meninjau memorandum</a:t>
+            </a:r>
+          </a:p>
+        </p:txBody>
+      </p:sp>
+      <p:sp>
+        <p:nvSpPr>
+          <p:cNvPr id="12" name="Rectangle 11"/>
+          <p:cNvSpPr/>
+          <p:nvPr/>
+        </p:nvSpPr>
+        <p:spPr>
+          <a:xfrm>
+            <a:off x="0" y="6446520"/>
+            <a:ext cx="12191695" cy="411480"/>
+          </a:xfrm>
+          <a:prstGeom prst="rect">
+            <a:avLst/>
+          </a:prstGeom>
+          <a:solidFill>
+            <a:srgbClr val="0C2340"/>
+          </a:solidFill>
+          <a:ln>
+            <a:noFill/>
+          </a:ln>
+        </p:spPr>
+        <p:style>
+          <a:lnRef idx="1">
+            <a:schemeClr val="accent1"/>
+          </a:lnRef>
+          <a:fillRef idx="3">
+            <a:schemeClr val="accent1"/>
+          </a:fillRef>
+          <a:effectRef idx="2">
+            <a:schemeClr val="accent1"/>
+          </a:effectRef>
+          <a:fontRef idx="minor">
+            <a:schemeClr val="lt1"/>
+          </a:fontRef>
+        </p:style>
+        <p:txBody>
+          <a:bodyPr rtlCol="0" anchor="ctr"/>
+          <a:lstStyle/>
+          <a:p>
+            <a:pPr algn="ctr"/>
+          </a:p>
+        </p:txBody>
+      </p:sp>
+      <p:sp>
+        <p:nvSpPr>
+          <p:cNvPr id="13" name="TextBox 12"/>
+          <p:cNvSpPr txBox="1"/>
+          <p:nvPr/>
+        </p:nvSpPr>
+        <p:spPr>
+          <a:xfrm>
+            <a:off x="457200" y="6492240"/>
+            <a:ext cx="5486400" cy="320040"/>
+          </a:xfrm>
+          <a:prstGeom prst="rect">
+            <a:avLst/>
+          </a:prstGeom>
+          <a:noFill/>
+        </p:spPr>
+        <p:txBody>
+          <a:bodyPr wrap="none">
+            <a:spAutoFit/>
+          </a:bodyPr>
+          <a:lstStyle/>
+          <a:p>
+            <a:pPr>
+              <a:defRPr sz="1100" b="1">
+                <a:solidFill>
+                  <a:srgbClr val="F58220"/>
+                </a:solidFill>
+              </a:defRPr>
+            </a:pPr>
+            <a:r>
+              <a:t>CorpSec Bank Sumut</a:t>
+            </a:r>
+          </a:p>
+        </p:txBody>
+      </p:sp>
+      <p:sp>
+        <p:nvSpPr>
+          <p:cNvPr id="14" name="TextBox 13"/>
+          <p:cNvSpPr txBox="1"/>
+          <p:nvPr/>
+        </p:nvSpPr>
+        <p:spPr>
+          <a:xfrm>
+            <a:off x="10515600" y="6492240"/>
+            <a:ext cx="1371600" cy="320040"/>
+          </a:xfrm>
+          <a:prstGeom prst="rect">
+            <a:avLst/>
+          </a:prstGeom>
+          <a:noFill/>
+        </p:spPr>
+        <p:txBody>
+          <a:bodyPr wrap="none">
+            <a:spAutoFit/>
+          </a:bodyPr>
+          <a:lstStyle/>
+          <a:p>
             <a:pPr algn="r">
-              <a:defRPr sz="900">
-                <a:solidFill>
-                  <a:srgbClr val="64748B"/>
-                </a:solidFill>
-              </a:defRPr>
-            </a:pPr>
-            <a:r>
-              <a:t>CorpSec Bank Sumut — PRD Discovery v0.1</a:t>
+              <a:defRPr sz="1100">
+                <a:solidFill>
+                  <a:srgbClr val="FFFFFF"/>
+                </a:solidFill>
+              </a:defRPr>
+            </a:pPr>
+            <a:r>
+              <a:t>11</a:t>
             </a:r>
           </a:p>
         </p:txBody>
@@ -3970,7 +4491,7 @@
     <p:bg>
       <p:bgPr>
         <a:solidFill>
-          <a:srgbClr val="FFFFFF"/>
+          <a:srgbClr val="F8FAFC"/>
         </a:solidFill>
         <a:effectLst/>
       </p:bgPr>
@@ -3991,7 +4512,7 @@
         <p:spPr>
           <a:xfrm>
             <a:off x="0" y="0"/>
-            <a:ext cx="12191695" cy="73152"/>
+            <a:ext cx="164592" cy="6446520"/>
           </a:xfrm>
           <a:prstGeom prst="rect">
             <a:avLst/>
@@ -4033,8 +4554,8 @@
         </p:nvSpPr>
         <p:spPr>
           <a:xfrm>
-            <a:off x="548640" y="320040"/>
-            <a:ext cx="10972800" cy="640080"/>
+            <a:off x="502920" y="320040"/>
+            <a:ext cx="11155680" cy="1005840"/>
           </a:xfrm>
           <a:prstGeom prst="rect">
             <a:avLst/>
@@ -4048,14 +4569,29 @@
           <a:lstStyle/>
           <a:p>
             <a:pPr>
-              <a:defRPr sz="2800" b="1">
+              <a:defRPr sz="3400" b="1">
                 <a:solidFill>
                   <a:srgbClr val="0C2340"/>
                 </a:solidFill>
               </a:defRPr>
             </a:pPr>
             <a:r>
-              <a:t>SLA Monitoring &amp; KPI Success Metrics</a:t>
+              <a:t>Target Kinerja Sistem</a:t>
+            </a:r>
+          </a:p>
+          <a:p>
+            <a:pPr>
+              <a:spcBef>
+                <a:spcPts val="600"/>
+              </a:spcBef>
+              <a:defRPr sz="1700">
+                <a:solidFill>
+                  <a:srgbClr val="64748B"/>
+                </a:solidFill>
+              </a:defRPr>
+            </a:pPr>
+            <a:r>
+              <a:t>Indikator yang dipantau sesuai kebutuhan CorpSec</a:t>
             </a:r>
           </a:p>
         </p:txBody>
@@ -4069,8 +4605,8 @@
           <p:nvPr/>
         </p:nvGraphicFramePr>
         <p:xfrm>
-          <a:off x="457200" y="1143000"/>
-          <a:ext cx="11247120" cy="2688336"/>
+          <a:off x="502920" y="1508760"/>
+          <a:ext cx="11155680" cy="3520440"/>
         </p:xfrm>
         <a:graphic>
           <a:graphicData uri="http://schemas.openxmlformats.org/drawingml/2006/table">
@@ -4079,25 +4615,25 @@
                 <a:tableStyleId>{5C22544A-7EE6-4342-B048-85BDC9FD1C3A}</a:tableStyleId>
               </a:tblPr>
               <a:tblGrid>
-                <a:gridCol w="3749040"/>
-                <a:gridCol w="3749040"/>
-                <a:gridCol w="3749040"/>
+                <a:gridCol w="3718560"/>
+                <a:gridCol w="3718560"/>
+                <a:gridCol w="3718560"/>
               </a:tblGrid>
-              <a:tr h="384048">
+              <a:tr h="502920">
                 <a:tc>
                   <a:txBody>
                     <a:bodyPr/>
                     <a:lstStyle/>
                     <a:p>
                       <a:pPr>
-                        <a:defRPr b="1" sz="1100">
+                        <a:defRPr b="1" sz="1500">
                           <a:solidFill>
                             <a:srgbClr val="FFFFFF"/>
                           </a:solidFill>
                         </a:defRPr>
                       </a:pPr>
                       <a:r>
-                        <a:t>KPI (PRD)</a:t>
+                        <a:t>Indikator</a:t>
                       </a:r>
                     </a:p>
                   </a:txBody>
@@ -4113,7 +4649,7 @@
                     <a:lstStyle/>
                     <a:p>
                       <a:pPr>
-                        <a:defRPr b="1" sz="1100">
+                        <a:defRPr b="1" sz="1500">
                           <a:solidFill>
                             <a:srgbClr val="FFFFFF"/>
                           </a:solidFill>
@@ -4136,14 +4672,14 @@
                     <a:lstStyle/>
                     <a:p>
                       <a:pPr>
-                        <a:defRPr b="1" sz="1100">
+                        <a:defRPr b="1" sz="1500">
                           <a:solidFill>
                             <a:srgbClr val="FFFFFF"/>
                           </a:solidFill>
                         </a:defRPr>
                       </a:pPr>
                       <a:r>
-                        <a:t>Implementasi</a:t>
+                        <a:t>Keterangan</a:t>
                       </a:r>
                     </a:p>
                   </a:txBody>
@@ -4154,21 +4690,21 @@
                   </a:tcPr>
                 </a:tc>
               </a:tr>
-              <a:tr h="384048">
+              <a:tr h="502920">
                 <a:tc>
                   <a:txBody>
                     <a:bodyPr/>
                     <a:lstStyle/>
                     <a:p>
                       <a:pPr>
-                        <a:defRPr sz="1000">
+                        <a:defRPr sz="1400">
                           <a:solidFill>
                             <a:srgbClr val="1E293B"/>
                           </a:solidFill>
                         </a:defRPr>
                       </a:pPr>
                       <a:r>
-                        <a:t>Resume AI</a:t>
+                        <a:t>Waktu tinjauan memorandum</a:t>
                       </a:r>
                     </a:p>
                   </a:txBody>
@@ -4180,7 +4716,7 @@
                     <a:lstStyle/>
                     <a:p>
                       <a:pPr>
-                        <a:defRPr sz="1000">
+                        <a:defRPr sz="1400">
                           <a:solidFill>
                             <a:srgbClr val="1E293B"/>
                           </a:solidFill>
@@ -4199,41 +4735,41 @@
                     <a:lstStyle/>
                     <a:p>
                       <a:pPr>
-                        <a:defRPr sz="1000">
+                        <a:defRPr sz="1400">
                           <a:solidFill>
                             <a:srgbClr val="1E293B"/>
                           </a:solidFill>
                         </a:defRPr>
                       </a:pPr>
                       <a:r>
-                        <a:t>Simulasi ~2 menit otomatis</a:t>
+                        <a:t>Proses baca &amp; rangkum dokumen</a:t>
                       </a:r>
                     </a:p>
                   </a:txBody>
                   <a:tcPr/>
                 </a:tc>
               </a:tr>
-              <a:tr h="384048">
+              <a:tr h="502920">
                 <a:tc>
                   <a:txBody>
                     <a:bodyPr/>
                     <a:lstStyle/>
                     <a:p>
                       <a:pPr>
-                        <a:defRPr sz="1000">
+                        <a:defRPr sz="1400">
                           <a:solidFill>
                             <a:srgbClr val="1E293B"/>
                           </a:solidFill>
                         </a:defRPr>
                       </a:pPr>
                       <a:r>
-                        <a:t>Waktu Approval</a:t>
+                        <a:t>Proses persetujuan</a:t>
                       </a:r>
                     </a:p>
                   </a:txBody>
                   <a:tcPr>
                     <a:solidFill>
-                      <a:srgbClr val="F4F6F9"/>
+                      <a:srgbClr val="FFF4EB"/>
                     </a:solidFill>
                   </a:tcPr>
                 </a:tc>
@@ -4243,20 +4779,20 @@
                     <a:lstStyle/>
                     <a:p>
                       <a:pPr>
-                        <a:defRPr sz="1000">
+                        <a:defRPr sz="1400">
                           <a:solidFill>
                             <a:srgbClr val="1E293B"/>
                           </a:solidFill>
                         </a:defRPr>
                       </a:pPr>
                       <a:r>
-                        <a:t>-50%</a:t>
+                        <a:t>Lebih cepat</a:t>
                       </a:r>
                     </a:p>
                   </a:txBody>
                   <a:tcPr>
                     <a:solidFill>
-                      <a:srgbClr val="F4F6F9"/>
+                      <a:srgbClr val="FFF4EB"/>
                     </a:solidFill>
                   </a:tcPr>
                 </a:tc>
@@ -4266,39 +4802,39 @@
                     <a:lstStyle/>
                     <a:p>
                       <a:pPr>
-                        <a:defRPr sz="1000">
+                        <a:defRPr sz="1400">
                           <a:solidFill>
                             <a:srgbClr val="1E293B"/>
                           </a:solidFill>
                         </a:defRPr>
                       </a:pPr>
                       <a:r>
-                        <a:t>Workflow digital 7 level</a:t>
+                        <a:t>Alur digital, tidak lewat kertas</a:t>
                       </a:r>
                     </a:p>
                   </a:txBody>
                   <a:tcPr>
                     <a:solidFill>
-                      <a:srgbClr val="F4F6F9"/>
+                      <a:srgbClr val="FFF4EB"/>
                     </a:solidFill>
                   </a:tcPr>
                 </a:tc>
               </a:tr>
-              <a:tr h="384048">
+              <a:tr h="502920">
                 <a:tc>
                   <a:txBody>
                     <a:bodyPr/>
                     <a:lstStyle/>
                     <a:p>
                       <a:pPr>
-                        <a:defRPr sz="1000">
+                        <a:defRPr sz="1400">
                           <a:solidFill>
                             <a:srgbClr val="1E293B"/>
                           </a:solidFill>
                         </a:defRPr>
                       </a:pPr>
                       <a:r>
-                        <a:t>Penggunaan Kertas</a:t>
+                        <a:t>Penggunaan kertas</a:t>
                       </a:r>
                     </a:p>
                   </a:txBody>
@@ -4310,14 +4846,14 @@
                     <a:lstStyle/>
                     <a:p>
                       <a:pPr>
-                        <a:defRPr sz="1000">
+                        <a:defRPr sz="1400">
                           <a:solidFill>
                             <a:srgbClr val="1E293B"/>
                           </a:solidFill>
                         </a:defRPr>
                       </a:pPr>
                       <a:r>
-                        <a:t>-90%</a:t>
+                        <a:t>Berkurang</a:t>
                       </a:r>
                     </a:p>
                   </a:txBody>
@@ -4329,41 +4865,41 @@
                     <a:lstStyle/>
                     <a:p>
                       <a:pPr>
-                        <a:defRPr sz="1000">
+                        <a:defRPr sz="1400">
                           <a:solidFill>
                             <a:srgbClr val="1E293B"/>
                           </a:solidFill>
                         </a:defRPr>
                       </a:pPr>
                       <a:r>
-                        <a:t>Upload &amp; review PDF digital</a:t>
+                        <a:t>Semua lewat upload PDF</a:t>
                       </a:r>
                     </a:p>
                   </a:txBody>
                   <a:tcPr/>
                 </a:tc>
               </a:tr>
-              <a:tr h="384048">
+              <a:tr h="502920">
                 <a:tc>
                   <a:txBody>
                     <a:bodyPr/>
                     <a:lstStyle/>
                     <a:p>
                       <a:pPr>
-                        <a:defRPr sz="1000">
+                        <a:defRPr sz="1400">
                           <a:solidFill>
                             <a:srgbClr val="1E293B"/>
                           </a:solidFill>
                         </a:defRPr>
                       </a:pPr>
                       <a:r>
-                        <a:t>Agenda Terdokumentasi</a:t>
+                        <a:t>Agenda Direksi</a:t>
                       </a:r>
                     </a:p>
                   </a:txBody>
                   <a:tcPr>
                     <a:solidFill>
-                      <a:srgbClr val="F4F6F9"/>
+                      <a:srgbClr val="FFF4EB"/>
                     </a:solidFill>
                   </a:tcPr>
                 </a:tc>
@@ -4373,20 +4909,20 @@
                     <a:lstStyle/>
                     <a:p>
                       <a:pPr>
-                        <a:defRPr sz="1000">
+                        <a:defRPr sz="1400">
                           <a:solidFill>
                             <a:srgbClr val="1E293B"/>
                           </a:solidFill>
                         </a:defRPr>
                       </a:pPr>
                       <a:r>
-                        <a:t>100%</a:t>
+                        <a:t>Tercatat</a:t>
                       </a:r>
                     </a:p>
                   </a:txBody>
                   <a:tcPr>
                     <a:solidFill>
-                      <a:srgbClr val="F4F6F9"/>
+                      <a:srgbClr val="FFF4EB"/>
                     </a:solidFill>
                   </a:tcPr>
                 </a:tc>
@@ -4396,39 +4932,39 @@
                     <a:lstStyle/>
                     <a:p>
                       <a:pPr>
-                        <a:defRPr sz="1000">
+                        <a:defRPr sz="1400">
                           <a:solidFill>
                             <a:srgbClr val="1E293B"/>
                           </a:solidFill>
                         </a:defRPr>
                       </a:pPr>
                       <a:r>
-                        <a:t>Modul agenda terintegrasi</a:t>
+                        <a:t>Semua jadwal masuk sistem</a:t>
                       </a:r>
                     </a:p>
                   </a:txBody>
                   <a:tcPr>
                     <a:solidFill>
-                      <a:srgbClr val="F4F6F9"/>
+                      <a:srgbClr val="FFF4EB"/>
                     </a:solidFill>
                   </a:tcPr>
                 </a:tc>
               </a:tr>
-              <a:tr h="384048">
+              <a:tr h="502920">
                 <a:tc>
                   <a:txBody>
                     <a:bodyPr/>
                     <a:lstStyle/>
                     <a:p>
                       <a:pPr>
-                        <a:defRPr sz="1000">
+                        <a:defRPr sz="1400">
                           <a:solidFill>
                             <a:srgbClr val="1E293B"/>
                           </a:solidFill>
                         </a:defRPr>
                       </a:pPr>
                       <a:r>
-                        <a:t>SLA Memorandum</a:t>
+                        <a:t>SLA memorandum</a:t>
                       </a:r>
                     </a:p>
                   </a:txBody>
@@ -4440,7 +4976,7 @@
                     <a:lstStyle/>
                     <a:p>
                       <a:pPr>
-                        <a:defRPr sz="1000">
+                        <a:defRPr sz="1400">
                           <a:solidFill>
                             <a:srgbClr val="1E293B"/>
                           </a:solidFill>
@@ -4459,41 +4995,41 @@
                     <a:lstStyle/>
                     <a:p>
                       <a:pPr>
-                        <a:defRPr sz="1000">
+                        <a:defRPr sz="1400">
                           <a:solidFill>
                             <a:srgbClr val="1E293B"/>
                           </a:solidFill>
                         </a:defRPr>
                       </a:pPr>
                       <a:r>
-                        <a:t>Monitoring real-time di /sla</a:t>
+                        <a:t>Dipantau di menu SLA</a:t>
                       </a:r>
                     </a:p>
                   </a:txBody>
                   <a:tcPr/>
                 </a:tc>
               </a:tr>
-              <a:tr h="384048">
+              <a:tr h="502920">
                 <a:tc>
                   <a:txBody>
                     <a:bodyPr/>
                     <a:lstStyle/>
                     <a:p>
                       <a:pPr>
-                        <a:defRPr sz="1000">
+                        <a:defRPr sz="1400">
                           <a:solidFill>
                             <a:srgbClr val="1E293B"/>
                           </a:solidFill>
                         </a:defRPr>
                       </a:pPr>
                       <a:r>
-                        <a:t>Memorandum Terlambat</a:t>
+                        <a:t>Keterlambatan</a:t>
                       </a:r>
                     </a:p>
                   </a:txBody>
                   <a:tcPr>
                     <a:solidFill>
-                      <a:srgbClr val="F4F6F9"/>
+                      <a:srgbClr val="FFF4EB"/>
                     </a:solidFill>
                   </a:tcPr>
                 </a:tc>
@@ -4503,20 +5039,20 @@
                     <a:lstStyle/>
                     <a:p>
                       <a:pPr>
-                        <a:defRPr sz="1000">
+                        <a:defRPr sz="1400">
                           <a:solidFill>
                             <a:srgbClr val="1E293B"/>
                           </a:solidFill>
                         </a:defRPr>
                       </a:pPr>
                       <a:r>
-                        <a:t>0</a:t>
+                        <a:t>Minim</a:t>
                       </a:r>
                     </a:p>
                   </a:txBody>
                   <a:tcPr>
                     <a:solidFill>
-                      <a:srgbClr val="F4F6F9"/>
+                      <a:srgbClr val="FFF4EB"/>
                     </a:solidFill>
                   </a:tcPr>
                 </a:tc>
@@ -4526,20 +5062,20 @@
                     <a:lstStyle/>
                     <a:p>
                       <a:pPr>
-                        <a:defRPr sz="1000">
+                        <a:defRPr sz="1400">
                           <a:solidFill>
                             <a:srgbClr val="1E293B"/>
                           </a:solidFill>
                         </a:defRPr>
                       </a:pPr>
                       <a:r>
-                        <a:t>Alert SLA breached</a:t>
+                        <a:t>Ada peringatan jika melewati batas waktu</a:t>
                       </a:r>
                     </a:p>
                   </a:txBody>
                   <a:tcPr>
                     <a:solidFill>
-                      <a:srgbClr val="F4F6F9"/>
+                      <a:srgbClr val="FFF4EB"/>
                     </a:solidFill>
                   </a:tcPr>
                 </a:tc>
@@ -4550,14 +5086,57 @@
       </p:graphicFrame>
       <p:sp>
         <p:nvSpPr>
-          <p:cNvPr id="5" name="TextBox 4"/>
+          <p:cNvPr id="5" name="Rectangle 4"/>
+          <p:cNvSpPr/>
+          <p:nvPr/>
+        </p:nvSpPr>
+        <p:spPr>
+          <a:xfrm>
+            <a:off x="0" y="6446520"/>
+            <a:ext cx="12191695" cy="411480"/>
+          </a:xfrm>
+          <a:prstGeom prst="rect">
+            <a:avLst/>
+          </a:prstGeom>
+          <a:solidFill>
+            <a:srgbClr val="0C2340"/>
+          </a:solidFill>
+          <a:ln>
+            <a:noFill/>
+          </a:ln>
+        </p:spPr>
+        <p:style>
+          <a:lnRef idx="1">
+            <a:schemeClr val="accent1"/>
+          </a:lnRef>
+          <a:fillRef idx="3">
+            <a:schemeClr val="accent1"/>
+          </a:fillRef>
+          <a:effectRef idx="2">
+            <a:schemeClr val="accent1"/>
+          </a:effectRef>
+          <a:fontRef idx="minor">
+            <a:schemeClr val="lt1"/>
+          </a:fontRef>
+        </p:style>
+        <p:txBody>
+          <a:bodyPr rtlCol="0" anchor="ctr"/>
+          <a:lstStyle/>
+          <a:p>
+            <a:pPr algn="ctr"/>
+          </a:p>
+        </p:txBody>
+      </p:sp>
+      <p:sp>
+        <p:nvSpPr>
+          <p:cNvPr id="6" name="TextBox 5"/>
           <p:cNvSpPr txBox="1"/>
           <p:nvPr/>
         </p:nvSpPr>
         <p:spPr>
           <a:xfrm>
-            <a:off x="457200" y="6400800"/>
-            <a:ext cx="11247120" cy="365760"/>
+            <a:off x="457200" y="6492240"/>
+            <a:ext cx="5486400" cy="320040"/>
           </a:xfrm>
           <a:prstGeom prst="rect">
             <a:avLst/>
@@ -4570,15 +5149,50 @@
           </a:bodyPr>
           <a:lstStyle/>
           <a:p>
+            <a:pPr>
+              <a:defRPr sz="1100" b="1">
+                <a:solidFill>
+                  <a:srgbClr val="F58220"/>
+                </a:solidFill>
+              </a:defRPr>
+            </a:pPr>
+            <a:r>
+              <a:t>CorpSec Bank Sumut</a:t>
+            </a:r>
+          </a:p>
+        </p:txBody>
+      </p:sp>
+      <p:sp>
+        <p:nvSpPr>
+          <p:cNvPr id="7" name="TextBox 6"/>
+          <p:cNvSpPr txBox="1"/>
+          <p:nvPr/>
+        </p:nvSpPr>
+        <p:spPr>
+          <a:xfrm>
+            <a:off x="10515600" y="6492240"/>
+            <a:ext cx="1371600" cy="320040"/>
+          </a:xfrm>
+          <a:prstGeom prst="rect">
+            <a:avLst/>
+          </a:prstGeom>
+          <a:noFill/>
+        </p:spPr>
+        <p:txBody>
+          <a:bodyPr wrap="none">
+            <a:spAutoFit/>
+          </a:bodyPr>
+          <a:lstStyle/>
+          <a:p>
             <a:pPr algn="r">
-              <a:defRPr sz="900">
-                <a:solidFill>
-                  <a:srgbClr val="64748B"/>
-                </a:solidFill>
-              </a:defRPr>
-            </a:pPr>
-            <a:r>
-              <a:t>CorpSec Bank Sumut — PRD Discovery v0.1</a:t>
+              <a:defRPr sz="1100">
+                <a:solidFill>
+                  <a:srgbClr val="FFFFFF"/>
+                </a:solidFill>
+              </a:defRPr>
+            </a:pPr>
+            <a:r>
+              <a:t>12</a:t>
             </a:r>
           </a:p>
         </p:txBody>
@@ -4597,7 +5211,7 @@
     <p:bg>
       <p:bgPr>
         <a:solidFill>
-          <a:srgbClr val="FFFFFF"/>
+          <a:srgbClr val="F8FAFC"/>
         </a:solidFill>
         <a:effectLst/>
       </p:bgPr>
@@ -4618,7 +5232,7 @@
         <p:spPr>
           <a:xfrm>
             <a:off x="0" y="0"/>
-            <a:ext cx="12191695" cy="73152"/>
+            <a:ext cx="164592" cy="6446520"/>
           </a:xfrm>
           <a:prstGeom prst="rect">
             <a:avLst/>
@@ -4660,8 +5274,8 @@
         </p:nvSpPr>
         <p:spPr>
           <a:xfrm>
-            <a:off x="548640" y="320040"/>
-            <a:ext cx="10972800" cy="640080"/>
+            <a:off x="502920" y="320040"/>
+            <a:ext cx="11155680" cy="1005840"/>
           </a:xfrm>
           <a:prstGeom prst="rect">
             <a:avLst/>
@@ -4675,34 +5289,180 @@
           <a:lstStyle/>
           <a:p>
             <a:pPr>
-              <a:defRPr sz="2800" b="1">
+              <a:defRPr sz="3400" b="1">
                 <a:solidFill>
                   <a:srgbClr val="0C2340"/>
                 </a:solidFill>
               </a:defRPr>
             </a:pPr>
             <a:r>
-              <a:t>Desain UI — Branding Bank Sumut</a:t>
-            </a:r>
-          </a:p>
-        </p:txBody>
-      </p:sp>
-      <p:sp>
-        <p:nvSpPr>
-          <p:cNvPr id="4" name="Rectangle 3"/>
+              <a:t>Tampilan Website</a:t>
+            </a:r>
+          </a:p>
+          <a:p>
+            <a:pPr>
+              <a:spcBef>
+                <a:spcPts val="600"/>
+              </a:spcBef>
+              <a:defRPr sz="1700">
+                <a:solidFill>
+                  <a:srgbClr val="64748B"/>
+                </a:solidFill>
+              </a:defRPr>
+            </a:pPr>
+            <a:r>
+              <a:t>Desain mengikuti identitas Bank Sumut</a:t>
+            </a:r>
+          </a:p>
+        </p:txBody>
+      </p:sp>
+      <p:sp>
+        <p:nvSpPr>
+          <p:cNvPr id="4" name="TextBox 3"/>
+          <p:cNvSpPr txBox="1"/>
+          <p:nvPr/>
+        </p:nvSpPr>
+        <p:spPr>
+          <a:xfrm>
+            <a:off x="502920" y="1417320"/>
+            <a:ext cx="11155680" cy="4754880"/>
+          </a:xfrm>
+          <a:prstGeom prst="rect">
+            <a:avLst/>
+          </a:prstGeom>
+          <a:noFill/>
+        </p:spPr>
+        <p:txBody>
+          <a:bodyPr wrap="square">
+            <a:spAutoFit/>
+          </a:bodyPr>
+          <a:lstStyle/>
+          <a:p>
+            <a:pPr>
+              <a:lnSpc>
+                <a:spcPct val="125000"/>
+              </a:lnSpc>
+              <a:spcAft>
+                <a:spcPts val="1400"/>
+              </a:spcAft>
+              <a:defRPr sz="2100">
+                <a:solidFill>
+                  <a:srgbClr val="1E293B"/>
+                </a:solidFill>
+              </a:defRPr>
+            </a:pPr>
+            <a:r>
+              <a:t>Warna utama: biru navy dan oranye sesuai branding Bank Sumut.</a:t>
+            </a:r>
+          </a:p>
+          <a:p>
+            <a:pPr>
+              <a:lnSpc>
+                <a:spcPct val="125000"/>
+              </a:lnSpc>
+              <a:spcAft>
+                <a:spcPts val="1400"/>
+              </a:spcAft>
+              <a:defRPr sz="2100">
+                <a:solidFill>
+                  <a:srgbClr val="1E293B"/>
+                </a:solidFill>
+              </a:defRPr>
+            </a:pPr>
+            <a:r>
+              <a:t>Tampilan bersih, enak dibaca, dan mudah dinavigasi.</a:t>
+            </a:r>
+          </a:p>
+          <a:p>
+            <a:pPr>
+              <a:lnSpc>
+                <a:spcPct val="125000"/>
+              </a:lnSpc>
+              <a:spcAft>
+                <a:spcPts val="1400"/>
+              </a:spcAft>
+              <a:defRPr sz="2100">
+                <a:solidFill>
+                  <a:srgbClr val="1E293B"/>
+                </a:solidFill>
+              </a:defRPr>
+            </a:pPr>
+            <a:r>
+              <a:t>Halaman login menampilkan gambar gedung Bank Sumut.</a:t>
+            </a:r>
+          </a:p>
+          <a:p>
+            <a:pPr>
+              <a:lnSpc>
+                <a:spcPct val="125000"/>
+              </a:lnSpc>
+              <a:spcAft>
+                <a:spcPts val="1400"/>
+              </a:spcAft>
+              <a:defRPr sz="2100">
+                <a:solidFill>
+                  <a:srgbClr val="1E293B"/>
+                </a:solidFill>
+              </a:defRPr>
+            </a:pPr>
+            <a:r>
+              <a:t>Dashboard dilengkapi banner dan ringkasan informasi penting.</a:t>
+            </a:r>
+          </a:p>
+          <a:p>
+            <a:pPr>
+              <a:lnSpc>
+                <a:spcPct val="125000"/>
+              </a:lnSpc>
+              <a:spcAft>
+                <a:spcPts val="1400"/>
+              </a:spcAft>
+              <a:defRPr sz="2100">
+                <a:solidFill>
+                  <a:srgbClr val="1E293B"/>
+                </a:solidFill>
+              </a:defRPr>
+            </a:pPr>
+            <a:r>
+              <a:t>Setiap role melihat menu yang sesuai dengan tugasnya.</a:t>
+            </a:r>
+          </a:p>
+          <a:p>
+            <a:pPr>
+              <a:lnSpc>
+                <a:spcPct val="125000"/>
+              </a:lnSpc>
+              <a:spcAft>
+                <a:spcPts val="1400"/>
+              </a:spcAft>
+              <a:defRPr sz="2100">
+                <a:solidFill>
+                  <a:srgbClr val="1E293B"/>
+                </a:solidFill>
+              </a:defRPr>
+            </a:pPr>
+            <a:r>
+              <a:t>Bisa diakses lewat laptop maupun layar yang lebih kecil.</a:t>
+            </a:r>
+          </a:p>
+        </p:txBody>
+      </p:sp>
+      <p:sp>
+        <p:nvSpPr>
+          <p:cNvPr id="5" name="Rectangle 4"/>
           <p:cNvSpPr/>
           <p:nvPr/>
         </p:nvSpPr>
         <p:spPr>
           <a:xfrm>
-            <a:off x="548640" y="960120"/>
-            <a:ext cx="1371600" cy="45720"/>
+            <a:off x="0" y="6446520"/>
+            <a:ext cx="12191695" cy="411480"/>
           </a:xfrm>
           <a:prstGeom prst="rect">
             <a:avLst/>
           </a:prstGeom>
           <a:solidFill>
-            <a:srgbClr val="F58220"/>
+            <a:srgbClr val="0C2340"/>
           </a:solidFill>
           <a:ln>
             <a:noFill/>
@@ -4732,14 +5492,14 @@
       </p:sp>
       <p:sp>
         <p:nvSpPr>
-          <p:cNvPr id="5" name="TextBox 4"/>
+          <p:cNvPr id="6" name="TextBox 5"/>
           <p:cNvSpPr txBox="1"/>
           <p:nvPr/>
         </p:nvSpPr>
         <p:spPr>
           <a:xfrm>
-            <a:off x="548640" y="1234440"/>
-            <a:ext cx="10972800" cy="457200"/>
+            <a:off x="457200" y="6492240"/>
+            <a:ext cx="5486400" cy="320040"/>
           </a:xfrm>
           <a:prstGeom prst="rect">
             <a:avLst/>
@@ -4753,127 +5513,14 @@
           <a:lstStyle/>
           <a:p>
             <a:pPr>
-              <a:defRPr sz="1300">
-                <a:solidFill>
-                  <a:srgbClr val="64748B"/>
-                </a:solidFill>
-              </a:defRPr>
-            </a:pPr>
-            <a:r>
-              <a:t>Modern, simple, corporate</a:t>
-            </a:r>
-          </a:p>
-        </p:txBody>
-      </p:sp>
-      <p:sp>
-        <p:nvSpPr>
-          <p:cNvPr id="6" name="TextBox 5"/>
-          <p:cNvSpPr txBox="1"/>
-          <p:nvPr/>
-        </p:nvSpPr>
-        <p:spPr>
-          <a:xfrm>
-            <a:off x="548640" y="1645920"/>
-            <a:ext cx="10972800" cy="5303520"/>
-          </a:xfrm>
-          <a:prstGeom prst="rect">
-            <a:avLst/>
-          </a:prstGeom>
-          <a:noFill/>
-        </p:spPr>
-        <p:txBody>
-          <a:bodyPr wrap="square">
-            <a:spAutoFit/>
-          </a:bodyPr>
-          <a:lstStyle/>
-          <a:p>
-            <a:pPr>
-              <a:spcAft>
-                <a:spcPts val="800"/>
-              </a:spcAft>
-              <a:defRPr sz="1500">
-                <a:solidFill>
-                  <a:srgbClr val="1E293B"/>
-                </a:solidFill>
-              </a:defRPr>
-            </a:pPr>
-            <a:r>
-              <a:t>Identitas visual: Navy (#0C2340) + Orange (#F58220).</a:t>
-            </a:r>
-          </a:p>
-          <a:p>
-            <a:pPr>
-              <a:spcAft>
-                <a:spcPts val="800"/>
-              </a:spcAft>
-              <a:defRPr sz="1500">
-                <a:solidFill>
-                  <a:srgbClr val="1E293B"/>
-                </a:solidFill>
-              </a:defRPr>
-            </a:pPr>
-            <a:r>
-              <a:t>Login dengan hero panel gambar gedung Bank Sumut.</a:t>
-            </a:r>
-          </a:p>
-          <a:p>
-            <a:pPr>
-              <a:spcAft>
-                <a:spcPts val="800"/>
-              </a:spcAft>
-              <a:defRPr sz="1500">
-                <a:solidFill>
-                  <a:srgbClr val="1E293B"/>
-                </a:solidFill>
-              </a:defRPr>
-            </a:pPr>
-            <a:r>
-              <a:t>Sidebar navy gelap, navigasi aktif oranye, logo Bank Sumut.</a:t>
-            </a:r>
-          </a:p>
-          <a:p>
-            <a:pPr>
-              <a:spcAft>
-                <a:spcPts val="800"/>
-              </a:spcAft>
-              <a:defRPr sz="1500">
-                <a:solidFill>
-                  <a:srgbClr val="1E293B"/>
-                </a:solidFill>
-              </a:defRPr>
-            </a:pPr>
-            <a:r>
-              <a:t>Dashboard &amp; memorandum dengan banner hero corporate.</a:t>
-            </a:r>
-          </a:p>
-          <a:p>
-            <a:pPr>
-              <a:spcAft>
-                <a:spcPts val="800"/>
-              </a:spcAft>
-              <a:defRPr sz="1500">
-                <a:solidFill>
-                  <a:srgbClr val="1E293B"/>
-                </a:solidFill>
-              </a:defRPr>
-            </a:pPr>
-            <a:r>
-              <a:t>Komponen konsisten: workflow stepper, badge status, stat cards, grafik.</a:t>
-            </a:r>
-          </a:p>
-          <a:p>
-            <a:pPr>
-              <a:spcAft>
-                <a:spcPts val="800"/>
-              </a:spcAft>
-              <a:defRPr sz="1500">
-                <a:solidFill>
-                  <a:srgbClr val="1E293B"/>
-                </a:solidFill>
-              </a:defRPr>
-            </a:pPr>
-            <a:r>
-              <a:t>Responsive — mobile sidebar dengan hamburger menu.</a:t>
+              <a:defRPr sz="1100" b="1">
+                <a:solidFill>
+                  <a:srgbClr val="F58220"/>
+                </a:solidFill>
+              </a:defRPr>
+            </a:pPr>
+            <a:r>
+              <a:t>CorpSec Bank Sumut</a:t>
             </a:r>
           </a:p>
         </p:txBody>
@@ -4886,8 +5533,8 @@
         </p:nvSpPr>
         <p:spPr>
           <a:xfrm>
-            <a:off x="457200" y="6400800"/>
-            <a:ext cx="11247120" cy="365760"/>
+            <a:off x="10515600" y="6492240"/>
+            <a:ext cx="1371600" cy="320040"/>
           </a:xfrm>
           <a:prstGeom prst="rect">
             <a:avLst/>
@@ -4901,14 +5548,14 @@
           <a:lstStyle/>
           <a:p>
             <a:pPr algn="r">
-              <a:defRPr sz="900">
-                <a:solidFill>
-                  <a:srgbClr val="64748B"/>
-                </a:solidFill>
-              </a:defRPr>
-            </a:pPr>
-            <a:r>
-              <a:t>CorpSec Bank Sumut — PRD Discovery v0.1</a:t>
+              <a:defRPr sz="1100">
+                <a:solidFill>
+                  <a:srgbClr val="FFFFFF"/>
+                </a:solidFill>
+              </a:defRPr>
+            </a:pPr>
+            <a:r>
+              <a:t>13</a:t>
             </a:r>
           </a:p>
         </p:txBody>
@@ -4927,7 +5574,7 @@
     <p:bg>
       <p:bgPr>
         <a:solidFill>
-          <a:srgbClr val="FFFFFF"/>
+          <a:srgbClr val="F8FAFC"/>
         </a:solidFill>
         <a:effectLst/>
       </p:bgPr>
@@ -4948,7 +5595,7 @@
         <p:spPr>
           <a:xfrm>
             <a:off x="0" y="0"/>
-            <a:ext cx="12191695" cy="73152"/>
+            <a:ext cx="164592" cy="6446520"/>
           </a:xfrm>
           <a:prstGeom prst="rect">
             <a:avLst/>
@@ -4990,8 +5637,8 @@
         </p:nvSpPr>
         <p:spPr>
           <a:xfrm>
-            <a:off x="548640" y="320040"/>
-            <a:ext cx="10972800" cy="640080"/>
+            <a:off x="502920" y="320040"/>
+            <a:ext cx="11155680" cy="1005840"/>
           </a:xfrm>
           <a:prstGeom prst="rect">
             <a:avLst/>
@@ -5005,34 +5652,180 @@
           <a:lstStyle/>
           <a:p>
             <a:pPr>
-              <a:defRPr sz="2800" b="1">
+              <a:defRPr sz="3400" b="1">
                 <a:solidFill>
                   <a:srgbClr val="0C2340"/>
                 </a:solidFill>
               </a:defRPr>
             </a:pPr>
             <a:r>
-              <a:t>Kesimpulan</a:t>
-            </a:r>
-          </a:p>
-        </p:txBody>
-      </p:sp>
-      <p:sp>
-        <p:nvSpPr>
-          <p:cNvPr id="4" name="Rectangle 3"/>
+              <a:t>Teknologi yang Digunakan</a:t>
+            </a:r>
+          </a:p>
+          <a:p>
+            <a:pPr>
+              <a:spcBef>
+                <a:spcPts val="600"/>
+              </a:spcBef>
+              <a:defRPr sz="1700">
+                <a:solidFill>
+                  <a:srgbClr val="64748B"/>
+                </a:solidFill>
+              </a:defRPr>
+            </a:pPr>
+            <a:r>
+              <a:t>Dasar pembangunan sistem</a:t>
+            </a:r>
+          </a:p>
+        </p:txBody>
+      </p:sp>
+      <p:sp>
+        <p:nvSpPr>
+          <p:cNvPr id="4" name="TextBox 3"/>
+          <p:cNvSpPr txBox="1"/>
+          <p:nvPr/>
+        </p:nvSpPr>
+        <p:spPr>
+          <a:xfrm>
+            <a:off x="502920" y="1417320"/>
+            <a:ext cx="11155680" cy="4754880"/>
+          </a:xfrm>
+          <a:prstGeom prst="rect">
+            <a:avLst/>
+          </a:prstGeom>
+          <a:noFill/>
+        </p:spPr>
+        <p:txBody>
+          <a:bodyPr wrap="square">
+            <a:spAutoFit/>
+          </a:bodyPr>
+          <a:lstStyle/>
+          <a:p>
+            <a:pPr>
+              <a:lnSpc>
+                <a:spcPct val="125000"/>
+              </a:lnSpc>
+              <a:spcAft>
+                <a:spcPts val="1400"/>
+              </a:spcAft>
+              <a:defRPr sz="2100">
+                <a:solidFill>
+                  <a:srgbClr val="1E293B"/>
+                </a:solidFill>
+              </a:defRPr>
+            </a:pPr>
+            <a:r>
+              <a:t>Website dibangun dengan Next.js — framework web modern.</a:t>
+            </a:r>
+          </a:p>
+          <a:p>
+            <a:pPr>
+              <a:lnSpc>
+                <a:spcPct val="125000"/>
+              </a:lnSpc>
+              <a:spcAft>
+                <a:spcPts val="1400"/>
+              </a:spcAft>
+              <a:defRPr sz="2100">
+                <a:solidFill>
+                  <a:srgbClr val="1E293B"/>
+                </a:solidFill>
+              </a:defRPr>
+            </a:pPr>
+            <a:r>
+              <a:t>Data disimpan di database SQLite, cukup untuk kebutuhan demo.</a:t>
+            </a:r>
+          </a:p>
+          <a:p>
+            <a:pPr>
+              <a:lnSpc>
+                <a:spcPct val="125000"/>
+              </a:lnSpc>
+              <a:spcAft>
+                <a:spcPts val="1400"/>
+              </a:spcAft>
+              <a:defRPr sz="2100">
+                <a:solidFill>
+                  <a:srgbClr val="1E293B"/>
+                </a:solidFill>
+              </a:defRPr>
+            </a:pPr>
+            <a:r>
+              <a:t>Tampilan dibuat dengan Tailwind CSS, mengikuti warna Bank Sumut.</a:t>
+            </a:r>
+          </a:p>
+          <a:p>
+            <a:pPr>
+              <a:lnSpc>
+                <a:spcPct val="125000"/>
+              </a:lnSpc>
+              <a:spcAft>
+                <a:spcPts val="1400"/>
+              </a:spcAft>
+              <a:defRPr sz="2100">
+                <a:solidFill>
+                  <a:srgbClr val="1E293B"/>
+                </a:solidFill>
+              </a:defRPr>
+            </a:pPr>
+            <a:r>
+              <a:t>Grafik di dashboard menggunakan Recharts.</a:t>
+            </a:r>
+          </a:p>
+          <a:p>
+            <a:pPr>
+              <a:lnSpc>
+                <a:spcPct val="125000"/>
+              </a:lnSpc>
+              <a:spcAft>
+                <a:spcPts val="1400"/>
+              </a:spcAft>
+              <a:defRPr sz="2100">
+                <a:solidFill>
+                  <a:srgbClr val="1E293B"/>
+                </a:solidFill>
+              </a:defRPr>
+            </a:pPr>
+            <a:r>
+              <a:t>File memorandum disimpan dalam format PDF.</a:t>
+            </a:r>
+          </a:p>
+          <a:p>
+            <a:pPr>
+              <a:lnSpc>
+                <a:spcPct val="125000"/>
+              </a:lnSpc>
+              <a:spcAft>
+                <a:spcPts val="1400"/>
+              </a:spcAft>
+              <a:defRPr sz="2100">
+                <a:solidFill>
+                  <a:srgbClr val="1E293B"/>
+                </a:solidFill>
+              </a:defRPr>
+            </a:pPr>
+            <a:r>
+              <a:t>Sistem login dengan pembagian akses per role.</a:t>
+            </a:r>
+          </a:p>
+        </p:txBody>
+      </p:sp>
+      <p:sp>
+        <p:nvSpPr>
+          <p:cNvPr id="5" name="Rectangle 4"/>
           <p:cNvSpPr/>
           <p:nvPr/>
         </p:nvSpPr>
         <p:spPr>
           <a:xfrm>
-            <a:off x="548640" y="960120"/>
-            <a:ext cx="1371600" cy="45720"/>
+            <a:off x="0" y="6446520"/>
+            <a:ext cx="12191695" cy="411480"/>
           </a:xfrm>
           <a:prstGeom prst="rect">
             <a:avLst/>
           </a:prstGeom>
           <a:solidFill>
-            <a:srgbClr val="F58220"/>
+            <a:srgbClr val="0C2340"/>
           </a:solidFill>
           <a:ln>
             <a:noFill/>
@@ -5062,127 +5855,14 @@
       </p:sp>
       <p:sp>
         <p:nvSpPr>
-          <p:cNvPr id="5" name="TextBox 4"/>
-          <p:cNvSpPr txBox="1"/>
-          <p:nvPr/>
-        </p:nvSpPr>
-        <p:spPr>
-          <a:xfrm>
-            <a:off x="548640" y="1234440"/>
-            <a:ext cx="10972800" cy="5303520"/>
-          </a:xfrm>
-          <a:prstGeom prst="rect">
-            <a:avLst/>
-          </a:prstGeom>
-          <a:noFill/>
-        </p:spPr>
-        <p:txBody>
-          <a:bodyPr wrap="square">
-            <a:spAutoFit/>
-          </a:bodyPr>
-          <a:lstStyle/>
-          <a:p>
-            <a:pPr>
-              <a:spcAft>
-                <a:spcPts val="800"/>
-              </a:spcAft>
-              <a:defRPr sz="1500">
-                <a:solidFill>
-                  <a:srgbClr val="1E293B"/>
-                </a:solidFill>
-              </a:defRPr>
-            </a:pPr>
-            <a:r>
-              <a:t>Platform CorpSec Bank Sumut mengimplementasikan seluruh ruang lingkup PRD v0.1.</a:t>
-            </a:r>
-          </a:p>
-          <a:p>
-            <a:pPr>
-              <a:spcAft>
-                <a:spcPts val="800"/>
-              </a:spcAft>
-              <a:defRPr sz="1500">
-                <a:solidFill>
-                  <a:srgbClr val="1E293B"/>
-                </a:solidFill>
-              </a:defRPr>
-            </a:pPr>
-            <a:r>
-              <a:t>Workflow 7 level + AI review + tanda tangan digital + SLA terintegrasi.</a:t>
-            </a:r>
-          </a:p>
-          <a:p>
-            <a:pPr>
-              <a:spcAft>
-                <a:spcPts val="800"/>
-              </a:spcAft>
-              <a:defRPr sz="1500">
-                <a:solidFill>
-                  <a:srgbClr val="1E293B"/>
-                </a:solidFill>
-              </a:defRPr>
-            </a:pPr>
-            <a:r>
-              <a:t>7 role RBAC — dari Divisi Pengusul hingga Direksi/Komisaris.</a:t>
-            </a:r>
-          </a:p>
-          <a:p>
-            <a:pPr>
-              <a:spcAft>
-                <a:spcPts val="800"/>
-              </a:spcAft>
-              <a:defRPr sz="1500">
-                <a:solidFill>
-                  <a:srgbClr val="1E293B"/>
-                </a:solidFill>
-              </a:defRPr>
-            </a:pPr>
-            <a:r>
-              <a:t>8 modul operasional dalam satu platform terpadu.</a:t>
-            </a:r>
-          </a:p>
-          <a:p>
-            <a:pPr>
-              <a:spcAft>
-                <a:spcPts val="800"/>
-              </a:spcAft>
-              <a:defRPr sz="1500">
-                <a:solidFill>
-                  <a:srgbClr val="1E293B"/>
-                </a:solidFill>
-              </a:defRPr>
-            </a:pPr>
-            <a:r>
-              <a:t>UI modern dengan branding Bank Sumut &amp; data demo lengkap.</a:t>
-            </a:r>
-          </a:p>
-          <a:p>
-            <a:pPr>
-              <a:spcAft>
-                <a:spcPts val="800"/>
-              </a:spcAft>
-              <a:defRPr sz="1500">
-                <a:solidFill>
-                  <a:srgbClr val="1E293B"/>
-                </a:solidFill>
-              </a:defRPr>
-            </a:pPr>
-            <a:r>
-              <a:t>Prototype siap demo: http://localhost:3000/login</a:t>
-            </a:r>
-          </a:p>
-        </p:txBody>
-      </p:sp>
-      <p:sp>
-        <p:nvSpPr>
           <p:cNvPr id="6" name="TextBox 5"/>
           <p:cNvSpPr txBox="1"/>
           <p:nvPr/>
         </p:nvSpPr>
         <p:spPr>
           <a:xfrm>
-            <a:off x="457200" y="6400800"/>
-            <a:ext cx="11247120" cy="365760"/>
+            <a:off x="457200" y="6492240"/>
+            <a:ext cx="5486400" cy="320040"/>
           </a:xfrm>
           <a:prstGeom prst="rect">
             <a:avLst/>
@@ -5195,15 +5875,50 @@
           </a:bodyPr>
           <a:lstStyle/>
           <a:p>
+            <a:pPr>
+              <a:defRPr sz="1100" b="1">
+                <a:solidFill>
+                  <a:srgbClr val="F58220"/>
+                </a:solidFill>
+              </a:defRPr>
+            </a:pPr>
+            <a:r>
+              <a:t>CorpSec Bank Sumut</a:t>
+            </a:r>
+          </a:p>
+        </p:txBody>
+      </p:sp>
+      <p:sp>
+        <p:nvSpPr>
+          <p:cNvPr id="7" name="TextBox 6"/>
+          <p:cNvSpPr txBox="1"/>
+          <p:nvPr/>
+        </p:nvSpPr>
+        <p:spPr>
+          <a:xfrm>
+            <a:off x="10515600" y="6492240"/>
+            <a:ext cx="1371600" cy="320040"/>
+          </a:xfrm>
+          <a:prstGeom prst="rect">
+            <a:avLst/>
+          </a:prstGeom>
+          <a:noFill/>
+        </p:spPr>
+        <p:txBody>
+          <a:bodyPr wrap="none">
+            <a:spAutoFit/>
+          </a:bodyPr>
+          <a:lstStyle/>
+          <a:p>
             <a:pPr algn="r">
-              <a:defRPr sz="900">
-                <a:solidFill>
-                  <a:srgbClr val="64748B"/>
-                </a:solidFill>
-              </a:defRPr>
-            </a:pPr>
-            <a:r>
-              <a:t>CorpSec Bank Sumut — PRD Discovery v0.1</a:t>
+              <a:defRPr sz="1100">
+                <a:solidFill>
+                  <a:srgbClr val="FFFFFF"/>
+                </a:solidFill>
+              </a:defRPr>
+            </a:pPr>
+            <a:r>
+              <a:t>14</a:t>
             </a:r>
           </a:p>
         </p:txBody>
@@ -5242,8 +5957,8 @@
         </p:nvSpPr>
         <p:spPr>
           <a:xfrm>
-            <a:off x="0" y="0"/>
-            <a:ext cx="12191695" cy="109728"/>
+            <a:off x="0" y="2926080"/>
+            <a:ext cx="12191695" cy="73152"/>
           </a:xfrm>
           <a:prstGeom prst="rect">
             <a:avLst/>
@@ -5279,20 +5994,125 @@
       </p:sp>
       <p:sp>
         <p:nvSpPr>
-          <p:cNvPr id="3" name="Oval 2"/>
+          <p:cNvPr id="3" name="TextBox 2"/>
+          <p:cNvSpPr txBox="1"/>
+          <p:nvPr/>
+        </p:nvSpPr>
+        <p:spPr>
+          <a:xfrm>
+            <a:off x="640080" y="2011680"/>
+            <a:ext cx="10972800" cy="914400"/>
+          </a:xfrm>
+          <a:prstGeom prst="rect">
+            <a:avLst/>
+          </a:prstGeom>
+          <a:noFill/>
+        </p:spPr>
+        <p:txBody>
+          <a:bodyPr wrap="none">
+            <a:spAutoFit/>
+          </a:bodyPr>
+          <a:lstStyle/>
+          <a:p>
+            <a:pPr algn="ctr">
+              <a:defRPr sz="4800" b="1">
+                <a:solidFill>
+                  <a:srgbClr val="FFFFFF"/>
+                </a:solidFill>
+              </a:defRPr>
+            </a:pPr>
+            <a:r>
+              <a:t>Terima Kasih</a:t>
+            </a:r>
+          </a:p>
+        </p:txBody>
+      </p:sp>
+      <p:sp>
+        <p:nvSpPr>
+          <p:cNvPr id="4" name="TextBox 3"/>
+          <p:cNvSpPr txBox="1"/>
+          <p:nvPr/>
+        </p:nvSpPr>
+        <p:spPr>
+          <a:xfrm>
+            <a:off x="640080" y="3246120"/>
+            <a:ext cx="10972800" cy="731520"/>
+          </a:xfrm>
+          <a:prstGeom prst="rect">
+            <a:avLst/>
+          </a:prstGeom>
+          <a:noFill/>
+        </p:spPr>
+        <p:txBody>
+          <a:bodyPr wrap="none">
+            <a:spAutoFit/>
+          </a:bodyPr>
+          <a:lstStyle/>
+          <a:p>
+            <a:pPr algn="ctr">
+              <a:defRPr sz="2200">
+                <a:solidFill>
+                  <a:srgbClr val="F58220"/>
+                </a:solidFill>
+              </a:defRPr>
+            </a:pPr>
+            <a:r>
+              <a:t>CorpSec Bank Sumut — Platform Corporate Secretary Digital</a:t>
+            </a:r>
+          </a:p>
+        </p:txBody>
+      </p:sp>
+      <p:sp>
+        <p:nvSpPr>
+          <p:cNvPr id="5" name="TextBox 4"/>
+          <p:cNvSpPr txBox="1"/>
+          <p:nvPr/>
+        </p:nvSpPr>
+        <p:spPr>
+          <a:xfrm>
+            <a:off x="640080" y="4114800"/>
+            <a:ext cx="10972800" cy="548640"/>
+          </a:xfrm>
+          <a:prstGeom prst="rect">
+            <a:avLst/>
+          </a:prstGeom>
+          <a:noFill/>
+        </p:spPr>
+        <p:txBody>
+          <a:bodyPr wrap="none">
+            <a:spAutoFit/>
+          </a:bodyPr>
+          <a:lstStyle/>
+          <a:p>
+            <a:pPr algn="ctr">
+              <a:defRPr sz="1800">
+                <a:solidFill>
+                  <a:srgbClr val="BCCDDC"/>
+                </a:solidFill>
+              </a:defRPr>
+            </a:pPr>
+            <a:r>
+              <a:t>localhost:3000/login</a:t>
+            </a:r>
+          </a:p>
+        </p:txBody>
+      </p:sp>
+      <p:sp>
+        <p:nvSpPr>
+          <p:cNvPr id="6" name="Rectangle 5"/>
           <p:cNvSpPr/>
           <p:nvPr/>
         </p:nvSpPr>
         <p:spPr>
           <a:xfrm>
-            <a:off x="8686800" y="-914400"/>
-            <a:ext cx="4572000" cy="4572000"/>
-          </a:xfrm>
-          <a:prstGeom prst="ellipse">
+            <a:off x="0" y="6446520"/>
+            <a:ext cx="12191695" cy="411480"/>
+          </a:xfrm>
+          <a:prstGeom prst="rect">
             <a:avLst/>
           </a:prstGeom>
           <a:solidFill>
-            <a:srgbClr val="F58220"/>
+            <a:srgbClr val="0C2340"/>
           </a:solidFill>
           <a:ln>
             <a:noFill/>
@@ -5322,14 +6142,14 @@
       </p:sp>
       <p:sp>
         <p:nvSpPr>
-          <p:cNvPr id="4" name="TextBox 3"/>
+          <p:cNvPr id="7" name="TextBox 6"/>
           <p:cNvSpPr txBox="1"/>
           <p:nvPr/>
         </p:nvSpPr>
         <p:spPr>
           <a:xfrm>
-            <a:off x="731520" y="2011680"/>
-            <a:ext cx="10058400" cy="1371600"/>
+            <a:off x="457200" y="6492240"/>
+            <a:ext cx="5486400" cy="320040"/>
           </a:xfrm>
           <a:prstGeom prst="rect">
             <a:avLst/>
@@ -5343,28 +6163,28 @@
           <a:lstStyle/>
           <a:p>
             <a:pPr>
-              <a:defRPr sz="4000" b="1">
-                <a:solidFill>
-                  <a:srgbClr val="FFFFFF"/>
-                </a:solidFill>
-              </a:defRPr>
-            </a:pPr>
-            <a:r>
-              <a:t>Terima Kasih</a:t>
-            </a:r>
-          </a:p>
-        </p:txBody>
-      </p:sp>
-      <p:sp>
-        <p:nvSpPr>
-          <p:cNvPr id="5" name="TextBox 4"/>
+              <a:defRPr sz="1100" b="1">
+                <a:solidFill>
+                  <a:srgbClr val="F58220"/>
+                </a:solidFill>
+              </a:defRPr>
+            </a:pPr>
+            <a:r>
+              <a:t>CorpSec Bank Sumut</a:t>
+            </a:r>
+          </a:p>
+        </p:txBody>
+      </p:sp>
+      <p:sp>
+        <p:nvSpPr>
+          <p:cNvPr id="8" name="TextBox 7"/>
           <p:cNvSpPr txBox="1"/>
           <p:nvPr/>
         </p:nvSpPr>
         <p:spPr>
           <a:xfrm>
-            <a:off x="731520" y="3474720"/>
-            <a:ext cx="9144000" cy="914400"/>
+            <a:off x="10515600" y="6492240"/>
+            <a:ext cx="1371600" cy="320040"/>
           </a:xfrm>
           <a:prstGeom prst="rect">
             <a:avLst/>
@@ -5377,85 +6197,15 @@
           </a:bodyPr>
           <a:lstStyle/>
           <a:p>
-            <a:pPr>
-              <a:defRPr sz="2000">
-                <a:solidFill>
-                  <a:srgbClr val="F58220"/>
-                </a:solidFill>
-              </a:defRPr>
-            </a:pPr>
-            <a:r>
-              <a:t>CorpSec Bank Sumut — Digital Platform</a:t>
-            </a:r>
-          </a:p>
-        </p:txBody>
-      </p:sp>
-      <p:sp>
-        <p:nvSpPr>
-          <p:cNvPr id="6" name="TextBox 5"/>
-          <p:cNvSpPr txBox="1"/>
-          <p:nvPr/>
-        </p:nvSpPr>
-        <p:spPr>
-          <a:xfrm>
-            <a:off x="731520" y="4572000"/>
-            <a:ext cx="9144000" cy="731520"/>
-          </a:xfrm>
-          <a:prstGeom prst="rect">
-            <a:avLst/>
-          </a:prstGeom>
-          <a:noFill/>
-        </p:spPr>
-        <p:txBody>
-          <a:bodyPr wrap="none">
-            <a:spAutoFit/>
-          </a:bodyPr>
-          <a:lstStyle/>
-          <a:p>
-            <a:pPr>
-              <a:defRPr sz="1400">
-                <a:solidFill>
-                  <a:srgbClr val="BCCDDC"/>
-                </a:solidFill>
-              </a:defRPr>
-            </a:pPr>
-            <a:r>
-              <a:t>Demo: http://localhost:3000/login</a:t>
-            </a:r>
-          </a:p>
-        </p:txBody>
-      </p:sp>
-      <p:sp>
-        <p:nvSpPr>
-          <p:cNvPr id="7" name="TextBox 6"/>
-          <p:cNvSpPr txBox="1"/>
-          <p:nvPr/>
-        </p:nvSpPr>
-        <p:spPr>
-          <a:xfrm>
-            <a:off x="457200" y="6400800"/>
-            <a:ext cx="11247120" cy="365760"/>
-          </a:xfrm>
-          <a:prstGeom prst="rect">
-            <a:avLst/>
-          </a:prstGeom>
-          <a:noFill/>
-        </p:spPr>
-        <p:txBody>
-          <a:bodyPr wrap="none">
-            <a:spAutoFit/>
-          </a:bodyPr>
-          <a:lstStyle/>
-          <a:p>
             <a:pPr algn="r">
-              <a:defRPr sz="900">
-                <a:solidFill>
-                  <a:srgbClr val="64748B"/>
-                </a:solidFill>
-              </a:defRPr>
-            </a:pPr>
-            <a:r>
-              <a:t>Bank Sumut — Corporate Secretary Digital Platform | PRD v0.1</a:t>
+              <a:defRPr sz="1100">
+                <a:solidFill>
+                  <a:srgbClr val="FFFFFF"/>
+                </a:solidFill>
+              </a:defRPr>
+            </a:pPr>
+            <a:r>
+              <a:t>15</a:t>
             </a:r>
           </a:p>
         </p:txBody>
@@ -5474,7 +6224,7 @@
     <p:bg>
       <p:bgPr>
         <a:solidFill>
-          <a:srgbClr val="FFFFFF"/>
+          <a:srgbClr val="F8FAFC"/>
         </a:solidFill>
         <a:effectLst/>
       </p:bgPr>
@@ -5495,7 +6245,7 @@
         <p:spPr>
           <a:xfrm>
             <a:off x="0" y="0"/>
-            <a:ext cx="12191695" cy="73152"/>
+            <a:ext cx="164592" cy="6446520"/>
           </a:xfrm>
           <a:prstGeom prst="rect">
             <a:avLst/>
@@ -5537,8 +6287,8 @@
         </p:nvSpPr>
         <p:spPr>
           <a:xfrm>
-            <a:off x="548640" y="320040"/>
-            <a:ext cx="10972800" cy="640080"/>
+            <a:off x="502920" y="320040"/>
+            <a:ext cx="11155680" cy="1005840"/>
           </a:xfrm>
           <a:prstGeom prst="rect">
             <a:avLst/>
@@ -5552,34 +6302,162 @@
           <a:lstStyle/>
           <a:p>
             <a:pPr>
-              <a:defRPr sz="2800" b="1">
+              <a:defRPr sz="3400" b="1">
                 <a:solidFill>
                   <a:srgbClr val="0C2340"/>
                 </a:solidFill>
               </a:defRPr>
             </a:pPr>
             <a:r>
-              <a:t>Latar Belakang &amp; Tantangan</a:t>
-            </a:r>
-          </a:p>
-        </p:txBody>
-      </p:sp>
-      <p:sp>
-        <p:nvSpPr>
-          <p:cNvPr id="4" name="Rectangle 3"/>
+              <a:t>Kenapa Sistem Ini Dibuat?</a:t>
+            </a:r>
+          </a:p>
+          <a:p>
+            <a:pPr>
+              <a:spcBef>
+                <a:spcPts val="600"/>
+              </a:spcBef>
+              <a:defRPr sz="1700">
+                <a:solidFill>
+                  <a:srgbClr val="64748B"/>
+                </a:solidFill>
+              </a:defRPr>
+            </a:pPr>
+            <a:r>
+              <a:t>Permasalahan yang dihadapi Corporate Secretary</a:t>
+            </a:r>
+          </a:p>
+        </p:txBody>
+      </p:sp>
+      <p:sp>
+        <p:nvSpPr>
+          <p:cNvPr id="4" name="TextBox 3"/>
+          <p:cNvSpPr txBox="1"/>
+          <p:nvPr/>
+        </p:nvSpPr>
+        <p:spPr>
+          <a:xfrm>
+            <a:off x="502920" y="1417320"/>
+            <a:ext cx="11155680" cy="4754880"/>
+          </a:xfrm>
+          <a:prstGeom prst="rect">
+            <a:avLst/>
+          </a:prstGeom>
+          <a:noFill/>
+        </p:spPr>
+        <p:txBody>
+          <a:bodyPr wrap="square">
+            <a:spAutoFit/>
+          </a:bodyPr>
+          <a:lstStyle/>
+          <a:p>
+            <a:pPr>
+              <a:lnSpc>
+                <a:spcPct val="125000"/>
+              </a:lnSpc>
+              <a:spcAft>
+                <a:spcPts val="1400"/>
+              </a:spcAft>
+              <a:defRPr sz="2100">
+                <a:solidFill>
+                  <a:srgbClr val="1E293B"/>
+                </a:solidFill>
+              </a:defRPr>
+            </a:pPr>
+            <a:r>
+              <a:t>Memorandum masih banyak lewat kertas dan email, sehingga sulit dilacak.</a:t>
+            </a:r>
+          </a:p>
+          <a:p>
+            <a:pPr>
+              <a:lnSpc>
+                <a:spcPct val="125000"/>
+              </a:lnSpc>
+              <a:spcAft>
+                <a:spcPts val="1400"/>
+              </a:spcAft>
+              <a:defRPr sz="2100">
+                <a:solidFill>
+                  <a:srgbClr val="1E293B"/>
+                </a:solidFill>
+              </a:defRPr>
+            </a:pPr>
+            <a:r>
+              <a:t>Proses persetujuan memakan waktu karena harus menunggu antar divisi.</a:t>
+            </a:r>
+          </a:p>
+          <a:p>
+            <a:pPr>
+              <a:lnSpc>
+                <a:spcPct val="125000"/>
+              </a:lnSpc>
+              <a:spcAft>
+                <a:spcPts val="1400"/>
+              </a:spcAft>
+              <a:defRPr sz="2100">
+                <a:solidFill>
+                  <a:srgbClr val="1E293B"/>
+                </a:solidFill>
+              </a:defRPr>
+            </a:pPr>
+            <a:r>
+              <a:t>Agenda Direksi dan catatan rapat belum terpusat di satu tempat.</a:t>
+            </a:r>
+          </a:p>
+          <a:p>
+            <a:pPr>
+              <a:lnSpc>
+                <a:spcPct val="125000"/>
+              </a:lnSpc>
+              <a:spcAft>
+                <a:spcPts val="1400"/>
+              </a:spcAft>
+              <a:defRPr sz="2100">
+                <a:solidFill>
+                  <a:srgbClr val="1E293B"/>
+                </a:solidFill>
+              </a:defRPr>
+            </a:pPr>
+            <a:r>
+              <a:t>Belum ada pemantauan SLA yang jelas untuk setiap memorandum.</a:t>
+            </a:r>
+          </a:p>
+          <a:p>
+            <a:pPr>
+              <a:lnSpc>
+                <a:spcPct val="125000"/>
+              </a:lnSpc>
+              <a:spcAft>
+                <a:spcPts val="1400"/>
+              </a:spcAft>
+              <a:defRPr sz="2100">
+                <a:solidFill>
+                  <a:srgbClr val="1E293B"/>
+                </a:solidFill>
+              </a:defRPr>
+            </a:pPr>
+            <a:r>
+              <a:t>CorpSec Bank Sumut butuh satu sistem digital yang rapi dan mudah dipakai.</a:t>
+            </a:r>
+          </a:p>
+        </p:txBody>
+      </p:sp>
+      <p:sp>
+        <p:nvSpPr>
+          <p:cNvPr id="5" name="Rectangle 4"/>
           <p:cNvSpPr/>
           <p:nvPr/>
         </p:nvSpPr>
         <p:spPr>
           <a:xfrm>
-            <a:off x="548640" y="960120"/>
-            <a:ext cx="1371600" cy="45720"/>
+            <a:off x="0" y="6446520"/>
+            <a:ext cx="12191695" cy="411480"/>
           </a:xfrm>
           <a:prstGeom prst="rect">
             <a:avLst/>
           </a:prstGeom>
           <a:solidFill>
-            <a:srgbClr val="F58220"/>
+            <a:srgbClr val="0C2340"/>
           </a:solidFill>
           <a:ln>
             <a:noFill/>
@@ -5609,14 +6487,14 @@
       </p:sp>
       <p:sp>
         <p:nvSpPr>
-          <p:cNvPr id="5" name="TextBox 4"/>
+          <p:cNvPr id="6" name="TextBox 5"/>
           <p:cNvSpPr txBox="1"/>
           <p:nvPr/>
         </p:nvSpPr>
         <p:spPr>
           <a:xfrm>
-            <a:off x="548640" y="1234440"/>
-            <a:ext cx="10972800" cy="457200"/>
+            <a:off x="457200" y="6492240"/>
+            <a:ext cx="5486400" cy="320040"/>
           </a:xfrm>
           <a:prstGeom prst="rect">
             <a:avLst/>
@@ -5630,97 +6508,14 @@
           <a:lstStyle/>
           <a:p>
             <a:pPr>
-              <a:defRPr sz="1300">
-                <a:solidFill>
-                  <a:srgbClr val="64748B"/>
-                </a:solidFill>
-              </a:defRPr>
-            </a:pPr>
-            <a:r>
-              <a:t>Mengapa platform digital CorpSec dibutuhkan?</a:t>
-            </a:r>
-          </a:p>
-        </p:txBody>
-      </p:sp>
-      <p:sp>
-        <p:nvSpPr>
-          <p:cNvPr id="6" name="TextBox 5"/>
-          <p:cNvSpPr txBox="1"/>
-          <p:nvPr/>
-        </p:nvSpPr>
-        <p:spPr>
-          <a:xfrm>
-            <a:off x="548640" y="1645920"/>
-            <a:ext cx="10972800" cy="5303520"/>
-          </a:xfrm>
-          <a:prstGeom prst="rect">
-            <a:avLst/>
-          </a:prstGeom>
-          <a:noFill/>
-        </p:spPr>
-        <p:txBody>
-          <a:bodyPr wrap="square">
-            <a:spAutoFit/>
-          </a:bodyPr>
-          <a:lstStyle/>
-          <a:p>
-            <a:pPr>
-              <a:spcAft>
-                <a:spcPts val="800"/>
-              </a:spcAft>
-              <a:defRPr sz="1500">
-                <a:solidFill>
-                  <a:srgbClr val="1E293B"/>
-                </a:solidFill>
-              </a:defRPr>
-            </a:pPr>
-            <a:r>
-              <a:t>Corporate Secretary Bank Sumut mengelola memorandum, agenda Direksi, rapat, dan compliance.</a:t>
-            </a:r>
-          </a:p>
-          <a:p>
-            <a:pPr>
-              <a:spcAft>
-                <a:spcPts val="800"/>
-              </a:spcAft>
-              <a:defRPr sz="1500">
-                <a:solidFill>
-                  <a:srgbClr val="1E293B"/>
-                </a:solidFill>
-              </a:defRPr>
-            </a:pPr>
-            <a:r>
-              <a:t>Proses manual masih mengandalkan kertas &amp; email — approval lambat, sulit dilacak.</a:t>
-            </a:r>
-          </a:p>
-          <a:p>
-            <a:pPr>
-              <a:spcAft>
-                <a:spcPts val="800"/>
-              </a:spcAft>
-              <a:defRPr sz="1500">
-                <a:solidFill>
-                  <a:srgbClr val="1E293B"/>
-                </a:solidFill>
-              </a:defRPr>
-            </a:pPr>
-            <a:r>
-              <a:t>PRD Discovery v0.1 mendefinisikan kebutuhan digitalisasi end-to-end CorpSec.</a:t>
-            </a:r>
-          </a:p>
-          <a:p>
-            <a:pPr>
-              <a:spcAft>
-                <a:spcPts val="800"/>
-              </a:spcAft>
-              <a:defRPr sz="1500">
-                <a:solidFill>
-                  <a:srgbClr val="1E293B"/>
-                </a:solidFill>
-              </a:defRPr>
-            </a:pPr>
-            <a:r>
-              <a:t>Solusi: platform terintegrasi dengan workflow 7 level, AI review, &amp; SLA monitoring.</a:t>
+              <a:defRPr sz="1100" b="1">
+                <a:solidFill>
+                  <a:srgbClr val="F58220"/>
+                </a:solidFill>
+              </a:defRPr>
+            </a:pPr>
+            <a:r>
+              <a:t>CorpSec Bank Sumut</a:t>
             </a:r>
           </a:p>
         </p:txBody>
@@ -5733,8 +6528,8 @@
         </p:nvSpPr>
         <p:spPr>
           <a:xfrm>
-            <a:off x="457200" y="6400800"/>
-            <a:ext cx="11247120" cy="365760"/>
+            <a:off x="10515600" y="6492240"/>
+            <a:ext cx="1371600" cy="320040"/>
           </a:xfrm>
           <a:prstGeom prst="rect">
             <a:avLst/>
@@ -5748,14 +6543,14 @@
           <a:lstStyle/>
           <a:p>
             <a:pPr algn="r">
-              <a:defRPr sz="900">
-                <a:solidFill>
-                  <a:srgbClr val="64748B"/>
-                </a:solidFill>
-              </a:defRPr>
-            </a:pPr>
-            <a:r>
-              <a:t>CorpSec Bank Sumut — PRD Discovery v0.1</a:t>
+              <a:defRPr sz="1100">
+                <a:solidFill>
+                  <a:srgbClr val="FFFFFF"/>
+                </a:solidFill>
+              </a:defRPr>
+            </a:pPr>
+            <a:r>
+              <a:t>2</a:t>
             </a:r>
           </a:p>
         </p:txBody>
@@ -5774,7 +6569,7 @@
     <p:bg>
       <p:bgPr>
         <a:solidFill>
-          <a:srgbClr val="FFFFFF"/>
+          <a:srgbClr val="F8FAFC"/>
         </a:solidFill>
         <a:effectLst/>
       </p:bgPr>
@@ -5795,7 +6590,7 @@
         <p:spPr>
           <a:xfrm>
             <a:off x="0" y="0"/>
-            <a:ext cx="12191695" cy="73152"/>
+            <a:ext cx="164592" cy="6446520"/>
           </a:xfrm>
           <a:prstGeom prst="rect">
             <a:avLst/>
@@ -5837,8 +6632,8 @@
         </p:nvSpPr>
         <p:spPr>
           <a:xfrm>
-            <a:off x="548640" y="320040"/>
-            <a:ext cx="10972800" cy="640080"/>
+            <a:off x="502920" y="320040"/>
+            <a:ext cx="11155680" cy="1005840"/>
           </a:xfrm>
           <a:prstGeom prst="rect">
             <a:avLst/>
@@ -5852,37 +6647,39 @@
           <a:lstStyle/>
           <a:p>
             <a:pPr>
-              <a:defRPr sz="2800" b="1">
+              <a:defRPr sz="3400" b="1">
                 <a:solidFill>
                   <a:srgbClr val="0C2340"/>
                 </a:solidFill>
               </a:defRPr>
             </a:pPr>
             <a:r>
-              <a:t>Visi Produk &amp; Ruang Lingkup PRD</a:t>
-            </a:r>
-          </a:p>
-        </p:txBody>
-      </p:sp>
-      <p:sp>
-        <p:nvSpPr>
-          <p:cNvPr id="4" name="Rectangle 3"/>
+              <a:t>Apa Itu CorpSec Bank Sumut?</a:t>
+            </a:r>
+          </a:p>
+        </p:txBody>
+      </p:sp>
+      <p:sp>
+        <p:nvSpPr>
+          <p:cNvPr id="4" name="Rounded Rectangle 3"/>
           <p:cNvSpPr/>
           <p:nvPr/>
         </p:nvSpPr>
         <p:spPr>
           <a:xfrm>
-            <a:off x="548640" y="960120"/>
-            <a:ext cx="1371600" cy="45720"/>
-          </a:xfrm>
-          <a:prstGeom prst="rect">
+            <a:off x="502920" y="1828800"/>
+            <a:ext cx="2606039" cy="3474720"/>
+          </a:xfrm>
+          <a:prstGeom prst="roundRect">
             <a:avLst/>
           </a:prstGeom>
           <a:solidFill>
-            <a:srgbClr val="F58220"/>
+            <a:srgbClr val="FFFFFF"/>
           </a:solidFill>
           <a:ln>
-            <a:noFill/>
+            <a:solidFill>
+              <a:srgbClr val="E2E8F0"/>
+            </a:solidFill>
           </a:ln>
         </p:spPr>
         <p:style>
@@ -5915,8 +6712,43 @@
         </p:nvSpPr>
         <p:spPr>
           <a:xfrm>
-            <a:off x="548640" y="1234440"/>
-            <a:ext cx="10972800" cy="5303520"/>
+            <a:off x="502920" y="2194560"/>
+            <a:ext cx="2606039" cy="1097280"/>
+          </a:xfrm>
+          <a:prstGeom prst="rect">
+            <a:avLst/>
+          </a:prstGeom>
+          <a:noFill/>
+        </p:spPr>
+        <p:txBody>
+          <a:bodyPr wrap="none">
+            <a:spAutoFit/>
+          </a:bodyPr>
+          <a:lstStyle/>
+          <a:p>
+            <a:pPr algn="ctr">
+              <a:defRPr sz="5200" b="1">
+                <a:solidFill>
+                  <a:srgbClr val="F58220"/>
+                </a:solidFill>
+              </a:defRPr>
+            </a:pPr>
+            <a:r>
+              <a:t>8</a:t>
+            </a:r>
+          </a:p>
+        </p:txBody>
+      </p:sp>
+      <p:sp>
+        <p:nvSpPr>
+          <p:cNvPr id="6" name="TextBox 5"/>
+          <p:cNvSpPr txBox="1"/>
+          <p:nvPr/>
+        </p:nvSpPr>
+        <p:spPr>
+          <a:xfrm>
+            <a:off x="685800" y="3474720"/>
+            <a:ext cx="2240279" cy="1371600"/>
           </a:xfrm>
           <a:prstGeom prst="rect">
             <a:avLst/>
@@ -5929,92 +6761,78 @@
           </a:bodyPr>
           <a:lstStyle/>
           <a:p>
-            <a:pPr>
-              <a:spcAft>
-                <a:spcPts val="800"/>
-              </a:spcAft>
-              <a:defRPr sz="1500">
+            <a:pPr algn="ctr">
+              <a:defRPr sz="1700">
                 <a:solidFill>
                   <a:srgbClr val="1E293B"/>
                 </a:solidFill>
               </a:defRPr>
             </a:pPr>
             <a:r>
-              <a:t>Satu platform untuk seluruh operasional Corporate Secretary Bank Sumut.</a:t>
-            </a:r>
-          </a:p>
-          <a:p>
-            <a:pPr>
-              <a:spcAft>
-                <a:spcPts val="800"/>
-              </a:spcAft>
-              <a:defRPr sz="1500">
-                <a:solidFill>
-                  <a:srgbClr val="1E293B"/>
-                </a:solidFill>
-              </a:defRPr>
-            </a:pPr>
-            <a:r>
-              <a:t>Memorandum digital — upload PDF hingga keputusan final Direksi/Komisaris.</a:t>
-            </a:r>
-          </a:p>
-          <a:p>
-            <a:pPr>
-              <a:spcAft>
-                <a:spcPts val="800"/>
-              </a:spcAft>
-              <a:defRPr sz="1500">
-                <a:solidFill>
-                  <a:srgbClr val="1E293B"/>
-                </a:solidFill>
-              </a:defRPr>
-            </a:pPr>
-            <a:r>
-              <a:t>AI compliance review dengan referensi SMD &amp; regulasi OJK/BI.</a:t>
-            </a:r>
-          </a:p>
-          <a:p>
-            <a:pPr>
-              <a:spcAft>
-                <a:spcPts val="800"/>
-              </a:spcAft>
-              <a:defRPr sz="1500">
-                <a:solidFill>
-                  <a:srgbClr val="1E293B"/>
-                </a:solidFill>
-              </a:defRPr>
-            </a:pPr>
-            <a:r>
-              <a:t>Modul terintegrasi: Dashboard, Agenda, Rapat, Media, Knowledge, SLA, Laporan.</a:t>
-            </a:r>
-          </a:p>
-          <a:p>
-            <a:pPr>
-              <a:spcAft>
-                <a:spcPts val="800"/>
-              </a:spcAft>
-              <a:defRPr sz="1500">
-                <a:solidFill>
-                  <a:srgbClr val="1E293B"/>
-                </a:solidFill>
-              </a:defRPr>
-            </a:pPr>
-            <a:r>
-              <a:t>Tanda tangan digital &amp; notifikasi in-app di setiap tahap approval.</a:t>
-            </a:r>
-          </a:p>
-        </p:txBody>
-      </p:sp>
-      <p:sp>
-        <p:nvSpPr>
-          <p:cNvPr id="6" name="TextBox 5"/>
+              <a:t>Modul</a:t>
+            </a:r>
+            <a:br/>
+            <a:r>
+              <a:t>Operasional</a:t>
+            </a:r>
+          </a:p>
+        </p:txBody>
+      </p:sp>
+      <p:sp>
+        <p:nvSpPr>
+          <p:cNvPr id="7" name="Rounded Rectangle 6"/>
+          <p:cNvSpPr/>
+          <p:nvPr/>
+        </p:nvSpPr>
+        <p:spPr>
+          <a:xfrm>
+            <a:off x="3337559" y="1828800"/>
+            <a:ext cx="2606039" cy="3474720"/>
+          </a:xfrm>
+          <a:prstGeom prst="roundRect">
+            <a:avLst/>
+          </a:prstGeom>
+          <a:solidFill>
+            <a:srgbClr val="FFFFFF"/>
+          </a:solidFill>
+          <a:ln>
+            <a:solidFill>
+              <a:srgbClr val="E2E8F0"/>
+            </a:solidFill>
+          </a:ln>
+        </p:spPr>
+        <p:style>
+          <a:lnRef idx="1">
+            <a:schemeClr val="accent1"/>
+          </a:lnRef>
+          <a:fillRef idx="3">
+            <a:schemeClr val="accent1"/>
+          </a:fillRef>
+          <a:effectRef idx="2">
+            <a:schemeClr val="accent1"/>
+          </a:effectRef>
+          <a:fontRef idx="minor">
+            <a:schemeClr val="lt1"/>
+          </a:fontRef>
+        </p:style>
+        <p:txBody>
+          <a:bodyPr rtlCol="0" anchor="ctr"/>
+          <a:lstStyle/>
+          <a:p>
+            <a:pPr algn="ctr"/>
+          </a:p>
+        </p:txBody>
+      </p:sp>
+      <p:sp>
+        <p:nvSpPr>
+          <p:cNvPr id="8" name="TextBox 7"/>
           <p:cNvSpPr txBox="1"/>
           <p:nvPr/>
         </p:nvSpPr>
         <p:spPr>
           <a:xfrm>
-            <a:off x="457200" y="6400800"/>
-            <a:ext cx="11247120" cy="365760"/>
+            <a:off x="3337559" y="2194560"/>
+            <a:ext cx="2606039" cy="1097280"/>
           </a:xfrm>
           <a:prstGeom prst="rect">
             <a:avLst/>
@@ -6027,15 +6845,405 @@
           </a:bodyPr>
           <a:lstStyle/>
           <a:p>
+            <a:pPr algn="ctr">
+              <a:defRPr sz="5200" b="1">
+                <a:solidFill>
+                  <a:srgbClr val="F58220"/>
+                </a:solidFill>
+              </a:defRPr>
+            </a:pPr>
+            <a:r>
+              <a:t>7</a:t>
+            </a:r>
+          </a:p>
+        </p:txBody>
+      </p:sp>
+      <p:sp>
+        <p:nvSpPr>
+          <p:cNvPr id="9" name="TextBox 8"/>
+          <p:cNvSpPr txBox="1"/>
+          <p:nvPr/>
+        </p:nvSpPr>
+        <p:spPr>
+          <a:xfrm>
+            <a:off x="3520439" y="3474720"/>
+            <a:ext cx="2240279" cy="1371600"/>
+          </a:xfrm>
+          <a:prstGeom prst="rect">
+            <a:avLst/>
+          </a:prstGeom>
+          <a:noFill/>
+        </p:spPr>
+        <p:txBody>
+          <a:bodyPr wrap="square">
+            <a:spAutoFit/>
+          </a:bodyPr>
+          <a:lstStyle/>
+          <a:p>
+            <a:pPr algn="ctr">
+              <a:defRPr sz="1700">
+                <a:solidFill>
+                  <a:srgbClr val="1E293B"/>
+                </a:solidFill>
+              </a:defRPr>
+            </a:pPr>
+            <a:r>
+              <a:t>Tahap</a:t>
+            </a:r>
+            <a:br/>
+            <a:r>
+              <a:t>Persetujuan</a:t>
+            </a:r>
+          </a:p>
+        </p:txBody>
+      </p:sp>
+      <p:sp>
+        <p:nvSpPr>
+          <p:cNvPr id="10" name="Rounded Rectangle 9"/>
+          <p:cNvSpPr/>
+          <p:nvPr/>
+        </p:nvSpPr>
+        <p:spPr>
+          <a:xfrm>
+            <a:off x="6172199" y="1828800"/>
+            <a:ext cx="2606039" cy="3474720"/>
+          </a:xfrm>
+          <a:prstGeom prst="roundRect">
+            <a:avLst/>
+          </a:prstGeom>
+          <a:solidFill>
+            <a:srgbClr val="FFFFFF"/>
+          </a:solidFill>
+          <a:ln>
+            <a:solidFill>
+              <a:srgbClr val="E2E8F0"/>
+            </a:solidFill>
+          </a:ln>
+        </p:spPr>
+        <p:style>
+          <a:lnRef idx="1">
+            <a:schemeClr val="accent1"/>
+          </a:lnRef>
+          <a:fillRef idx="3">
+            <a:schemeClr val="accent1"/>
+          </a:fillRef>
+          <a:effectRef idx="2">
+            <a:schemeClr val="accent1"/>
+          </a:effectRef>
+          <a:fontRef idx="minor">
+            <a:schemeClr val="lt1"/>
+          </a:fontRef>
+        </p:style>
+        <p:txBody>
+          <a:bodyPr rtlCol="0" anchor="ctr"/>
+          <a:lstStyle/>
+          <a:p>
+            <a:pPr algn="ctr"/>
+          </a:p>
+        </p:txBody>
+      </p:sp>
+      <p:sp>
+        <p:nvSpPr>
+          <p:cNvPr id="11" name="TextBox 10"/>
+          <p:cNvSpPr txBox="1"/>
+          <p:nvPr/>
+        </p:nvSpPr>
+        <p:spPr>
+          <a:xfrm>
+            <a:off x="6172199" y="2194560"/>
+            <a:ext cx="2606039" cy="1097280"/>
+          </a:xfrm>
+          <a:prstGeom prst="rect">
+            <a:avLst/>
+          </a:prstGeom>
+          <a:noFill/>
+        </p:spPr>
+        <p:txBody>
+          <a:bodyPr wrap="none">
+            <a:spAutoFit/>
+          </a:bodyPr>
+          <a:lstStyle/>
+          <a:p>
+            <a:pPr algn="ctr">
+              <a:defRPr sz="5200" b="1">
+                <a:solidFill>
+                  <a:srgbClr val="F58220"/>
+                </a:solidFill>
+              </a:defRPr>
+            </a:pPr>
+            <a:r>
+              <a:t>7</a:t>
+            </a:r>
+          </a:p>
+        </p:txBody>
+      </p:sp>
+      <p:sp>
+        <p:nvSpPr>
+          <p:cNvPr id="12" name="TextBox 11"/>
+          <p:cNvSpPr txBox="1"/>
+          <p:nvPr/>
+        </p:nvSpPr>
+        <p:spPr>
+          <a:xfrm>
+            <a:off x="6355079" y="3474720"/>
+            <a:ext cx="2240279" cy="1371600"/>
+          </a:xfrm>
+          <a:prstGeom prst="rect">
+            <a:avLst/>
+          </a:prstGeom>
+          <a:noFill/>
+        </p:spPr>
+        <p:txBody>
+          <a:bodyPr wrap="square">
+            <a:spAutoFit/>
+          </a:bodyPr>
+          <a:lstStyle/>
+          <a:p>
+            <a:pPr algn="ctr">
+              <a:defRPr sz="1700">
+                <a:solidFill>
+                  <a:srgbClr val="1E293B"/>
+                </a:solidFill>
+              </a:defRPr>
+            </a:pPr>
+            <a:r>
+              <a:t>Level</a:t>
+            </a:r>
+            <a:br/>
+            <a:r>
+              <a:t>Pengguna</a:t>
+            </a:r>
+          </a:p>
+        </p:txBody>
+      </p:sp>
+      <p:sp>
+        <p:nvSpPr>
+          <p:cNvPr id="13" name="Rounded Rectangle 12"/>
+          <p:cNvSpPr/>
+          <p:nvPr/>
+        </p:nvSpPr>
+        <p:spPr>
+          <a:xfrm>
+            <a:off x="9006840" y="1828800"/>
+            <a:ext cx="2606039" cy="3474720"/>
+          </a:xfrm>
+          <a:prstGeom prst="roundRect">
+            <a:avLst/>
+          </a:prstGeom>
+          <a:solidFill>
+            <a:srgbClr val="FFFFFF"/>
+          </a:solidFill>
+          <a:ln>
+            <a:solidFill>
+              <a:srgbClr val="E2E8F0"/>
+            </a:solidFill>
+          </a:ln>
+        </p:spPr>
+        <p:style>
+          <a:lnRef idx="1">
+            <a:schemeClr val="accent1"/>
+          </a:lnRef>
+          <a:fillRef idx="3">
+            <a:schemeClr val="accent1"/>
+          </a:fillRef>
+          <a:effectRef idx="2">
+            <a:schemeClr val="accent1"/>
+          </a:effectRef>
+          <a:fontRef idx="minor">
+            <a:schemeClr val="lt1"/>
+          </a:fontRef>
+        </p:style>
+        <p:txBody>
+          <a:bodyPr rtlCol="0" anchor="ctr"/>
+          <a:lstStyle/>
+          <a:p>
+            <a:pPr algn="ctr"/>
+          </a:p>
+        </p:txBody>
+      </p:sp>
+      <p:sp>
+        <p:nvSpPr>
+          <p:cNvPr id="14" name="TextBox 13"/>
+          <p:cNvSpPr txBox="1"/>
+          <p:nvPr/>
+        </p:nvSpPr>
+        <p:spPr>
+          <a:xfrm>
+            <a:off x="9006840" y="2194560"/>
+            <a:ext cx="2606039" cy="1097280"/>
+          </a:xfrm>
+          <a:prstGeom prst="rect">
+            <a:avLst/>
+          </a:prstGeom>
+          <a:noFill/>
+        </p:spPr>
+        <p:txBody>
+          <a:bodyPr wrap="none">
+            <a:spAutoFit/>
+          </a:bodyPr>
+          <a:lstStyle/>
+          <a:p>
+            <a:pPr algn="ctr">
+              <a:defRPr sz="5200" b="1">
+                <a:solidFill>
+                  <a:srgbClr val="F58220"/>
+                </a:solidFill>
+              </a:defRPr>
+            </a:pPr>
+            <a:r>
+              <a:t>1</a:t>
+            </a:r>
+          </a:p>
+        </p:txBody>
+      </p:sp>
+      <p:sp>
+        <p:nvSpPr>
+          <p:cNvPr id="15" name="TextBox 14"/>
+          <p:cNvSpPr txBox="1"/>
+          <p:nvPr/>
+        </p:nvSpPr>
+        <p:spPr>
+          <a:xfrm>
+            <a:off x="9189719" y="3474720"/>
+            <a:ext cx="2240279" cy="1371600"/>
+          </a:xfrm>
+          <a:prstGeom prst="rect">
+            <a:avLst/>
+          </a:prstGeom>
+          <a:noFill/>
+        </p:spPr>
+        <p:txBody>
+          <a:bodyPr wrap="square">
+            <a:spAutoFit/>
+          </a:bodyPr>
+          <a:lstStyle/>
+          <a:p>
+            <a:pPr algn="ctr">
+              <a:defRPr sz="1700">
+                <a:solidFill>
+                  <a:srgbClr val="1E293B"/>
+                </a:solidFill>
+              </a:defRPr>
+            </a:pPr>
+            <a:r>
+              <a:t>Platform</a:t>
+            </a:r>
+            <a:br/>
+            <a:r>
+              <a:t>Terpadu</a:t>
+            </a:r>
+          </a:p>
+        </p:txBody>
+      </p:sp>
+      <p:sp>
+        <p:nvSpPr>
+          <p:cNvPr id="16" name="Rectangle 15"/>
+          <p:cNvSpPr/>
+          <p:nvPr/>
+        </p:nvSpPr>
+        <p:spPr>
+          <a:xfrm>
+            <a:off x="0" y="6446520"/>
+            <a:ext cx="12191695" cy="411480"/>
+          </a:xfrm>
+          <a:prstGeom prst="rect">
+            <a:avLst/>
+          </a:prstGeom>
+          <a:solidFill>
+            <a:srgbClr val="0C2340"/>
+          </a:solidFill>
+          <a:ln>
+            <a:noFill/>
+          </a:ln>
+        </p:spPr>
+        <p:style>
+          <a:lnRef idx="1">
+            <a:schemeClr val="accent1"/>
+          </a:lnRef>
+          <a:fillRef idx="3">
+            <a:schemeClr val="accent1"/>
+          </a:fillRef>
+          <a:effectRef idx="2">
+            <a:schemeClr val="accent1"/>
+          </a:effectRef>
+          <a:fontRef idx="minor">
+            <a:schemeClr val="lt1"/>
+          </a:fontRef>
+        </p:style>
+        <p:txBody>
+          <a:bodyPr rtlCol="0" anchor="ctr"/>
+          <a:lstStyle/>
+          <a:p>
+            <a:pPr algn="ctr"/>
+          </a:p>
+        </p:txBody>
+      </p:sp>
+      <p:sp>
+        <p:nvSpPr>
+          <p:cNvPr id="17" name="TextBox 16"/>
+          <p:cNvSpPr txBox="1"/>
+          <p:nvPr/>
+        </p:nvSpPr>
+        <p:spPr>
+          <a:xfrm>
+            <a:off x="457200" y="6492240"/>
+            <a:ext cx="5486400" cy="320040"/>
+          </a:xfrm>
+          <a:prstGeom prst="rect">
+            <a:avLst/>
+          </a:prstGeom>
+          <a:noFill/>
+        </p:spPr>
+        <p:txBody>
+          <a:bodyPr wrap="none">
+            <a:spAutoFit/>
+          </a:bodyPr>
+          <a:lstStyle/>
+          <a:p>
+            <a:pPr>
+              <a:defRPr sz="1100" b="1">
+                <a:solidFill>
+                  <a:srgbClr val="F58220"/>
+                </a:solidFill>
+              </a:defRPr>
+            </a:pPr>
+            <a:r>
+              <a:t>CorpSec Bank Sumut</a:t>
+            </a:r>
+          </a:p>
+        </p:txBody>
+      </p:sp>
+      <p:sp>
+        <p:nvSpPr>
+          <p:cNvPr id="18" name="TextBox 17"/>
+          <p:cNvSpPr txBox="1"/>
+          <p:nvPr/>
+        </p:nvSpPr>
+        <p:spPr>
+          <a:xfrm>
+            <a:off x="10515600" y="6492240"/>
+            <a:ext cx="1371600" cy="320040"/>
+          </a:xfrm>
+          <a:prstGeom prst="rect">
+            <a:avLst/>
+          </a:prstGeom>
+          <a:noFill/>
+        </p:spPr>
+        <p:txBody>
+          <a:bodyPr wrap="none">
+            <a:spAutoFit/>
+          </a:bodyPr>
+          <a:lstStyle/>
+          <a:p>
             <a:pPr algn="r">
-              <a:defRPr sz="900">
-                <a:solidFill>
-                  <a:srgbClr val="64748B"/>
-                </a:solidFill>
-              </a:defRPr>
-            </a:pPr>
-            <a:r>
-              <a:t>CorpSec Bank Sumut — PRD Discovery v0.1</a:t>
+              <a:defRPr sz="1100">
+                <a:solidFill>
+                  <a:srgbClr val="FFFFFF"/>
+                </a:solidFill>
+              </a:defRPr>
+            </a:pPr>
+            <a:r>
+              <a:t>3</a:t>
             </a:r>
           </a:p>
         </p:txBody>
@@ -6054,7 +7262,7 @@
     <p:bg>
       <p:bgPr>
         <a:solidFill>
-          <a:srgbClr val="FFFFFF"/>
+          <a:srgbClr val="F8FAFC"/>
         </a:solidFill>
         <a:effectLst/>
       </p:bgPr>
@@ -6075,7 +7283,7 @@
         <p:spPr>
           <a:xfrm>
             <a:off x="0" y="0"/>
-            <a:ext cx="12191695" cy="73152"/>
+            <a:ext cx="164592" cy="6446520"/>
           </a:xfrm>
           <a:prstGeom prst="rect">
             <a:avLst/>
@@ -6117,8 +7325,8 @@
         </p:nvSpPr>
         <p:spPr>
           <a:xfrm>
-            <a:off x="548640" y="320040"/>
-            <a:ext cx="10972800" cy="640080"/>
+            <a:off x="502920" y="320040"/>
+            <a:ext cx="11155680" cy="1005840"/>
           </a:xfrm>
           <a:prstGeom prst="rect">
             <a:avLst/>
@@ -6132,14 +7340,718 @@
           <a:lstStyle/>
           <a:p>
             <a:pPr>
-              <a:defRPr sz="2800" b="1">
+              <a:defRPr sz="3400" b="1">
                 <a:solidFill>
                   <a:srgbClr val="0C2340"/>
                 </a:solidFill>
               </a:defRPr>
             </a:pPr>
             <a:r>
-              <a:t>Arsitektur Teknologi</a:t>
+              <a:t>Fitur Utama Sistem</a:t>
+            </a:r>
+          </a:p>
+        </p:txBody>
+      </p:sp>
+      <p:sp>
+        <p:nvSpPr>
+          <p:cNvPr id="4" name="Rounded Rectangle 3"/>
+          <p:cNvSpPr/>
+          <p:nvPr/>
+        </p:nvSpPr>
+        <p:spPr>
+          <a:xfrm>
+            <a:off x="502920" y="1417320"/>
+            <a:ext cx="5394960" cy="4663440"/>
+          </a:xfrm>
+          <a:prstGeom prst="roundRect">
+            <a:avLst/>
+          </a:prstGeom>
+          <a:solidFill>
+            <a:srgbClr val="FFFFFF"/>
+          </a:solidFill>
+          <a:ln>
+            <a:solidFill>
+              <a:srgbClr val="E2E8F0"/>
+            </a:solidFill>
+          </a:ln>
+        </p:spPr>
+        <p:style>
+          <a:lnRef idx="1">
+            <a:schemeClr val="accent1"/>
+          </a:lnRef>
+          <a:fillRef idx="3">
+            <a:schemeClr val="accent1"/>
+          </a:fillRef>
+          <a:effectRef idx="2">
+            <a:schemeClr val="accent1"/>
+          </a:effectRef>
+          <a:fontRef idx="minor">
+            <a:schemeClr val="lt1"/>
+          </a:fontRef>
+        </p:style>
+        <p:txBody>
+          <a:bodyPr rtlCol="0" anchor="ctr"/>
+          <a:lstStyle/>
+          <a:p>
+            <a:pPr algn="ctr"/>
+          </a:p>
+        </p:txBody>
+      </p:sp>
+      <p:sp>
+        <p:nvSpPr>
+          <p:cNvPr id="5" name="Rectangle 4"/>
+          <p:cNvSpPr/>
+          <p:nvPr/>
+        </p:nvSpPr>
+        <p:spPr>
+          <a:xfrm>
+            <a:off x="502920" y="1417320"/>
+            <a:ext cx="5394960" cy="502920"/>
+          </a:xfrm>
+          <a:prstGeom prst="rect">
+            <a:avLst/>
+          </a:prstGeom>
+          <a:solidFill>
+            <a:srgbClr val="0C2340"/>
+          </a:solidFill>
+          <a:ln>
+            <a:noFill/>
+          </a:ln>
+        </p:spPr>
+        <p:style>
+          <a:lnRef idx="1">
+            <a:schemeClr val="accent1"/>
+          </a:lnRef>
+          <a:fillRef idx="3">
+            <a:schemeClr val="accent1"/>
+          </a:fillRef>
+          <a:effectRef idx="2">
+            <a:schemeClr val="accent1"/>
+          </a:effectRef>
+          <a:fontRef idx="minor">
+            <a:schemeClr val="lt1"/>
+          </a:fontRef>
+        </p:style>
+        <p:txBody>
+          <a:bodyPr rtlCol="0" anchor="ctr"/>
+          <a:lstStyle/>
+          <a:p>
+            <a:pPr algn="ctr"/>
+          </a:p>
+        </p:txBody>
+      </p:sp>
+      <p:sp>
+        <p:nvSpPr>
+          <p:cNvPr id="6" name="TextBox 5"/>
+          <p:cNvSpPr txBox="1"/>
+          <p:nvPr/>
+        </p:nvSpPr>
+        <p:spPr>
+          <a:xfrm>
+            <a:off x="731520" y="1481328"/>
+            <a:ext cx="4937760" cy="411480"/>
+          </a:xfrm>
+          <a:prstGeom prst="rect">
+            <a:avLst/>
+          </a:prstGeom>
+          <a:noFill/>
+        </p:spPr>
+        <p:txBody>
+          <a:bodyPr wrap="none">
+            <a:spAutoFit/>
+          </a:bodyPr>
+          <a:lstStyle/>
+          <a:p>
+            <a:pPr>
+              <a:defRPr sz="1800" b="1">
+                <a:solidFill>
+                  <a:srgbClr val="FFFFFF"/>
+                </a:solidFill>
+              </a:defRPr>
+            </a:pPr>
+            <a:r>
+              <a:t>Yang Bisa Dilakukan CorpSec</a:t>
+            </a:r>
+          </a:p>
+        </p:txBody>
+      </p:sp>
+      <p:sp>
+        <p:nvSpPr>
+          <p:cNvPr id="7" name="TextBox 6"/>
+          <p:cNvSpPr txBox="1"/>
+          <p:nvPr/>
+        </p:nvSpPr>
+        <p:spPr>
+          <a:xfrm>
+            <a:off x="777240" y="2103120"/>
+            <a:ext cx="4846320" cy="4754880"/>
+          </a:xfrm>
+          <a:prstGeom prst="rect">
+            <a:avLst/>
+          </a:prstGeom>
+          <a:noFill/>
+        </p:spPr>
+        <p:txBody>
+          <a:bodyPr wrap="square">
+            <a:spAutoFit/>
+          </a:bodyPr>
+          <a:lstStyle/>
+          <a:p>
+            <a:pPr>
+              <a:lnSpc>
+                <a:spcPct val="125000"/>
+              </a:lnSpc>
+              <a:spcAft>
+                <a:spcPts val="1400"/>
+              </a:spcAft>
+              <a:defRPr sz="1800">
+                <a:solidFill>
+                  <a:srgbClr val="1E293B"/>
+                </a:solidFill>
+              </a:defRPr>
+            </a:pPr>
+            <a:r>
+              <a:t>Lihat ringkasan agenda &amp; memorandum di dashboard</a:t>
+            </a:r>
+          </a:p>
+          <a:p>
+            <a:pPr>
+              <a:lnSpc>
+                <a:spcPct val="125000"/>
+              </a:lnSpc>
+              <a:spcAft>
+                <a:spcPts val="1400"/>
+              </a:spcAft>
+              <a:defRPr sz="1800">
+                <a:solidFill>
+                  <a:srgbClr val="1E293B"/>
+                </a:solidFill>
+              </a:defRPr>
+            </a:pPr>
+            <a:r>
+              <a:t>Terima dan tinjau memorandum dari divisi</a:t>
+            </a:r>
+          </a:p>
+          <a:p>
+            <a:pPr>
+              <a:lnSpc>
+                <a:spcPct val="125000"/>
+              </a:lnSpc>
+              <a:spcAft>
+                <a:spcPts val="1400"/>
+              </a:spcAft>
+              <a:defRPr sz="1800">
+                <a:solidFill>
+                  <a:srgbClr val="1E293B"/>
+                </a:solidFill>
+              </a:defRPr>
+            </a:pPr>
+            <a:r>
+              <a:t>Kelola jadwal kegiatan Direksi</a:t>
+            </a:r>
+          </a:p>
+          <a:p>
+            <a:pPr>
+              <a:lnSpc>
+                <a:spcPct val="125000"/>
+              </a:lnSpc>
+              <a:spcAft>
+                <a:spcPts val="1400"/>
+              </a:spcAft>
+              <a:defRPr sz="1800">
+                <a:solidFill>
+                  <a:srgbClr val="1E293B"/>
+                </a:solidFill>
+              </a:defRPr>
+            </a:pPr>
+            <a:r>
+              <a:t>Pantau SLA dan laporan kinerja</a:t>
+            </a:r>
+          </a:p>
+          <a:p>
+            <a:pPr>
+              <a:lnSpc>
+                <a:spcPct val="125000"/>
+              </a:lnSpc>
+              <a:spcAft>
+                <a:spcPts val="1400"/>
+              </a:spcAft>
+              <a:defRPr sz="1800">
+                <a:solidFill>
+                  <a:srgbClr val="1E293B"/>
+                </a:solidFill>
+              </a:defRPr>
+            </a:pPr>
+            <a:r>
+              <a:t>Cek berita dan regulasi terkait bank</a:t>
+            </a:r>
+          </a:p>
+        </p:txBody>
+      </p:sp>
+      <p:sp>
+        <p:nvSpPr>
+          <p:cNvPr id="8" name="Rounded Rectangle 7"/>
+          <p:cNvSpPr/>
+          <p:nvPr/>
+        </p:nvSpPr>
+        <p:spPr>
+          <a:xfrm>
+            <a:off x="6263640" y="1417320"/>
+            <a:ext cx="5394960" cy="4663440"/>
+          </a:xfrm>
+          <a:prstGeom prst="roundRect">
+            <a:avLst/>
+          </a:prstGeom>
+          <a:solidFill>
+            <a:srgbClr val="FFFFFF"/>
+          </a:solidFill>
+          <a:ln>
+            <a:solidFill>
+              <a:srgbClr val="E2E8F0"/>
+            </a:solidFill>
+          </a:ln>
+        </p:spPr>
+        <p:style>
+          <a:lnRef idx="1">
+            <a:schemeClr val="accent1"/>
+          </a:lnRef>
+          <a:fillRef idx="3">
+            <a:schemeClr val="accent1"/>
+          </a:fillRef>
+          <a:effectRef idx="2">
+            <a:schemeClr val="accent1"/>
+          </a:effectRef>
+          <a:fontRef idx="minor">
+            <a:schemeClr val="lt1"/>
+          </a:fontRef>
+        </p:style>
+        <p:txBody>
+          <a:bodyPr rtlCol="0" anchor="ctr"/>
+          <a:lstStyle/>
+          <a:p>
+            <a:pPr algn="ctr"/>
+          </a:p>
+        </p:txBody>
+      </p:sp>
+      <p:sp>
+        <p:nvSpPr>
+          <p:cNvPr id="9" name="Rectangle 8"/>
+          <p:cNvSpPr/>
+          <p:nvPr/>
+        </p:nvSpPr>
+        <p:spPr>
+          <a:xfrm>
+            <a:off x="6263640" y="1417320"/>
+            <a:ext cx="5394960" cy="502920"/>
+          </a:xfrm>
+          <a:prstGeom prst="rect">
+            <a:avLst/>
+          </a:prstGeom>
+          <a:solidFill>
+            <a:srgbClr val="0C2340"/>
+          </a:solidFill>
+          <a:ln>
+            <a:noFill/>
+          </a:ln>
+        </p:spPr>
+        <p:style>
+          <a:lnRef idx="1">
+            <a:schemeClr val="accent1"/>
+          </a:lnRef>
+          <a:fillRef idx="3">
+            <a:schemeClr val="accent1"/>
+          </a:fillRef>
+          <a:effectRef idx="2">
+            <a:schemeClr val="accent1"/>
+          </a:effectRef>
+          <a:fontRef idx="minor">
+            <a:schemeClr val="lt1"/>
+          </a:fontRef>
+        </p:style>
+        <p:txBody>
+          <a:bodyPr rtlCol="0" anchor="ctr"/>
+          <a:lstStyle/>
+          <a:p>
+            <a:pPr algn="ctr"/>
+          </a:p>
+        </p:txBody>
+      </p:sp>
+      <p:sp>
+        <p:nvSpPr>
+          <p:cNvPr id="10" name="TextBox 9"/>
+          <p:cNvSpPr txBox="1"/>
+          <p:nvPr/>
+        </p:nvSpPr>
+        <p:spPr>
+          <a:xfrm>
+            <a:off x="6492240" y="1481328"/>
+            <a:ext cx="4937760" cy="411480"/>
+          </a:xfrm>
+          <a:prstGeom prst="rect">
+            <a:avLst/>
+          </a:prstGeom>
+          <a:noFill/>
+        </p:spPr>
+        <p:txBody>
+          <a:bodyPr wrap="none">
+            <a:spAutoFit/>
+          </a:bodyPr>
+          <a:lstStyle/>
+          <a:p>
+            <a:pPr>
+              <a:defRPr sz="1800" b="1">
+                <a:solidFill>
+                  <a:srgbClr val="FFFFFF"/>
+                </a:solidFill>
+              </a:defRPr>
+            </a:pPr>
+            <a:r>
+              <a:t>Yang Bisa Dilakukan Divisi Lain</a:t>
+            </a:r>
+          </a:p>
+        </p:txBody>
+      </p:sp>
+      <p:sp>
+        <p:nvSpPr>
+          <p:cNvPr id="11" name="TextBox 10"/>
+          <p:cNvSpPr txBox="1"/>
+          <p:nvPr/>
+        </p:nvSpPr>
+        <p:spPr>
+          <a:xfrm>
+            <a:off x="6537959" y="2103120"/>
+            <a:ext cx="4846320" cy="4754880"/>
+          </a:xfrm>
+          <a:prstGeom prst="rect">
+            <a:avLst/>
+          </a:prstGeom>
+          <a:noFill/>
+        </p:spPr>
+        <p:txBody>
+          <a:bodyPr wrap="square">
+            <a:spAutoFit/>
+          </a:bodyPr>
+          <a:lstStyle/>
+          <a:p>
+            <a:pPr>
+              <a:lnSpc>
+                <a:spcPct val="125000"/>
+              </a:lnSpc>
+              <a:spcAft>
+                <a:spcPts val="1400"/>
+              </a:spcAft>
+              <a:defRPr sz="1800">
+                <a:solidFill>
+                  <a:srgbClr val="1E293B"/>
+                </a:solidFill>
+              </a:defRPr>
+            </a:pPr>
+            <a:r>
+              <a:t>Pengusul: kirim memorandum PDF</a:t>
+            </a:r>
+          </a:p>
+          <a:p>
+            <a:pPr>
+              <a:lnSpc>
+                <a:spcPct val="125000"/>
+              </a:lnSpc>
+              <a:spcAft>
+                <a:spcPts val="1400"/>
+              </a:spcAft>
+              <a:defRPr sz="1800">
+                <a:solidFill>
+                  <a:srgbClr val="1E293B"/>
+                </a:solidFill>
+              </a:defRPr>
+            </a:pPr>
+            <a:r>
+              <a:t>Pimpinan Bidang: setujui atau tolak</a:t>
+            </a:r>
+          </a:p>
+          <a:p>
+            <a:pPr>
+              <a:lnSpc>
+                <a:spcPct val="125000"/>
+              </a:lnSpc>
+              <a:spcAft>
+                <a:spcPts val="1400"/>
+              </a:spcAft>
+              <a:defRPr sz="1800">
+                <a:solidFill>
+                  <a:srgbClr val="1E293B"/>
+                </a:solidFill>
+              </a:defRPr>
+            </a:pPr>
+            <a:r>
+              <a:t>Sekretaris: teruskan ke Direksi/Komisaris</a:t>
+            </a:r>
+          </a:p>
+          <a:p>
+            <a:pPr>
+              <a:lnSpc>
+                <a:spcPct val="125000"/>
+              </a:lnSpc>
+              <a:spcAft>
+                <a:spcPts val="1400"/>
+              </a:spcAft>
+              <a:defRPr sz="1800">
+                <a:solidFill>
+                  <a:srgbClr val="1E293B"/>
+                </a:solidFill>
+              </a:defRPr>
+            </a:pPr>
+            <a:r>
+              <a:t>Direksi &amp; Komisaris: beri keputusan</a:t>
+            </a:r>
+          </a:p>
+          <a:p>
+            <a:pPr>
+              <a:lnSpc>
+                <a:spcPct val="125000"/>
+              </a:lnSpc>
+              <a:spcAft>
+                <a:spcPts val="1400"/>
+              </a:spcAft>
+              <a:defRPr sz="1800">
+                <a:solidFill>
+                  <a:srgbClr val="1E293B"/>
+                </a:solidFill>
+              </a:defRPr>
+            </a:pPr>
+            <a:r>
+              <a:t>Semua pihak bisa cek status dokumen</a:t>
+            </a:r>
+          </a:p>
+        </p:txBody>
+      </p:sp>
+      <p:sp>
+        <p:nvSpPr>
+          <p:cNvPr id="12" name="Rectangle 11"/>
+          <p:cNvSpPr/>
+          <p:nvPr/>
+        </p:nvSpPr>
+        <p:spPr>
+          <a:xfrm>
+            <a:off x="0" y="6446520"/>
+            <a:ext cx="12191695" cy="411480"/>
+          </a:xfrm>
+          <a:prstGeom prst="rect">
+            <a:avLst/>
+          </a:prstGeom>
+          <a:solidFill>
+            <a:srgbClr val="0C2340"/>
+          </a:solidFill>
+          <a:ln>
+            <a:noFill/>
+          </a:ln>
+        </p:spPr>
+        <p:style>
+          <a:lnRef idx="1">
+            <a:schemeClr val="accent1"/>
+          </a:lnRef>
+          <a:fillRef idx="3">
+            <a:schemeClr val="accent1"/>
+          </a:fillRef>
+          <a:effectRef idx="2">
+            <a:schemeClr val="accent1"/>
+          </a:effectRef>
+          <a:fontRef idx="minor">
+            <a:schemeClr val="lt1"/>
+          </a:fontRef>
+        </p:style>
+        <p:txBody>
+          <a:bodyPr rtlCol="0" anchor="ctr"/>
+          <a:lstStyle/>
+          <a:p>
+            <a:pPr algn="ctr"/>
+          </a:p>
+        </p:txBody>
+      </p:sp>
+      <p:sp>
+        <p:nvSpPr>
+          <p:cNvPr id="13" name="TextBox 12"/>
+          <p:cNvSpPr txBox="1"/>
+          <p:nvPr/>
+        </p:nvSpPr>
+        <p:spPr>
+          <a:xfrm>
+            <a:off x="457200" y="6492240"/>
+            <a:ext cx="5486400" cy="320040"/>
+          </a:xfrm>
+          <a:prstGeom prst="rect">
+            <a:avLst/>
+          </a:prstGeom>
+          <a:noFill/>
+        </p:spPr>
+        <p:txBody>
+          <a:bodyPr wrap="none">
+            <a:spAutoFit/>
+          </a:bodyPr>
+          <a:lstStyle/>
+          <a:p>
+            <a:pPr>
+              <a:defRPr sz="1100" b="1">
+                <a:solidFill>
+                  <a:srgbClr val="F58220"/>
+                </a:solidFill>
+              </a:defRPr>
+            </a:pPr>
+            <a:r>
+              <a:t>CorpSec Bank Sumut</a:t>
+            </a:r>
+          </a:p>
+        </p:txBody>
+      </p:sp>
+      <p:sp>
+        <p:nvSpPr>
+          <p:cNvPr id="14" name="TextBox 13"/>
+          <p:cNvSpPr txBox="1"/>
+          <p:nvPr/>
+        </p:nvSpPr>
+        <p:spPr>
+          <a:xfrm>
+            <a:off x="10515600" y="6492240"/>
+            <a:ext cx="1371600" cy="320040"/>
+          </a:xfrm>
+          <a:prstGeom prst="rect">
+            <a:avLst/>
+          </a:prstGeom>
+          <a:noFill/>
+        </p:spPr>
+        <p:txBody>
+          <a:bodyPr wrap="none">
+            <a:spAutoFit/>
+          </a:bodyPr>
+          <a:lstStyle/>
+          <a:p>
+            <a:pPr algn="r">
+              <a:defRPr sz="1100">
+                <a:solidFill>
+                  <a:srgbClr val="FFFFFF"/>
+                </a:solidFill>
+              </a:defRPr>
+            </a:pPr>
+            <a:r>
+              <a:t>4</a:t>
+            </a:r>
+          </a:p>
+        </p:txBody>
+      </p:sp>
+    </p:spTree>
+  </p:cSld>
+  <p:clrMapOvr>
+    <a:masterClrMapping/>
+  </p:clrMapOvr>
+</p:sld>
+</file>
+
+<file path=ppt/slides/slide5.xml><?xml version="1.0" encoding="utf-8"?>
+<p:sld xmlns:a="http://schemas.openxmlformats.org/drawingml/2006/main" xmlns:p="http://schemas.openxmlformats.org/presentationml/2006/main" xmlns:r="http://schemas.openxmlformats.org/officeDocument/2006/relationships">
+  <p:cSld>
+    <p:bg>
+      <p:bgPr>
+        <a:solidFill>
+          <a:srgbClr val="F8FAFC"/>
+        </a:solidFill>
+        <a:effectLst/>
+      </p:bgPr>
+    </p:bg>
+    <p:spTree>
+      <p:nvGrpSpPr>
+        <p:cNvPr id="1" name=""/>
+        <p:cNvGrpSpPr/>
+        <p:nvPr/>
+      </p:nvGrpSpPr>
+      <p:grpSpPr/>
+      <p:sp>
+        <p:nvSpPr>
+          <p:cNvPr id="2" name="Rectangle 1"/>
+          <p:cNvSpPr/>
+          <p:nvPr/>
+        </p:nvSpPr>
+        <p:spPr>
+          <a:xfrm>
+            <a:off x="0" y="0"/>
+            <a:ext cx="164592" cy="6446520"/>
+          </a:xfrm>
+          <a:prstGeom prst="rect">
+            <a:avLst/>
+          </a:prstGeom>
+          <a:solidFill>
+            <a:srgbClr val="F58220"/>
+          </a:solidFill>
+          <a:ln>
+            <a:noFill/>
+          </a:ln>
+        </p:spPr>
+        <p:style>
+          <a:lnRef idx="1">
+            <a:schemeClr val="accent1"/>
+          </a:lnRef>
+          <a:fillRef idx="3">
+            <a:schemeClr val="accent1"/>
+          </a:fillRef>
+          <a:effectRef idx="2">
+            <a:schemeClr val="accent1"/>
+          </a:effectRef>
+          <a:fontRef idx="minor">
+            <a:schemeClr val="lt1"/>
+          </a:fontRef>
+        </p:style>
+        <p:txBody>
+          <a:bodyPr rtlCol="0" anchor="ctr"/>
+          <a:lstStyle/>
+          <a:p>
+            <a:pPr algn="ctr"/>
+          </a:p>
+        </p:txBody>
+      </p:sp>
+      <p:sp>
+        <p:nvSpPr>
+          <p:cNvPr id="3" name="TextBox 2"/>
+          <p:cNvSpPr txBox="1"/>
+          <p:nvPr/>
+        </p:nvSpPr>
+        <p:spPr>
+          <a:xfrm>
+            <a:off x="502920" y="320040"/>
+            <a:ext cx="11155680" cy="1005840"/>
+          </a:xfrm>
+          <a:prstGeom prst="rect">
+            <a:avLst/>
+          </a:prstGeom>
+          <a:noFill/>
+        </p:spPr>
+        <p:txBody>
+          <a:bodyPr wrap="none">
+            <a:spAutoFit/>
+          </a:bodyPr>
+          <a:lstStyle/>
+          <a:p>
+            <a:pPr>
+              <a:defRPr sz="3400" b="1">
+                <a:solidFill>
+                  <a:srgbClr val="0C2340"/>
+                </a:solidFill>
+              </a:defRPr>
+            </a:pPr>
+            <a:r>
+              <a:t>Menu &amp; Halaman Sistem</a:t>
+            </a:r>
+          </a:p>
+          <a:p>
+            <a:pPr>
+              <a:spcBef>
+                <a:spcPts val="600"/>
+              </a:spcBef>
+              <a:defRPr sz="1700">
+                <a:solidFill>
+                  <a:srgbClr val="64748B"/>
+                </a:solidFill>
+              </a:defRPr>
+            </a:pPr>
+            <a:r>
+              <a:t>Ringkasan modul yang tersedia di website</a:t>
             </a:r>
           </a:p>
         </p:txBody>
@@ -6153,8 +8065,8 @@
           <p:nvPr/>
         </p:nvGraphicFramePr>
         <p:xfrm>
-          <a:off x="457200" y="1143000"/>
-          <a:ext cx="11247120" cy="2688336"/>
+          <a:off x="502920" y="1508760"/>
+          <a:ext cx="11155680" cy="4023360"/>
         </p:xfrm>
         <a:graphic>
           <a:graphicData uri="http://schemas.openxmlformats.org/drawingml/2006/table">
@@ -6163,25 +8075,25 @@
                 <a:tableStyleId>{5C22544A-7EE6-4342-B048-85BDC9FD1C3A}</a:tableStyleId>
               </a:tblPr>
               <a:tblGrid>
-                <a:gridCol w="3749040"/>
-                <a:gridCol w="3749040"/>
-                <a:gridCol w="3749040"/>
+                <a:gridCol w="3718560"/>
+                <a:gridCol w="3718560"/>
+                <a:gridCol w="3718560"/>
               </a:tblGrid>
-              <a:tr h="384048">
+              <a:tr h="502920">
                 <a:tc>
                   <a:txBody>
                     <a:bodyPr/>
                     <a:lstStyle/>
                     <a:p>
                       <a:pPr>
-                        <a:defRPr b="1" sz="1100">
+                        <a:defRPr b="1" sz="1500">
                           <a:solidFill>
                             <a:srgbClr val="FFFFFF"/>
                           </a:solidFill>
                         </a:defRPr>
                       </a:pPr>
                       <a:r>
-                        <a:t>Layer</a:t>
+                        <a:t>Menu</a:t>
                       </a:r>
                     </a:p>
                   </a:txBody>
@@ -6197,14 +8109,14 @@
                     <a:lstStyle/>
                     <a:p>
                       <a:pPr>
-                        <a:defRPr b="1" sz="1100">
+                        <a:defRPr b="1" sz="1500">
                           <a:solidFill>
                             <a:srgbClr val="FFFFFF"/>
                           </a:solidFill>
                         </a:defRPr>
                       </a:pPr>
                       <a:r>
-                        <a:t>Teknologi</a:t>
+                        <a:t>Alamat</a:t>
                       </a:r>
                     </a:p>
                   </a:txBody>
@@ -6220,14 +8132,14 @@
                     <a:lstStyle/>
                     <a:p>
                       <a:pPr>
-                        <a:defRPr b="1" sz="1100">
+                        <a:defRPr b="1" sz="1500">
                           <a:solidFill>
                             <a:srgbClr val="FFFFFF"/>
                           </a:solidFill>
                         </a:defRPr>
                       </a:pPr>
                       <a:r>
-                        <a:t>Fungsi</a:t>
+                        <a:t>Kegunaan</a:t>
                       </a:r>
                     </a:p>
                   </a:txBody>
@@ -6238,641 +8150,14 @@
                   </a:tcPr>
                 </a:tc>
               </a:tr>
-              <a:tr h="384048">
+              <a:tr h="502920">
                 <a:tc>
                   <a:txBody>
                     <a:bodyPr/>
                     <a:lstStyle/>
                     <a:p>
                       <a:pPr>
-                        <a:defRPr sz="1000">
-                          <a:solidFill>
-                            <a:srgbClr val="1E293B"/>
-                          </a:solidFill>
-                        </a:defRPr>
-                      </a:pPr>
-                      <a:r>
-                        <a:t>Frontend</a:t>
-                      </a:r>
-                    </a:p>
-                  </a:txBody>
-                  <a:tcPr/>
-                </a:tc>
-                <a:tc>
-                  <a:txBody>
-                    <a:bodyPr/>
-                    <a:lstStyle/>
-                    <a:p>
-                      <a:pPr>
-                        <a:defRPr sz="1000">
-                          <a:solidFill>
-                            <a:srgbClr val="1E293B"/>
-                          </a:solidFill>
-                        </a:defRPr>
-                      </a:pPr>
-                      <a:r>
-                        <a:t>Next.js 16 + React 19</a:t>
-                      </a:r>
-                    </a:p>
-                  </a:txBody>
-                  <a:tcPr/>
-                </a:tc>
-                <a:tc>
-                  <a:txBody>
-                    <a:bodyPr/>
-                    <a:lstStyle/>
-                    <a:p>
-                      <a:pPr>
-                        <a:defRPr sz="1000">
-                          <a:solidFill>
-                            <a:srgbClr val="1E293B"/>
-                          </a:solidFill>
-                        </a:defRPr>
-                      </a:pPr>
-                      <a:r>
-                        <a:t>App Router, UI responsif</a:t>
-                      </a:r>
-                    </a:p>
-                  </a:txBody>
-                  <a:tcPr/>
-                </a:tc>
-              </a:tr>
-              <a:tr h="384048">
-                <a:tc>
-                  <a:txBody>
-                    <a:bodyPr/>
-                    <a:lstStyle/>
-                    <a:p>
-                      <a:pPr>
-                        <a:defRPr sz="1000">
-                          <a:solidFill>
-                            <a:srgbClr val="1E293B"/>
-                          </a:solidFill>
-                        </a:defRPr>
-                      </a:pPr>
-                      <a:r>
-                        <a:t>Database</a:t>
-                      </a:r>
-                    </a:p>
-                  </a:txBody>
-                  <a:tcPr>
-                    <a:solidFill>
-                      <a:srgbClr val="F4F6F9"/>
-                    </a:solidFill>
-                  </a:tcPr>
-                </a:tc>
-                <a:tc>
-                  <a:txBody>
-                    <a:bodyPr/>
-                    <a:lstStyle/>
-                    <a:p>
-                      <a:pPr>
-                        <a:defRPr sz="1000">
-                          <a:solidFill>
-                            <a:srgbClr val="1E293B"/>
-                          </a:solidFill>
-                        </a:defRPr>
-                      </a:pPr>
-                      <a:r>
-                        <a:t>SQLite + Drizzle ORM</a:t>
-                      </a:r>
-                    </a:p>
-                  </a:txBody>
-                  <a:tcPr>
-                    <a:solidFill>
-                      <a:srgbClr val="F4F6F9"/>
-                    </a:solidFill>
-                  </a:tcPr>
-                </a:tc>
-                <a:tc>
-                  <a:txBody>
-                    <a:bodyPr/>
-                    <a:lstStyle/>
-                    <a:p>
-                      <a:pPr>
-                        <a:defRPr sz="1000">
-                          <a:solidFill>
-                            <a:srgbClr val="1E293B"/>
-                          </a:solidFill>
-                        </a:defRPr>
-                      </a:pPr>
-                      <a:r>
-                        <a:t>11 tabel, auto-seed demo</a:t>
-                      </a:r>
-                    </a:p>
-                  </a:txBody>
-                  <a:tcPr>
-                    <a:solidFill>
-                      <a:srgbClr val="F4F6F9"/>
-                    </a:solidFill>
-                  </a:tcPr>
-                </a:tc>
-              </a:tr>
-              <a:tr h="384048">
-                <a:tc>
-                  <a:txBody>
-                    <a:bodyPr/>
-                    <a:lstStyle/>
-                    <a:p>
-                      <a:pPr>
-                        <a:defRPr sz="1000">
-                          <a:solidFill>
-                            <a:srgbClr val="1E293B"/>
-                          </a:solidFill>
-                        </a:defRPr>
-                      </a:pPr>
-                      <a:r>
-                        <a:t>Styling</a:t>
-                      </a:r>
-                    </a:p>
-                  </a:txBody>
-                  <a:tcPr/>
-                </a:tc>
-                <a:tc>
-                  <a:txBody>
-                    <a:bodyPr/>
-                    <a:lstStyle/>
-                    <a:p>
-                      <a:pPr>
-                        <a:defRPr sz="1000">
-                          <a:solidFill>
-                            <a:srgbClr val="1E293B"/>
-                          </a:solidFill>
-                        </a:defRPr>
-                      </a:pPr>
-                      <a:r>
-                        <a:t>Tailwind CSS v4</a:t>
-                      </a:r>
-                    </a:p>
-                  </a:txBody>
-                  <a:tcPr/>
-                </a:tc>
-                <a:tc>
-                  <a:txBody>
-                    <a:bodyPr/>
-                    <a:lstStyle/>
-                    <a:p>
-                      <a:pPr>
-                        <a:defRPr sz="1000">
-                          <a:solidFill>
-                            <a:srgbClr val="1E293B"/>
-                          </a:solidFill>
-                        </a:defRPr>
-                      </a:pPr>
-                      <a:r>
-                        <a:t>Brand navy &amp; orange Bank Sumut</a:t>
-                      </a:r>
-                    </a:p>
-                  </a:txBody>
-                  <a:tcPr/>
-                </a:tc>
-              </a:tr>
-              <a:tr h="384048">
-                <a:tc>
-                  <a:txBody>
-                    <a:bodyPr/>
-                    <a:lstStyle/>
-                    <a:p>
-                      <a:pPr>
-                        <a:defRPr sz="1000">
-                          <a:solidFill>
-                            <a:srgbClr val="1E293B"/>
-                          </a:solidFill>
-                        </a:defRPr>
-                      </a:pPr>
-                      <a:r>
-                        <a:t>Grafik</a:t>
-                      </a:r>
-                    </a:p>
-                  </a:txBody>
-                  <a:tcPr>
-                    <a:solidFill>
-                      <a:srgbClr val="F4F6F9"/>
-                    </a:solidFill>
-                  </a:tcPr>
-                </a:tc>
-                <a:tc>
-                  <a:txBody>
-                    <a:bodyPr/>
-                    <a:lstStyle/>
-                    <a:p>
-                      <a:pPr>
-                        <a:defRPr sz="1000">
-                          <a:solidFill>
-                            <a:srgbClr val="1E293B"/>
-                          </a:solidFill>
-                        </a:defRPr>
-                      </a:pPr>
-                      <a:r>
-                        <a:t>Recharts</a:t>
-                      </a:r>
-                    </a:p>
-                  </a:txBody>
-                  <a:tcPr>
-                    <a:solidFill>
-                      <a:srgbClr val="F4F6F9"/>
-                    </a:solidFill>
-                  </a:tcPr>
-                </a:tc>
-                <a:tc>
-                  <a:txBody>
-                    <a:bodyPr/>
-                    <a:lstStyle/>
-                    <a:p>
-                      <a:pPr>
-                        <a:defRPr sz="1000">
-                          <a:solidFill>
-                            <a:srgbClr val="1E293B"/>
-                          </a:solidFill>
-                        </a:defRPr>
-                      </a:pPr>
-                      <a:r>
-                        <a:t>Dashboard &amp; laporan statistik</a:t>
-                      </a:r>
-                    </a:p>
-                  </a:txBody>
-                  <a:tcPr>
-                    <a:solidFill>
-                      <a:srgbClr val="F4F6F9"/>
-                    </a:solidFill>
-                  </a:tcPr>
-                </a:tc>
-              </a:tr>
-              <a:tr h="384048">
-                <a:tc>
-                  <a:txBody>
-                    <a:bodyPr/>
-                    <a:lstStyle/>
-                    <a:p>
-                      <a:pPr>
-                        <a:defRPr sz="1000">
-                          <a:solidFill>
-                            <a:srgbClr val="1E293B"/>
-                          </a:solidFill>
-                        </a:defRPr>
-                      </a:pPr>
-                      <a:r>
-                        <a:t>PDF &amp; AI</a:t>
-                      </a:r>
-                    </a:p>
-                  </a:txBody>
-                  <a:tcPr/>
-                </a:tc>
-                <a:tc>
-                  <a:txBody>
-                    <a:bodyPr/>
-                    <a:lstStyle/>
-                    <a:p>
-                      <a:pPr>
-                        <a:defRPr sz="1000">
-                          <a:solidFill>
-                            <a:srgbClr val="1E293B"/>
-                          </a:solidFill>
-                        </a:defRPr>
-                      </a:pPr>
-                      <a:r>
-                        <a:t>pdf-parse + RAG</a:t>
-                      </a:r>
-                    </a:p>
-                  </a:txBody>
-                  <a:tcPr/>
-                </a:tc>
-                <a:tc>
-                  <a:txBody>
-                    <a:bodyPr/>
-                    <a:lstStyle/>
-                    <a:p>
-                      <a:pPr>
-                        <a:defRPr sz="1000">
-                          <a:solidFill>
-                            <a:srgbClr val="1E293B"/>
-                          </a:solidFill>
-                        </a:defRPr>
-                      </a:pPr>
-                      <a:r>
-                        <a:t>Ekstraksi teks &amp; analisa compliance</a:t>
-                      </a:r>
-                    </a:p>
-                  </a:txBody>
-                  <a:tcPr/>
-                </a:tc>
-              </a:tr>
-              <a:tr h="384048">
-                <a:tc>
-                  <a:txBody>
-                    <a:bodyPr/>
-                    <a:lstStyle/>
-                    <a:p>
-                      <a:pPr>
-                        <a:defRPr sz="1000">
-                          <a:solidFill>
-                            <a:srgbClr val="1E293B"/>
-                          </a:solidFill>
-                        </a:defRPr>
-                      </a:pPr>
-                      <a:r>
-                        <a:t>Auth</a:t>
-                      </a:r>
-                    </a:p>
-                  </a:txBody>
-                  <a:tcPr>
-                    <a:solidFill>
-                      <a:srgbClr val="F4F6F9"/>
-                    </a:solidFill>
-                  </a:tcPr>
-                </a:tc>
-                <a:tc>
-                  <a:txBody>
-                    <a:bodyPr/>
-                    <a:lstStyle/>
-                    <a:p>
-                      <a:pPr>
-                        <a:defRPr sz="1000">
-                          <a:solidFill>
-                            <a:srgbClr val="1E293B"/>
-                          </a:solidFill>
-                        </a:defRPr>
-                      </a:pPr>
-                      <a:r>
-                        <a:t>Cookie Session + RBAC</a:t>
-                      </a:r>
-                    </a:p>
-                  </a:txBody>
-                  <a:tcPr>
-                    <a:solidFill>
-                      <a:srgbClr val="F4F6F9"/>
-                    </a:solidFill>
-                  </a:tcPr>
-                </a:tc>
-                <a:tc>
-                  <a:txBody>
-                    <a:bodyPr/>
-                    <a:lstStyle/>
-                    <a:p>
-                      <a:pPr>
-                        <a:defRPr sz="1000">
-                          <a:solidFill>
-                            <a:srgbClr val="1E293B"/>
-                          </a:solidFill>
-                        </a:defRPr>
-                      </a:pPr>
-                      <a:r>
-                        <a:t>7 role, middleware guard</a:t>
-                      </a:r>
-                    </a:p>
-                  </a:txBody>
-                  <a:tcPr>
-                    <a:solidFill>
-                      <a:srgbClr val="F4F6F9"/>
-                    </a:solidFill>
-                  </a:tcPr>
-                </a:tc>
-              </a:tr>
-            </a:tbl>
-          </a:graphicData>
-        </a:graphic>
-      </p:graphicFrame>
-      <p:sp>
-        <p:nvSpPr>
-          <p:cNvPr id="5" name="TextBox 4"/>
-          <p:cNvSpPr txBox="1"/>
-          <p:nvPr/>
-        </p:nvSpPr>
-        <p:spPr>
-          <a:xfrm>
-            <a:off x="457200" y="6400800"/>
-            <a:ext cx="11247120" cy="365760"/>
-          </a:xfrm>
-          <a:prstGeom prst="rect">
-            <a:avLst/>
-          </a:prstGeom>
-          <a:noFill/>
-        </p:spPr>
-        <p:txBody>
-          <a:bodyPr wrap="none">
-            <a:spAutoFit/>
-          </a:bodyPr>
-          <a:lstStyle/>
-          <a:p>
-            <a:pPr algn="r">
-              <a:defRPr sz="900">
-                <a:solidFill>
-                  <a:srgbClr val="64748B"/>
-                </a:solidFill>
-              </a:defRPr>
-            </a:pPr>
-            <a:r>
-              <a:t>CorpSec Bank Sumut — PRD Discovery v0.1</a:t>
-            </a:r>
-          </a:p>
-        </p:txBody>
-      </p:sp>
-    </p:spTree>
-  </p:cSld>
-  <p:clrMapOvr>
-    <a:masterClrMapping/>
-  </p:clrMapOvr>
-</p:sld>
-</file>
-
-<file path=ppt/slides/slide5.xml><?xml version="1.0" encoding="utf-8"?>
-<p:sld xmlns:a="http://schemas.openxmlformats.org/drawingml/2006/main" xmlns:p="http://schemas.openxmlformats.org/presentationml/2006/main" xmlns:r="http://schemas.openxmlformats.org/officeDocument/2006/relationships">
-  <p:cSld>
-    <p:bg>
-      <p:bgPr>
-        <a:solidFill>
-          <a:srgbClr val="FFFFFF"/>
-        </a:solidFill>
-        <a:effectLst/>
-      </p:bgPr>
-    </p:bg>
-    <p:spTree>
-      <p:nvGrpSpPr>
-        <p:cNvPr id="1" name=""/>
-        <p:cNvGrpSpPr/>
-        <p:nvPr/>
-      </p:nvGrpSpPr>
-      <p:grpSpPr/>
-      <p:sp>
-        <p:nvSpPr>
-          <p:cNvPr id="2" name="Rectangle 1"/>
-          <p:cNvSpPr/>
-          <p:nvPr/>
-        </p:nvSpPr>
-        <p:spPr>
-          <a:xfrm>
-            <a:off x="0" y="0"/>
-            <a:ext cx="12191695" cy="73152"/>
-          </a:xfrm>
-          <a:prstGeom prst="rect">
-            <a:avLst/>
-          </a:prstGeom>
-          <a:solidFill>
-            <a:srgbClr val="F58220"/>
-          </a:solidFill>
-          <a:ln>
-            <a:noFill/>
-          </a:ln>
-        </p:spPr>
-        <p:style>
-          <a:lnRef idx="1">
-            <a:schemeClr val="accent1"/>
-          </a:lnRef>
-          <a:fillRef idx="3">
-            <a:schemeClr val="accent1"/>
-          </a:fillRef>
-          <a:effectRef idx="2">
-            <a:schemeClr val="accent1"/>
-          </a:effectRef>
-          <a:fontRef idx="minor">
-            <a:schemeClr val="lt1"/>
-          </a:fontRef>
-        </p:style>
-        <p:txBody>
-          <a:bodyPr rtlCol="0" anchor="ctr"/>
-          <a:lstStyle/>
-          <a:p>
-            <a:pPr algn="ctr"/>
-          </a:p>
-        </p:txBody>
-      </p:sp>
-      <p:sp>
-        <p:nvSpPr>
-          <p:cNvPr id="3" name="TextBox 2"/>
-          <p:cNvSpPr txBox="1"/>
-          <p:nvPr/>
-        </p:nvSpPr>
-        <p:spPr>
-          <a:xfrm>
-            <a:off x="548640" y="320040"/>
-            <a:ext cx="10972800" cy="640080"/>
-          </a:xfrm>
-          <a:prstGeom prst="rect">
-            <a:avLst/>
-          </a:prstGeom>
-          <a:noFill/>
-        </p:spPr>
-        <p:txBody>
-          <a:bodyPr wrap="none">
-            <a:spAutoFit/>
-          </a:bodyPr>
-          <a:lstStyle/>
-          <a:p>
-            <a:pPr>
-              <a:defRPr sz="2800" b="1">
-                <a:solidFill>
-                  <a:srgbClr val="0C2340"/>
-                </a:solidFill>
-              </a:defRPr>
-            </a:pPr>
-            <a:r>
-              <a:t>Modul Utama Website</a:t>
-            </a:r>
-          </a:p>
-        </p:txBody>
-      </p:sp>
-      <p:graphicFrame>
-        <p:nvGraphicFramePr>
-          <p:cNvPr id="4" name="Table 3"/>
-          <p:cNvGraphicFramePr>
-            <a:graphicFrameLocks noGrp="1"/>
-          </p:cNvGraphicFramePr>
-          <p:nvPr/>
-        </p:nvGraphicFramePr>
-        <p:xfrm>
-          <a:off x="457200" y="1143000"/>
-          <a:ext cx="11247120" cy="3072384"/>
-        </p:xfrm>
-        <a:graphic>
-          <a:graphicData uri="http://schemas.openxmlformats.org/drawingml/2006/table">
-            <a:tbl>
-              <a:tblPr firstRow="1" bandRow="1">
-                <a:tableStyleId>{5C22544A-7EE6-4342-B048-85BDC9FD1C3A}</a:tableStyleId>
-              </a:tblPr>
-              <a:tblGrid>
-                <a:gridCol w="3749040"/>
-                <a:gridCol w="3749040"/>
-                <a:gridCol w="3749040"/>
-              </a:tblGrid>
-              <a:tr h="384048">
-                <a:tc>
-                  <a:txBody>
-                    <a:bodyPr/>
-                    <a:lstStyle/>
-                    <a:p>
-                      <a:pPr>
-                        <a:defRPr b="1" sz="1100">
-                          <a:solidFill>
-                            <a:srgbClr val="FFFFFF"/>
-                          </a:solidFill>
-                        </a:defRPr>
-                      </a:pPr>
-                      <a:r>
-                        <a:t>Modul</a:t>
-                      </a:r>
-                    </a:p>
-                  </a:txBody>
-                  <a:tcPr>
-                    <a:solidFill>
-                      <a:srgbClr val="0C2340"/>
-                    </a:solidFill>
-                  </a:tcPr>
-                </a:tc>
-                <a:tc>
-                  <a:txBody>
-                    <a:bodyPr/>
-                    <a:lstStyle/>
-                    <a:p>
-                      <a:pPr>
-                        <a:defRPr b="1" sz="1100">
-                          <a:solidFill>
-                            <a:srgbClr val="FFFFFF"/>
-                          </a:solidFill>
-                        </a:defRPr>
-                      </a:pPr>
-                      <a:r>
-                        <a:t>Route</a:t>
-                      </a:r>
-                    </a:p>
-                  </a:txBody>
-                  <a:tcPr>
-                    <a:solidFill>
-                      <a:srgbClr val="0C2340"/>
-                    </a:solidFill>
-                  </a:tcPr>
-                </a:tc>
-                <a:tc>
-                  <a:txBody>
-                    <a:bodyPr/>
-                    <a:lstStyle/>
-                    <a:p>
-                      <a:pPr>
-                        <a:defRPr b="1" sz="1100">
-                          <a:solidFill>
-                            <a:srgbClr val="FFFFFF"/>
-                          </a:solidFill>
-                        </a:defRPr>
-                      </a:pPr>
-                      <a:r>
-                        <a:t>Fungsi</a:t>
-                      </a:r>
-                    </a:p>
-                  </a:txBody>
-                  <a:tcPr>
-                    <a:solidFill>
-                      <a:srgbClr val="0C2340"/>
-                    </a:solidFill>
-                  </a:tcPr>
-                </a:tc>
-              </a:tr>
-              <a:tr h="384048">
-                <a:tc>
-                  <a:txBody>
-                    <a:bodyPr/>
-                    <a:lstStyle/>
-                    <a:p>
-                      <a:pPr>
-                        <a:defRPr sz="1000">
+                        <a:defRPr sz="1400">
                           <a:solidFill>
                             <a:srgbClr val="1E293B"/>
                           </a:solidFill>
@@ -6891,7 +8176,7 @@
                     <a:lstStyle/>
                     <a:p>
                       <a:pPr>
-                        <a:defRPr sz="1000">
+                        <a:defRPr sz="1400">
                           <a:solidFill>
                             <a:srgbClr val="1E293B"/>
                           </a:solidFill>
@@ -6910,28 +8195,28 @@
                     <a:lstStyle/>
                     <a:p>
                       <a:pPr>
-                        <a:defRPr sz="1000">
+                        <a:defRPr sz="1400">
                           <a:solidFill>
                             <a:srgbClr val="1E293B"/>
                           </a:solidFill>
                         </a:defRPr>
                       </a:pPr>
                       <a:r>
-                        <a:t>Statistik, grafik, notifikasi, aksi cepat</a:t>
+                        <a:t>Ringkasan harian CorpSec</a:t>
                       </a:r>
                     </a:p>
                   </a:txBody>
                   <a:tcPr/>
                 </a:tc>
               </a:tr>
-              <a:tr h="384048">
+              <a:tr h="502920">
                 <a:tc>
                   <a:txBody>
                     <a:bodyPr/>
                     <a:lstStyle/>
                     <a:p>
                       <a:pPr>
-                        <a:defRPr sz="1000">
+                        <a:defRPr sz="1400">
                           <a:solidFill>
                             <a:srgbClr val="1E293B"/>
                           </a:solidFill>
@@ -6944,7 +8229,7 @@
                   </a:txBody>
                   <a:tcPr>
                     <a:solidFill>
-                      <a:srgbClr val="F4F6F9"/>
+                      <a:srgbClr val="FFF4EB"/>
                     </a:solidFill>
                   </a:tcPr>
                 </a:tc>
@@ -6954,7 +8239,7 @@
                     <a:lstStyle/>
                     <a:p>
                       <a:pPr>
-                        <a:defRPr sz="1000">
+                        <a:defRPr sz="1400">
                           <a:solidFill>
                             <a:srgbClr val="1E293B"/>
                           </a:solidFill>
@@ -6967,7 +8252,7 @@
                   </a:txBody>
                   <a:tcPr>
                     <a:solidFill>
-                      <a:srgbClr val="F4F6F9"/>
+                      <a:srgbClr val="FFF4EB"/>
                     </a:solidFill>
                   </a:tcPr>
                 </a:tc>
@@ -6977,32 +8262,32 @@
                     <a:lstStyle/>
                     <a:p>
                       <a:pPr>
-                        <a:defRPr sz="1000">
+                        <a:defRPr sz="1400">
                           <a:solidFill>
                             <a:srgbClr val="1E293B"/>
                           </a:solidFill>
                         </a:defRPr>
                       </a:pPr>
                       <a:r>
-                        <a:t>Upload PDF, workflow, AI review</a:t>
+                        <a:t>Upload &amp; kelola memorandum</a:t>
                       </a:r>
                     </a:p>
                   </a:txBody>
                   <a:tcPr>
                     <a:solidFill>
-                      <a:srgbClr val="F4F6F9"/>
+                      <a:srgbClr val="FFF4EB"/>
                     </a:solidFill>
                   </a:tcPr>
                 </a:tc>
               </a:tr>
-              <a:tr h="384048">
+              <a:tr h="502920">
                 <a:tc>
                   <a:txBody>
                     <a:bodyPr/>
                     <a:lstStyle/>
                     <a:p>
                       <a:pPr>
-                        <a:defRPr sz="1000">
+                        <a:defRPr sz="1400">
                           <a:solidFill>
                             <a:srgbClr val="1E293B"/>
                           </a:solidFill>
@@ -7021,7 +8306,7 @@
                     <a:lstStyle/>
                     <a:p>
                       <a:pPr>
-                        <a:defRPr sz="1000">
+                        <a:defRPr sz="1400">
                           <a:solidFill>
                             <a:srgbClr val="1E293B"/>
                           </a:solidFill>
@@ -7040,28 +8325,28 @@
                     <a:lstStyle/>
                     <a:p>
                       <a:pPr>
-                        <a:defRPr sz="1000">
+                        <a:defRPr sz="1400">
                           <a:solidFill>
                             <a:srgbClr val="1E293B"/>
                           </a:solidFill>
                         </a:defRPr>
                       </a:pPr>
                       <a:r>
-                        <a:t>Jadwal &amp; persiapan kegiatan Direksi</a:t>
+                        <a:t>Jadwal kegiatan Direksi</a:t>
                       </a:r>
                     </a:p>
                   </a:txBody>
                   <a:tcPr/>
                 </a:tc>
               </a:tr>
-              <a:tr h="384048">
+              <a:tr h="502920">
                 <a:tc>
                   <a:txBody>
                     <a:bodyPr/>
                     <a:lstStyle/>
                     <a:p>
                       <a:pPr>
-                        <a:defRPr sz="1000">
+                        <a:defRPr sz="1400">
                           <a:solidFill>
                             <a:srgbClr val="1E293B"/>
                           </a:solidFill>
@@ -7074,7 +8359,7 @@
                   </a:txBody>
                   <a:tcPr>
                     <a:solidFill>
-                      <a:srgbClr val="F4F6F9"/>
+                      <a:srgbClr val="FFF4EB"/>
                     </a:solidFill>
                   </a:tcPr>
                 </a:tc>
@@ -7084,7 +8369,7 @@
                     <a:lstStyle/>
                     <a:p>
                       <a:pPr>
-                        <a:defRPr sz="1000">
+                        <a:defRPr sz="1400">
                           <a:solidFill>
                             <a:srgbClr val="1E293B"/>
                           </a:solidFill>
@@ -7097,7 +8382,7 @@
                   </a:txBody>
                   <a:tcPr>
                     <a:solidFill>
-                      <a:srgbClr val="F4F6F9"/>
+                      <a:srgbClr val="FFF4EB"/>
                     </a:solidFill>
                   </a:tcPr>
                 </a:tc>
@@ -7107,32 +8392,32 @@
                     <a:lstStyle/>
                     <a:p>
                       <a:pPr>
-                        <a:defRPr sz="1000">
+                        <a:defRPr sz="1400">
                           <a:solidFill>
                             <a:srgbClr val="1E293B"/>
                           </a:solidFill>
                         </a:defRPr>
                       </a:pPr>
                       <a:r>
-                        <a:t>Notulen &amp; tindak lanjut rapat</a:t>
+                        <a:t>Notulen &amp; tindak lanjut</a:t>
                       </a:r>
                     </a:p>
                   </a:txBody>
                   <a:tcPr>
                     <a:solidFill>
-                      <a:srgbClr val="F4F6F9"/>
+                      <a:srgbClr val="FFF4EB"/>
                     </a:solidFill>
                   </a:tcPr>
                 </a:tc>
               </a:tr>
-              <a:tr h="384048">
+              <a:tr h="502920">
                 <a:tc>
                   <a:txBody>
                     <a:bodyPr/>
                     <a:lstStyle/>
                     <a:p>
                       <a:pPr>
-                        <a:defRPr sz="1000">
+                        <a:defRPr sz="1400">
                           <a:solidFill>
                             <a:srgbClr val="1E293B"/>
                           </a:solidFill>
@@ -7151,7 +8436,7 @@
                     <a:lstStyle/>
                     <a:p>
                       <a:pPr>
-                        <a:defRPr sz="1000">
+                        <a:defRPr sz="1400">
                           <a:solidFill>
                             <a:srgbClr val="1E293B"/>
                           </a:solidFill>
@@ -7170,28 +8455,28 @@
                     <a:lstStyle/>
                     <a:p>
                       <a:pPr>
-                        <a:defRPr sz="1000">
+                        <a:defRPr sz="1400">
                           <a:solidFill>
                             <a:srgbClr val="1E293B"/>
                           </a:solidFill>
                         </a:defRPr>
                       </a:pPr>
                       <a:r>
-                        <a:t>Berita &amp; analisis sentimen</a:t>
+                        <a:t>Pantau berita &amp; sentimen</a:t>
                       </a:r>
                     </a:p>
                   </a:txBody>
                   <a:tcPr/>
                 </a:tc>
               </a:tr>
-              <a:tr h="384048">
+              <a:tr h="502920">
                 <a:tc>
                   <a:txBody>
                     <a:bodyPr/>
                     <a:lstStyle/>
                     <a:p>
                       <a:pPr>
-                        <a:defRPr sz="1000">
+                        <a:defRPr sz="1400">
                           <a:solidFill>
                             <a:srgbClr val="1E293B"/>
                           </a:solidFill>
@@ -7204,7 +8489,7 @@
                   </a:txBody>
                   <a:tcPr>
                     <a:solidFill>
-                      <a:srgbClr val="F4F6F9"/>
+                      <a:srgbClr val="FFF4EB"/>
                     </a:solidFill>
                   </a:tcPr>
                 </a:tc>
@@ -7214,7 +8499,7 @@
                     <a:lstStyle/>
                     <a:p>
                       <a:pPr>
-                        <a:defRPr sz="1000">
+                        <a:defRPr sz="1400">
                           <a:solidFill>
                             <a:srgbClr val="1E293B"/>
                           </a:solidFill>
@@ -7227,7 +8512,7 @@
                   </a:txBody>
                   <a:tcPr>
                     <a:solidFill>
-                      <a:srgbClr val="F4F6F9"/>
+                      <a:srgbClr val="FFF4EB"/>
                     </a:solidFill>
                   </a:tcPr>
                 </a:tc>
@@ -7237,32 +8522,32 @@
                     <a:lstStyle/>
                     <a:p>
                       <a:pPr>
-                        <a:defRPr sz="1000">
+                        <a:defRPr sz="1400">
                           <a:solidFill>
                             <a:srgbClr val="1E293B"/>
                           </a:solidFill>
                         </a:defRPr>
                       </a:pPr>
                       <a:r>
-                        <a:t>Dokumen internal &amp; regulasi (RAG)</a:t>
+                        <a:t>Arsip dokumen &amp; regulasi</a:t>
                       </a:r>
                     </a:p>
                   </a:txBody>
                   <a:tcPr>
                     <a:solidFill>
-                      <a:srgbClr val="F4F6F9"/>
+                      <a:srgbClr val="FFF4EB"/>
                     </a:solidFill>
                   </a:tcPr>
                 </a:tc>
               </a:tr>
-              <a:tr h="384048">
+              <a:tr h="502920">
                 <a:tc>
                   <a:txBody>
                     <a:bodyPr/>
                     <a:lstStyle/>
                     <a:p>
                       <a:pPr>
-                        <a:defRPr sz="1000">
+                        <a:defRPr sz="1400">
                           <a:solidFill>
                             <a:srgbClr val="1E293B"/>
                           </a:solidFill>
@@ -7281,7 +8566,7 @@
                     <a:lstStyle/>
                     <a:p>
                       <a:pPr>
-                        <a:defRPr sz="1000">
+                        <a:defRPr sz="1400">
                           <a:solidFill>
                             <a:srgbClr val="1E293B"/>
                           </a:solidFill>
@@ -7300,14 +8585,14 @@
                     <a:lstStyle/>
                     <a:p>
                       <a:pPr>
-                        <a:defRPr sz="1000">
+                        <a:defRPr sz="1400">
                           <a:solidFill>
                             <a:srgbClr val="1E293B"/>
                           </a:solidFill>
                         </a:defRPr>
                       </a:pPr>
                       <a:r>
-                        <a:t>Monitoring SLA &amp; KPI PRD</a:t>
+                        <a:t>Pantau target &amp; statistik</a:t>
                       </a:r>
                     </a:p>
                   </a:txBody>
@@ -7320,14 +8605,57 @@
       </p:graphicFrame>
       <p:sp>
         <p:nvSpPr>
-          <p:cNvPr id="5" name="TextBox 4"/>
+          <p:cNvPr id="5" name="Rectangle 4"/>
+          <p:cNvSpPr/>
+          <p:nvPr/>
+        </p:nvSpPr>
+        <p:spPr>
+          <a:xfrm>
+            <a:off x="0" y="6446520"/>
+            <a:ext cx="12191695" cy="411480"/>
+          </a:xfrm>
+          <a:prstGeom prst="rect">
+            <a:avLst/>
+          </a:prstGeom>
+          <a:solidFill>
+            <a:srgbClr val="0C2340"/>
+          </a:solidFill>
+          <a:ln>
+            <a:noFill/>
+          </a:ln>
+        </p:spPr>
+        <p:style>
+          <a:lnRef idx="1">
+            <a:schemeClr val="accent1"/>
+          </a:lnRef>
+          <a:fillRef idx="3">
+            <a:schemeClr val="accent1"/>
+          </a:fillRef>
+          <a:effectRef idx="2">
+            <a:schemeClr val="accent1"/>
+          </a:effectRef>
+          <a:fontRef idx="minor">
+            <a:schemeClr val="lt1"/>
+          </a:fontRef>
+        </p:style>
+        <p:txBody>
+          <a:bodyPr rtlCol="0" anchor="ctr"/>
+          <a:lstStyle/>
+          <a:p>
+            <a:pPr algn="ctr"/>
+          </a:p>
+        </p:txBody>
+      </p:sp>
+      <p:sp>
+        <p:nvSpPr>
+          <p:cNvPr id="6" name="TextBox 5"/>
           <p:cNvSpPr txBox="1"/>
           <p:nvPr/>
         </p:nvSpPr>
         <p:spPr>
           <a:xfrm>
-            <a:off x="457200" y="6400800"/>
-            <a:ext cx="11247120" cy="365760"/>
+            <a:off x="457200" y="6492240"/>
+            <a:ext cx="5486400" cy="320040"/>
           </a:xfrm>
           <a:prstGeom prst="rect">
             <a:avLst/>
@@ -7340,15 +8668,50 @@
           </a:bodyPr>
           <a:lstStyle/>
           <a:p>
+            <a:pPr>
+              <a:defRPr sz="1100" b="1">
+                <a:solidFill>
+                  <a:srgbClr val="F58220"/>
+                </a:solidFill>
+              </a:defRPr>
+            </a:pPr>
+            <a:r>
+              <a:t>CorpSec Bank Sumut</a:t>
+            </a:r>
+          </a:p>
+        </p:txBody>
+      </p:sp>
+      <p:sp>
+        <p:nvSpPr>
+          <p:cNvPr id="7" name="TextBox 6"/>
+          <p:cNvSpPr txBox="1"/>
+          <p:nvPr/>
+        </p:nvSpPr>
+        <p:spPr>
+          <a:xfrm>
+            <a:off x="10515600" y="6492240"/>
+            <a:ext cx="1371600" cy="320040"/>
+          </a:xfrm>
+          <a:prstGeom prst="rect">
+            <a:avLst/>
+          </a:prstGeom>
+          <a:noFill/>
+        </p:spPr>
+        <p:txBody>
+          <a:bodyPr wrap="none">
+            <a:spAutoFit/>
+          </a:bodyPr>
+          <a:lstStyle/>
+          <a:p>
             <a:pPr algn="r">
-              <a:defRPr sz="900">
-                <a:solidFill>
-                  <a:srgbClr val="64748B"/>
-                </a:solidFill>
-              </a:defRPr>
-            </a:pPr>
-            <a:r>
-              <a:t>CorpSec Bank Sumut — PRD Discovery v0.1</a:t>
+              <a:defRPr sz="1100">
+                <a:solidFill>
+                  <a:srgbClr val="FFFFFF"/>
+                </a:solidFill>
+              </a:defRPr>
+            </a:pPr>
+            <a:r>
+              <a:t>5</a:t>
             </a:r>
           </a:p>
         </p:txBody>
@@ -7367,7 +8730,7 @@
     <p:bg>
       <p:bgPr>
         <a:solidFill>
-          <a:srgbClr val="FFFFFF"/>
+          <a:srgbClr val="F8FAFC"/>
         </a:solidFill>
         <a:effectLst/>
       </p:bgPr>
@@ -7388,7 +8751,7 @@
         <p:spPr>
           <a:xfrm>
             <a:off x="0" y="0"/>
-            <a:ext cx="12191695" cy="73152"/>
+            <a:ext cx="164592" cy="6446520"/>
           </a:xfrm>
           <a:prstGeom prst="rect">
             <a:avLst/>
@@ -7430,8 +8793,8 @@
         </p:nvSpPr>
         <p:spPr>
           <a:xfrm>
-            <a:off x="548640" y="320040"/>
-            <a:ext cx="10972800" cy="640080"/>
+            <a:off x="502920" y="320040"/>
+            <a:ext cx="11155680" cy="1005840"/>
           </a:xfrm>
           <a:prstGeom prst="rect">
             <a:avLst/>
@@ -7445,34 +8808,180 @@
           <a:lstStyle/>
           <a:p>
             <a:pPr>
-              <a:defRPr sz="2800" b="1">
+              <a:defRPr sz="3400" b="1">
                 <a:solidFill>
                   <a:srgbClr val="0C2340"/>
                 </a:solidFill>
               </a:defRPr>
             </a:pPr>
             <a:r>
-              <a:t>Dashboard &amp; Manajemen Memorandum</a:t>
-            </a:r>
-          </a:p>
-        </p:txBody>
-      </p:sp>
-      <p:sp>
-        <p:nvSpPr>
-          <p:cNvPr id="4" name="Rectangle 3"/>
+              <a:t>Modul Memorandum</a:t>
+            </a:r>
+          </a:p>
+          <a:p>
+            <a:pPr>
+              <a:spcBef>
+                <a:spcPts val="600"/>
+              </a:spcBef>
+              <a:defRPr sz="1700">
+                <a:solidFill>
+                  <a:srgbClr val="64748B"/>
+                </a:solidFill>
+              </a:defRPr>
+            </a:pPr>
+            <a:r>
+              <a:t>Dari upload PDF sampai keputusan akhir</a:t>
+            </a:r>
+          </a:p>
+        </p:txBody>
+      </p:sp>
+      <p:sp>
+        <p:nvSpPr>
+          <p:cNvPr id="4" name="TextBox 3"/>
+          <p:cNvSpPr txBox="1"/>
+          <p:nvPr/>
+        </p:nvSpPr>
+        <p:spPr>
+          <a:xfrm>
+            <a:off x="502920" y="1417320"/>
+            <a:ext cx="11155680" cy="4754880"/>
+          </a:xfrm>
+          <a:prstGeom prst="rect">
+            <a:avLst/>
+          </a:prstGeom>
+          <a:noFill/>
+        </p:spPr>
+        <p:txBody>
+          <a:bodyPr wrap="square">
+            <a:spAutoFit/>
+          </a:bodyPr>
+          <a:lstStyle/>
+          <a:p>
+            <a:pPr>
+              <a:lnSpc>
+                <a:spcPct val="125000"/>
+              </a:lnSpc>
+              <a:spcAft>
+                <a:spcPts val="1400"/>
+              </a:spcAft>
+              <a:defRPr sz="2100">
+                <a:solidFill>
+                  <a:srgbClr val="1E293B"/>
+                </a:solidFill>
+              </a:defRPr>
+            </a:pPr>
+            <a:r>
+              <a:t>Divisi mengunggah memorandum dalam bentuk PDF.</a:t>
+            </a:r>
+          </a:p>
+          <a:p>
+            <a:pPr>
+              <a:lnSpc>
+                <a:spcPct val="125000"/>
+              </a:lnSpc>
+              <a:spcAft>
+                <a:spcPts val="1400"/>
+              </a:spcAft>
+              <a:defRPr sz="2100">
+                <a:solidFill>
+                  <a:srgbClr val="1E293B"/>
+                </a:solidFill>
+              </a:defRPr>
+            </a:pPr>
+            <a:r>
+              <a:t>CorpSec menerima dokumen, membaca isi, dan meninjau kelengkapan.</a:t>
+            </a:r>
+          </a:p>
+          <a:p>
+            <a:pPr>
+              <a:lnSpc>
+                <a:spcPct val="125000"/>
+              </a:lnSpc>
+              <a:spcAft>
+                <a:spcPts val="1400"/>
+              </a:spcAft>
+              <a:defRPr sz="2100">
+                <a:solidFill>
+                  <a:srgbClr val="1E293B"/>
+                </a:solidFill>
+              </a:defRPr>
+            </a:pPr>
+            <a:r>
+              <a:t>Sistem membantu merangkum isi memorandum dan menandai hal penting.</a:t>
+            </a:r>
+          </a:p>
+          <a:p>
+            <a:pPr>
+              <a:lnSpc>
+                <a:spcPct val="125000"/>
+              </a:lnSpc>
+              <a:spcAft>
+                <a:spcPts val="1400"/>
+              </a:spcAft>
+              <a:defRPr sz="2100">
+                <a:solidFill>
+                  <a:srgbClr val="1E293B"/>
+                </a:solidFill>
+              </a:defRPr>
+            </a:pPr>
+            <a:r>
+              <a:t>Setiap memorandum punya status: menunggu, sedang ditinjau, disetujui, atau ditolak.</a:t>
+            </a:r>
+          </a:p>
+          <a:p>
+            <a:pPr>
+              <a:lnSpc>
+                <a:spcPct val="125000"/>
+              </a:lnSpc>
+              <a:spcAft>
+                <a:spcPts val="1400"/>
+              </a:spcAft>
+              <a:defRPr sz="2100">
+                <a:solidFill>
+                  <a:srgbClr val="1E293B"/>
+                </a:solidFill>
+              </a:defRPr>
+            </a:pPr>
+            <a:r>
+              <a:t>Dokumen yang belum dibaca ditandai agar tidak terlewat.</a:t>
+            </a:r>
+          </a:p>
+          <a:p>
+            <a:pPr>
+              <a:lnSpc>
+                <a:spcPct val="125000"/>
+              </a:lnSpc>
+              <a:spcAft>
+                <a:spcPts val="1400"/>
+              </a:spcAft>
+              <a:defRPr sz="2100">
+                <a:solidFill>
+                  <a:srgbClr val="1E293B"/>
+                </a:solidFill>
+              </a:defRPr>
+            </a:pPr>
+            <a:r>
+              <a:t>Riwayat keputusan tersimpan sehingga bisa dicek kapan saja.</a:t>
+            </a:r>
+          </a:p>
+        </p:txBody>
+      </p:sp>
+      <p:sp>
+        <p:nvSpPr>
+          <p:cNvPr id="5" name="Rectangle 4"/>
           <p:cNvSpPr/>
           <p:nvPr/>
         </p:nvSpPr>
         <p:spPr>
           <a:xfrm>
-            <a:off x="548640" y="960120"/>
-            <a:ext cx="1371600" cy="45720"/>
+            <a:off x="0" y="6446520"/>
+            <a:ext cx="12191695" cy="411480"/>
           </a:xfrm>
           <a:prstGeom prst="rect">
             <a:avLst/>
           </a:prstGeom>
           <a:solidFill>
-            <a:srgbClr val="F58220"/>
+            <a:srgbClr val="0C2340"/>
           </a:solidFill>
           <a:ln>
             <a:noFill/>
@@ -7502,157 +9011,14 @@
       </p:sp>
       <p:sp>
         <p:nvSpPr>
-          <p:cNvPr id="5" name="TextBox 4"/>
-          <p:cNvSpPr txBox="1"/>
-          <p:nvPr/>
-        </p:nvSpPr>
-        <p:spPr>
-          <a:xfrm>
-            <a:off x="548640" y="1234440"/>
-            <a:ext cx="10972800" cy="5303520"/>
-          </a:xfrm>
-          <a:prstGeom prst="rect">
-            <a:avLst/>
-          </a:prstGeom>
-          <a:noFill/>
-        </p:spPr>
-        <p:txBody>
-          <a:bodyPr wrap="square">
-            <a:spAutoFit/>
-          </a:bodyPr>
-          <a:lstStyle/>
-          <a:p>
-            <a:pPr>
-              <a:spcAft>
-                <a:spcPts val="800"/>
-              </a:spcAft>
-              <a:defRPr sz="1500">
-                <a:solidFill>
-                  <a:srgbClr val="1E293B"/>
-                </a:solidFill>
-              </a:defRPr>
-            </a:pPr>
-            <a:r>
-              <a:t>Dashboard CorpSec — pusat kendali operasional:</a:t>
-            </a:r>
-          </a:p>
-          <a:p>
-            <a:pPr lvl="1">
-              <a:spcAft>
-                <a:spcPts val="800"/>
-              </a:spcAft>
-              <a:defRPr sz="1300">
-                <a:solidFill>
-                  <a:srgbClr val="64748B"/>
-                </a:solidFill>
-              </a:defRPr>
-            </a:pPr>
-            <a:r>
-              <a:t>  • Stat cards: agenda, memorandum pending, SLA, notifikasi regulator</a:t>
-            </a:r>
-          </a:p>
-          <a:p>
-            <a:pPr lvl="1">
-              <a:spcAft>
-                <a:spcPts val="800"/>
-              </a:spcAft>
-              <a:defRPr sz="1300">
-                <a:solidFill>
-                  <a:srgbClr val="64748B"/>
-                </a:solidFill>
-              </a:defRPr>
-            </a:pPr>
-            <a:r>
-              <a:t>  • Grafik: statistik memorandum, tren bulanan, tren SLA</a:t>
-            </a:r>
-          </a:p>
-          <a:p>
-            <a:pPr lvl="1">
-              <a:spcAft>
-                <a:spcPts val="800"/>
-              </a:spcAft>
-              <a:defRPr sz="1300">
-                <a:solidFill>
-                  <a:srgbClr val="64748B"/>
-                </a:solidFill>
-              </a:defRPr>
-            </a:pPr>
-            <a:r>
-              <a:t>  • Notifikasi keputusan Pimpinan Bidang &amp; aksi cepat upload</a:t>
-            </a:r>
-          </a:p>
-          <a:p>
-            <a:pPr>
-              <a:spcAft>
-                <a:spcPts val="800"/>
-              </a:spcAft>
-              <a:defRPr sz="1500">
-                <a:solidFill>
-                  <a:srgbClr val="1E293B"/>
-                </a:solidFill>
-              </a:defRPr>
-            </a:pPr>
-            <a:r>
-              <a:t>Manajemen Memorandum:</a:t>
-            </a:r>
-          </a:p>
-          <a:p>
-            <a:pPr lvl="1">
-              <a:spcAft>
-                <a:spcPts val="800"/>
-              </a:spcAft>
-              <a:defRPr sz="1300">
-                <a:solidFill>
-                  <a:srgbClr val="64748B"/>
-                </a:solidFill>
-              </a:defRPr>
-            </a:pPr>
-            <a:r>
-              <a:t>  • Upload PDF (max 20 MB) + metadata (perihal, divisi, urgensi)</a:t>
-            </a:r>
-          </a:p>
-          <a:p>
-            <a:pPr lvl="1">
-              <a:spcAft>
-                <a:spcPts val="800"/>
-              </a:spcAft>
-              <a:defRPr sz="1300">
-                <a:solidFill>
-                  <a:srgbClr val="64748B"/>
-                </a:solidFill>
-              </a:defRPr>
-            </a:pPr>
-            <a:r>
-              <a:t>  • Indikator baca, status workflow, aging, AI score</a:t>
-            </a:r>
-          </a:p>
-          <a:p>
-            <a:pPr lvl="1">
-              <a:spcAft>
-                <a:spcPts val="800"/>
-              </a:spcAft>
-              <a:defRPr sz="1300">
-                <a:solidFill>
-                  <a:srgbClr val="64748B"/>
-                </a:solidFill>
-              </a:defRPr>
-            </a:pPr>
-            <a:r>
-              <a:t>  • PDF viewer, workflow stepper, tanda tangan digital</a:t>
-            </a:r>
-          </a:p>
-        </p:txBody>
-      </p:sp>
-      <p:sp>
-        <p:nvSpPr>
           <p:cNvPr id="6" name="TextBox 5"/>
           <p:cNvSpPr txBox="1"/>
           <p:nvPr/>
         </p:nvSpPr>
         <p:spPr>
           <a:xfrm>
-            <a:off x="457200" y="6400800"/>
-            <a:ext cx="11247120" cy="365760"/>
+            <a:off x="457200" y="6492240"/>
+            <a:ext cx="5486400" cy="320040"/>
           </a:xfrm>
           <a:prstGeom prst="rect">
             <a:avLst/>
@@ -7665,15 +9031,50 @@
           </a:bodyPr>
           <a:lstStyle/>
           <a:p>
+            <a:pPr>
+              <a:defRPr sz="1100" b="1">
+                <a:solidFill>
+                  <a:srgbClr val="F58220"/>
+                </a:solidFill>
+              </a:defRPr>
+            </a:pPr>
+            <a:r>
+              <a:t>CorpSec Bank Sumut</a:t>
+            </a:r>
+          </a:p>
+        </p:txBody>
+      </p:sp>
+      <p:sp>
+        <p:nvSpPr>
+          <p:cNvPr id="7" name="TextBox 6"/>
+          <p:cNvSpPr txBox="1"/>
+          <p:nvPr/>
+        </p:nvSpPr>
+        <p:spPr>
+          <a:xfrm>
+            <a:off x="10515600" y="6492240"/>
+            <a:ext cx="1371600" cy="320040"/>
+          </a:xfrm>
+          <a:prstGeom prst="rect">
+            <a:avLst/>
+          </a:prstGeom>
+          <a:noFill/>
+        </p:spPr>
+        <p:txBody>
+          <a:bodyPr wrap="none">
+            <a:spAutoFit/>
+          </a:bodyPr>
+          <a:lstStyle/>
+          <a:p>
             <a:pPr algn="r">
-              <a:defRPr sz="900">
-                <a:solidFill>
-                  <a:srgbClr val="64748B"/>
-                </a:solidFill>
-              </a:defRPr>
-            </a:pPr>
-            <a:r>
-              <a:t>CorpSec Bank Sumut — PRD Discovery v0.1</a:t>
+              <a:defRPr sz="1100">
+                <a:solidFill>
+                  <a:srgbClr val="FFFFFF"/>
+                </a:solidFill>
+              </a:defRPr>
+            </a:pPr>
+            <a:r>
+              <a:t>6</a:t>
             </a:r>
           </a:p>
         </p:txBody>
@@ -7692,7 +9093,7 @@
     <p:bg>
       <p:bgPr>
         <a:solidFill>
-          <a:srgbClr val="FFFFFF"/>
+          <a:srgbClr val="F8FAFC"/>
         </a:solidFill>
         <a:effectLst/>
       </p:bgPr>
@@ -7713,7 +9114,7 @@
         <p:spPr>
           <a:xfrm>
             <a:off x="0" y="0"/>
-            <a:ext cx="12191695" cy="73152"/>
+            <a:ext cx="164592" cy="6446520"/>
           </a:xfrm>
           <a:prstGeom prst="rect">
             <a:avLst/>
@@ -7755,8 +9156,8 @@
         </p:nvSpPr>
         <p:spPr>
           <a:xfrm>
-            <a:off x="548640" y="320040"/>
-            <a:ext cx="10972800" cy="640080"/>
+            <a:off x="502920" y="320040"/>
+            <a:ext cx="11155680" cy="1005840"/>
           </a:xfrm>
           <a:prstGeom prst="rect">
             <a:avLst/>
@@ -7770,34 +9171,198 @@
           <a:lstStyle/>
           <a:p>
             <a:pPr>
-              <a:defRPr sz="2800" b="1">
+              <a:defRPr sz="3400" b="1">
                 <a:solidFill>
                   <a:srgbClr val="0C2340"/>
                 </a:solidFill>
               </a:defRPr>
             </a:pPr>
             <a:r>
-              <a:t>Workflow Persetujuan 7 Level</a:t>
-            </a:r>
-          </a:p>
-        </p:txBody>
-      </p:sp>
-      <p:sp>
-        <p:nvSpPr>
-          <p:cNvPr id="4" name="Rectangle 3"/>
+              <a:t>Alur Persetujuan Memorandum</a:t>
+            </a:r>
+          </a:p>
+          <a:p>
+            <a:pPr>
+              <a:spcBef>
+                <a:spcPts val="600"/>
+              </a:spcBef>
+              <a:defRPr sz="1700">
+                <a:solidFill>
+                  <a:srgbClr val="64748B"/>
+                </a:solidFill>
+              </a:defRPr>
+            </a:pPr>
+            <a:r>
+              <a:t>7 tahap dari pengusul sampai keputusan akhir</a:t>
+            </a:r>
+          </a:p>
+        </p:txBody>
+      </p:sp>
+      <p:sp>
+        <p:nvSpPr>
+          <p:cNvPr id="4" name="TextBox 3"/>
+          <p:cNvSpPr txBox="1"/>
+          <p:nvPr/>
+        </p:nvSpPr>
+        <p:spPr>
+          <a:xfrm>
+            <a:off x="502920" y="1417320"/>
+            <a:ext cx="11155680" cy="4754880"/>
+          </a:xfrm>
+          <a:prstGeom prst="rect">
+            <a:avLst/>
+          </a:prstGeom>
+          <a:noFill/>
+        </p:spPr>
+        <p:txBody>
+          <a:bodyPr wrap="square">
+            <a:spAutoFit/>
+          </a:bodyPr>
+          <a:lstStyle/>
+          <a:p>
+            <a:pPr>
+              <a:lnSpc>
+                <a:spcPct val="125000"/>
+              </a:lnSpc>
+              <a:spcAft>
+                <a:spcPts val="1400"/>
+              </a:spcAft>
+              <a:defRPr sz="2100">
+                <a:solidFill>
+                  <a:srgbClr val="1E293B"/>
+                </a:solidFill>
+              </a:defRPr>
+            </a:pPr>
+            <a:r>
+              <a:t>1. Divisi Pengusul — mengirim memorandum</a:t>
+            </a:r>
+          </a:p>
+          <a:p>
+            <a:pPr>
+              <a:lnSpc>
+                <a:spcPct val="125000"/>
+              </a:lnSpc>
+              <a:spcAft>
+                <a:spcPts val="1400"/>
+              </a:spcAft>
+              <a:defRPr sz="2100">
+                <a:solidFill>
+                  <a:srgbClr val="1E293B"/>
+                </a:solidFill>
+              </a:defRPr>
+            </a:pPr>
+            <a:r>
+              <a:t>2. Corporate Secretary — meninjau &amp; menyiapkan dokumen</a:t>
+            </a:r>
+          </a:p>
+          <a:p>
+            <a:pPr>
+              <a:lnSpc>
+                <a:spcPct val="125000"/>
+              </a:lnSpc>
+              <a:spcAft>
+                <a:spcPts val="1400"/>
+              </a:spcAft>
+              <a:defRPr sz="2100">
+                <a:solidFill>
+                  <a:srgbClr val="1E293B"/>
+                </a:solidFill>
+              </a:defRPr>
+            </a:pPr>
+            <a:r>
+              <a:t>3. Pemimpin Bidang — menyetujui atau menolak</a:t>
+            </a:r>
+          </a:p>
+          <a:p>
+            <a:pPr>
+              <a:lnSpc>
+                <a:spcPct val="125000"/>
+              </a:lnSpc>
+              <a:spcAft>
+                <a:spcPts val="1400"/>
+              </a:spcAft>
+              <a:defRPr sz="2100">
+                <a:solidFill>
+                  <a:srgbClr val="1E293B"/>
+                </a:solidFill>
+              </a:defRPr>
+            </a:pPr>
+            <a:r>
+              <a:t>4. Sekretaris Direksi/Komisaris — meneruskan ke pimpinan</a:t>
+            </a:r>
+          </a:p>
+          <a:p>
+            <a:pPr>
+              <a:lnSpc>
+                <a:spcPct val="125000"/>
+              </a:lnSpc>
+              <a:spcAft>
+                <a:spcPts val="1400"/>
+              </a:spcAft>
+              <a:defRPr sz="2100">
+                <a:solidFill>
+                  <a:srgbClr val="1E293B"/>
+                </a:solidFill>
+              </a:defRPr>
+            </a:pPr>
+            <a:r>
+              <a:t>5. Direksi atau Komisaris — memberi keputusan</a:t>
+            </a:r>
+          </a:p>
+          <a:p>
+            <a:pPr>
+              <a:lnSpc>
+                <a:spcPct val="125000"/>
+              </a:lnSpc>
+              <a:spcAft>
+                <a:spcPts val="1400"/>
+              </a:spcAft>
+              <a:defRPr sz="2100">
+                <a:solidFill>
+                  <a:srgbClr val="1E293B"/>
+                </a:solidFill>
+              </a:defRPr>
+            </a:pPr>
+            <a:r>
+              <a:t>6. CorpSec — menyelesaikan proses sesuai keputusan</a:t>
+            </a:r>
+          </a:p>
+          <a:p>
+            <a:pPr>
+              <a:lnSpc>
+                <a:spcPct val="125000"/>
+              </a:lnSpc>
+              <a:spcAft>
+                <a:spcPts val="1400"/>
+              </a:spcAft>
+              <a:defRPr sz="2100">
+                <a:solidFill>
+                  <a:srgbClr val="1E293B"/>
+                </a:solidFill>
+              </a:defRPr>
+            </a:pPr>
+            <a:r>
+              <a:t>7. Kembali ke Pengusul — pemberitahuan hasil akhir</a:t>
+            </a:r>
+          </a:p>
+        </p:txBody>
+      </p:sp>
+      <p:sp>
+        <p:nvSpPr>
+          <p:cNvPr id="5" name="Rectangle 4"/>
           <p:cNvSpPr/>
           <p:nvPr/>
         </p:nvSpPr>
         <p:spPr>
           <a:xfrm>
-            <a:off x="548640" y="960120"/>
-            <a:ext cx="1371600" cy="45720"/>
+            <a:off x="0" y="6446520"/>
+            <a:ext cx="12191695" cy="411480"/>
           </a:xfrm>
           <a:prstGeom prst="rect">
             <a:avLst/>
           </a:prstGeom>
           <a:solidFill>
-            <a:srgbClr val="F58220"/>
+            <a:srgbClr val="0C2340"/>
           </a:solidFill>
           <a:ln>
             <a:noFill/>
@@ -7827,14 +9392,14 @@
       </p:sp>
       <p:sp>
         <p:nvSpPr>
-          <p:cNvPr id="5" name="TextBox 4"/>
+          <p:cNvPr id="6" name="TextBox 5"/>
           <p:cNvSpPr txBox="1"/>
           <p:nvPr/>
         </p:nvSpPr>
         <p:spPr>
           <a:xfrm>
-            <a:off x="548640" y="1234440"/>
-            <a:ext cx="10972800" cy="457200"/>
+            <a:off x="457200" y="6492240"/>
+            <a:ext cx="5486400" cy="320040"/>
           </a:xfrm>
           <a:prstGeom prst="rect">
             <a:avLst/>
@@ -7848,142 +9413,14 @@
           <a:lstStyle/>
           <a:p>
             <a:pPr>
-              <a:defRPr sz="1300">
-                <a:solidFill>
-                  <a:srgbClr val="64748B"/>
-                </a:solidFill>
-              </a:defRPr>
-            </a:pPr>
-            <a:r>
-              <a:t>Cabang rute: Direksi (via SekDir) atau Komisaris (via SekKom)</a:t>
-            </a:r>
-          </a:p>
-        </p:txBody>
-      </p:sp>
-      <p:sp>
-        <p:nvSpPr>
-          <p:cNvPr id="6" name="TextBox 5"/>
-          <p:cNvSpPr txBox="1"/>
-          <p:nvPr/>
-        </p:nvSpPr>
-        <p:spPr>
-          <a:xfrm>
-            <a:off x="548640" y="1645920"/>
-            <a:ext cx="10972800" cy="5303520"/>
-          </a:xfrm>
-          <a:prstGeom prst="rect">
-            <a:avLst/>
-          </a:prstGeom>
-          <a:noFill/>
-        </p:spPr>
-        <p:txBody>
-          <a:bodyPr wrap="square">
-            <a:spAutoFit/>
-          </a:bodyPr>
-          <a:lstStyle/>
-          <a:p>
-            <a:pPr>
-              <a:spcAft>
-                <a:spcPts val="800"/>
-              </a:spcAft>
-              <a:defRPr sz="1500">
-                <a:solidFill>
-                  <a:srgbClr val="1E293B"/>
-                </a:solidFill>
-              </a:defRPr>
-            </a:pPr>
-            <a:r>
-              <a:t>1. Divisi Pengusul — Upload &amp; kirim memorandum PDF</a:t>
-            </a:r>
-          </a:p>
-          <a:p>
-            <a:pPr>
-              <a:spcAft>
-                <a:spcPts val="800"/>
-              </a:spcAft>
-              <a:defRPr sz="1500">
-                <a:solidFill>
-                  <a:srgbClr val="1E293B"/>
-                </a:solidFill>
-              </a:defRPr>
-            </a:pPr>
-            <a:r>
-              <a:t>2. Corporate Secretary — Analisa AI &amp; review compliance</a:t>
-            </a:r>
-          </a:p>
-          <a:p>
-            <a:pPr>
-              <a:spcAft>
-                <a:spcPts val="800"/>
-              </a:spcAft>
-              <a:defRPr sz="1500">
-                <a:solidFill>
-                  <a:srgbClr val="1E293B"/>
-                </a:solidFill>
-              </a:defRPr>
-            </a:pPr>
-            <a:r>
-              <a:t>3. Pemimpin Bidang — Approve/tolak + tanda tangan digital</a:t>
-            </a:r>
-          </a:p>
-          <a:p>
-            <a:pPr>
-              <a:spcAft>
-                <a:spcPts val="800"/>
-              </a:spcAft>
-              <a:defRPr sz="1500">
-                <a:solidFill>
-                  <a:srgbClr val="1E293B"/>
-                </a:solidFill>
-              </a:defRPr>
-            </a:pPr>
-            <a:r>
-              <a:t>4. Sekretaris Direksi/Komisaris — Terima &amp; forward ke board</a:t>
-            </a:r>
-          </a:p>
-          <a:p>
-            <a:pPr>
-              <a:spcAft>
-                <a:spcPts val="800"/>
-              </a:spcAft>
-              <a:defRPr sz="1500">
-                <a:solidFill>
-                  <a:srgbClr val="1E293B"/>
-                </a:solidFill>
-              </a:defRPr>
-            </a:pPr>
-            <a:r>
-              <a:t>5. Direksi (5 anggota) / Komisaris (3 anggota) — Keputusan board</a:t>
-            </a:r>
-          </a:p>
-          <a:p>
-            <a:pPr>
-              <a:spcAft>
-                <a:spcPts val="800"/>
-              </a:spcAft>
-              <a:defRPr sz="1500">
-                <a:solidFill>
-                  <a:srgbClr val="1E293B"/>
-                </a:solidFill>
-              </a:defRPr>
-            </a:pPr>
-            <a:r>
-              <a:t>6. CorpSec — Finalisasi keputusan board</a:t>
-            </a:r>
-          </a:p>
-          <a:p>
-            <a:pPr>
-              <a:spcAft>
-                <a:spcPts val="800"/>
-              </a:spcAft>
-              <a:defRPr sz="1500">
-                <a:solidFill>
-                  <a:srgbClr val="1E293B"/>
-                </a:solidFill>
-              </a:defRPr>
-            </a:pPr>
-            <a:r>
-              <a:t>7. Kembali ke Pengusul — Notifikasi keputusan final</a:t>
+              <a:defRPr sz="1100" b="1">
+                <a:solidFill>
+                  <a:srgbClr val="F58220"/>
+                </a:solidFill>
+              </a:defRPr>
+            </a:pPr>
+            <a:r>
+              <a:t>CorpSec Bank Sumut</a:t>
             </a:r>
           </a:p>
         </p:txBody>
@@ -7996,8 +9433,8 @@
         </p:nvSpPr>
         <p:spPr>
           <a:xfrm>
-            <a:off x="457200" y="6400800"/>
-            <a:ext cx="11247120" cy="365760"/>
+            <a:off x="10515600" y="6492240"/>
+            <a:ext cx="1371600" cy="320040"/>
           </a:xfrm>
           <a:prstGeom prst="rect">
             <a:avLst/>
@@ -8011,14 +9448,14 @@
           <a:lstStyle/>
           <a:p>
             <a:pPr algn="r">
-              <a:defRPr sz="900">
-                <a:solidFill>
-                  <a:srgbClr val="64748B"/>
-                </a:solidFill>
-              </a:defRPr>
-            </a:pPr>
-            <a:r>
-              <a:t>CorpSec Bank Sumut — PRD Discovery v0.1</a:t>
+              <a:defRPr sz="1100">
+                <a:solidFill>
+                  <a:srgbClr val="FFFFFF"/>
+                </a:solidFill>
+              </a:defRPr>
+            </a:pPr>
+            <a:r>
+              <a:t>7</a:t>
             </a:r>
           </a:p>
         </p:txBody>
@@ -8037,7 +9474,7 @@
     <p:bg>
       <p:bgPr>
         <a:solidFill>
-          <a:srgbClr val="FFFFFF"/>
+          <a:srgbClr val="F8FAFC"/>
         </a:solidFill>
         <a:effectLst/>
       </p:bgPr>
@@ -8058,7 +9495,7 @@
         <p:spPr>
           <a:xfrm>
             <a:off x="0" y="0"/>
-            <a:ext cx="12191695" cy="73152"/>
+            <a:ext cx="164592" cy="6446520"/>
           </a:xfrm>
           <a:prstGeom prst="rect">
             <a:avLst/>
@@ -8100,8 +9537,8 @@
         </p:nvSpPr>
         <p:spPr>
           <a:xfrm>
-            <a:off x="548640" y="320040"/>
-            <a:ext cx="10972800" cy="640080"/>
+            <a:off x="502920" y="320040"/>
+            <a:ext cx="11155680" cy="1005840"/>
           </a:xfrm>
           <a:prstGeom prst="rect">
             <a:avLst/>
@@ -8115,14 +9552,29 @@
           <a:lstStyle/>
           <a:p>
             <a:pPr>
-              <a:defRPr sz="2800" b="1">
+              <a:defRPr sz="3400" b="1">
                 <a:solidFill>
                   <a:srgbClr val="0C2340"/>
                 </a:solidFill>
               </a:defRPr>
             </a:pPr>
             <a:r>
-              <a:t>Role-Based Access Control — 7 Role</a:t>
+              <a:t>Siapa Saja Pengguna Sistem?</a:t>
+            </a:r>
+          </a:p>
+          <a:p>
+            <a:pPr>
+              <a:spcBef>
+                <a:spcPts val="600"/>
+              </a:spcBef>
+              <a:defRPr sz="1700">
+                <a:solidFill>
+                  <a:srgbClr val="64748B"/>
+                </a:solidFill>
+              </a:defRPr>
+            </a:pPr>
+            <a:r>
+              <a:t>Setiap role punya akses sesuai tugasnya</a:t>
             </a:r>
           </a:p>
         </p:txBody>
@@ -8136,8 +9588,8 @@
           <p:nvPr/>
         </p:nvGraphicFramePr>
         <p:xfrm>
-          <a:off x="457200" y="1143000"/>
-          <a:ext cx="11247120" cy="3072384"/>
+          <a:off x="502920" y="1508760"/>
+          <a:ext cx="11155680" cy="4023360"/>
         </p:xfrm>
         <a:graphic>
           <a:graphicData uri="http://schemas.openxmlformats.org/drawingml/2006/table">
@@ -8146,25 +9598,25 @@
                 <a:tableStyleId>{5C22544A-7EE6-4342-B048-85BDC9FD1C3A}</a:tableStyleId>
               </a:tblPr>
               <a:tblGrid>
-                <a:gridCol w="3749040"/>
-                <a:gridCol w="3749040"/>
-                <a:gridCol w="3749040"/>
+                <a:gridCol w="3718560"/>
+                <a:gridCol w="3718560"/>
+                <a:gridCol w="3718560"/>
               </a:tblGrid>
-              <a:tr h="384048">
+              <a:tr h="502920">
                 <a:tc>
                   <a:txBody>
                     <a:bodyPr/>
                     <a:lstStyle/>
                     <a:p>
                       <a:pPr>
-                        <a:defRPr b="1" sz="1100">
+                        <a:defRPr b="1" sz="1500">
                           <a:solidFill>
                             <a:srgbClr val="FFFFFF"/>
                           </a:solidFill>
                         </a:defRPr>
                       </a:pPr>
                       <a:r>
-                        <a:t>Role</a:t>
+                        <a:t>Peran</a:t>
                       </a:r>
                     </a:p>
                   </a:txBody>
@@ -8180,14 +9632,14 @@
                     <a:lstStyle/>
                     <a:p>
                       <a:pPr>
-                        <a:defRPr b="1" sz="1100">
+                        <a:defRPr b="1" sz="1500">
                           <a:solidFill>
                             <a:srgbClr val="FFFFFF"/>
                           </a:solidFill>
                         </a:defRPr>
                       </a:pPr>
                       <a:r>
-                        <a:t>Route</a:t>
+                        <a:t>Halaman Utama</a:t>
                       </a:r>
                     </a:p>
                   </a:txBody>
@@ -8203,14 +9655,14 @@
                     <a:lstStyle/>
                     <a:p>
                       <a:pPr>
-                        <a:defRPr b="1" sz="1100">
+                        <a:defRPr b="1" sz="1500">
                           <a:solidFill>
                             <a:srgbClr val="FFFFFF"/>
                           </a:solidFill>
                         </a:defRPr>
                       </a:pPr>
                       <a:r>
-                        <a:t>Akses Utama</a:t>
+                        <a:t>Tugas Utama</a:t>
                       </a:r>
                     </a:p>
                   </a:txBody>
@@ -8221,14 +9673,14 @@
                   </a:tcPr>
                 </a:tc>
               </a:tr>
-              <a:tr h="384048">
+              <a:tr h="502920">
                 <a:tc>
                   <a:txBody>
                     <a:bodyPr/>
                     <a:lstStyle/>
                     <a:p>
                       <a:pPr>
-                        <a:defRPr sz="1000">
+                        <a:defRPr sz="1400">
                           <a:solidFill>
                             <a:srgbClr val="1E293B"/>
                           </a:solidFill>
@@ -8247,7 +9699,7 @@
                     <a:lstStyle/>
                     <a:p>
                       <a:pPr>
-                        <a:defRPr sz="1000">
+                        <a:defRPr sz="1400">
                           <a:solidFill>
                             <a:srgbClr val="1E293B"/>
                           </a:solidFill>
@@ -8266,28 +9718,28 @@
                     <a:lstStyle/>
                     <a:p>
                       <a:pPr>
-                        <a:defRPr sz="1000">
+                        <a:defRPr sz="1400">
                           <a:solidFill>
                             <a:srgbClr val="1E293B"/>
                           </a:solidFill>
                         </a:defRPr>
                       </a:pPr>
                       <a:r>
-                        <a:t>Kirim PDF, riwayat keputusan</a:t>
+                        <a:t>Kirim memorandum, lihat riwayat</a:t>
                       </a:r>
                     </a:p>
                   </a:txBody>
                   <a:tcPr/>
                 </a:tc>
               </a:tr>
-              <a:tr h="384048">
+              <a:tr h="502920">
                 <a:tc>
                   <a:txBody>
                     <a:bodyPr/>
                     <a:lstStyle/>
                     <a:p>
                       <a:pPr>
-                        <a:defRPr sz="1000">
+                        <a:defRPr sz="1400">
                           <a:solidFill>
                             <a:srgbClr val="1E293B"/>
                           </a:solidFill>
@@ -8300,7 +9752,7 @@
                   </a:txBody>
                   <a:tcPr>
                     <a:solidFill>
-                      <a:srgbClr val="F4F6F9"/>
+                      <a:srgbClr val="FFF4EB"/>
                     </a:solidFill>
                   </a:tcPr>
                 </a:tc>
@@ -8310,7 +9762,7 @@
                     <a:lstStyle/>
                     <a:p>
                       <a:pPr>
-                        <a:defRPr sz="1000">
+                        <a:defRPr sz="1400">
                           <a:solidFill>
                             <a:srgbClr val="1E293B"/>
                           </a:solidFill>
@@ -8323,7 +9775,7 @@
                   </a:txBody>
                   <a:tcPr>
                     <a:solidFill>
-                      <a:srgbClr val="F4F6F9"/>
+                      <a:srgbClr val="FFF4EB"/>
                     </a:solidFill>
                   </a:tcPr>
                 </a:tc>
@@ -8333,32 +9785,32 @@
                     <a:lstStyle/>
                     <a:p>
                       <a:pPr>
-                        <a:defRPr sz="1000">
+                        <a:defRPr sz="1400">
                           <a:solidFill>
                             <a:srgbClr val="1E293B"/>
                           </a:solidFill>
                         </a:defRPr>
                       </a:pPr>
                       <a:r>
-                        <a:t>Akses penuh seluruh modul</a:t>
+                        <a:t>Kelola seluruh proses CorpSec</a:t>
                       </a:r>
                     </a:p>
                   </a:txBody>
                   <a:tcPr>
                     <a:solidFill>
-                      <a:srgbClr val="F4F6F9"/>
+                      <a:srgbClr val="FFF4EB"/>
                     </a:solidFill>
                   </a:tcPr>
                 </a:tc>
               </a:tr>
-              <a:tr h="384048">
+              <a:tr h="502920">
                 <a:tc>
                   <a:txBody>
                     <a:bodyPr/>
                     <a:lstStyle/>
                     <a:p>
                       <a:pPr>
-                        <a:defRPr sz="1000">
+                        <a:defRPr sz="1400">
                           <a:solidFill>
                             <a:srgbClr val="1E293B"/>
                           </a:solidFill>
@@ -8377,7 +9829,7 @@
                     <a:lstStyle/>
                     <a:p>
                       <a:pPr>
-                        <a:defRPr sz="1000">
+                        <a:defRPr sz="1400">
                           <a:solidFill>
                             <a:srgbClr val="1E293B"/>
                           </a:solidFill>
@@ -8396,28 +9848,28 @@
                     <a:lstStyle/>
                     <a:p>
                       <a:pPr>
-                        <a:defRPr sz="1000">
+                        <a:defRPr sz="1400">
                           <a:solidFill>
                             <a:srgbClr val="1E293B"/>
                           </a:solidFill>
                         </a:defRPr>
                       </a:pPr>
                       <a:r>
-                        <a:t>Review, approve/tolak + TTD</a:t>
+                        <a:t>Tinjau &amp; putuskan memorandum</a:t>
                       </a:r>
                     </a:p>
                   </a:txBody>
                   <a:tcPr/>
                 </a:tc>
               </a:tr>
-              <a:tr h="384048">
+              <a:tr h="502920">
                 <a:tc>
                   <a:txBody>
                     <a:bodyPr/>
                     <a:lstStyle/>
                     <a:p>
                       <a:pPr>
-                        <a:defRPr sz="1000">
+                        <a:defRPr sz="1400">
                           <a:solidFill>
                             <a:srgbClr val="1E293B"/>
                           </a:solidFill>
@@ -8430,7 +9882,7 @@
                   </a:txBody>
                   <a:tcPr>
                     <a:solidFill>
-                      <a:srgbClr val="F4F6F9"/>
+                      <a:srgbClr val="FFF4EB"/>
                     </a:solidFill>
                   </a:tcPr>
                 </a:tc>
@@ -8440,7 +9892,7 @@
                     <a:lstStyle/>
                     <a:p>
                       <a:pPr>
-                        <a:defRPr sz="1000">
+                        <a:defRPr sz="1400">
                           <a:solidFill>
                             <a:srgbClr val="1E293B"/>
                           </a:solidFill>
@@ -8453,7 +9905,7 @@
                   </a:txBody>
                   <a:tcPr>
                     <a:solidFill>
-                      <a:srgbClr val="F4F6F9"/>
+                      <a:srgbClr val="FFF4EB"/>
                     </a:solidFill>
                   </a:tcPr>
                 </a:tc>
@@ -8463,32 +9915,32 @@
                     <a:lstStyle/>
                     <a:p>
                       <a:pPr>
-                        <a:defRPr sz="1000">
+                        <a:defRPr sz="1400">
                           <a:solidFill>
                             <a:srgbClr val="1E293B"/>
                           </a:solidFill>
                         </a:defRPr>
                       </a:pPr>
                       <a:r>
-                        <a:t>Terima &amp; forward ke Direksi</a:t>
+                        <a:t>Teruskan ke Direksi</a:t>
                       </a:r>
                     </a:p>
                   </a:txBody>
                   <a:tcPr>
                     <a:solidFill>
-                      <a:srgbClr val="F4F6F9"/>
+                      <a:srgbClr val="FFF4EB"/>
                     </a:solidFill>
                   </a:tcPr>
                 </a:tc>
               </a:tr>
-              <a:tr h="384048">
+              <a:tr h="502920">
                 <a:tc>
                   <a:txBody>
                     <a:bodyPr/>
                     <a:lstStyle/>
                     <a:p>
                       <a:pPr>
-                        <a:defRPr sz="1000">
+                        <a:defRPr sz="1400">
                           <a:solidFill>
                             <a:srgbClr val="1E293B"/>
                           </a:solidFill>
@@ -8507,7 +9959,7 @@
                     <a:lstStyle/>
                     <a:p>
                       <a:pPr>
-                        <a:defRPr sz="1000">
+                        <a:defRPr sz="1400">
                           <a:solidFill>
                             <a:srgbClr val="1E293B"/>
                           </a:solidFill>
@@ -8526,28 +9978,28 @@
                     <a:lstStyle/>
                     <a:p>
                       <a:pPr>
-                        <a:defRPr sz="1000">
+                        <a:defRPr sz="1400">
                           <a:solidFill>
                             <a:srgbClr val="1E293B"/>
                           </a:solidFill>
                         </a:defRPr>
                       </a:pPr>
                       <a:r>
-                        <a:t>Forward ke Komisaris</a:t>
+                        <a:t>Teruskan ke Komisaris</a:t>
                       </a:r>
                     </a:p>
                   </a:txBody>
                   <a:tcPr/>
                 </a:tc>
               </a:tr>
-              <a:tr h="384048">
+              <a:tr h="502920">
                 <a:tc>
                   <a:txBody>
                     <a:bodyPr/>
                     <a:lstStyle/>
                     <a:p>
                       <a:pPr>
-                        <a:defRPr sz="1000">
+                        <a:defRPr sz="1400">
                           <a:solidFill>
                             <a:srgbClr val="1E293B"/>
                           </a:solidFill>
@@ -8560,7 +10012,7 @@
                   </a:txBody>
                   <a:tcPr>
                     <a:solidFill>
-                      <a:srgbClr val="F4F6F9"/>
+                      <a:srgbClr val="FFF4EB"/>
                     </a:solidFill>
                   </a:tcPr>
                 </a:tc>
@@ -8570,7 +10022,7 @@
                     <a:lstStyle/>
                     <a:p>
                       <a:pPr>
-                        <a:defRPr sz="1000">
+                        <a:defRPr sz="1400">
                           <a:solidFill>
                             <a:srgbClr val="1E293B"/>
                           </a:solidFill>
@@ -8583,7 +10035,7 @@
                   </a:txBody>
                   <a:tcPr>
                     <a:solidFill>
-                      <a:srgbClr val="F4F6F9"/>
+                      <a:srgbClr val="FFF4EB"/>
                     </a:solidFill>
                   </a:tcPr>
                 </a:tc>
@@ -8593,32 +10045,32 @@
                     <a:lstStyle/>
                     <a:p>
                       <a:pPr>
-                        <a:defRPr sz="1000">
+                        <a:defRPr sz="1400">
                           <a:solidFill>
                             <a:srgbClr val="1E293B"/>
                           </a:solidFill>
                         </a:defRPr>
                       </a:pPr>
                       <a:r>
-                        <a:t>Keputusan + tanda tangan digital</a:t>
+                        <a:t>Berikan keputusan &amp; tanda tangan</a:t>
                       </a:r>
                     </a:p>
                   </a:txBody>
                   <a:tcPr>
                     <a:solidFill>
-                      <a:srgbClr val="F4F6F9"/>
+                      <a:srgbClr val="FFF4EB"/>
                     </a:solidFill>
                   </a:tcPr>
                 </a:tc>
               </a:tr>
-              <a:tr h="384048">
+              <a:tr h="502920">
                 <a:tc>
                   <a:txBody>
                     <a:bodyPr/>
                     <a:lstStyle/>
                     <a:p>
                       <a:pPr>
-                        <a:defRPr sz="1000">
+                        <a:defRPr sz="1400">
                           <a:solidFill>
                             <a:srgbClr val="1E293B"/>
                           </a:solidFill>
@@ -8637,7 +10089,7 @@
                     <a:lstStyle/>
                     <a:p>
                       <a:pPr>
-                        <a:defRPr sz="1000">
+                        <a:defRPr sz="1400">
                           <a:solidFill>
                             <a:srgbClr val="1E293B"/>
                           </a:solidFill>
@@ -8656,14 +10108,14 @@
                     <a:lstStyle/>
                     <a:p>
                       <a:pPr>
-                        <a:defRPr sz="1000">
+                        <a:defRPr sz="1400">
                           <a:solidFill>
                             <a:srgbClr val="1E293B"/>
                           </a:solidFill>
                         </a:defRPr>
                       </a:pPr>
                       <a:r>
-                        <a:t>Keputusan + disposisi</a:t>
+                        <a:t>Berikan keputusan</a:t>
                       </a:r>
                     </a:p>
                   </a:txBody>
@@ -8676,14 +10128,57 @@
       </p:graphicFrame>
       <p:sp>
         <p:nvSpPr>
-          <p:cNvPr id="5" name="TextBox 4"/>
+          <p:cNvPr id="5" name="Rectangle 4"/>
+          <p:cNvSpPr/>
+          <p:nvPr/>
+        </p:nvSpPr>
+        <p:spPr>
+          <a:xfrm>
+            <a:off x="0" y="6446520"/>
+            <a:ext cx="12191695" cy="411480"/>
+          </a:xfrm>
+          <a:prstGeom prst="rect">
+            <a:avLst/>
+          </a:prstGeom>
+          <a:solidFill>
+            <a:srgbClr val="0C2340"/>
+          </a:solidFill>
+          <a:ln>
+            <a:noFill/>
+          </a:ln>
+        </p:spPr>
+        <p:style>
+          <a:lnRef idx="1">
+            <a:schemeClr val="accent1"/>
+          </a:lnRef>
+          <a:fillRef idx="3">
+            <a:schemeClr val="accent1"/>
+          </a:fillRef>
+          <a:effectRef idx="2">
+            <a:schemeClr val="accent1"/>
+          </a:effectRef>
+          <a:fontRef idx="minor">
+            <a:schemeClr val="lt1"/>
+          </a:fontRef>
+        </p:style>
+        <p:txBody>
+          <a:bodyPr rtlCol="0" anchor="ctr"/>
+          <a:lstStyle/>
+          <a:p>
+            <a:pPr algn="ctr"/>
+          </a:p>
+        </p:txBody>
+      </p:sp>
+      <p:sp>
+        <p:nvSpPr>
+          <p:cNvPr id="6" name="TextBox 5"/>
           <p:cNvSpPr txBox="1"/>
           <p:nvPr/>
         </p:nvSpPr>
         <p:spPr>
           <a:xfrm>
-            <a:off x="457200" y="6400800"/>
-            <a:ext cx="11247120" cy="365760"/>
+            <a:off x="457200" y="6492240"/>
+            <a:ext cx="5486400" cy="320040"/>
           </a:xfrm>
           <a:prstGeom prst="rect">
             <a:avLst/>
@@ -8696,15 +10191,50 @@
           </a:bodyPr>
           <a:lstStyle/>
           <a:p>
+            <a:pPr>
+              <a:defRPr sz="1100" b="1">
+                <a:solidFill>
+                  <a:srgbClr val="F58220"/>
+                </a:solidFill>
+              </a:defRPr>
+            </a:pPr>
+            <a:r>
+              <a:t>CorpSec Bank Sumut</a:t>
+            </a:r>
+          </a:p>
+        </p:txBody>
+      </p:sp>
+      <p:sp>
+        <p:nvSpPr>
+          <p:cNvPr id="7" name="TextBox 6"/>
+          <p:cNvSpPr txBox="1"/>
+          <p:nvPr/>
+        </p:nvSpPr>
+        <p:spPr>
+          <a:xfrm>
+            <a:off x="10515600" y="6492240"/>
+            <a:ext cx="1371600" cy="320040"/>
+          </a:xfrm>
+          <a:prstGeom prst="rect">
+            <a:avLst/>
+          </a:prstGeom>
+          <a:noFill/>
+        </p:spPr>
+        <p:txBody>
+          <a:bodyPr wrap="none">
+            <a:spAutoFit/>
+          </a:bodyPr>
+          <a:lstStyle/>
+          <a:p>
             <a:pPr algn="r">
-              <a:defRPr sz="900">
-                <a:solidFill>
-                  <a:srgbClr val="64748B"/>
-                </a:solidFill>
-              </a:defRPr>
-            </a:pPr>
-            <a:r>
-              <a:t>CorpSec Bank Sumut — PRD Discovery v0.1</a:t>
+              <a:defRPr sz="1100">
+                <a:solidFill>
+                  <a:srgbClr val="FFFFFF"/>
+                </a:solidFill>
+              </a:defRPr>
+            </a:pPr>
+            <a:r>
+              <a:t>8</a:t>
             </a:r>
           </a:p>
         </p:txBody>
@@ -8723,7 +10253,7 @@
     <p:bg>
       <p:bgPr>
         <a:solidFill>
-          <a:srgbClr val="FFFFFF"/>
+          <a:srgbClr val="F8FAFC"/>
         </a:solidFill>
         <a:effectLst/>
       </p:bgPr>
@@ -8744,7 +10274,7 @@
         <p:spPr>
           <a:xfrm>
             <a:off x="0" y="0"/>
-            <a:ext cx="12191695" cy="73152"/>
+            <a:ext cx="164592" cy="6446520"/>
           </a:xfrm>
           <a:prstGeom prst="rect">
             <a:avLst/>
@@ -8786,8 +10316,8 @@
         </p:nvSpPr>
         <p:spPr>
           <a:xfrm>
-            <a:off x="548640" y="320040"/>
-            <a:ext cx="10972800" cy="640080"/>
+            <a:off x="502920" y="320040"/>
+            <a:ext cx="11155680" cy="1005840"/>
           </a:xfrm>
           <a:prstGeom prst="rect">
             <a:avLst/>
@@ -8801,14 +10331,29 @@
           <a:lstStyle/>
           <a:p>
             <a:pPr>
-              <a:defRPr sz="2800" b="1">
+              <a:defRPr sz="3400" b="1">
                 <a:solidFill>
                   <a:srgbClr val="0C2340"/>
                 </a:solidFill>
               </a:defRPr>
             </a:pPr>
             <a:r>
-              <a:t>Akun Demo untuk Live Demo</a:t>
+              <a:t>Akun untuk Coba Sistem</a:t>
+            </a:r>
+          </a:p>
+          <a:p>
+            <a:pPr>
+              <a:spcBef>
+                <a:spcPts val="600"/>
+              </a:spcBef>
+              <a:defRPr sz="1700">
+                <a:solidFill>
+                  <a:srgbClr val="64748B"/>
+                </a:solidFill>
+              </a:defRPr>
+            </a:pPr>
+            <a:r>
+              <a:t>Gunakan akun berikut saat demo atau presentasi</a:t>
             </a:r>
           </a:p>
         </p:txBody>
@@ -8822,8 +10367,8 @@
           <p:nvPr/>
         </p:nvGraphicFramePr>
         <p:xfrm>
-          <a:off x="457200" y="1143000"/>
-          <a:ext cx="11247120" cy="3456432"/>
+          <a:off x="502920" y="1508760"/>
+          <a:ext cx="11155680" cy="4389120"/>
         </p:xfrm>
         <a:graphic>
           <a:graphicData uri="http://schemas.openxmlformats.org/drawingml/2006/table">
@@ -8832,25 +10377,25 @@
                 <a:tableStyleId>{5C22544A-7EE6-4342-B048-85BDC9FD1C3A}</a:tableStyleId>
               </a:tblPr>
               <a:tblGrid>
-                <a:gridCol w="3749040"/>
-                <a:gridCol w="3749040"/>
-                <a:gridCol w="3749040"/>
+                <a:gridCol w="3718560"/>
+                <a:gridCol w="3718560"/>
+                <a:gridCol w="3718560"/>
               </a:tblGrid>
-              <a:tr h="384048">
+              <a:tr h="487680">
                 <a:tc>
                   <a:txBody>
                     <a:bodyPr/>
                     <a:lstStyle/>
                     <a:p>
                       <a:pPr>
-                        <a:defRPr b="1" sz="1100">
+                        <a:defRPr b="1" sz="1500">
                           <a:solidFill>
                             <a:srgbClr val="FFFFFF"/>
                           </a:solidFill>
                         </a:defRPr>
                       </a:pPr>
                       <a:r>
-                        <a:t>Role</a:t>
+                        <a:t>Peran</a:t>
                       </a:r>
                     </a:p>
                   </a:txBody>
@@ -8866,7 +10411,7 @@
                     <a:lstStyle/>
                     <a:p>
                       <a:pPr>
-                        <a:defRPr b="1" sz="1100">
+                        <a:defRPr b="1" sz="1500">
                           <a:solidFill>
                             <a:srgbClr val="FFFFFF"/>
                           </a:solidFill>
@@ -8889,7 +10434,7 @@
                     <a:lstStyle/>
                     <a:p>
                       <a:pPr>
-                        <a:defRPr b="1" sz="1100">
+                        <a:defRPr b="1" sz="1500">
                           <a:solidFill>
                             <a:srgbClr val="FFFFFF"/>
                           </a:solidFill>
@@ -8907,14 +10452,14 @@
                   </a:tcPr>
                 </a:tc>
               </a:tr>
-              <a:tr h="384048">
+              <a:tr h="487680">
                 <a:tc>
                   <a:txBody>
                     <a:bodyPr/>
                     <a:lstStyle/>
                     <a:p>
                       <a:pPr>
-                        <a:defRPr sz="1000">
+                        <a:defRPr sz="1400">
                           <a:solidFill>
                             <a:srgbClr val="1E293B"/>
                           </a:solidFill>
@@ -8933,7 +10478,7 @@
                     <a:lstStyle/>
                     <a:p>
                       <a:pPr>
-                        <a:defRPr sz="1000">
+                        <a:defRPr sz="1400">
                           <a:solidFill>
                             <a:srgbClr val="1E293B"/>
                           </a:solidFill>
@@ -8952,7 +10497,7 @@
                     <a:lstStyle/>
                     <a:p>
                       <a:pPr>
-                        <a:defRPr sz="1000">
+                        <a:defRPr sz="1400">
                           <a:solidFill>
                             <a:srgbClr val="1E293B"/>
                           </a:solidFill>
@@ -8966,14 +10511,14 @@
                   <a:tcPr/>
                 </a:tc>
               </a:tr>
-              <a:tr h="384048">
+              <a:tr h="487680">
                 <a:tc>
                   <a:txBody>
                     <a:bodyPr/>
                     <a:lstStyle/>
                     <a:p>
                       <a:pPr>
-                        <a:defRPr sz="1000">
+                        <a:defRPr sz="1400">
                           <a:solidFill>
                             <a:srgbClr val="1E293B"/>
                           </a:solidFill>
@@ -8986,7 +10531,7 @@
                   </a:txBody>
                   <a:tcPr>
                     <a:solidFill>
-                      <a:srgbClr val="F4F6F9"/>
+                      <a:srgbClr val="FFF4EB"/>
                     </a:solidFill>
                   </a:tcPr>
                 </a:tc>
@@ -8996,7 +10541,7 @@
                     <a:lstStyle/>
                     <a:p>
                       <a:pPr>
-                        <a:defRPr sz="1000">
+                        <a:defRPr sz="1400">
                           <a:solidFill>
                             <a:srgbClr val="1E293B"/>
                           </a:solidFill>
@@ -9009,7 +10554,7 @@
                   </a:txBody>
                   <a:tcPr>
                     <a:solidFill>
-                      <a:srgbClr val="F4F6F9"/>
+                      <a:srgbClr val="FFF4EB"/>
                     </a:solidFill>
                   </a:tcPr>
                 </a:tc>
@@ -9019,7 +10564,7 @@
                     <a:lstStyle/>
                     <a:p>
                       <a:pPr>
-                        <a:defRPr sz="1000">
+                        <a:defRPr sz="1400">
                           <a:solidFill>
                             <a:srgbClr val="1E293B"/>
                           </a:solidFill>
@@ -9032,19 +10577,19 @@
                   </a:txBody>
                   <a:tcPr>
                     <a:solidFill>
-                      <a:srgbClr val="F4F6F9"/>
+                      <a:srgbClr val="FFF4EB"/>
                     </a:solidFill>
                   </a:tcPr>
                 </a:tc>
               </a:tr>
-              <a:tr h="384048">
+              <a:tr h="487680">
                 <a:tc>
                   <a:txBody>
                     <a:bodyPr/>
                     <a:lstStyle/>
                     <a:p>
                       <a:pPr>
-                        <a:defRPr sz="1000">
+                        <a:defRPr sz="1400">
                           <a:solidFill>
                             <a:srgbClr val="1E293B"/>
                           </a:solidFill>
@@ -9063,7 +10608,7 @@
                     <a:lstStyle/>
                     <a:p>
                       <a:pPr>
-                        <a:defRPr sz="1000">
+                        <a:defRPr sz="1400">
                           <a:solidFill>
                             <a:srgbClr val="1E293B"/>
                           </a:solidFill>
@@ -9082,7 +10627,7 @@
                     <a:lstStyle/>
                     <a:p>
                       <a:pPr>
-                        <a:defRPr sz="1000">
+                        <a:defRPr sz="1400">
                           <a:solidFill>
                             <a:srgbClr val="1E293B"/>
                           </a:solidFill>
@@ -9096,14 +10641,14 @@
                   <a:tcPr/>
                 </a:tc>
               </a:tr>
-              <a:tr h="384048">
+              <a:tr h="487680">
                 <a:tc>
                   <a:txBody>
                     <a:bodyPr/>
                     <a:lstStyle/>
                     <a:p>
                       <a:pPr>
-                        <a:defRPr sz="1000">
+                        <a:defRPr sz="1400">
                           <a:solidFill>
                             <a:srgbClr val="1E293B"/>
                           </a:solidFill>
@@ -9116,7 +10661,7 @@
                   </a:txBody>
                   <a:tcPr>
                     <a:solidFill>
-                      <a:srgbClr val="F4F6F9"/>
+                      <a:srgbClr val="FFF4EB"/>
                     </a:solidFill>
                   </a:tcPr>
                 </a:tc>
@@ -9126,7 +10671,7 @@
                     <a:lstStyle/>
                     <a:p>
                       <a:pPr>
-                        <a:defRPr sz="1000">
+                        <a:defRPr sz="1400">
                           <a:solidFill>
                             <a:srgbClr val="1E293B"/>
                           </a:solidFill>
@@ -9139,7 +10684,7 @@
                   </a:txBody>
                   <a:tcPr>
                     <a:solidFill>
-                      <a:srgbClr val="F4F6F9"/>
+                      <a:srgbClr val="FFF4EB"/>
                     </a:solidFill>
                   </a:tcPr>
                 </a:tc>
@@ -9149,7 +10694,7 @@
                     <a:lstStyle/>
                     <a:p>
                       <a:pPr>
-                        <a:defRPr sz="1000">
+                        <a:defRPr sz="1400">
                           <a:solidFill>
                             <a:srgbClr val="1E293B"/>
                           </a:solidFill>
@@ -9162,19 +10707,19 @@
                   </a:txBody>
                   <a:tcPr>
                     <a:solidFill>
-                      <a:srgbClr val="F4F6F9"/>
+                      <a:srgbClr val="FFF4EB"/>
                     </a:solidFill>
                   </a:tcPr>
                 </a:tc>
               </a:tr>
-              <a:tr h="384048">
+              <a:tr h="487680">
                 <a:tc>
                   <a:txBody>
                     <a:bodyPr/>
                     <a:lstStyle/>
                     <a:p>
                       <a:pPr>
-                        <a:defRPr sz="1000">
+                        <a:defRPr sz="1400">
                           <a:solidFill>
                             <a:srgbClr val="1E293B"/>
                           </a:solidFill>
@@ -9193,7 +10738,7 @@
                     <a:lstStyle/>
                     <a:p>
                       <a:pPr>
-                        <a:defRPr sz="1000">
+                        <a:defRPr sz="1400">
                           <a:solidFill>
                             <a:srgbClr val="1E293B"/>
                           </a:solidFill>
@@ -9212,7 +10757,7 @@
                     <a:lstStyle/>
                     <a:p>
                       <a:pPr>
-                        <a:defRPr sz="1000">
+                        <a:defRPr sz="1400">
                           <a:solidFill>
                             <a:srgbClr val="1E293B"/>
                           </a:solidFill>
@@ -9226,14 +10771,14 @@
                   <a:tcPr/>
                 </a:tc>
               </a:tr>
-              <a:tr h="384048">
+              <a:tr h="487680">
                 <a:tc>
                   <a:txBody>
                     <a:bodyPr/>
                     <a:lstStyle/>
                     <a:p>
                       <a:pPr>
-                        <a:defRPr sz="1000">
+                        <a:defRPr sz="1400">
                           <a:solidFill>
                             <a:srgbClr val="1E293B"/>
                           </a:solidFill>
@@ -9246,7 +10791,7 @@
                   </a:txBody>
                   <a:tcPr>
                     <a:solidFill>
-                      <a:srgbClr val="F4F6F9"/>
+                      <a:srgbClr val="FFF4EB"/>
                     </a:solidFill>
                   </a:tcPr>
                 </a:tc>
@@ -9256,7 +10801,7 @@
                     <a:lstStyle/>
                     <a:p>
                       <a:pPr>
-                        <a:defRPr sz="1000">
+                        <a:defRPr sz="1400">
                           <a:solidFill>
                             <a:srgbClr val="1E293B"/>
                           </a:solidFill>
@@ -9269,7 +10814,7 @@
                   </a:txBody>
                   <a:tcPr>
                     <a:solidFill>
-                      <a:srgbClr val="F4F6F9"/>
+                      <a:srgbClr val="FFF4EB"/>
                     </a:solidFill>
                   </a:tcPr>
                 </a:tc>
@@ -9279,7 +10824,7 @@
                     <a:lstStyle/>
                     <a:p>
                       <a:pPr>
-                        <a:defRPr sz="1000">
+                        <a:defRPr sz="1400">
                           <a:solidFill>
                             <a:srgbClr val="1E293B"/>
                           </a:solidFill>
@@ -9292,19 +10837,19 @@
                   </a:txBody>
                   <a:tcPr>
                     <a:solidFill>
-                      <a:srgbClr val="F4F6F9"/>
+                      <a:srgbClr val="FFF4EB"/>
                     </a:solidFill>
                   </a:tcPr>
                 </a:tc>
               </a:tr>
-              <a:tr h="384048">
+              <a:tr h="487680">
                 <a:tc>
                   <a:txBody>
                     <a:bodyPr/>
                     <a:lstStyle/>
                     <a:p>
                       <a:pPr>
-                        <a:defRPr sz="1000">
+                        <a:defRPr sz="1400">
                           <a:solidFill>
                             <a:srgbClr val="1E293B"/>
                           </a:solidFill>
@@ -9323,7 +10868,7 @@
                     <a:lstStyle/>
                     <a:p>
                       <a:pPr>
-                        <a:defRPr sz="1000">
+                        <a:defRPr sz="1400">
                           <a:solidFill>
                             <a:srgbClr val="1E293B"/>
                           </a:solidFill>
@@ -9342,7 +10887,7 @@
                     <a:lstStyle/>
                     <a:p>
                       <a:pPr>
-                        <a:defRPr sz="1000">
+                        <a:defRPr sz="1400">
                           <a:solidFill>
                             <a:srgbClr val="1E293B"/>
                           </a:solidFill>
@@ -9356,14 +10901,14 @@
                   <a:tcPr/>
                 </a:tc>
               </a:tr>
-              <a:tr h="384048">
+              <a:tr h="487680">
                 <a:tc>
                   <a:txBody>
                     <a:bodyPr/>
                     <a:lstStyle/>
                     <a:p>
                       <a:pPr>
-                        <a:defRPr sz="1000">
+                        <a:defRPr sz="1400">
                           <a:solidFill>
                             <a:srgbClr val="1E293B"/>
                           </a:solidFill>
@@ -9376,7 +10921,7 @@
                   </a:txBody>
                   <a:tcPr>
                     <a:solidFill>
-                      <a:srgbClr val="F4F6F9"/>
+                      <a:srgbClr val="FFF4EB"/>
                     </a:solidFill>
                   </a:tcPr>
                 </a:tc>
@@ -9386,7 +10931,7 @@
                     <a:lstStyle/>
                     <a:p>
                       <a:pPr>
-                        <a:defRPr sz="1000">
+                        <a:defRPr sz="1400">
                           <a:solidFill>
                             <a:srgbClr val="1E293B"/>
                           </a:solidFill>
@@ -9399,7 +10944,7 @@
                   </a:txBody>
                   <a:tcPr>
                     <a:solidFill>
-                      <a:srgbClr val="F4F6F9"/>
+                      <a:srgbClr val="FFF4EB"/>
                     </a:solidFill>
                   </a:tcPr>
                 </a:tc>
@@ -9409,7 +10954,7 @@
                     <a:lstStyle/>
                     <a:p>
                       <a:pPr>
-                        <a:defRPr sz="1000">
+                        <a:defRPr sz="1400">
                           <a:solidFill>
                             <a:srgbClr val="1E293B"/>
                           </a:solidFill>
@@ -9422,7 +10967,7 @@
                   </a:txBody>
                   <a:tcPr>
                     <a:solidFill>
-                      <a:srgbClr val="F4F6F9"/>
+                      <a:srgbClr val="FFF4EB"/>
                     </a:solidFill>
                   </a:tcPr>
                 </a:tc>
@@ -9433,14 +10978,57 @@
       </p:graphicFrame>
       <p:sp>
         <p:nvSpPr>
-          <p:cNvPr id="5" name="TextBox 4"/>
+          <p:cNvPr id="5" name="Rectangle 4"/>
+          <p:cNvSpPr/>
+          <p:nvPr/>
+        </p:nvSpPr>
+        <p:spPr>
+          <a:xfrm>
+            <a:off x="0" y="6446520"/>
+            <a:ext cx="12191695" cy="411480"/>
+          </a:xfrm>
+          <a:prstGeom prst="rect">
+            <a:avLst/>
+          </a:prstGeom>
+          <a:solidFill>
+            <a:srgbClr val="0C2340"/>
+          </a:solidFill>
+          <a:ln>
+            <a:noFill/>
+          </a:ln>
+        </p:spPr>
+        <p:style>
+          <a:lnRef idx="1">
+            <a:schemeClr val="accent1"/>
+          </a:lnRef>
+          <a:fillRef idx="3">
+            <a:schemeClr val="accent1"/>
+          </a:fillRef>
+          <a:effectRef idx="2">
+            <a:schemeClr val="accent1"/>
+          </a:effectRef>
+          <a:fontRef idx="minor">
+            <a:schemeClr val="lt1"/>
+          </a:fontRef>
+        </p:style>
+        <p:txBody>
+          <a:bodyPr rtlCol="0" anchor="ctr"/>
+          <a:lstStyle/>
+          <a:p>
+            <a:pPr algn="ctr"/>
+          </a:p>
+        </p:txBody>
+      </p:sp>
+      <p:sp>
+        <p:nvSpPr>
+          <p:cNvPr id="6" name="TextBox 5"/>
           <p:cNvSpPr txBox="1"/>
           <p:nvPr/>
         </p:nvSpPr>
         <p:spPr>
           <a:xfrm>
-            <a:off x="457200" y="6400800"/>
-            <a:ext cx="11247120" cy="365760"/>
+            <a:off x="457200" y="6492240"/>
+            <a:ext cx="5486400" cy="320040"/>
           </a:xfrm>
           <a:prstGeom prst="rect">
             <a:avLst/>
@@ -9453,15 +11041,50 @@
           </a:bodyPr>
           <a:lstStyle/>
           <a:p>
+            <a:pPr>
+              <a:defRPr sz="1100" b="1">
+                <a:solidFill>
+                  <a:srgbClr val="F58220"/>
+                </a:solidFill>
+              </a:defRPr>
+            </a:pPr>
+            <a:r>
+              <a:t>CorpSec Bank Sumut</a:t>
+            </a:r>
+          </a:p>
+        </p:txBody>
+      </p:sp>
+      <p:sp>
+        <p:nvSpPr>
+          <p:cNvPr id="7" name="TextBox 6"/>
+          <p:cNvSpPr txBox="1"/>
+          <p:nvPr/>
+        </p:nvSpPr>
+        <p:spPr>
+          <a:xfrm>
+            <a:off x="10515600" y="6492240"/>
+            <a:ext cx="1371600" cy="320040"/>
+          </a:xfrm>
+          <a:prstGeom prst="rect">
+            <a:avLst/>
+          </a:prstGeom>
+          <a:noFill/>
+        </p:spPr>
+        <p:txBody>
+          <a:bodyPr wrap="none">
+            <a:spAutoFit/>
+          </a:bodyPr>
+          <a:lstStyle/>
+          <a:p>
             <a:pPr algn="r">
-              <a:defRPr sz="900">
-                <a:solidFill>
-                  <a:srgbClr val="64748B"/>
-                </a:solidFill>
-              </a:defRPr>
-            </a:pPr>
-            <a:r>
-              <a:t>CorpSec Bank Sumut — PRD Discovery v0.1</a:t>
+              <a:defRPr sz="1100">
+                <a:solidFill>
+                  <a:srgbClr val="FFFFFF"/>
+                </a:solidFill>
+              </a:defRPr>
+            </a:pPr>
+            <a:r>
+              <a:t>9</a:t>
             </a:r>
           </a:p>
         </p:txBody>

--- a/CorpSec-Bank-Sumut-Presentasi.pptx
+++ b/CorpSec-Bank-Sumut-Presentasi.pptx
@@ -15,6 +15,9 @@
     <p:sldId id="263" r:id="rId14"/>
     <p:sldId id="264" r:id="rId15"/>
     <p:sldId id="265" r:id="rId16"/>
+    <p:sldId id="266" r:id="rId17"/>
+    <p:sldId id="267" r:id="rId18"/>
+    <p:sldId id="268" r:id="rId19"/>
   </p:sldIdLst>
   <p:sldSz cx="12191695" cy="6858000" type="screen4x3"/>
   <p:notesSz cx="6858000" cy="9144000"/>
@@ -3392,6 +3395,2354 @@
     <p:bg>
       <p:bgPr>
         <a:solidFill>
+          <a:srgbClr val="F8FAFC"/>
+        </a:solidFill>
+        <a:effectLst/>
+      </p:bgPr>
+    </p:bg>
+    <p:spTree>
+      <p:nvGrpSpPr>
+        <p:cNvPr id="1" name=""/>
+        <p:cNvGrpSpPr/>
+        <p:nvPr/>
+      </p:nvGrpSpPr>
+      <p:grpSpPr/>
+      <p:sp>
+        <p:nvSpPr>
+          <p:cNvPr id="2" name="Rectangle 1"/>
+          <p:cNvSpPr/>
+          <p:nvPr/>
+        </p:nvSpPr>
+        <p:spPr>
+          <a:xfrm>
+            <a:off x="0" y="0"/>
+            <a:ext cx="164592" cy="6446520"/>
+          </a:xfrm>
+          <a:prstGeom prst="rect">
+            <a:avLst/>
+          </a:prstGeom>
+          <a:solidFill>
+            <a:srgbClr val="F58220"/>
+          </a:solidFill>
+          <a:ln>
+            <a:noFill/>
+          </a:ln>
+        </p:spPr>
+        <p:style>
+          <a:lnRef idx="1">
+            <a:schemeClr val="accent1"/>
+          </a:lnRef>
+          <a:fillRef idx="3">
+            <a:schemeClr val="accent1"/>
+          </a:fillRef>
+          <a:effectRef idx="2">
+            <a:schemeClr val="accent1"/>
+          </a:effectRef>
+          <a:fontRef idx="minor">
+            <a:schemeClr val="lt1"/>
+          </a:fontRef>
+        </p:style>
+        <p:txBody>
+          <a:bodyPr rtlCol="0" anchor="ctr"/>
+          <a:lstStyle/>
+          <a:p>
+            <a:pPr algn="ctr"/>
+          </a:p>
+        </p:txBody>
+      </p:sp>
+      <p:sp>
+        <p:nvSpPr>
+          <p:cNvPr id="3" name="TextBox 2"/>
+          <p:cNvSpPr txBox="1"/>
+          <p:nvPr/>
+        </p:nvSpPr>
+        <p:spPr>
+          <a:xfrm>
+            <a:off x="502920" y="320040"/>
+            <a:ext cx="11155680" cy="914400"/>
+          </a:xfrm>
+          <a:prstGeom prst="rect">
+            <a:avLst/>
+          </a:prstGeom>
+          <a:noFill/>
+        </p:spPr>
+        <p:txBody>
+          <a:bodyPr wrap="none">
+            <a:spAutoFit/>
+          </a:bodyPr>
+          <a:lstStyle/>
+          <a:p>
+            <a:pPr>
+              <a:defRPr sz="3200" b="1">
+                <a:solidFill>
+                  <a:srgbClr val="0C2340"/>
+                </a:solidFill>
+              </a:defRPr>
+            </a:pPr>
+            <a:r>
+              <a:t>Perbaikan Aspek User Experience</a:t>
+            </a:r>
+          </a:p>
+          <a:p>
+            <a:pPr>
+              <a:spcBef>
+                <a:spcPts val="600"/>
+              </a:spcBef>
+              <a:defRPr sz="1700">
+                <a:solidFill>
+                  <a:srgbClr val="64748B"/>
+                </a:solidFill>
+              </a:defRPr>
+            </a:pPr>
+            <a:r>
+              <a:t>Yang sudah diterapkan dan rencana perbaikan</a:t>
+            </a:r>
+          </a:p>
+        </p:txBody>
+      </p:sp>
+      <p:sp>
+        <p:nvSpPr>
+          <p:cNvPr id="4" name="Rounded Rectangle 3"/>
+          <p:cNvSpPr/>
+          <p:nvPr/>
+        </p:nvSpPr>
+        <p:spPr>
+          <a:xfrm>
+            <a:off x="411480" y="1325880"/>
+            <a:ext cx="5394960" cy="4572000"/>
+          </a:xfrm>
+          <a:prstGeom prst="roundRect">
+            <a:avLst/>
+          </a:prstGeom>
+          <a:solidFill>
+            <a:srgbClr val="FFFFFF"/>
+          </a:solidFill>
+          <a:ln>
+            <a:solidFill>
+              <a:srgbClr val="E2E8F0"/>
+            </a:solidFill>
+          </a:ln>
+        </p:spPr>
+        <p:style>
+          <a:lnRef idx="1">
+            <a:schemeClr val="accent1"/>
+          </a:lnRef>
+          <a:fillRef idx="3">
+            <a:schemeClr val="accent1"/>
+          </a:fillRef>
+          <a:effectRef idx="2">
+            <a:schemeClr val="accent1"/>
+          </a:effectRef>
+          <a:fontRef idx="minor">
+            <a:schemeClr val="lt1"/>
+          </a:fontRef>
+        </p:style>
+        <p:txBody>
+          <a:bodyPr rtlCol="0" anchor="ctr"/>
+          <a:lstStyle/>
+          <a:p>
+            <a:pPr algn="ctr"/>
+          </a:p>
+        </p:txBody>
+      </p:sp>
+      <p:sp>
+        <p:nvSpPr>
+          <p:cNvPr id="5" name="Rectangle 4"/>
+          <p:cNvSpPr/>
+          <p:nvPr/>
+        </p:nvSpPr>
+        <p:spPr>
+          <a:xfrm>
+            <a:off x="411480" y="1325880"/>
+            <a:ext cx="5394960" cy="475488"/>
+          </a:xfrm>
+          <a:prstGeom prst="rect">
+            <a:avLst/>
+          </a:prstGeom>
+          <a:solidFill>
+            <a:srgbClr val="059669"/>
+          </a:solidFill>
+          <a:ln>
+            <a:noFill/>
+          </a:ln>
+        </p:spPr>
+        <p:style>
+          <a:lnRef idx="1">
+            <a:schemeClr val="accent1"/>
+          </a:lnRef>
+          <a:fillRef idx="3">
+            <a:schemeClr val="accent1"/>
+          </a:fillRef>
+          <a:effectRef idx="2">
+            <a:schemeClr val="accent1"/>
+          </a:effectRef>
+          <a:fontRef idx="minor">
+            <a:schemeClr val="lt1"/>
+          </a:fontRef>
+        </p:style>
+        <p:txBody>
+          <a:bodyPr rtlCol="0" anchor="ctr"/>
+          <a:lstStyle/>
+          <a:p>
+            <a:pPr algn="ctr"/>
+          </a:p>
+        </p:txBody>
+      </p:sp>
+      <p:sp>
+        <p:nvSpPr>
+          <p:cNvPr id="6" name="TextBox 5"/>
+          <p:cNvSpPr txBox="1"/>
+          <p:nvPr/>
+        </p:nvSpPr>
+        <p:spPr>
+          <a:xfrm>
+            <a:off x="594360" y="1399032"/>
+            <a:ext cx="5029200" cy="365760"/>
+          </a:xfrm>
+          <a:prstGeom prst="rect">
+            <a:avLst/>
+          </a:prstGeom>
+          <a:noFill/>
+        </p:spPr>
+        <p:txBody>
+          <a:bodyPr wrap="none">
+            <a:spAutoFit/>
+          </a:bodyPr>
+          <a:lstStyle/>
+          <a:p>
+            <a:pPr>
+              <a:defRPr sz="1600" b="1">
+                <a:solidFill>
+                  <a:srgbClr val="FFFFFF"/>
+                </a:solidFill>
+              </a:defRPr>
+            </a:pPr>
+            <a:r>
+              <a:t>Sudah Diterapkan</a:t>
+            </a:r>
+          </a:p>
+        </p:txBody>
+      </p:sp>
+      <p:sp>
+        <p:nvSpPr>
+          <p:cNvPr id="7" name="TextBox 6"/>
+          <p:cNvSpPr txBox="1"/>
+          <p:nvPr/>
+        </p:nvSpPr>
+        <p:spPr>
+          <a:xfrm>
+            <a:off x="594360" y="1920240"/>
+            <a:ext cx="5029200" cy="3886200"/>
+          </a:xfrm>
+          <a:prstGeom prst="rect">
+            <a:avLst/>
+          </a:prstGeom>
+          <a:noFill/>
+        </p:spPr>
+        <p:txBody>
+          <a:bodyPr wrap="square">
+            <a:spAutoFit/>
+          </a:bodyPr>
+          <a:lstStyle/>
+          <a:p>
+            <a:pPr>
+              <a:spcAft>
+                <a:spcPts val="600"/>
+              </a:spcAft>
+              <a:defRPr sz="1400">
+                <a:solidFill>
+                  <a:srgbClr val="1E293B"/>
+                </a:solidFill>
+              </a:defRPr>
+            </a:pPr>
+            <a:r>
+              <a:t>Desain UI mengikuti identitas Bank Sumut (navy &amp; oranye)</a:t>
+            </a:r>
+          </a:p>
+          <a:p>
+            <a:pPr>
+              <a:spcAft>
+                <a:spcPts val="600"/>
+              </a:spcAft>
+              <a:defRPr sz="1400">
+                <a:solidFill>
+                  <a:srgbClr val="1E293B"/>
+                </a:solidFill>
+              </a:defRPr>
+            </a:pPr>
+            <a:r>
+              <a:t>Login page dengan hero image &amp; akun demo cepat</a:t>
+            </a:r>
+          </a:p>
+          <a:p>
+            <a:pPr>
+              <a:spcAft>
+                <a:spcPts val="600"/>
+              </a:spcAft>
+              <a:defRPr sz="1400">
+                <a:solidFill>
+                  <a:srgbClr val="1E293B"/>
+                </a:solidFill>
+              </a:defRPr>
+            </a:pPr>
+            <a:r>
+              <a:t>Navigasi sidebar per role — tidak membingungkan</a:t>
+            </a:r>
+          </a:p>
+          <a:p>
+            <a:pPr>
+              <a:spcAft>
+                <a:spcPts val="600"/>
+              </a:spcAft>
+              <a:defRPr sz="1400">
+                <a:solidFill>
+                  <a:srgbClr val="1E293B"/>
+                </a:solidFill>
+              </a:defRPr>
+            </a:pPr>
+            <a:r>
+              <a:t>Workflow stepper visual di detail memorandum</a:t>
+            </a:r>
+          </a:p>
+          <a:p>
+            <a:pPr>
+              <a:spcAft>
+                <a:spcPts val="600"/>
+              </a:spcAft>
+              <a:defRPr sz="1400">
+                <a:solidFill>
+                  <a:srgbClr val="1E293B"/>
+                </a:solidFill>
+              </a:defRPr>
+            </a:pPr>
+            <a:r>
+              <a:t>Indikator baca (belum/sudah dibaca) pada daftar memo</a:t>
+            </a:r>
+          </a:p>
+          <a:p>
+            <a:pPr>
+              <a:spcAft>
+                <a:spcPts val="600"/>
+              </a:spcAft>
+              <a:defRPr sz="1400">
+                <a:solidFill>
+                  <a:srgbClr val="1E293B"/>
+                </a:solidFill>
+              </a:defRPr>
+            </a:pPr>
+            <a:r>
+              <a:t>Dashboard hero banner &amp; stat cards informatif</a:t>
+            </a:r>
+          </a:p>
+          <a:p>
+            <a:pPr>
+              <a:spcAft>
+                <a:spcPts val="600"/>
+              </a:spcAft>
+              <a:defRPr sz="1400">
+                <a:solidFill>
+                  <a:srgbClr val="1E293B"/>
+                </a:solidFill>
+              </a:defRPr>
+            </a:pPr>
+            <a:r>
+              <a:t>Redirect otomatis ke halaman sesuai role setelah login</a:t>
+            </a:r>
+          </a:p>
+          <a:p>
+            <a:pPr>
+              <a:spcAft>
+                <a:spcPts val="600"/>
+              </a:spcAft>
+              <a:defRPr sz="1400">
+                <a:solidFill>
+                  <a:srgbClr val="1E293B"/>
+                </a:solidFill>
+              </a:defRPr>
+            </a:pPr>
+            <a:r>
+              <a:t>Sidebar mobile dengan menu hamburger</a:t>
+            </a:r>
+          </a:p>
+        </p:txBody>
+      </p:sp>
+      <p:sp>
+        <p:nvSpPr>
+          <p:cNvPr id="8" name="Rounded Rectangle 7"/>
+          <p:cNvSpPr/>
+          <p:nvPr/>
+        </p:nvSpPr>
+        <p:spPr>
+          <a:xfrm>
+            <a:off x="6263640" y="1325880"/>
+            <a:ext cx="5394960" cy="4572000"/>
+          </a:xfrm>
+          <a:prstGeom prst="roundRect">
+            <a:avLst/>
+          </a:prstGeom>
+          <a:solidFill>
+            <a:srgbClr val="FFFFFF"/>
+          </a:solidFill>
+          <a:ln>
+            <a:solidFill>
+              <a:srgbClr val="E2E8F0"/>
+            </a:solidFill>
+          </a:ln>
+        </p:spPr>
+        <p:style>
+          <a:lnRef idx="1">
+            <a:schemeClr val="accent1"/>
+          </a:lnRef>
+          <a:fillRef idx="3">
+            <a:schemeClr val="accent1"/>
+          </a:fillRef>
+          <a:effectRef idx="2">
+            <a:schemeClr val="accent1"/>
+          </a:effectRef>
+          <a:fontRef idx="minor">
+            <a:schemeClr val="lt1"/>
+          </a:fontRef>
+        </p:style>
+        <p:txBody>
+          <a:bodyPr rtlCol="0" anchor="ctr"/>
+          <a:lstStyle/>
+          <a:p>
+            <a:pPr algn="ctr"/>
+          </a:p>
+        </p:txBody>
+      </p:sp>
+      <p:sp>
+        <p:nvSpPr>
+          <p:cNvPr id="9" name="Rectangle 8"/>
+          <p:cNvSpPr/>
+          <p:nvPr/>
+        </p:nvSpPr>
+        <p:spPr>
+          <a:xfrm>
+            <a:off x="6263640" y="1325880"/>
+            <a:ext cx="5394960" cy="475488"/>
+          </a:xfrm>
+          <a:prstGeom prst="rect">
+            <a:avLst/>
+          </a:prstGeom>
+          <a:solidFill>
+            <a:srgbClr val="F58220"/>
+          </a:solidFill>
+          <a:ln>
+            <a:noFill/>
+          </a:ln>
+        </p:spPr>
+        <p:style>
+          <a:lnRef idx="1">
+            <a:schemeClr val="accent1"/>
+          </a:lnRef>
+          <a:fillRef idx="3">
+            <a:schemeClr val="accent1"/>
+          </a:fillRef>
+          <a:effectRef idx="2">
+            <a:schemeClr val="accent1"/>
+          </a:effectRef>
+          <a:fontRef idx="minor">
+            <a:schemeClr val="lt1"/>
+          </a:fontRef>
+        </p:style>
+        <p:txBody>
+          <a:bodyPr rtlCol="0" anchor="ctr"/>
+          <a:lstStyle/>
+          <a:p>
+            <a:pPr algn="ctr"/>
+          </a:p>
+        </p:txBody>
+      </p:sp>
+      <p:sp>
+        <p:nvSpPr>
+          <p:cNvPr id="10" name="TextBox 9"/>
+          <p:cNvSpPr txBox="1"/>
+          <p:nvPr/>
+        </p:nvSpPr>
+        <p:spPr>
+          <a:xfrm>
+            <a:off x="6446520" y="1399032"/>
+            <a:ext cx="5029200" cy="365760"/>
+          </a:xfrm>
+          <a:prstGeom prst="rect">
+            <a:avLst/>
+          </a:prstGeom>
+          <a:noFill/>
+        </p:spPr>
+        <p:txBody>
+          <a:bodyPr wrap="none">
+            <a:spAutoFit/>
+          </a:bodyPr>
+          <a:lstStyle/>
+          <a:p>
+            <a:pPr>
+              <a:defRPr sz="1600" b="1">
+                <a:solidFill>
+                  <a:srgbClr val="FFFFFF"/>
+                </a:solidFill>
+              </a:defRPr>
+            </a:pPr>
+            <a:r>
+              <a:t>Rencana Perbaikan UX</a:t>
+            </a:r>
+          </a:p>
+        </p:txBody>
+      </p:sp>
+      <p:sp>
+        <p:nvSpPr>
+          <p:cNvPr id="11" name="TextBox 10"/>
+          <p:cNvSpPr txBox="1"/>
+          <p:nvPr/>
+        </p:nvSpPr>
+        <p:spPr>
+          <a:xfrm>
+            <a:off x="6446520" y="1920240"/>
+            <a:ext cx="5029200" cy="3886200"/>
+          </a:xfrm>
+          <a:prstGeom prst="rect">
+            <a:avLst/>
+          </a:prstGeom>
+          <a:noFill/>
+        </p:spPr>
+        <p:txBody>
+          <a:bodyPr wrap="square">
+            <a:spAutoFit/>
+          </a:bodyPr>
+          <a:lstStyle/>
+          <a:p>
+            <a:pPr>
+              <a:spcAft>
+                <a:spcPts val="600"/>
+              </a:spcAft>
+              <a:defRPr sz="1400">
+                <a:solidFill>
+                  <a:srgbClr val="1E293B"/>
+                </a:solidFill>
+              </a:defRPr>
+            </a:pPr>
+            <a:r>
+              <a:t>Notifikasi real-time (toast &amp; badge) saat ada dokumen baru</a:t>
+            </a:r>
+          </a:p>
+          <a:p>
+            <a:pPr>
+              <a:spcAft>
+                <a:spcPts val="600"/>
+              </a:spcAft>
+              <a:defRPr sz="1400">
+                <a:solidFill>
+                  <a:srgbClr val="1E293B"/>
+                </a:solidFill>
+              </a:defRPr>
+            </a:pPr>
+            <a:r>
+              <a:t>Loading state &amp; feedback saat upload PDF</a:t>
+            </a:r>
+          </a:p>
+          <a:p>
+            <a:pPr>
+              <a:spcAft>
+                <a:spcPts val="600"/>
+              </a:spcAft>
+              <a:defRPr sz="1400">
+                <a:solidFill>
+                  <a:srgbClr val="1E293B"/>
+                </a:solidFill>
+              </a:defRPr>
+            </a:pPr>
+            <a:r>
+              <a:t>Halaman error yang lebih informatif</a:t>
+            </a:r>
+          </a:p>
+          <a:p>
+            <a:pPr>
+              <a:spcAft>
+                <a:spcPts val="600"/>
+              </a:spcAft>
+              <a:defRPr sz="1400">
+                <a:solidFill>
+                  <a:srgbClr val="1E293B"/>
+                </a:solidFill>
+              </a:defRPr>
+            </a:pPr>
+            <a:r>
+              <a:t>Pencarian &amp; filter di daftar memorandum</a:t>
+            </a:r>
+          </a:p>
+          <a:p>
+            <a:pPr>
+              <a:spcAft>
+                <a:spcPts val="600"/>
+              </a:spcAft>
+              <a:defRPr sz="1400">
+                <a:solidFill>
+                  <a:srgbClr val="1E293B"/>
+                </a:solidFill>
+              </a:defRPr>
+            </a:pPr>
+            <a:r>
+              <a:t>Mode gelap (dark mode) opsional</a:t>
+            </a:r>
+          </a:p>
+          <a:p>
+            <a:pPr>
+              <a:spcAft>
+                <a:spcPts val="600"/>
+              </a:spcAft>
+              <a:defRPr sz="1400">
+                <a:solidFill>
+                  <a:srgbClr val="1E293B"/>
+                </a:solidFill>
+              </a:defRPr>
+            </a:pPr>
+            <a:r>
+              <a:t>Panduan singkat (onboarding) untuk user baru</a:t>
+            </a:r>
+          </a:p>
+          <a:p>
+            <a:pPr>
+              <a:spcAft>
+                <a:spcPts val="600"/>
+              </a:spcAft>
+              <a:defRPr sz="1400">
+                <a:solidFill>
+                  <a:srgbClr val="1E293B"/>
+                </a:solidFill>
+              </a:defRPr>
+            </a:pPr>
+            <a:r>
+              <a:t>Optimasi tampilan tablet &amp; HP</a:t>
+            </a:r>
+          </a:p>
+          <a:p>
+            <a:pPr>
+              <a:spcAft>
+                <a:spcPts val="600"/>
+              </a:spcAft>
+              <a:defRPr sz="1400">
+                <a:solidFill>
+                  <a:srgbClr val="1E293B"/>
+                </a:solidFill>
+              </a:defRPr>
+            </a:pPr>
+            <a:r>
+              <a:t>Akses cepat ke rapat &amp; media dari sidebar CorpSec</a:t>
+            </a:r>
+          </a:p>
+        </p:txBody>
+      </p:sp>
+      <p:sp>
+        <p:nvSpPr>
+          <p:cNvPr id="12" name="Rectangle 11"/>
+          <p:cNvSpPr/>
+          <p:nvPr/>
+        </p:nvSpPr>
+        <p:spPr>
+          <a:xfrm>
+            <a:off x="0" y="6446520"/>
+            <a:ext cx="12191695" cy="411480"/>
+          </a:xfrm>
+          <a:prstGeom prst="rect">
+            <a:avLst/>
+          </a:prstGeom>
+          <a:solidFill>
+            <a:srgbClr val="0C2340"/>
+          </a:solidFill>
+          <a:ln>
+            <a:noFill/>
+          </a:ln>
+        </p:spPr>
+        <p:style>
+          <a:lnRef idx="1">
+            <a:schemeClr val="accent1"/>
+          </a:lnRef>
+          <a:fillRef idx="3">
+            <a:schemeClr val="accent1"/>
+          </a:fillRef>
+          <a:effectRef idx="2">
+            <a:schemeClr val="accent1"/>
+          </a:effectRef>
+          <a:fontRef idx="minor">
+            <a:schemeClr val="lt1"/>
+          </a:fontRef>
+        </p:style>
+        <p:txBody>
+          <a:bodyPr rtlCol="0" anchor="ctr"/>
+          <a:lstStyle/>
+          <a:p>
+            <a:pPr algn="ctr"/>
+          </a:p>
+        </p:txBody>
+      </p:sp>
+      <p:sp>
+        <p:nvSpPr>
+          <p:cNvPr id="13" name="TextBox 12"/>
+          <p:cNvSpPr txBox="1"/>
+          <p:nvPr/>
+        </p:nvSpPr>
+        <p:spPr>
+          <a:xfrm>
+            <a:off x="457200" y="6492240"/>
+            <a:ext cx="5486400" cy="320040"/>
+          </a:xfrm>
+          <a:prstGeom prst="rect">
+            <a:avLst/>
+          </a:prstGeom>
+          <a:noFill/>
+        </p:spPr>
+        <p:txBody>
+          <a:bodyPr wrap="none">
+            <a:spAutoFit/>
+          </a:bodyPr>
+          <a:lstStyle/>
+          <a:p>
+            <a:pPr>
+              <a:defRPr sz="1100" b="1">
+                <a:solidFill>
+                  <a:srgbClr val="F58220"/>
+                </a:solidFill>
+              </a:defRPr>
+            </a:pPr>
+            <a:r>
+              <a:t>CorpSec Bank Sumut — Business Problem Canvas</a:t>
+            </a:r>
+          </a:p>
+        </p:txBody>
+      </p:sp>
+      <p:sp>
+        <p:nvSpPr>
+          <p:cNvPr id="14" name="TextBox 13"/>
+          <p:cNvSpPr txBox="1"/>
+          <p:nvPr/>
+        </p:nvSpPr>
+        <p:spPr>
+          <a:xfrm>
+            <a:off x="10515600" y="6492240"/>
+            <a:ext cx="1371600" cy="320040"/>
+          </a:xfrm>
+          <a:prstGeom prst="rect">
+            <a:avLst/>
+          </a:prstGeom>
+          <a:noFill/>
+        </p:spPr>
+        <p:txBody>
+          <a:bodyPr wrap="none">
+            <a:spAutoFit/>
+          </a:bodyPr>
+          <a:lstStyle/>
+          <a:p>
+            <a:pPr algn="r">
+              <a:defRPr sz="1100">
+                <a:solidFill>
+                  <a:srgbClr val="FFFFFF"/>
+                </a:solidFill>
+              </a:defRPr>
+            </a:pPr>
+            <a:r>
+              <a:t>10</a:t>
+            </a:r>
+          </a:p>
+        </p:txBody>
+      </p:sp>
+    </p:spTree>
+  </p:cSld>
+  <p:clrMapOvr>
+    <a:masterClrMapping/>
+  </p:clrMapOvr>
+</p:sld>
+</file>
+
+<file path=ppt/slides/slide11.xml><?xml version="1.0" encoding="utf-8"?>
+<p:sld xmlns:a="http://schemas.openxmlformats.org/drawingml/2006/main" xmlns:p="http://schemas.openxmlformats.org/presentationml/2006/main" xmlns:r="http://schemas.openxmlformats.org/officeDocument/2006/relationships">
+  <p:cSld>
+    <p:bg>
+      <p:bgPr>
+        <a:solidFill>
+          <a:srgbClr val="F8FAFC"/>
+        </a:solidFill>
+        <a:effectLst/>
+      </p:bgPr>
+    </p:bg>
+    <p:spTree>
+      <p:nvGrpSpPr>
+        <p:cNvPr id="1" name=""/>
+        <p:cNvGrpSpPr/>
+        <p:nvPr/>
+      </p:nvGrpSpPr>
+      <p:grpSpPr/>
+      <p:sp>
+        <p:nvSpPr>
+          <p:cNvPr id="2" name="Rectangle 1"/>
+          <p:cNvSpPr/>
+          <p:nvPr/>
+        </p:nvSpPr>
+        <p:spPr>
+          <a:xfrm>
+            <a:off x="0" y="0"/>
+            <a:ext cx="164592" cy="6446520"/>
+          </a:xfrm>
+          <a:prstGeom prst="rect">
+            <a:avLst/>
+          </a:prstGeom>
+          <a:solidFill>
+            <a:srgbClr val="F58220"/>
+          </a:solidFill>
+          <a:ln>
+            <a:noFill/>
+          </a:ln>
+        </p:spPr>
+        <p:style>
+          <a:lnRef idx="1">
+            <a:schemeClr val="accent1"/>
+          </a:lnRef>
+          <a:fillRef idx="3">
+            <a:schemeClr val="accent1"/>
+          </a:fillRef>
+          <a:effectRef idx="2">
+            <a:schemeClr val="accent1"/>
+          </a:effectRef>
+          <a:fontRef idx="minor">
+            <a:schemeClr val="lt1"/>
+          </a:fontRef>
+        </p:style>
+        <p:txBody>
+          <a:bodyPr rtlCol="0" anchor="ctr"/>
+          <a:lstStyle/>
+          <a:p>
+            <a:pPr algn="ctr"/>
+          </a:p>
+        </p:txBody>
+      </p:sp>
+      <p:sp>
+        <p:nvSpPr>
+          <p:cNvPr id="3" name="TextBox 2"/>
+          <p:cNvSpPr txBox="1"/>
+          <p:nvPr/>
+        </p:nvSpPr>
+        <p:spPr>
+          <a:xfrm>
+            <a:off x="502920" y="320040"/>
+            <a:ext cx="11155680" cy="914400"/>
+          </a:xfrm>
+          <a:prstGeom prst="rect">
+            <a:avLst/>
+          </a:prstGeom>
+          <a:noFill/>
+        </p:spPr>
+        <p:txBody>
+          <a:bodyPr wrap="none">
+            <a:spAutoFit/>
+          </a:bodyPr>
+          <a:lstStyle/>
+          <a:p>
+            <a:pPr>
+              <a:defRPr sz="3200" b="1">
+                <a:solidFill>
+                  <a:srgbClr val="0C2340"/>
+                </a:solidFill>
+              </a:defRPr>
+            </a:pPr>
+            <a:r>
+              <a:t>Perbaikan Aspek Keamanan</a:t>
+            </a:r>
+          </a:p>
+          <a:p>
+            <a:pPr>
+              <a:spcBef>
+                <a:spcPts val="600"/>
+              </a:spcBef>
+              <a:defRPr sz="1700">
+                <a:solidFill>
+                  <a:srgbClr val="64748B"/>
+                </a:solidFill>
+              </a:defRPr>
+            </a:pPr>
+            <a:r>
+              <a:t>Kondisi saat ini dan langkah penguatan</a:t>
+            </a:r>
+          </a:p>
+        </p:txBody>
+      </p:sp>
+      <p:sp>
+        <p:nvSpPr>
+          <p:cNvPr id="4" name="Rounded Rectangle 3"/>
+          <p:cNvSpPr/>
+          <p:nvPr/>
+        </p:nvSpPr>
+        <p:spPr>
+          <a:xfrm>
+            <a:off x="411480" y="1325880"/>
+            <a:ext cx="5394960" cy="4572000"/>
+          </a:xfrm>
+          <a:prstGeom prst="roundRect">
+            <a:avLst/>
+          </a:prstGeom>
+          <a:solidFill>
+            <a:srgbClr val="FFFFFF"/>
+          </a:solidFill>
+          <a:ln>
+            <a:solidFill>
+              <a:srgbClr val="E2E8F0"/>
+            </a:solidFill>
+          </a:ln>
+        </p:spPr>
+        <p:style>
+          <a:lnRef idx="1">
+            <a:schemeClr val="accent1"/>
+          </a:lnRef>
+          <a:fillRef idx="3">
+            <a:schemeClr val="accent1"/>
+          </a:fillRef>
+          <a:effectRef idx="2">
+            <a:schemeClr val="accent1"/>
+          </a:effectRef>
+          <a:fontRef idx="minor">
+            <a:schemeClr val="lt1"/>
+          </a:fontRef>
+        </p:style>
+        <p:txBody>
+          <a:bodyPr rtlCol="0" anchor="ctr"/>
+          <a:lstStyle/>
+          <a:p>
+            <a:pPr algn="ctr"/>
+          </a:p>
+        </p:txBody>
+      </p:sp>
+      <p:sp>
+        <p:nvSpPr>
+          <p:cNvPr id="5" name="Rectangle 4"/>
+          <p:cNvSpPr/>
+          <p:nvPr/>
+        </p:nvSpPr>
+        <p:spPr>
+          <a:xfrm>
+            <a:off x="411480" y="1325880"/>
+            <a:ext cx="5394960" cy="475488"/>
+          </a:xfrm>
+          <a:prstGeom prst="rect">
+            <a:avLst/>
+          </a:prstGeom>
+          <a:solidFill>
+            <a:srgbClr val="059669"/>
+          </a:solidFill>
+          <a:ln>
+            <a:noFill/>
+          </a:ln>
+        </p:spPr>
+        <p:style>
+          <a:lnRef idx="1">
+            <a:schemeClr val="accent1"/>
+          </a:lnRef>
+          <a:fillRef idx="3">
+            <a:schemeClr val="accent1"/>
+          </a:fillRef>
+          <a:effectRef idx="2">
+            <a:schemeClr val="accent1"/>
+          </a:effectRef>
+          <a:fontRef idx="minor">
+            <a:schemeClr val="lt1"/>
+          </a:fontRef>
+        </p:style>
+        <p:txBody>
+          <a:bodyPr rtlCol="0" anchor="ctr"/>
+          <a:lstStyle/>
+          <a:p>
+            <a:pPr algn="ctr"/>
+          </a:p>
+        </p:txBody>
+      </p:sp>
+      <p:sp>
+        <p:nvSpPr>
+          <p:cNvPr id="6" name="TextBox 5"/>
+          <p:cNvSpPr txBox="1"/>
+          <p:nvPr/>
+        </p:nvSpPr>
+        <p:spPr>
+          <a:xfrm>
+            <a:off x="594360" y="1399032"/>
+            <a:ext cx="5029200" cy="365760"/>
+          </a:xfrm>
+          <a:prstGeom prst="rect">
+            <a:avLst/>
+          </a:prstGeom>
+          <a:noFill/>
+        </p:spPr>
+        <p:txBody>
+          <a:bodyPr wrap="none">
+            <a:spAutoFit/>
+          </a:bodyPr>
+          <a:lstStyle/>
+          <a:p>
+            <a:pPr>
+              <a:defRPr sz="1600" b="1">
+                <a:solidFill>
+                  <a:srgbClr val="FFFFFF"/>
+                </a:solidFill>
+              </a:defRPr>
+            </a:pPr>
+            <a:r>
+              <a:t>Sudah Diterapkan</a:t>
+            </a:r>
+          </a:p>
+        </p:txBody>
+      </p:sp>
+      <p:sp>
+        <p:nvSpPr>
+          <p:cNvPr id="7" name="TextBox 6"/>
+          <p:cNvSpPr txBox="1"/>
+          <p:nvPr/>
+        </p:nvSpPr>
+        <p:spPr>
+          <a:xfrm>
+            <a:off x="594360" y="1920240"/>
+            <a:ext cx="5029200" cy="3886200"/>
+          </a:xfrm>
+          <a:prstGeom prst="rect">
+            <a:avLst/>
+          </a:prstGeom>
+          <a:noFill/>
+        </p:spPr>
+        <p:txBody>
+          <a:bodyPr wrap="square">
+            <a:spAutoFit/>
+          </a:bodyPr>
+          <a:lstStyle/>
+          <a:p>
+            <a:pPr>
+              <a:spcAft>
+                <a:spcPts val="600"/>
+              </a:spcAft>
+              <a:defRPr sz="1400">
+                <a:solidFill>
+                  <a:srgbClr val="1E293B"/>
+                </a:solidFill>
+              </a:defRPr>
+            </a:pPr>
+            <a:r>
+              <a:t>Login wajib — halaman dilindungi middleware</a:t>
+            </a:r>
+          </a:p>
+          <a:p>
+            <a:pPr>
+              <a:spcAft>
+                <a:spcPts val="600"/>
+              </a:spcAft>
+              <a:defRPr sz="1400">
+                <a:solidFill>
+                  <a:srgbClr val="1E293B"/>
+                </a:solidFill>
+              </a:defRPr>
+            </a:pPr>
+            <a:r>
+              <a:t>Pembagian akses per role (RBAC 7 level)</a:t>
+            </a:r>
+          </a:p>
+          <a:p>
+            <a:pPr>
+              <a:spcAft>
+                <a:spcPts val="600"/>
+              </a:spcAft>
+              <a:defRPr sz="1400">
+                <a:solidFill>
+                  <a:srgbClr val="1E293B"/>
+                </a:solidFill>
+              </a:defRPr>
+            </a:pPr>
+            <a:r>
+              <a:t>Cookie session httpOnly &amp; sameSite=lax</a:t>
+            </a:r>
+          </a:p>
+          <a:p>
+            <a:pPr>
+              <a:spcAft>
+                <a:spcPts val="600"/>
+              </a:spcAft>
+              <a:defRPr sz="1400">
+                <a:solidFill>
+                  <a:srgbClr val="1E293B"/>
+                </a:solidFill>
+              </a:defRPr>
+            </a:pPr>
+            <a:r>
+              <a:t>API memorandum dicek role sebelum aksi (requireApiRole)</a:t>
+            </a:r>
+          </a:p>
+          <a:p>
+            <a:pPr>
+              <a:spcAft>
+                <a:spcPts val="600"/>
+              </a:spcAft>
+              <a:defRPr sz="1400">
+                <a:solidFill>
+                  <a:srgbClr val="1E293B"/>
+                </a:solidFill>
+              </a:defRPr>
+            </a:pPr>
+            <a:r>
+              <a:t>Redirect otomatis jika akses halaman tidak sesuai role</a:t>
+            </a:r>
+          </a:p>
+          <a:p>
+            <a:pPr>
+              <a:spcAft>
+                <a:spcPts val="600"/>
+              </a:spcAft>
+              <a:defRPr sz="1400">
+                <a:solidFill>
+                  <a:srgbClr val="1E293B"/>
+                </a:solidFill>
+              </a:defRPr>
+            </a:pPr>
+            <a:r>
+              <a:t>Validasi file upload (format PDF, batas ukuran)</a:t>
+            </a:r>
+          </a:p>
+        </p:txBody>
+      </p:sp>
+      <p:sp>
+        <p:nvSpPr>
+          <p:cNvPr id="8" name="Rounded Rectangle 7"/>
+          <p:cNvSpPr/>
+          <p:nvPr/>
+        </p:nvSpPr>
+        <p:spPr>
+          <a:xfrm>
+            <a:off x="6263640" y="1325880"/>
+            <a:ext cx="5394960" cy="4572000"/>
+          </a:xfrm>
+          <a:prstGeom prst="roundRect">
+            <a:avLst/>
+          </a:prstGeom>
+          <a:solidFill>
+            <a:srgbClr val="FFFFFF"/>
+          </a:solidFill>
+          <a:ln>
+            <a:solidFill>
+              <a:srgbClr val="E2E8F0"/>
+            </a:solidFill>
+          </a:ln>
+        </p:spPr>
+        <p:style>
+          <a:lnRef idx="1">
+            <a:schemeClr val="accent1"/>
+          </a:lnRef>
+          <a:fillRef idx="3">
+            <a:schemeClr val="accent1"/>
+          </a:fillRef>
+          <a:effectRef idx="2">
+            <a:schemeClr val="accent1"/>
+          </a:effectRef>
+          <a:fontRef idx="minor">
+            <a:schemeClr val="lt1"/>
+          </a:fontRef>
+        </p:style>
+        <p:txBody>
+          <a:bodyPr rtlCol="0" anchor="ctr"/>
+          <a:lstStyle/>
+          <a:p>
+            <a:pPr algn="ctr"/>
+          </a:p>
+        </p:txBody>
+      </p:sp>
+      <p:sp>
+        <p:nvSpPr>
+          <p:cNvPr id="9" name="Rectangle 8"/>
+          <p:cNvSpPr/>
+          <p:nvPr/>
+        </p:nvSpPr>
+        <p:spPr>
+          <a:xfrm>
+            <a:off x="6263640" y="1325880"/>
+            <a:ext cx="5394960" cy="475488"/>
+          </a:xfrm>
+          <a:prstGeom prst="rect">
+            <a:avLst/>
+          </a:prstGeom>
+          <a:solidFill>
+            <a:srgbClr val="DC2626"/>
+          </a:solidFill>
+          <a:ln>
+            <a:noFill/>
+          </a:ln>
+        </p:spPr>
+        <p:style>
+          <a:lnRef idx="1">
+            <a:schemeClr val="accent1"/>
+          </a:lnRef>
+          <a:fillRef idx="3">
+            <a:schemeClr val="accent1"/>
+          </a:fillRef>
+          <a:effectRef idx="2">
+            <a:schemeClr val="accent1"/>
+          </a:effectRef>
+          <a:fontRef idx="minor">
+            <a:schemeClr val="lt1"/>
+          </a:fontRef>
+        </p:style>
+        <p:txBody>
+          <a:bodyPr rtlCol="0" anchor="ctr"/>
+          <a:lstStyle/>
+          <a:p>
+            <a:pPr algn="ctr"/>
+          </a:p>
+        </p:txBody>
+      </p:sp>
+      <p:sp>
+        <p:nvSpPr>
+          <p:cNvPr id="10" name="TextBox 9"/>
+          <p:cNvSpPr txBox="1"/>
+          <p:nvPr/>
+        </p:nvSpPr>
+        <p:spPr>
+          <a:xfrm>
+            <a:off x="6446520" y="1399032"/>
+            <a:ext cx="5029200" cy="365760"/>
+          </a:xfrm>
+          <a:prstGeom prst="rect">
+            <a:avLst/>
+          </a:prstGeom>
+          <a:noFill/>
+        </p:spPr>
+        <p:txBody>
+          <a:bodyPr wrap="none">
+            <a:spAutoFit/>
+          </a:bodyPr>
+          <a:lstStyle/>
+          <a:p>
+            <a:pPr>
+              <a:defRPr sz="1600" b="1">
+                <a:solidFill>
+                  <a:srgbClr val="FFFFFF"/>
+                </a:solidFill>
+              </a:defRPr>
+            </a:pPr>
+            <a:r>
+              <a:t>Perlu Ditingkatkan</a:t>
+            </a:r>
+          </a:p>
+        </p:txBody>
+      </p:sp>
+      <p:sp>
+        <p:nvSpPr>
+          <p:cNvPr id="11" name="TextBox 10"/>
+          <p:cNvSpPr txBox="1"/>
+          <p:nvPr/>
+        </p:nvSpPr>
+        <p:spPr>
+          <a:xfrm>
+            <a:off x="6446520" y="1920240"/>
+            <a:ext cx="5029200" cy="3886200"/>
+          </a:xfrm>
+          <a:prstGeom prst="rect">
+            <a:avLst/>
+          </a:prstGeom>
+          <a:noFill/>
+        </p:spPr>
+        <p:txBody>
+          <a:bodyPr wrap="square">
+            <a:spAutoFit/>
+          </a:bodyPr>
+          <a:lstStyle/>
+          <a:p>
+            <a:pPr>
+              <a:spcAft>
+                <a:spcPts val="600"/>
+              </a:spcAft>
+              <a:defRPr sz="1400">
+                <a:solidFill>
+                  <a:srgbClr val="1E293B"/>
+                </a:solidFill>
+              </a:defRPr>
+            </a:pPr>
+            <a:r>
+              <a:t>Session cookie perlu ditandatangani (JWT/signed cookie)</a:t>
+            </a:r>
+          </a:p>
+          <a:p>
+            <a:pPr>
+              <a:spcAft>
+                <a:spcPts val="600"/>
+              </a:spcAft>
+              <a:defRPr sz="1400">
+                <a:solidFill>
+                  <a:srgbClr val="1E293B"/>
+                </a:solidFill>
+              </a:defRPr>
+            </a:pPr>
+            <a:r>
+              <a:t>Password disimpan plaintext — perlu bcrypt/hash</a:t>
+            </a:r>
+          </a:p>
+          <a:p>
+            <a:pPr>
+              <a:spcAft>
+                <a:spcPts val="600"/>
+              </a:spcAft>
+              <a:defRPr sz="1400">
+                <a:solidFill>
+                  <a:srgbClr val="1E293B"/>
+                </a:solidFill>
+              </a:defRPr>
+            </a:pPr>
+            <a:r>
+              <a:t>Belum ada rate limiting pada login</a:t>
+            </a:r>
+          </a:p>
+          <a:p>
+            <a:pPr>
+              <a:spcAft>
+                <a:spcPts val="600"/>
+              </a:spcAft>
+              <a:defRPr sz="1400">
+                <a:solidFill>
+                  <a:srgbClr val="1E293B"/>
+                </a:solidFill>
+              </a:defRPr>
+            </a:pPr>
+            <a:r>
+              <a:t>Belum ada security headers (CSP, HSTS, X-Frame)</a:t>
+            </a:r>
+          </a:p>
+          <a:p>
+            <a:pPr>
+              <a:spcAft>
+                <a:spcPts val="600"/>
+              </a:spcAft>
+              <a:defRPr sz="1400">
+                <a:solidFill>
+                  <a:srgbClr val="1E293B"/>
+                </a:solidFill>
+              </a:defRPr>
+            </a:pPr>
+            <a:r>
+              <a:t>Belum ada audit log aktivitas user</a:t>
+            </a:r>
+          </a:p>
+          <a:p>
+            <a:pPr>
+              <a:spcAft>
+                <a:spcPts val="600"/>
+              </a:spcAft>
+              <a:defRPr sz="1400">
+                <a:solidFill>
+                  <a:srgbClr val="1E293B"/>
+                </a:solidFill>
+              </a:defRPr>
+            </a:pPr>
+            <a:r>
+              <a:t>Perlu validasi input lebih ketat di semua API</a:t>
+            </a:r>
+          </a:p>
+          <a:p>
+            <a:pPr>
+              <a:spcAft>
+                <a:spcPts val="600"/>
+              </a:spcAft>
+              <a:defRPr sz="1400">
+                <a:solidFill>
+                  <a:srgbClr val="1E293B"/>
+                </a:solidFill>
+              </a:defRPr>
+            </a:pPr>
+            <a:r>
+              <a:t>Enkripsi file PDF di storage server</a:t>
+            </a:r>
+          </a:p>
+          <a:p>
+            <a:pPr>
+              <a:spcAft>
+                <a:spcPts val="600"/>
+              </a:spcAft>
+              <a:defRPr sz="1400">
+                <a:solidFill>
+                  <a:srgbClr val="1E293B"/>
+                </a:solidFill>
+              </a:defRPr>
+            </a:pPr>
+            <a:r>
+              <a:t>Integrasi SSO Active Directory Bank Sumut</a:t>
+            </a:r>
+          </a:p>
+        </p:txBody>
+      </p:sp>
+      <p:sp>
+        <p:nvSpPr>
+          <p:cNvPr id="12" name="Rectangle 11"/>
+          <p:cNvSpPr/>
+          <p:nvPr/>
+        </p:nvSpPr>
+        <p:spPr>
+          <a:xfrm>
+            <a:off x="0" y="6446520"/>
+            <a:ext cx="12191695" cy="411480"/>
+          </a:xfrm>
+          <a:prstGeom prst="rect">
+            <a:avLst/>
+          </a:prstGeom>
+          <a:solidFill>
+            <a:srgbClr val="0C2340"/>
+          </a:solidFill>
+          <a:ln>
+            <a:noFill/>
+          </a:ln>
+        </p:spPr>
+        <p:style>
+          <a:lnRef idx="1">
+            <a:schemeClr val="accent1"/>
+          </a:lnRef>
+          <a:fillRef idx="3">
+            <a:schemeClr val="accent1"/>
+          </a:fillRef>
+          <a:effectRef idx="2">
+            <a:schemeClr val="accent1"/>
+          </a:effectRef>
+          <a:fontRef idx="minor">
+            <a:schemeClr val="lt1"/>
+          </a:fontRef>
+        </p:style>
+        <p:txBody>
+          <a:bodyPr rtlCol="0" anchor="ctr"/>
+          <a:lstStyle/>
+          <a:p>
+            <a:pPr algn="ctr"/>
+          </a:p>
+        </p:txBody>
+      </p:sp>
+      <p:sp>
+        <p:nvSpPr>
+          <p:cNvPr id="13" name="TextBox 12"/>
+          <p:cNvSpPr txBox="1"/>
+          <p:nvPr/>
+        </p:nvSpPr>
+        <p:spPr>
+          <a:xfrm>
+            <a:off x="457200" y="6492240"/>
+            <a:ext cx="5486400" cy="320040"/>
+          </a:xfrm>
+          <a:prstGeom prst="rect">
+            <a:avLst/>
+          </a:prstGeom>
+          <a:noFill/>
+        </p:spPr>
+        <p:txBody>
+          <a:bodyPr wrap="none">
+            <a:spAutoFit/>
+          </a:bodyPr>
+          <a:lstStyle/>
+          <a:p>
+            <a:pPr>
+              <a:defRPr sz="1100" b="1">
+                <a:solidFill>
+                  <a:srgbClr val="F58220"/>
+                </a:solidFill>
+              </a:defRPr>
+            </a:pPr>
+            <a:r>
+              <a:t>CorpSec Bank Sumut — Business Problem Canvas</a:t>
+            </a:r>
+          </a:p>
+        </p:txBody>
+      </p:sp>
+      <p:sp>
+        <p:nvSpPr>
+          <p:cNvPr id="14" name="TextBox 13"/>
+          <p:cNvSpPr txBox="1"/>
+          <p:nvPr/>
+        </p:nvSpPr>
+        <p:spPr>
+          <a:xfrm>
+            <a:off x="10515600" y="6492240"/>
+            <a:ext cx="1371600" cy="320040"/>
+          </a:xfrm>
+          <a:prstGeom prst="rect">
+            <a:avLst/>
+          </a:prstGeom>
+          <a:noFill/>
+        </p:spPr>
+        <p:txBody>
+          <a:bodyPr wrap="none">
+            <a:spAutoFit/>
+          </a:bodyPr>
+          <a:lstStyle/>
+          <a:p>
+            <a:pPr algn="r">
+              <a:defRPr sz="1100">
+                <a:solidFill>
+                  <a:srgbClr val="FFFFFF"/>
+                </a:solidFill>
+              </a:defRPr>
+            </a:pPr>
+            <a:r>
+              <a:t>11</a:t>
+            </a:r>
+          </a:p>
+        </p:txBody>
+      </p:sp>
+    </p:spTree>
+  </p:cSld>
+  <p:clrMapOvr>
+    <a:masterClrMapping/>
+  </p:clrMapOvr>
+</p:sld>
+</file>
+
+<file path=ppt/slides/slide12.xml><?xml version="1.0" encoding="utf-8"?>
+<p:sld xmlns:a="http://schemas.openxmlformats.org/drawingml/2006/main" xmlns:p="http://schemas.openxmlformats.org/presentationml/2006/main" xmlns:r="http://schemas.openxmlformats.org/officeDocument/2006/relationships">
+  <p:cSld>
+    <p:bg>
+      <p:bgPr>
+        <a:solidFill>
+          <a:srgbClr val="F8FAFC"/>
+        </a:solidFill>
+        <a:effectLst/>
+      </p:bgPr>
+    </p:bg>
+    <p:spTree>
+      <p:nvGrpSpPr>
+        <p:cNvPr id="1" name=""/>
+        <p:cNvGrpSpPr/>
+        <p:nvPr/>
+      </p:nvGrpSpPr>
+      <p:grpSpPr/>
+      <p:sp>
+        <p:nvSpPr>
+          <p:cNvPr id="2" name="Rectangle 1"/>
+          <p:cNvSpPr/>
+          <p:nvPr/>
+        </p:nvSpPr>
+        <p:spPr>
+          <a:xfrm>
+            <a:off x="0" y="0"/>
+            <a:ext cx="164592" cy="6446520"/>
+          </a:xfrm>
+          <a:prstGeom prst="rect">
+            <a:avLst/>
+          </a:prstGeom>
+          <a:solidFill>
+            <a:srgbClr val="F58220"/>
+          </a:solidFill>
+          <a:ln>
+            <a:noFill/>
+          </a:ln>
+        </p:spPr>
+        <p:style>
+          <a:lnRef idx="1">
+            <a:schemeClr val="accent1"/>
+          </a:lnRef>
+          <a:fillRef idx="3">
+            <a:schemeClr val="accent1"/>
+          </a:fillRef>
+          <a:effectRef idx="2">
+            <a:schemeClr val="accent1"/>
+          </a:effectRef>
+          <a:fontRef idx="minor">
+            <a:schemeClr val="lt1"/>
+          </a:fontRef>
+        </p:style>
+        <p:txBody>
+          <a:bodyPr rtlCol="0" anchor="ctr"/>
+          <a:lstStyle/>
+          <a:p>
+            <a:pPr algn="ctr"/>
+          </a:p>
+        </p:txBody>
+      </p:sp>
+      <p:sp>
+        <p:nvSpPr>
+          <p:cNvPr id="3" name="TextBox 2"/>
+          <p:cNvSpPr txBox="1"/>
+          <p:nvPr/>
+        </p:nvSpPr>
+        <p:spPr>
+          <a:xfrm>
+            <a:off x="502920" y="320040"/>
+            <a:ext cx="11155680" cy="914400"/>
+          </a:xfrm>
+          <a:prstGeom prst="rect">
+            <a:avLst/>
+          </a:prstGeom>
+          <a:noFill/>
+        </p:spPr>
+        <p:txBody>
+          <a:bodyPr wrap="none">
+            <a:spAutoFit/>
+          </a:bodyPr>
+          <a:lstStyle/>
+          <a:p>
+            <a:pPr>
+              <a:defRPr sz="3200" b="1">
+                <a:solidFill>
+                  <a:srgbClr val="0C2340"/>
+                </a:solidFill>
+              </a:defRPr>
+            </a:pPr>
+            <a:r>
+              <a:t>Rencana Langkah Selanjutnya</a:t>
+            </a:r>
+          </a:p>
+          <a:p>
+            <a:pPr>
+              <a:spcBef>
+                <a:spcPts val="600"/>
+              </a:spcBef>
+              <a:defRPr sz="1700">
+                <a:solidFill>
+                  <a:srgbClr val="64748B"/>
+                </a:solidFill>
+              </a:defRPr>
+            </a:pPr>
+            <a:r>
+              <a:t>Prioritas pengembangan ke depan</a:t>
+            </a:r>
+          </a:p>
+        </p:txBody>
+      </p:sp>
+      <p:sp>
+        <p:nvSpPr>
+          <p:cNvPr id="4" name="Rounded Rectangle 3"/>
+          <p:cNvSpPr/>
+          <p:nvPr/>
+        </p:nvSpPr>
+        <p:spPr>
+          <a:xfrm>
+            <a:off x="411480" y="1417320"/>
+            <a:ext cx="3657600" cy="4434840"/>
+          </a:xfrm>
+          <a:prstGeom prst="roundRect">
+            <a:avLst/>
+          </a:prstGeom>
+          <a:solidFill>
+            <a:srgbClr val="FFFFFF"/>
+          </a:solidFill>
+          <a:ln>
+            <a:solidFill>
+              <a:srgbClr val="E2E8F0"/>
+            </a:solidFill>
+          </a:ln>
+        </p:spPr>
+        <p:style>
+          <a:lnRef idx="1">
+            <a:schemeClr val="accent1"/>
+          </a:lnRef>
+          <a:fillRef idx="3">
+            <a:schemeClr val="accent1"/>
+          </a:fillRef>
+          <a:effectRef idx="2">
+            <a:schemeClr val="accent1"/>
+          </a:effectRef>
+          <a:fontRef idx="minor">
+            <a:schemeClr val="lt1"/>
+          </a:fontRef>
+        </p:style>
+        <p:txBody>
+          <a:bodyPr rtlCol="0" anchor="ctr"/>
+          <a:lstStyle/>
+          <a:p>
+            <a:pPr algn="ctr"/>
+          </a:p>
+        </p:txBody>
+      </p:sp>
+      <p:sp>
+        <p:nvSpPr>
+          <p:cNvPr id="5" name="Rectangle 4"/>
+          <p:cNvSpPr/>
+          <p:nvPr/>
+        </p:nvSpPr>
+        <p:spPr>
+          <a:xfrm>
+            <a:off x="411480" y="1417320"/>
+            <a:ext cx="3657600" cy="475488"/>
+          </a:xfrm>
+          <a:prstGeom prst="rect">
+            <a:avLst/>
+          </a:prstGeom>
+          <a:solidFill>
+            <a:srgbClr val="0C2340"/>
+          </a:solidFill>
+          <a:ln>
+            <a:noFill/>
+          </a:ln>
+        </p:spPr>
+        <p:style>
+          <a:lnRef idx="1">
+            <a:schemeClr val="accent1"/>
+          </a:lnRef>
+          <a:fillRef idx="3">
+            <a:schemeClr val="accent1"/>
+          </a:fillRef>
+          <a:effectRef idx="2">
+            <a:schemeClr val="accent1"/>
+          </a:effectRef>
+          <a:fontRef idx="minor">
+            <a:schemeClr val="lt1"/>
+          </a:fontRef>
+        </p:style>
+        <p:txBody>
+          <a:bodyPr rtlCol="0" anchor="ctr"/>
+          <a:lstStyle/>
+          <a:p>
+            <a:pPr algn="ctr"/>
+          </a:p>
+        </p:txBody>
+      </p:sp>
+      <p:sp>
+        <p:nvSpPr>
+          <p:cNvPr id="6" name="TextBox 5"/>
+          <p:cNvSpPr txBox="1"/>
+          <p:nvPr/>
+        </p:nvSpPr>
+        <p:spPr>
+          <a:xfrm>
+            <a:off x="594360" y="1490472"/>
+            <a:ext cx="3291840" cy="365760"/>
+          </a:xfrm>
+          <a:prstGeom prst="rect">
+            <a:avLst/>
+          </a:prstGeom>
+          <a:noFill/>
+        </p:spPr>
+        <p:txBody>
+          <a:bodyPr wrap="none">
+            <a:spAutoFit/>
+          </a:bodyPr>
+          <a:lstStyle/>
+          <a:p>
+            <a:pPr>
+              <a:defRPr sz="1600" b="1">
+                <a:solidFill>
+                  <a:srgbClr val="FFFFFF"/>
+                </a:solidFill>
+              </a:defRPr>
+            </a:pPr>
+            <a:r>
+              <a:t>Fase 1 — Stabilisasi</a:t>
+            </a:r>
+          </a:p>
+        </p:txBody>
+      </p:sp>
+      <p:sp>
+        <p:nvSpPr>
+          <p:cNvPr id="7" name="TextBox 6"/>
+          <p:cNvSpPr txBox="1"/>
+          <p:nvPr/>
+        </p:nvSpPr>
+        <p:spPr>
+          <a:xfrm>
+            <a:off x="594360" y="2011680"/>
+            <a:ext cx="3291840" cy="3749039"/>
+          </a:xfrm>
+          <a:prstGeom prst="rect">
+            <a:avLst/>
+          </a:prstGeom>
+          <a:noFill/>
+        </p:spPr>
+        <p:txBody>
+          <a:bodyPr wrap="square">
+            <a:spAutoFit/>
+          </a:bodyPr>
+          <a:lstStyle/>
+          <a:p>
+            <a:pPr>
+              <a:spcAft>
+                <a:spcPts val="600"/>
+              </a:spcAft>
+              <a:defRPr sz="1400">
+                <a:solidFill>
+                  <a:srgbClr val="1E293B"/>
+                </a:solidFill>
+              </a:defRPr>
+            </a:pPr>
+            <a:r>
+              <a:t>Perbaiki keamanan: hash password, signed session</a:t>
+            </a:r>
+          </a:p>
+          <a:p>
+            <a:pPr>
+              <a:spcAft>
+                <a:spcPts val="600"/>
+              </a:spcAft>
+              <a:defRPr sz="1400">
+                <a:solidFill>
+                  <a:srgbClr val="1E293B"/>
+                </a:solidFill>
+              </a:defRPr>
+            </a:pPr>
+            <a:r>
+              <a:t>Tambah rate limiting &amp; security headers</a:t>
+            </a:r>
+          </a:p>
+          <a:p>
+            <a:pPr>
+              <a:spcAft>
+                <a:spcPts val="600"/>
+              </a:spcAft>
+              <a:defRPr sz="1400">
+                <a:solidFill>
+                  <a:srgbClr val="1E293B"/>
+                </a:solidFill>
+              </a:defRPr>
+            </a:pPr>
+            <a:r>
+              <a:t>Lengkapi audit log aktivitas</a:t>
+            </a:r>
+          </a:p>
+          <a:p>
+            <a:pPr>
+              <a:spcAft>
+                <a:spcPts val="600"/>
+              </a:spcAft>
+              <a:defRPr sz="1400">
+                <a:solidFill>
+                  <a:srgbClr val="1E293B"/>
+                </a:solidFill>
+              </a:defRPr>
+            </a:pPr>
+            <a:r>
+              <a:t>Uji coba internal dengan user CorpSec</a:t>
+            </a:r>
+          </a:p>
+        </p:txBody>
+      </p:sp>
+      <p:sp>
+        <p:nvSpPr>
+          <p:cNvPr id="8" name="Rounded Rectangle 7"/>
+          <p:cNvSpPr/>
+          <p:nvPr/>
+        </p:nvSpPr>
+        <p:spPr>
+          <a:xfrm>
+            <a:off x="4297680" y="1417320"/>
+            <a:ext cx="3657600" cy="4434840"/>
+          </a:xfrm>
+          <a:prstGeom prst="roundRect">
+            <a:avLst/>
+          </a:prstGeom>
+          <a:solidFill>
+            <a:srgbClr val="FFFFFF"/>
+          </a:solidFill>
+          <a:ln>
+            <a:solidFill>
+              <a:srgbClr val="E2E8F0"/>
+            </a:solidFill>
+          </a:ln>
+        </p:spPr>
+        <p:style>
+          <a:lnRef idx="1">
+            <a:schemeClr val="accent1"/>
+          </a:lnRef>
+          <a:fillRef idx="3">
+            <a:schemeClr val="accent1"/>
+          </a:fillRef>
+          <a:effectRef idx="2">
+            <a:schemeClr val="accent1"/>
+          </a:effectRef>
+          <a:fontRef idx="minor">
+            <a:schemeClr val="lt1"/>
+          </a:fontRef>
+        </p:style>
+        <p:txBody>
+          <a:bodyPr rtlCol="0" anchor="ctr"/>
+          <a:lstStyle/>
+          <a:p>
+            <a:pPr algn="ctr"/>
+          </a:p>
+        </p:txBody>
+      </p:sp>
+      <p:sp>
+        <p:nvSpPr>
+          <p:cNvPr id="9" name="Rectangle 8"/>
+          <p:cNvSpPr/>
+          <p:nvPr/>
+        </p:nvSpPr>
+        <p:spPr>
+          <a:xfrm>
+            <a:off x="4297680" y="1417320"/>
+            <a:ext cx="3657600" cy="475488"/>
+          </a:xfrm>
+          <a:prstGeom prst="rect">
+            <a:avLst/>
+          </a:prstGeom>
+          <a:solidFill>
+            <a:srgbClr val="F58220"/>
+          </a:solidFill>
+          <a:ln>
+            <a:noFill/>
+          </a:ln>
+        </p:spPr>
+        <p:style>
+          <a:lnRef idx="1">
+            <a:schemeClr val="accent1"/>
+          </a:lnRef>
+          <a:fillRef idx="3">
+            <a:schemeClr val="accent1"/>
+          </a:fillRef>
+          <a:effectRef idx="2">
+            <a:schemeClr val="accent1"/>
+          </a:effectRef>
+          <a:fontRef idx="minor">
+            <a:schemeClr val="lt1"/>
+          </a:fontRef>
+        </p:style>
+        <p:txBody>
+          <a:bodyPr rtlCol="0" anchor="ctr"/>
+          <a:lstStyle/>
+          <a:p>
+            <a:pPr algn="ctr"/>
+          </a:p>
+        </p:txBody>
+      </p:sp>
+      <p:sp>
+        <p:nvSpPr>
+          <p:cNvPr id="10" name="TextBox 9"/>
+          <p:cNvSpPr txBox="1"/>
+          <p:nvPr/>
+        </p:nvSpPr>
+        <p:spPr>
+          <a:xfrm>
+            <a:off x="4480560" y="1490472"/>
+            <a:ext cx="3291840" cy="365760"/>
+          </a:xfrm>
+          <a:prstGeom prst="rect">
+            <a:avLst/>
+          </a:prstGeom>
+          <a:noFill/>
+        </p:spPr>
+        <p:txBody>
+          <a:bodyPr wrap="none">
+            <a:spAutoFit/>
+          </a:bodyPr>
+          <a:lstStyle/>
+          <a:p>
+            <a:pPr>
+              <a:defRPr sz="1600" b="1">
+                <a:solidFill>
+                  <a:srgbClr val="FFFFFF"/>
+                </a:solidFill>
+              </a:defRPr>
+            </a:pPr>
+            <a:r>
+              <a:t>Fase 2 — Peningkatan Fitur</a:t>
+            </a:r>
+          </a:p>
+        </p:txBody>
+      </p:sp>
+      <p:sp>
+        <p:nvSpPr>
+          <p:cNvPr id="11" name="TextBox 10"/>
+          <p:cNvSpPr txBox="1"/>
+          <p:nvPr/>
+        </p:nvSpPr>
+        <p:spPr>
+          <a:xfrm>
+            <a:off x="4480560" y="2011680"/>
+            <a:ext cx="3291840" cy="3749039"/>
+          </a:xfrm>
+          <a:prstGeom prst="rect">
+            <a:avLst/>
+          </a:prstGeom>
+          <a:noFill/>
+        </p:spPr>
+        <p:txBody>
+          <a:bodyPr wrap="square">
+            <a:spAutoFit/>
+          </a:bodyPr>
+          <a:lstStyle/>
+          <a:p>
+            <a:pPr>
+              <a:spcAft>
+                <a:spcPts val="600"/>
+              </a:spcAft>
+              <a:defRPr sz="1400">
+                <a:solidFill>
+                  <a:srgbClr val="1E293B"/>
+                </a:solidFill>
+              </a:defRPr>
+            </a:pPr>
+            <a:r>
+              <a:t>Integrasi LLM nyata untuk tinjauan memorandum</a:t>
+            </a:r>
+          </a:p>
+          <a:p>
+            <a:pPr>
+              <a:spcAft>
+                <a:spcPts val="600"/>
+              </a:spcAft>
+              <a:defRPr sz="1400">
+                <a:solidFill>
+                  <a:srgbClr val="1E293B"/>
+                </a:solidFill>
+              </a:defRPr>
+            </a:pPr>
+            <a:r>
+              <a:t>Notifikasi email/SMS saat approval &amp; SLA breach</a:t>
+            </a:r>
+          </a:p>
+          <a:p>
+            <a:pPr>
+              <a:spcAft>
+                <a:spcPts val="600"/>
+              </a:spcAft>
+              <a:defRPr sz="1400">
+                <a:solidFill>
+                  <a:srgbClr val="1E293B"/>
+                </a:solidFill>
+              </a:defRPr>
+            </a:pPr>
+            <a:r>
+              <a:t>Export laporan PDF/Excel</a:t>
+            </a:r>
+          </a:p>
+          <a:p>
+            <a:pPr>
+              <a:spcAft>
+                <a:spcPts val="600"/>
+              </a:spcAft>
+              <a:defRPr sz="1400">
+                <a:solidFill>
+                  <a:srgbClr val="1E293B"/>
+                </a:solidFill>
+              </a:defRPr>
+            </a:pPr>
+            <a:r>
+              <a:t>Koneksi ke SMD Bank Sumut</a:t>
+            </a:r>
+          </a:p>
+        </p:txBody>
+      </p:sp>
+      <p:sp>
+        <p:nvSpPr>
+          <p:cNvPr id="12" name="Rounded Rectangle 11"/>
+          <p:cNvSpPr/>
+          <p:nvPr/>
+        </p:nvSpPr>
+        <p:spPr>
+          <a:xfrm>
+            <a:off x="8183879" y="1417320"/>
+            <a:ext cx="3657600" cy="4434840"/>
+          </a:xfrm>
+          <a:prstGeom prst="roundRect">
+            <a:avLst/>
+          </a:prstGeom>
+          <a:solidFill>
+            <a:srgbClr val="FFFFFF"/>
+          </a:solidFill>
+          <a:ln>
+            <a:solidFill>
+              <a:srgbClr val="E2E8F0"/>
+            </a:solidFill>
+          </a:ln>
+        </p:spPr>
+        <p:style>
+          <a:lnRef idx="1">
+            <a:schemeClr val="accent1"/>
+          </a:lnRef>
+          <a:fillRef idx="3">
+            <a:schemeClr val="accent1"/>
+          </a:fillRef>
+          <a:effectRef idx="2">
+            <a:schemeClr val="accent1"/>
+          </a:effectRef>
+          <a:fontRef idx="minor">
+            <a:schemeClr val="lt1"/>
+          </a:fontRef>
+        </p:style>
+        <p:txBody>
+          <a:bodyPr rtlCol="0" anchor="ctr"/>
+          <a:lstStyle/>
+          <a:p>
+            <a:pPr algn="ctr"/>
+          </a:p>
+        </p:txBody>
+      </p:sp>
+      <p:sp>
+        <p:nvSpPr>
+          <p:cNvPr id="13" name="Rectangle 12"/>
+          <p:cNvSpPr/>
+          <p:nvPr/>
+        </p:nvSpPr>
+        <p:spPr>
+          <a:xfrm>
+            <a:off x="8183879" y="1417320"/>
+            <a:ext cx="3657600" cy="475488"/>
+          </a:xfrm>
+          <a:prstGeom prst="rect">
+            <a:avLst/>
+          </a:prstGeom>
+          <a:solidFill>
+            <a:srgbClr val="059669"/>
+          </a:solidFill>
+          <a:ln>
+            <a:noFill/>
+          </a:ln>
+        </p:spPr>
+        <p:style>
+          <a:lnRef idx="1">
+            <a:schemeClr val="accent1"/>
+          </a:lnRef>
+          <a:fillRef idx="3">
+            <a:schemeClr val="accent1"/>
+          </a:fillRef>
+          <a:effectRef idx="2">
+            <a:schemeClr val="accent1"/>
+          </a:effectRef>
+          <a:fontRef idx="minor">
+            <a:schemeClr val="lt1"/>
+          </a:fontRef>
+        </p:style>
+        <p:txBody>
+          <a:bodyPr rtlCol="0" anchor="ctr"/>
+          <a:lstStyle/>
+          <a:p>
+            <a:pPr algn="ctr"/>
+          </a:p>
+        </p:txBody>
+      </p:sp>
+      <p:sp>
+        <p:nvSpPr>
+          <p:cNvPr id="14" name="TextBox 13"/>
+          <p:cNvSpPr txBox="1"/>
+          <p:nvPr/>
+        </p:nvSpPr>
+        <p:spPr>
+          <a:xfrm>
+            <a:off x="8366759" y="1490472"/>
+            <a:ext cx="3291840" cy="365760"/>
+          </a:xfrm>
+          <a:prstGeom prst="rect">
+            <a:avLst/>
+          </a:prstGeom>
+          <a:noFill/>
+        </p:spPr>
+        <p:txBody>
+          <a:bodyPr wrap="none">
+            <a:spAutoFit/>
+          </a:bodyPr>
+          <a:lstStyle/>
+          <a:p>
+            <a:pPr>
+              <a:defRPr sz="1600" b="1">
+                <a:solidFill>
+                  <a:srgbClr val="FFFFFF"/>
+                </a:solidFill>
+              </a:defRPr>
+            </a:pPr>
+            <a:r>
+              <a:t>Fase 3 — Go Live</a:t>
+            </a:r>
+          </a:p>
+        </p:txBody>
+      </p:sp>
+      <p:sp>
+        <p:nvSpPr>
+          <p:cNvPr id="15" name="TextBox 14"/>
+          <p:cNvSpPr txBox="1"/>
+          <p:nvPr/>
+        </p:nvSpPr>
+        <p:spPr>
+          <a:xfrm>
+            <a:off x="8366759" y="2011680"/>
+            <a:ext cx="3291840" cy="3749039"/>
+          </a:xfrm>
+          <a:prstGeom prst="rect">
+            <a:avLst/>
+          </a:prstGeom>
+          <a:noFill/>
+        </p:spPr>
+        <p:txBody>
+          <a:bodyPr wrap="square">
+            <a:spAutoFit/>
+          </a:bodyPr>
+          <a:lstStyle/>
+          <a:p>
+            <a:pPr>
+              <a:spcAft>
+                <a:spcPts val="600"/>
+              </a:spcAft>
+              <a:defRPr sz="1400">
+                <a:solidFill>
+                  <a:srgbClr val="1E293B"/>
+                </a:solidFill>
+              </a:defRPr>
+            </a:pPr>
+            <a:r>
+              <a:t>Integrasi SSO Active Directory</a:t>
+            </a:r>
+          </a:p>
+          <a:p>
+            <a:pPr>
+              <a:spcAft>
+                <a:spcPts val="600"/>
+              </a:spcAft>
+              <a:defRPr sz="1400">
+                <a:solidFill>
+                  <a:srgbClr val="1E293B"/>
+                </a:solidFill>
+              </a:defRPr>
+            </a:pPr>
+            <a:r>
+              <a:t>Migrasi database ke PostgreSQL production</a:t>
+            </a:r>
+          </a:p>
+          <a:p>
+            <a:pPr>
+              <a:spcAft>
+                <a:spcPts val="600"/>
+              </a:spcAft>
+              <a:defRPr sz="1400">
+                <a:solidFill>
+                  <a:srgbClr val="1E293B"/>
+                </a:solidFill>
+              </a:defRPr>
+            </a:pPr>
+            <a:r>
+              <a:t>Penetration testing &amp; UAT formal</a:t>
+            </a:r>
+          </a:p>
+          <a:p>
+            <a:pPr>
+              <a:spcAft>
+                <a:spcPts val="600"/>
+              </a:spcAft>
+              <a:defRPr sz="1400">
+                <a:solidFill>
+                  <a:srgbClr val="1E293B"/>
+                </a:solidFill>
+              </a:defRPr>
+            </a:pPr>
+            <a:r>
+              <a:t>Pelatihan user &amp; rollout ke seluruh divisi</a:t>
+            </a:r>
+          </a:p>
+        </p:txBody>
+      </p:sp>
+      <p:sp>
+        <p:nvSpPr>
+          <p:cNvPr id="16" name="Rectangle 15"/>
+          <p:cNvSpPr/>
+          <p:nvPr/>
+        </p:nvSpPr>
+        <p:spPr>
+          <a:xfrm>
+            <a:off x="0" y="6446520"/>
+            <a:ext cx="12191695" cy="411480"/>
+          </a:xfrm>
+          <a:prstGeom prst="rect">
+            <a:avLst/>
+          </a:prstGeom>
+          <a:solidFill>
+            <a:srgbClr val="0C2340"/>
+          </a:solidFill>
+          <a:ln>
+            <a:noFill/>
+          </a:ln>
+        </p:spPr>
+        <p:style>
+          <a:lnRef idx="1">
+            <a:schemeClr val="accent1"/>
+          </a:lnRef>
+          <a:fillRef idx="3">
+            <a:schemeClr val="accent1"/>
+          </a:fillRef>
+          <a:effectRef idx="2">
+            <a:schemeClr val="accent1"/>
+          </a:effectRef>
+          <a:fontRef idx="minor">
+            <a:schemeClr val="lt1"/>
+          </a:fontRef>
+        </p:style>
+        <p:txBody>
+          <a:bodyPr rtlCol="0" anchor="ctr"/>
+          <a:lstStyle/>
+          <a:p>
+            <a:pPr algn="ctr"/>
+          </a:p>
+        </p:txBody>
+      </p:sp>
+      <p:sp>
+        <p:nvSpPr>
+          <p:cNvPr id="17" name="TextBox 16"/>
+          <p:cNvSpPr txBox="1"/>
+          <p:nvPr/>
+        </p:nvSpPr>
+        <p:spPr>
+          <a:xfrm>
+            <a:off x="457200" y="6492240"/>
+            <a:ext cx="5486400" cy="320040"/>
+          </a:xfrm>
+          <a:prstGeom prst="rect">
+            <a:avLst/>
+          </a:prstGeom>
+          <a:noFill/>
+        </p:spPr>
+        <p:txBody>
+          <a:bodyPr wrap="none">
+            <a:spAutoFit/>
+          </a:bodyPr>
+          <a:lstStyle/>
+          <a:p>
+            <a:pPr>
+              <a:defRPr sz="1100" b="1">
+                <a:solidFill>
+                  <a:srgbClr val="F58220"/>
+                </a:solidFill>
+              </a:defRPr>
+            </a:pPr>
+            <a:r>
+              <a:t>CorpSec Bank Sumut — Business Problem Canvas</a:t>
+            </a:r>
+          </a:p>
+        </p:txBody>
+      </p:sp>
+      <p:sp>
+        <p:nvSpPr>
+          <p:cNvPr id="18" name="TextBox 17"/>
+          <p:cNvSpPr txBox="1"/>
+          <p:nvPr/>
+        </p:nvSpPr>
+        <p:spPr>
+          <a:xfrm>
+            <a:off x="10515600" y="6492240"/>
+            <a:ext cx="1371600" cy="320040"/>
+          </a:xfrm>
+          <a:prstGeom prst="rect">
+            <a:avLst/>
+          </a:prstGeom>
+          <a:noFill/>
+        </p:spPr>
+        <p:txBody>
+          <a:bodyPr wrap="none">
+            <a:spAutoFit/>
+          </a:bodyPr>
+          <a:lstStyle/>
+          <a:p>
+            <a:pPr algn="r">
+              <a:defRPr sz="1100">
+                <a:solidFill>
+                  <a:srgbClr val="FFFFFF"/>
+                </a:solidFill>
+              </a:defRPr>
+            </a:pPr>
+            <a:r>
+              <a:t>12</a:t>
+            </a:r>
+          </a:p>
+        </p:txBody>
+      </p:sp>
+    </p:spTree>
+  </p:cSld>
+  <p:clrMapOvr>
+    <a:masterClrMapping/>
+  </p:clrMapOvr>
+</p:sld>
+</file>
+
+<file path=ppt/slides/slide13.xml><?xml version="1.0" encoding="utf-8"?>
+<p:sld xmlns:a="http://schemas.openxmlformats.org/drawingml/2006/main" xmlns:p="http://schemas.openxmlformats.org/presentationml/2006/main" xmlns:r="http://schemas.openxmlformats.org/officeDocument/2006/relationships">
+  <p:cSld>
+    <p:bg>
+      <p:bgPr>
+        <a:solidFill>
           <a:srgbClr val="0C2340"/>
         </a:solidFill>
         <a:effectLst/>
@@ -3660,7 +6011,7 @@
               </a:defRPr>
             </a:pPr>
             <a:r>
-              <a:t>10</a:t>
+              <a:t>13</a:t>
             </a:r>
           </a:p>
         </p:txBody>
@@ -7153,7 +9504,7 @@
               </a:defRPr>
             </a:pPr>
             <a:r>
-              <a:t>Modul Sistem</a:t>
+              <a:t>Mockup — Halaman Login &amp; Dashboard</a:t>
             </a:r>
           </a:p>
           <a:p>
@@ -7168,21 +9519,90 @@
               </a:defRPr>
             </a:pPr>
             <a:r>
-              <a:t>Delapan modul operasional dalam satu platform</a:t>
-            </a:r>
-          </a:p>
-        </p:txBody>
-      </p:sp>
-      <p:sp>
-        <p:nvSpPr>
-          <p:cNvPr id="4" name="TextBox 3"/>
+              <a:t>Tampilan depan dan pusat kendali CorpSec</a:t>
+            </a:r>
+          </a:p>
+        </p:txBody>
+      </p:sp>
+      <p:sp>
+        <p:nvSpPr>
+          <p:cNvPr id="4" name="Rounded Rectangle 3"/>
+          <p:cNvSpPr/>
+          <p:nvPr/>
+        </p:nvSpPr>
+        <p:spPr>
+          <a:xfrm>
+            <a:off x="365760" y="1280160"/>
+            <a:ext cx="5486400" cy="3474720"/>
+          </a:xfrm>
+          <a:prstGeom prst="roundRect">
+            <a:avLst/>
+          </a:prstGeom>
+          <a:solidFill>
+            <a:srgbClr val="FFFFFF"/>
+          </a:solidFill>
+          <a:ln>
+            <a:solidFill>
+              <a:srgbClr val="E2E8F0"/>
+            </a:solidFill>
+          </a:ln>
+        </p:spPr>
+        <p:style>
+          <a:lnRef idx="1">
+            <a:schemeClr val="accent1"/>
+          </a:lnRef>
+          <a:fillRef idx="3">
+            <a:schemeClr val="accent1"/>
+          </a:fillRef>
+          <a:effectRef idx="2">
+            <a:schemeClr val="accent1"/>
+          </a:effectRef>
+          <a:fontRef idx="minor">
+            <a:schemeClr val="lt1"/>
+          </a:fontRef>
+        </p:style>
+        <p:txBody>
+          <a:bodyPr rtlCol="0" anchor="ctr"/>
+          <a:lstStyle/>
+          <a:p>
+            <a:pPr algn="ctr"/>
+          </a:p>
+        </p:txBody>
+      </p:sp>
+      <p:pic>
+        <p:nvPicPr>
+          <p:cNvPr id="5" name="Picture 4" descr="01-login.png"/>
+          <p:cNvPicPr>
+            <a:picLocks noChangeAspect="1"/>
+          </p:cNvPicPr>
+          <p:nvPr/>
+        </p:nvPicPr>
+        <p:blipFill>
+          <a:blip r:embed="rId2"/>
+          <a:stretch>
+            <a:fillRect/>
+          </a:stretch>
+        </p:blipFill>
+        <p:spPr>
+          <a:xfrm>
+            <a:off x="411480" y="1325880"/>
+            <a:ext cx="5394960" cy="3063240"/>
+          </a:xfrm>
+          <a:prstGeom prst="rect">
+            <a:avLst/>
+          </a:prstGeom>
+        </p:spPr>
+      </p:pic>
+      <p:sp>
+        <p:nvSpPr>
+          <p:cNvPr id="6" name="TextBox 5"/>
           <p:cNvSpPr txBox="1"/>
           <p:nvPr/>
         </p:nvSpPr>
         <p:spPr>
           <a:xfrm>
-            <a:off x="502920" y="1371600"/>
-            <a:ext cx="11155680" cy="4846320"/>
+            <a:off x="411480" y="4434840"/>
+            <a:ext cx="5394960" cy="320040"/>
           </a:xfrm>
           <a:prstGeom prst="rect">
             <a:avLst/>
@@ -7190,159 +9610,131 @@
           <a:noFill/>
         </p:spPr>
         <p:txBody>
-          <a:bodyPr wrap="square">
+          <a:bodyPr wrap="none">
             <a:spAutoFit/>
           </a:bodyPr>
           <a:lstStyle/>
           <a:p>
-            <a:pPr>
-              <a:lnSpc>
-                <a:spcPct val="120000"/>
-              </a:lnSpc>
-              <a:spcAft>
-                <a:spcPts val="1200"/>
-              </a:spcAft>
-              <a:defRPr sz="1900">
-                <a:solidFill>
-                  <a:srgbClr val="1E293B"/>
-                </a:solidFill>
-              </a:defRPr>
-            </a:pPr>
-            <a:r>
-              <a:t>Dashboard — ringkasan harian CorpSec (agenda, memo, SLA, notifikasi)</a:t>
-            </a:r>
-          </a:p>
-          <a:p>
-            <a:pPr>
-              <a:lnSpc>
-                <a:spcPct val="120000"/>
-              </a:lnSpc>
-              <a:spcAft>
-                <a:spcPts val="1200"/>
-              </a:spcAft>
-              <a:defRPr sz="1900">
-                <a:solidFill>
-                  <a:srgbClr val="1E293B"/>
-                </a:solidFill>
-              </a:defRPr>
-            </a:pPr>
-            <a:r>
-              <a:t>Memorandum — upload PDF, tinjauan, workflow 7 level, tanda tangan</a:t>
-            </a:r>
-          </a:p>
-          <a:p>
-            <a:pPr>
-              <a:lnSpc>
-                <a:spcPct val="120000"/>
-              </a:lnSpc>
-              <a:spcAft>
-                <a:spcPts val="1200"/>
-              </a:spcAft>
-              <a:defRPr sz="1900">
-                <a:solidFill>
-                  <a:srgbClr val="1E293B"/>
-                </a:solidFill>
-              </a:defRPr>
-            </a:pPr>
-            <a:r>
-              <a:t>Agenda Direksi — jadwal kegiatan &amp; catatan persiapan</a:t>
-            </a:r>
-          </a:p>
-          <a:p>
-            <a:pPr>
-              <a:lnSpc>
-                <a:spcPct val="120000"/>
-              </a:lnSpc>
-              <a:spcAft>
-                <a:spcPts val="1200"/>
-              </a:spcAft>
-              <a:defRPr sz="1900">
-                <a:solidFill>
-                  <a:srgbClr val="1E293B"/>
-                </a:solidFill>
-              </a:defRPr>
-            </a:pPr>
-            <a:r>
-              <a:t>Rapat — notulen &amp; tindak lanjut dengan penanggung jawab</a:t>
-            </a:r>
-          </a:p>
-          <a:p>
-            <a:pPr>
-              <a:lnSpc>
-                <a:spcPct val="120000"/>
-              </a:lnSpc>
-              <a:spcAft>
-                <a:spcPts val="1200"/>
-              </a:spcAft>
-              <a:defRPr sz="1900">
-                <a:solidFill>
-                  <a:srgbClr val="1E293B"/>
-                </a:solidFill>
-              </a:defRPr>
-            </a:pPr>
-            <a:r>
-              <a:t>Media Monitoring — berita Bank Sumut &amp; analisis sentimen</a:t>
-            </a:r>
-          </a:p>
-          <a:p>
-            <a:pPr>
-              <a:lnSpc>
-                <a:spcPct val="120000"/>
-              </a:lnSpc>
-              <a:spcAft>
-                <a:spcPts val="1200"/>
-              </a:spcAft>
-              <a:defRPr sz="1900">
-                <a:solidFill>
-                  <a:srgbClr val="1E293B"/>
-                </a:solidFill>
-              </a:defRPr>
-            </a:pPr>
-            <a:r>
-              <a:t>Knowledge Base — arsip SK/SE/SOP &amp; regulasi OJK/BI</a:t>
-            </a:r>
-          </a:p>
-          <a:p>
-            <a:pPr>
-              <a:lnSpc>
-                <a:spcPct val="120000"/>
-              </a:lnSpc>
-              <a:spcAft>
-                <a:spcPts val="1200"/>
-              </a:spcAft>
-              <a:defRPr sz="1900">
-                <a:solidFill>
-                  <a:srgbClr val="1E293B"/>
-                </a:solidFill>
-              </a:defRPr>
-            </a:pPr>
-            <a:r>
-              <a:t>SLA Monitoring — pantau target waktu ≥ 95%</a:t>
-            </a:r>
-          </a:p>
-          <a:p>
-            <a:pPr>
-              <a:lnSpc>
-                <a:spcPct val="120000"/>
-              </a:lnSpc>
-              <a:spcAft>
-                <a:spcPts val="1200"/>
-              </a:spcAft>
-              <a:defRPr sz="1900">
-                <a:solidFill>
-                  <a:srgbClr val="1E293B"/>
-                </a:solidFill>
-              </a:defRPr>
-            </a:pPr>
-            <a:r>
-              <a:t>Laporan — statistik &amp; KPI success metrics PRD</a:t>
-            </a:r>
-          </a:p>
-        </p:txBody>
-      </p:sp>
-      <p:sp>
-        <p:nvSpPr>
-          <p:cNvPr id="5" name="Rectangle 4"/>
+            <a:pPr algn="ctr">
+              <a:defRPr sz="1300" b="1">
+                <a:solidFill>
+                  <a:srgbClr val="0C2340"/>
+                </a:solidFill>
+              </a:defRPr>
+            </a:pPr>
+            <a:r>
+              <a:t>Halaman Login</a:t>
+            </a:r>
+          </a:p>
+        </p:txBody>
+      </p:sp>
+      <p:sp>
+        <p:nvSpPr>
+          <p:cNvPr id="7" name="Rounded Rectangle 6"/>
+          <p:cNvSpPr/>
+          <p:nvPr/>
+        </p:nvSpPr>
+        <p:spPr>
+          <a:xfrm>
+            <a:off x="6217920" y="1280160"/>
+            <a:ext cx="5486400" cy="3474720"/>
+          </a:xfrm>
+          <a:prstGeom prst="roundRect">
+            <a:avLst/>
+          </a:prstGeom>
+          <a:solidFill>
+            <a:srgbClr val="FFFFFF"/>
+          </a:solidFill>
+          <a:ln>
+            <a:solidFill>
+              <a:srgbClr val="E2E8F0"/>
+            </a:solidFill>
+          </a:ln>
+        </p:spPr>
+        <p:style>
+          <a:lnRef idx="1">
+            <a:schemeClr val="accent1"/>
+          </a:lnRef>
+          <a:fillRef idx="3">
+            <a:schemeClr val="accent1"/>
+          </a:fillRef>
+          <a:effectRef idx="2">
+            <a:schemeClr val="accent1"/>
+          </a:effectRef>
+          <a:fontRef idx="minor">
+            <a:schemeClr val="lt1"/>
+          </a:fontRef>
+        </p:style>
+        <p:txBody>
+          <a:bodyPr rtlCol="0" anchor="ctr"/>
+          <a:lstStyle/>
+          <a:p>
+            <a:pPr algn="ctr"/>
+          </a:p>
+        </p:txBody>
+      </p:sp>
+      <p:pic>
+        <p:nvPicPr>
+          <p:cNvPr id="8" name="Picture 7" descr="02-dashboard.png"/>
+          <p:cNvPicPr>
+            <a:picLocks noChangeAspect="1"/>
+          </p:cNvPicPr>
+          <p:nvPr/>
+        </p:nvPicPr>
+        <p:blipFill>
+          <a:blip r:embed="rId3"/>
+          <a:stretch>
+            <a:fillRect/>
+          </a:stretch>
+        </p:blipFill>
+        <p:spPr>
+          <a:xfrm>
+            <a:off x="6263640" y="1325880"/>
+            <a:ext cx="5394960" cy="3063240"/>
+          </a:xfrm>
+          <a:prstGeom prst="rect">
+            <a:avLst/>
+          </a:prstGeom>
+        </p:spPr>
+      </p:pic>
+      <p:sp>
+        <p:nvSpPr>
+          <p:cNvPr id="9" name="TextBox 8"/>
+          <p:cNvSpPr txBox="1"/>
+          <p:nvPr/>
+        </p:nvSpPr>
+        <p:spPr>
+          <a:xfrm>
+            <a:off x="6263640" y="4434840"/>
+            <a:ext cx="5394960" cy="320040"/>
+          </a:xfrm>
+          <a:prstGeom prst="rect">
+            <a:avLst/>
+          </a:prstGeom>
+          <a:noFill/>
+        </p:spPr>
+        <p:txBody>
+          <a:bodyPr wrap="none">
+            <a:spAutoFit/>
+          </a:bodyPr>
+          <a:lstStyle/>
+          <a:p>
+            <a:pPr algn="ctr">
+              <a:defRPr sz="1300" b="1">
+                <a:solidFill>
+                  <a:srgbClr val="0C2340"/>
+                </a:solidFill>
+              </a:defRPr>
+            </a:pPr>
+            <a:r>
+              <a:t>Dashboard Corporate Secretary</a:t>
+            </a:r>
+          </a:p>
+        </p:txBody>
+      </p:sp>
+      <p:sp>
+        <p:nvSpPr>
+          <p:cNvPr id="10" name="Rectangle 9"/>
           <p:cNvSpPr/>
           <p:nvPr/>
         </p:nvSpPr>
@@ -7385,7 +9777,7 @@
       </p:sp>
       <p:sp>
         <p:nvSpPr>
-          <p:cNvPr id="6" name="TextBox 5"/>
+          <p:cNvPr id="11" name="TextBox 10"/>
           <p:cNvSpPr txBox="1"/>
           <p:nvPr/>
         </p:nvSpPr>
@@ -7420,7 +9812,7 @@
       </p:sp>
       <p:sp>
         <p:nvSpPr>
-          <p:cNvPr id="7" name="TextBox 6"/>
+          <p:cNvPr id="12" name="TextBox 11"/>
           <p:cNvSpPr txBox="1"/>
           <p:nvPr/>
         </p:nvSpPr>
@@ -7552,7 +9944,7 @@
               </a:defRPr>
             </a:pPr>
             <a:r>
-              <a:t>Alur Kerja Memorandum</a:t>
+              <a:t>Mockup — Memorandum &amp; Divisi Pengusul</a:t>
             </a:r>
           </a:p>
           <a:p>
@@ -7567,21 +9959,90 @@
               </a:defRPr>
             </a:pPr>
             <a:r>
-              <a:t>7 tahap persetujuan sesuai PRD</a:t>
-            </a:r>
-          </a:p>
-        </p:txBody>
-      </p:sp>
-      <p:sp>
-        <p:nvSpPr>
-          <p:cNvPr id="4" name="TextBox 3"/>
+              <a:t>Modul utama pengelolaan dokumen</a:t>
+            </a:r>
+          </a:p>
+        </p:txBody>
+      </p:sp>
+      <p:sp>
+        <p:nvSpPr>
+          <p:cNvPr id="4" name="Rounded Rectangle 3"/>
+          <p:cNvSpPr/>
+          <p:nvPr/>
+        </p:nvSpPr>
+        <p:spPr>
+          <a:xfrm>
+            <a:off x="365760" y="1280160"/>
+            <a:ext cx="5486400" cy="3474720"/>
+          </a:xfrm>
+          <a:prstGeom prst="roundRect">
+            <a:avLst/>
+          </a:prstGeom>
+          <a:solidFill>
+            <a:srgbClr val="FFFFFF"/>
+          </a:solidFill>
+          <a:ln>
+            <a:solidFill>
+              <a:srgbClr val="E2E8F0"/>
+            </a:solidFill>
+          </a:ln>
+        </p:spPr>
+        <p:style>
+          <a:lnRef idx="1">
+            <a:schemeClr val="accent1"/>
+          </a:lnRef>
+          <a:fillRef idx="3">
+            <a:schemeClr val="accent1"/>
+          </a:fillRef>
+          <a:effectRef idx="2">
+            <a:schemeClr val="accent1"/>
+          </a:effectRef>
+          <a:fontRef idx="minor">
+            <a:schemeClr val="lt1"/>
+          </a:fontRef>
+        </p:style>
+        <p:txBody>
+          <a:bodyPr rtlCol="0" anchor="ctr"/>
+          <a:lstStyle/>
+          <a:p>
+            <a:pPr algn="ctr"/>
+          </a:p>
+        </p:txBody>
+      </p:sp>
+      <p:pic>
+        <p:nvPicPr>
+          <p:cNvPr id="5" name="Picture 4" descr="03-memorandum.png"/>
+          <p:cNvPicPr>
+            <a:picLocks noChangeAspect="1"/>
+          </p:cNvPicPr>
+          <p:nvPr/>
+        </p:nvPicPr>
+        <p:blipFill>
+          <a:blip r:embed="rId2"/>
+          <a:stretch>
+            <a:fillRect/>
+          </a:stretch>
+        </p:blipFill>
+        <p:spPr>
+          <a:xfrm>
+            <a:off x="411480" y="1325880"/>
+            <a:ext cx="5394960" cy="3063240"/>
+          </a:xfrm>
+          <a:prstGeom prst="rect">
+            <a:avLst/>
+          </a:prstGeom>
+        </p:spPr>
+      </p:pic>
+      <p:sp>
+        <p:nvSpPr>
+          <p:cNvPr id="6" name="TextBox 5"/>
           <p:cNvSpPr txBox="1"/>
           <p:nvPr/>
         </p:nvSpPr>
         <p:spPr>
           <a:xfrm>
-            <a:off x="502920" y="1371600"/>
-            <a:ext cx="11155680" cy="4846320"/>
+            <a:off x="411480" y="4434840"/>
+            <a:ext cx="5394960" cy="320040"/>
           </a:xfrm>
           <a:prstGeom prst="rect">
             <a:avLst/>
@@ -7589,141 +10050,131 @@
           <a:noFill/>
         </p:spPr>
         <p:txBody>
-          <a:bodyPr wrap="square">
+          <a:bodyPr wrap="none">
             <a:spAutoFit/>
           </a:bodyPr>
           <a:lstStyle/>
           <a:p>
-            <a:pPr>
-              <a:lnSpc>
-                <a:spcPct val="120000"/>
-              </a:lnSpc>
-              <a:spcAft>
-                <a:spcPts val="1200"/>
-              </a:spcAft>
-              <a:defRPr sz="2000">
-                <a:solidFill>
-                  <a:srgbClr val="1E293B"/>
-                </a:solidFill>
-              </a:defRPr>
-            </a:pPr>
-            <a:r>
-              <a:t>1. Divisi Pengusul — kirim memorandum PDF</a:t>
-            </a:r>
-          </a:p>
-          <a:p>
-            <a:pPr>
-              <a:lnSpc>
-                <a:spcPct val="120000"/>
-              </a:lnSpc>
-              <a:spcAft>
-                <a:spcPts val="1200"/>
-              </a:spcAft>
-              <a:defRPr sz="2000">
-                <a:solidFill>
-                  <a:srgbClr val="1E293B"/>
-                </a:solidFill>
-              </a:defRPr>
-            </a:pPr>
-            <a:r>
-              <a:t>2. Corporate Secretary — terima, rangkum, &amp; tinjau kelengkapan</a:t>
-            </a:r>
-          </a:p>
-          <a:p>
-            <a:pPr>
-              <a:lnSpc>
-                <a:spcPct val="120000"/>
-              </a:lnSpc>
-              <a:spcAft>
-                <a:spcPts val="1200"/>
-              </a:spcAft>
-              <a:defRPr sz="2000">
-                <a:solidFill>
-                  <a:srgbClr val="1E293B"/>
-                </a:solidFill>
-              </a:defRPr>
-            </a:pPr>
-            <a:r>
-              <a:t>3. Pemimpin Bidang — setujui atau tolak + tanda tangan</a:t>
-            </a:r>
-          </a:p>
-          <a:p>
-            <a:pPr>
-              <a:lnSpc>
-                <a:spcPct val="120000"/>
-              </a:lnSpc>
-              <a:spcAft>
-                <a:spcPts val="1200"/>
-              </a:spcAft>
-              <a:defRPr sz="2000">
-                <a:solidFill>
-                  <a:srgbClr val="1E293B"/>
-                </a:solidFill>
-              </a:defRPr>
-            </a:pPr>
-            <a:r>
-              <a:t>4. Sekretaris Direksi/Komisaris — teruskan ke pimpinan</a:t>
-            </a:r>
-          </a:p>
-          <a:p>
-            <a:pPr>
-              <a:lnSpc>
-                <a:spcPct val="120000"/>
-              </a:lnSpc>
-              <a:spcAft>
-                <a:spcPts val="1200"/>
-              </a:spcAft>
-              <a:defRPr sz="2000">
-                <a:solidFill>
-                  <a:srgbClr val="1E293B"/>
-                </a:solidFill>
-              </a:defRPr>
-            </a:pPr>
-            <a:r>
-              <a:t>5. Direksi / Komisaris — beri keputusan</a:t>
-            </a:r>
-          </a:p>
-          <a:p>
-            <a:pPr>
-              <a:lnSpc>
-                <a:spcPct val="120000"/>
-              </a:lnSpc>
-              <a:spcAft>
-                <a:spcPts val="1200"/>
-              </a:spcAft>
-              <a:defRPr sz="2000">
-                <a:solidFill>
-                  <a:srgbClr val="1E293B"/>
-                </a:solidFill>
-              </a:defRPr>
-            </a:pPr>
-            <a:r>
-              <a:t>6. CorpSec — finalisasi sesuai keputusan board</a:t>
-            </a:r>
-          </a:p>
-          <a:p>
-            <a:pPr>
-              <a:lnSpc>
-                <a:spcPct val="120000"/>
-              </a:lnSpc>
-              <a:spcAft>
-                <a:spcPts val="1200"/>
-              </a:spcAft>
-              <a:defRPr sz="2000">
-                <a:solidFill>
-                  <a:srgbClr val="1E293B"/>
-                </a:solidFill>
-              </a:defRPr>
-            </a:pPr>
-            <a:r>
-              <a:t>7. Kembali ke Pengusul — pemberitahuan hasil akhir</a:t>
-            </a:r>
-          </a:p>
-        </p:txBody>
-      </p:sp>
-      <p:sp>
-        <p:nvSpPr>
-          <p:cNvPr id="5" name="Rectangle 4"/>
+            <a:pPr algn="ctr">
+              <a:defRPr sz="1300" b="1">
+                <a:solidFill>
+                  <a:srgbClr val="0C2340"/>
+                </a:solidFill>
+              </a:defRPr>
+            </a:pPr>
+            <a:r>
+              <a:t>Manajemen Memorandum</a:t>
+            </a:r>
+          </a:p>
+        </p:txBody>
+      </p:sp>
+      <p:sp>
+        <p:nvSpPr>
+          <p:cNvPr id="7" name="Rounded Rectangle 6"/>
+          <p:cNvSpPr/>
+          <p:nvPr/>
+        </p:nvSpPr>
+        <p:spPr>
+          <a:xfrm>
+            <a:off x="6217920" y="1280160"/>
+            <a:ext cx="5486400" cy="3474720"/>
+          </a:xfrm>
+          <a:prstGeom prst="roundRect">
+            <a:avLst/>
+          </a:prstGeom>
+          <a:solidFill>
+            <a:srgbClr val="FFFFFF"/>
+          </a:solidFill>
+          <a:ln>
+            <a:solidFill>
+              <a:srgbClr val="E2E8F0"/>
+            </a:solidFill>
+          </a:ln>
+        </p:spPr>
+        <p:style>
+          <a:lnRef idx="1">
+            <a:schemeClr val="accent1"/>
+          </a:lnRef>
+          <a:fillRef idx="3">
+            <a:schemeClr val="accent1"/>
+          </a:fillRef>
+          <a:effectRef idx="2">
+            <a:schemeClr val="accent1"/>
+          </a:effectRef>
+          <a:fontRef idx="minor">
+            <a:schemeClr val="lt1"/>
+          </a:fontRef>
+        </p:style>
+        <p:txBody>
+          <a:bodyPr rtlCol="0" anchor="ctr"/>
+          <a:lstStyle/>
+          <a:p>
+            <a:pPr algn="ctr"/>
+          </a:p>
+        </p:txBody>
+      </p:sp>
+      <p:pic>
+        <p:nvPicPr>
+          <p:cNvPr id="8" name="Picture 7" descr="04-pengusul.png"/>
+          <p:cNvPicPr>
+            <a:picLocks noChangeAspect="1"/>
+          </p:cNvPicPr>
+          <p:nvPr/>
+        </p:nvPicPr>
+        <p:blipFill>
+          <a:blip r:embed="rId3"/>
+          <a:stretch>
+            <a:fillRect/>
+          </a:stretch>
+        </p:blipFill>
+        <p:spPr>
+          <a:xfrm>
+            <a:off x="6263640" y="1325880"/>
+            <a:ext cx="5394960" cy="3063240"/>
+          </a:xfrm>
+          <a:prstGeom prst="rect">
+            <a:avLst/>
+          </a:prstGeom>
+        </p:spPr>
+      </p:pic>
+      <p:sp>
+        <p:nvSpPr>
+          <p:cNvPr id="9" name="TextBox 8"/>
+          <p:cNvSpPr txBox="1"/>
+          <p:nvPr/>
+        </p:nvSpPr>
+        <p:spPr>
+          <a:xfrm>
+            <a:off x="6263640" y="4434840"/>
+            <a:ext cx="5394960" cy="320040"/>
+          </a:xfrm>
+          <a:prstGeom prst="rect">
+            <a:avLst/>
+          </a:prstGeom>
+          <a:noFill/>
+        </p:spPr>
+        <p:txBody>
+          <a:bodyPr wrap="none">
+            <a:spAutoFit/>
+          </a:bodyPr>
+          <a:lstStyle/>
+          <a:p>
+            <a:pPr algn="ctr">
+              <a:defRPr sz="1300" b="1">
+                <a:solidFill>
+                  <a:srgbClr val="0C2340"/>
+                </a:solidFill>
+              </a:defRPr>
+            </a:pPr>
+            <a:r>
+              <a:t>Beranda Divisi Pengusul</a:t>
+            </a:r>
+          </a:p>
+        </p:txBody>
+      </p:sp>
+      <p:sp>
+        <p:nvSpPr>
+          <p:cNvPr id="10" name="Rectangle 9"/>
           <p:cNvSpPr/>
           <p:nvPr/>
         </p:nvSpPr>
@@ -7766,7 +10217,7 @@
       </p:sp>
       <p:sp>
         <p:nvSpPr>
-          <p:cNvPr id="6" name="TextBox 5"/>
+          <p:cNvPr id="11" name="TextBox 10"/>
           <p:cNvSpPr txBox="1"/>
           <p:nvPr/>
         </p:nvSpPr>
@@ -7801,7 +10252,7 @@
       </p:sp>
       <p:sp>
         <p:nvSpPr>
-          <p:cNvPr id="7" name="TextBox 6"/>
+          <p:cNvPr id="12" name="TextBox 11"/>
           <p:cNvSpPr txBox="1"/>
           <p:nvPr/>
         </p:nvSpPr>
@@ -7933,7 +10384,7 @@
               </a:defRPr>
             </a:pPr>
             <a:r>
-              <a:t>Perbaikan Aspek User Experience</a:t>
+              <a:t>Mockup — Review &amp; Agenda</a:t>
             </a:r>
           </a:p>
           <a:p>
@@ -7948,7 +10399,7 @@
               </a:defRPr>
             </a:pPr>
             <a:r>
-              <a:t>Yang sudah diterapkan dan rencana perbaikan</a:t>
+              <a:t>Tampilan Pemimpin Bidang dan Agenda Direksi</a:t>
             </a:r>
           </a:p>
         </p:txBody>
@@ -7961,8 +10412,8 @@
         </p:nvSpPr>
         <p:spPr>
           <a:xfrm>
-            <a:off x="411480" y="1325880"/>
-            <a:ext cx="5394960" cy="4572000"/>
+            <a:off x="365760" y="1280160"/>
+            <a:ext cx="5486400" cy="3474720"/>
           </a:xfrm>
           <a:prstGeom prst="roundRect">
             <a:avLst/>
@@ -7998,49 +10449,30 @@
           </a:p>
         </p:txBody>
       </p:sp>
-      <p:sp>
-        <p:nvSpPr>
-          <p:cNvPr id="5" name="Rectangle 4"/>
-          <p:cNvSpPr/>
-          <p:nvPr/>
-        </p:nvSpPr>
+      <p:pic>
+        <p:nvPicPr>
+          <p:cNvPr id="5" name="Picture 4" descr="05-pimpinan.png"/>
+          <p:cNvPicPr>
+            <a:picLocks noChangeAspect="1"/>
+          </p:cNvPicPr>
+          <p:nvPr/>
+        </p:nvPicPr>
+        <p:blipFill>
+          <a:blip r:embed="rId2"/>
+          <a:stretch>
+            <a:fillRect/>
+          </a:stretch>
+        </p:blipFill>
         <p:spPr>
           <a:xfrm>
             <a:off x="411480" y="1325880"/>
-            <a:ext cx="5394960" cy="475488"/>
-          </a:xfrm>
-          <a:prstGeom prst="rect">
-            <a:avLst/>
-          </a:prstGeom>
-          <a:solidFill>
-            <a:srgbClr val="059669"/>
-          </a:solidFill>
-          <a:ln>
-            <a:noFill/>
-          </a:ln>
-        </p:spPr>
-        <p:style>
-          <a:lnRef idx="1">
-            <a:schemeClr val="accent1"/>
-          </a:lnRef>
-          <a:fillRef idx="3">
-            <a:schemeClr val="accent1"/>
-          </a:fillRef>
-          <a:effectRef idx="2">
-            <a:schemeClr val="accent1"/>
-          </a:effectRef>
-          <a:fontRef idx="minor">
-            <a:schemeClr val="lt1"/>
-          </a:fontRef>
-        </p:style>
-        <p:txBody>
-          <a:bodyPr rtlCol="0" anchor="ctr"/>
-          <a:lstStyle/>
-          <a:p>
-            <a:pPr algn="ctr"/>
-          </a:p>
-        </p:txBody>
-      </p:sp>
+            <a:ext cx="5394960" cy="3063240"/>
+          </a:xfrm>
+          <a:prstGeom prst="rect">
+            <a:avLst/>
+          </a:prstGeom>
+        </p:spPr>
+      </p:pic>
       <p:sp>
         <p:nvSpPr>
           <p:cNvPr id="6" name="TextBox 5"/>
@@ -8049,8 +10481,8 @@
         </p:nvSpPr>
         <p:spPr>
           <a:xfrm>
-            <a:off x="594360" y="1399032"/>
-            <a:ext cx="5029200" cy="365760"/>
+            <a:off x="411480" y="4434840"/>
+            <a:ext cx="5394960" cy="320040"/>
           </a:xfrm>
           <a:prstGeom prst="rect">
             <a:avLst/>
@@ -8063,172 +10495,29 @@
           </a:bodyPr>
           <a:lstStyle/>
           <a:p>
-            <a:pPr>
-              <a:defRPr sz="1600" b="1">
-                <a:solidFill>
-                  <a:srgbClr val="FFFFFF"/>
-                </a:solidFill>
-              </a:defRPr>
-            </a:pPr>
-            <a:r>
-              <a:t>Sudah Diterapkan</a:t>
-            </a:r>
-          </a:p>
-        </p:txBody>
-      </p:sp>
-      <p:sp>
-        <p:nvSpPr>
-          <p:cNvPr id="7" name="TextBox 6"/>
-          <p:cNvSpPr txBox="1"/>
-          <p:nvPr/>
-        </p:nvSpPr>
-        <p:spPr>
-          <a:xfrm>
-            <a:off x="594360" y="1920240"/>
-            <a:ext cx="5029200" cy="3886200"/>
-          </a:xfrm>
-          <a:prstGeom prst="rect">
-            <a:avLst/>
-          </a:prstGeom>
-          <a:noFill/>
-        </p:spPr>
-        <p:txBody>
-          <a:bodyPr wrap="square">
-            <a:spAutoFit/>
-          </a:bodyPr>
-          <a:lstStyle/>
-          <a:p>
-            <a:pPr>
-              <a:spcAft>
-                <a:spcPts val="600"/>
-              </a:spcAft>
-              <a:defRPr sz="1400">
-                <a:solidFill>
-                  <a:srgbClr val="1E293B"/>
-                </a:solidFill>
-              </a:defRPr>
-            </a:pPr>
-            <a:r>
-              <a:t>Desain UI mengikuti identitas Bank Sumut (navy &amp; oranye)</a:t>
-            </a:r>
-          </a:p>
-          <a:p>
-            <a:pPr>
-              <a:spcAft>
-                <a:spcPts val="600"/>
-              </a:spcAft>
-              <a:defRPr sz="1400">
-                <a:solidFill>
-                  <a:srgbClr val="1E293B"/>
-                </a:solidFill>
-              </a:defRPr>
-            </a:pPr>
-            <a:r>
-              <a:t>Login page dengan hero image &amp; akun demo cepat</a:t>
-            </a:r>
-          </a:p>
-          <a:p>
-            <a:pPr>
-              <a:spcAft>
-                <a:spcPts val="600"/>
-              </a:spcAft>
-              <a:defRPr sz="1400">
-                <a:solidFill>
-                  <a:srgbClr val="1E293B"/>
-                </a:solidFill>
-              </a:defRPr>
-            </a:pPr>
-            <a:r>
-              <a:t>Navigasi sidebar per role — tidak membingungkan</a:t>
-            </a:r>
-          </a:p>
-          <a:p>
-            <a:pPr>
-              <a:spcAft>
-                <a:spcPts val="600"/>
-              </a:spcAft>
-              <a:defRPr sz="1400">
-                <a:solidFill>
-                  <a:srgbClr val="1E293B"/>
-                </a:solidFill>
-              </a:defRPr>
-            </a:pPr>
-            <a:r>
-              <a:t>Workflow stepper visual di detail memorandum</a:t>
-            </a:r>
-          </a:p>
-          <a:p>
-            <a:pPr>
-              <a:spcAft>
-                <a:spcPts val="600"/>
-              </a:spcAft>
-              <a:defRPr sz="1400">
-                <a:solidFill>
-                  <a:srgbClr val="1E293B"/>
-                </a:solidFill>
-              </a:defRPr>
-            </a:pPr>
-            <a:r>
-              <a:t>Indikator baca (belum/sudah dibaca) pada daftar memo</a:t>
-            </a:r>
-          </a:p>
-          <a:p>
-            <a:pPr>
-              <a:spcAft>
-                <a:spcPts val="600"/>
-              </a:spcAft>
-              <a:defRPr sz="1400">
-                <a:solidFill>
-                  <a:srgbClr val="1E293B"/>
-                </a:solidFill>
-              </a:defRPr>
-            </a:pPr>
-            <a:r>
-              <a:t>Dashboard hero banner &amp; stat cards informatif</a:t>
-            </a:r>
-          </a:p>
-          <a:p>
-            <a:pPr>
-              <a:spcAft>
-                <a:spcPts val="600"/>
-              </a:spcAft>
-              <a:defRPr sz="1400">
-                <a:solidFill>
-                  <a:srgbClr val="1E293B"/>
-                </a:solidFill>
-              </a:defRPr>
-            </a:pPr>
-            <a:r>
-              <a:t>Redirect otomatis ke halaman sesuai role setelah login</a:t>
-            </a:r>
-          </a:p>
-          <a:p>
-            <a:pPr>
-              <a:spcAft>
-                <a:spcPts val="600"/>
-              </a:spcAft>
-              <a:defRPr sz="1400">
-                <a:solidFill>
-                  <a:srgbClr val="1E293B"/>
-                </a:solidFill>
-              </a:defRPr>
-            </a:pPr>
-            <a:r>
-              <a:t>Sidebar mobile dengan menu hamburger</a:t>
-            </a:r>
-          </a:p>
-        </p:txBody>
-      </p:sp>
-      <p:sp>
-        <p:nvSpPr>
-          <p:cNvPr id="8" name="Rounded Rectangle 7"/>
+            <a:pPr algn="ctr">
+              <a:defRPr sz="1300" b="1">
+                <a:solidFill>
+                  <a:srgbClr val="0C2340"/>
+                </a:solidFill>
+              </a:defRPr>
+            </a:pPr>
+            <a:r>
+              <a:t>Review Memorandum — Pimpinan Bidang</a:t>
+            </a:r>
+          </a:p>
+        </p:txBody>
+      </p:sp>
+      <p:sp>
+        <p:nvSpPr>
+          <p:cNvPr id="7" name="Rounded Rectangle 6"/>
           <p:cNvSpPr/>
           <p:nvPr/>
         </p:nvSpPr>
         <p:spPr>
           <a:xfrm>
-            <a:off x="6263640" y="1325880"/>
-            <a:ext cx="5394960" cy="4572000"/>
+            <a:off x="6217920" y="1280160"/>
+            <a:ext cx="5486400" cy="3474720"/>
           </a:xfrm>
           <a:prstGeom prst="roundRect">
             <a:avLst/>
@@ -8264,59 +10553,40 @@
           </a:p>
         </p:txBody>
       </p:sp>
-      <p:sp>
-        <p:nvSpPr>
-          <p:cNvPr id="9" name="Rectangle 8"/>
-          <p:cNvSpPr/>
-          <p:nvPr/>
-        </p:nvSpPr>
+      <p:pic>
+        <p:nvPicPr>
+          <p:cNvPr id="8" name="Picture 7" descr="06-agenda.png"/>
+          <p:cNvPicPr>
+            <a:picLocks noChangeAspect="1"/>
+          </p:cNvPicPr>
+          <p:nvPr/>
+        </p:nvPicPr>
+        <p:blipFill>
+          <a:blip r:embed="rId3"/>
+          <a:stretch>
+            <a:fillRect/>
+          </a:stretch>
+        </p:blipFill>
         <p:spPr>
           <a:xfrm>
             <a:off x="6263640" y="1325880"/>
-            <a:ext cx="5394960" cy="475488"/>
-          </a:xfrm>
-          <a:prstGeom prst="rect">
-            <a:avLst/>
-          </a:prstGeom>
-          <a:solidFill>
-            <a:srgbClr val="F58220"/>
-          </a:solidFill>
-          <a:ln>
-            <a:noFill/>
-          </a:ln>
-        </p:spPr>
-        <p:style>
-          <a:lnRef idx="1">
-            <a:schemeClr val="accent1"/>
-          </a:lnRef>
-          <a:fillRef idx="3">
-            <a:schemeClr val="accent1"/>
-          </a:fillRef>
-          <a:effectRef idx="2">
-            <a:schemeClr val="accent1"/>
-          </a:effectRef>
-          <a:fontRef idx="minor">
-            <a:schemeClr val="lt1"/>
-          </a:fontRef>
-        </p:style>
-        <p:txBody>
-          <a:bodyPr rtlCol="0" anchor="ctr"/>
-          <a:lstStyle/>
-          <a:p>
-            <a:pPr algn="ctr"/>
-          </a:p>
-        </p:txBody>
-      </p:sp>
-      <p:sp>
-        <p:nvSpPr>
-          <p:cNvPr id="10" name="TextBox 9"/>
+            <a:ext cx="5394960" cy="3063240"/>
+          </a:xfrm>
+          <a:prstGeom prst="rect">
+            <a:avLst/>
+          </a:prstGeom>
+        </p:spPr>
+      </p:pic>
+      <p:sp>
+        <p:nvSpPr>
+          <p:cNvPr id="9" name="TextBox 8"/>
           <p:cNvSpPr txBox="1"/>
           <p:nvPr/>
         </p:nvSpPr>
         <p:spPr>
           <a:xfrm>
-            <a:off x="6446520" y="1399032"/>
-            <a:ext cx="5029200" cy="365760"/>
+            <a:off x="6263640" y="4434840"/>
+            <a:ext cx="5394960" cy="320040"/>
           </a:xfrm>
           <a:prstGeom prst="rect">
             <a:avLst/>
@@ -8329,165 +10599,22 @@
           </a:bodyPr>
           <a:lstStyle/>
           <a:p>
-            <a:pPr>
-              <a:defRPr sz="1600" b="1">
-                <a:solidFill>
-                  <a:srgbClr val="FFFFFF"/>
-                </a:solidFill>
-              </a:defRPr>
-            </a:pPr>
-            <a:r>
-              <a:t>Rencana Perbaikan UX</a:t>
-            </a:r>
-          </a:p>
-        </p:txBody>
-      </p:sp>
-      <p:sp>
-        <p:nvSpPr>
-          <p:cNvPr id="11" name="TextBox 10"/>
-          <p:cNvSpPr txBox="1"/>
-          <p:nvPr/>
-        </p:nvSpPr>
-        <p:spPr>
-          <a:xfrm>
-            <a:off x="6446520" y="1920240"/>
-            <a:ext cx="5029200" cy="3886200"/>
-          </a:xfrm>
-          <a:prstGeom prst="rect">
-            <a:avLst/>
-          </a:prstGeom>
-          <a:noFill/>
-        </p:spPr>
-        <p:txBody>
-          <a:bodyPr wrap="square">
-            <a:spAutoFit/>
-          </a:bodyPr>
-          <a:lstStyle/>
-          <a:p>
-            <a:pPr>
-              <a:spcAft>
-                <a:spcPts val="600"/>
-              </a:spcAft>
-              <a:defRPr sz="1400">
-                <a:solidFill>
-                  <a:srgbClr val="1E293B"/>
-                </a:solidFill>
-              </a:defRPr>
-            </a:pPr>
-            <a:r>
-              <a:t>Notifikasi real-time (toast &amp; badge) saat ada dokumen baru</a:t>
-            </a:r>
-          </a:p>
-          <a:p>
-            <a:pPr>
-              <a:spcAft>
-                <a:spcPts val="600"/>
-              </a:spcAft>
-              <a:defRPr sz="1400">
-                <a:solidFill>
-                  <a:srgbClr val="1E293B"/>
-                </a:solidFill>
-              </a:defRPr>
-            </a:pPr>
-            <a:r>
-              <a:t>Loading state &amp; feedback saat upload PDF</a:t>
-            </a:r>
-          </a:p>
-          <a:p>
-            <a:pPr>
-              <a:spcAft>
-                <a:spcPts val="600"/>
-              </a:spcAft>
-              <a:defRPr sz="1400">
-                <a:solidFill>
-                  <a:srgbClr val="1E293B"/>
-                </a:solidFill>
-              </a:defRPr>
-            </a:pPr>
-            <a:r>
-              <a:t>Halaman error yang lebih informatif</a:t>
-            </a:r>
-          </a:p>
-          <a:p>
-            <a:pPr>
-              <a:spcAft>
-                <a:spcPts val="600"/>
-              </a:spcAft>
-              <a:defRPr sz="1400">
-                <a:solidFill>
-                  <a:srgbClr val="1E293B"/>
-                </a:solidFill>
-              </a:defRPr>
-            </a:pPr>
-            <a:r>
-              <a:t>Pencarian &amp; filter di daftar memorandum</a:t>
-            </a:r>
-          </a:p>
-          <a:p>
-            <a:pPr>
-              <a:spcAft>
-                <a:spcPts val="600"/>
-              </a:spcAft>
-              <a:defRPr sz="1400">
-                <a:solidFill>
-                  <a:srgbClr val="1E293B"/>
-                </a:solidFill>
-              </a:defRPr>
-            </a:pPr>
-            <a:r>
-              <a:t>Mode gelap (dark mode) opsional</a:t>
-            </a:r>
-          </a:p>
-          <a:p>
-            <a:pPr>
-              <a:spcAft>
-                <a:spcPts val="600"/>
-              </a:spcAft>
-              <a:defRPr sz="1400">
-                <a:solidFill>
-                  <a:srgbClr val="1E293B"/>
-                </a:solidFill>
-              </a:defRPr>
-            </a:pPr>
-            <a:r>
-              <a:t>Panduan singkat (onboarding) untuk user baru</a:t>
-            </a:r>
-          </a:p>
-          <a:p>
-            <a:pPr>
-              <a:spcAft>
-                <a:spcPts val="600"/>
-              </a:spcAft>
-              <a:defRPr sz="1400">
-                <a:solidFill>
-                  <a:srgbClr val="1E293B"/>
-                </a:solidFill>
-              </a:defRPr>
-            </a:pPr>
-            <a:r>
-              <a:t>Optimasi tampilan tablet &amp; HP</a:t>
-            </a:r>
-          </a:p>
-          <a:p>
-            <a:pPr>
-              <a:spcAft>
-                <a:spcPts val="600"/>
-              </a:spcAft>
-              <a:defRPr sz="1400">
-                <a:solidFill>
-                  <a:srgbClr val="1E293B"/>
-                </a:solidFill>
-              </a:defRPr>
-            </a:pPr>
-            <a:r>
-              <a:t>Akses cepat ke rapat &amp; media dari sidebar CorpSec</a:t>
-            </a:r>
-          </a:p>
-        </p:txBody>
-      </p:sp>
-      <p:sp>
-        <p:nvSpPr>
-          <p:cNvPr id="12" name="Rectangle 11"/>
+            <a:pPr algn="ctr">
+              <a:defRPr sz="1300" b="1">
+                <a:solidFill>
+                  <a:srgbClr val="0C2340"/>
+                </a:solidFill>
+              </a:defRPr>
+            </a:pPr>
+            <a:r>
+              <a:t>Manajemen Agenda Direksi</a:t>
+            </a:r>
+          </a:p>
+        </p:txBody>
+      </p:sp>
+      <p:sp>
+        <p:nvSpPr>
+          <p:cNvPr id="10" name="Rectangle 9"/>
           <p:cNvSpPr/>
           <p:nvPr/>
         </p:nvSpPr>
@@ -8530,7 +10657,7 @@
       </p:sp>
       <p:sp>
         <p:nvSpPr>
-          <p:cNvPr id="13" name="TextBox 12"/>
+          <p:cNvPr id="11" name="TextBox 10"/>
           <p:cNvSpPr txBox="1"/>
           <p:nvPr/>
         </p:nvSpPr>
@@ -8565,7 +10692,7 @@
       </p:sp>
       <p:sp>
         <p:nvSpPr>
-          <p:cNvPr id="14" name="TextBox 13"/>
+          <p:cNvPr id="12" name="TextBox 11"/>
           <p:cNvSpPr txBox="1"/>
           <p:nvPr/>
         </p:nvSpPr>
@@ -8697,7 +10824,7 @@
               </a:defRPr>
             </a:pPr>
             <a:r>
-              <a:t>Perbaikan Aspek Keamanan</a:t>
+              <a:t>Modul Sistem</a:t>
             </a:r>
           </a:p>
           <a:p>
@@ -8712,144 +10839,21 @@
               </a:defRPr>
             </a:pPr>
             <a:r>
-              <a:t>Kondisi saat ini dan langkah penguatan</a:t>
-            </a:r>
-          </a:p>
-        </p:txBody>
-      </p:sp>
-      <p:sp>
-        <p:nvSpPr>
-          <p:cNvPr id="4" name="Rounded Rectangle 3"/>
-          <p:cNvSpPr/>
-          <p:nvPr/>
-        </p:nvSpPr>
-        <p:spPr>
-          <a:xfrm>
-            <a:off x="411480" y="1325880"/>
-            <a:ext cx="5394960" cy="4572000"/>
-          </a:xfrm>
-          <a:prstGeom prst="roundRect">
-            <a:avLst/>
-          </a:prstGeom>
-          <a:solidFill>
-            <a:srgbClr val="FFFFFF"/>
-          </a:solidFill>
-          <a:ln>
-            <a:solidFill>
-              <a:srgbClr val="E2E8F0"/>
-            </a:solidFill>
-          </a:ln>
-        </p:spPr>
-        <p:style>
-          <a:lnRef idx="1">
-            <a:schemeClr val="accent1"/>
-          </a:lnRef>
-          <a:fillRef idx="3">
-            <a:schemeClr val="accent1"/>
-          </a:fillRef>
-          <a:effectRef idx="2">
-            <a:schemeClr val="accent1"/>
-          </a:effectRef>
-          <a:fontRef idx="minor">
-            <a:schemeClr val="lt1"/>
-          </a:fontRef>
-        </p:style>
-        <p:txBody>
-          <a:bodyPr rtlCol="0" anchor="ctr"/>
-          <a:lstStyle/>
-          <a:p>
-            <a:pPr algn="ctr"/>
-          </a:p>
-        </p:txBody>
-      </p:sp>
-      <p:sp>
-        <p:nvSpPr>
-          <p:cNvPr id="5" name="Rectangle 4"/>
-          <p:cNvSpPr/>
-          <p:nvPr/>
-        </p:nvSpPr>
-        <p:spPr>
-          <a:xfrm>
-            <a:off x="411480" y="1325880"/>
-            <a:ext cx="5394960" cy="475488"/>
-          </a:xfrm>
-          <a:prstGeom prst="rect">
-            <a:avLst/>
-          </a:prstGeom>
-          <a:solidFill>
-            <a:srgbClr val="059669"/>
-          </a:solidFill>
-          <a:ln>
-            <a:noFill/>
-          </a:ln>
-        </p:spPr>
-        <p:style>
-          <a:lnRef idx="1">
-            <a:schemeClr val="accent1"/>
-          </a:lnRef>
-          <a:fillRef idx="3">
-            <a:schemeClr val="accent1"/>
-          </a:fillRef>
-          <a:effectRef idx="2">
-            <a:schemeClr val="accent1"/>
-          </a:effectRef>
-          <a:fontRef idx="minor">
-            <a:schemeClr val="lt1"/>
-          </a:fontRef>
-        </p:style>
-        <p:txBody>
-          <a:bodyPr rtlCol="0" anchor="ctr"/>
-          <a:lstStyle/>
-          <a:p>
-            <a:pPr algn="ctr"/>
-          </a:p>
-        </p:txBody>
-      </p:sp>
-      <p:sp>
-        <p:nvSpPr>
-          <p:cNvPr id="6" name="TextBox 5"/>
+              <a:t>Delapan modul operasional dalam satu platform</a:t>
+            </a:r>
+          </a:p>
+        </p:txBody>
+      </p:sp>
+      <p:sp>
+        <p:nvSpPr>
+          <p:cNvPr id="4" name="TextBox 3"/>
           <p:cNvSpPr txBox="1"/>
           <p:nvPr/>
         </p:nvSpPr>
         <p:spPr>
           <a:xfrm>
-            <a:off x="594360" y="1399032"/>
-            <a:ext cx="5029200" cy="365760"/>
-          </a:xfrm>
-          <a:prstGeom prst="rect">
-            <a:avLst/>
-          </a:prstGeom>
-          <a:noFill/>
-        </p:spPr>
-        <p:txBody>
-          <a:bodyPr wrap="none">
-            <a:spAutoFit/>
-          </a:bodyPr>
-          <a:lstStyle/>
-          <a:p>
-            <a:pPr>
-              <a:defRPr sz="1600" b="1">
-                <a:solidFill>
-                  <a:srgbClr val="FFFFFF"/>
-                </a:solidFill>
-              </a:defRPr>
-            </a:pPr>
-            <a:r>
-              <a:t>Sudah Diterapkan</a:t>
-            </a:r>
-          </a:p>
-        </p:txBody>
-      </p:sp>
-      <p:sp>
-        <p:nvSpPr>
-          <p:cNvPr id="7" name="TextBox 6"/>
-          <p:cNvSpPr txBox="1"/>
-          <p:nvPr/>
-        </p:nvSpPr>
-        <p:spPr>
-          <a:xfrm>
-            <a:off x="594360" y="1920240"/>
-            <a:ext cx="5029200" cy="3886200"/>
+            <a:off x="502920" y="1371600"/>
+            <a:ext cx="11155680" cy="4846320"/>
           </a:xfrm>
           <a:prstGeom prst="rect">
             <a:avLst/>
@@ -8863,365 +10867,153 @@
           <a:lstStyle/>
           <a:p>
             <a:pPr>
+              <a:lnSpc>
+                <a:spcPct val="120000"/>
+              </a:lnSpc>
               <a:spcAft>
-                <a:spcPts val="600"/>
+                <a:spcPts val="1200"/>
               </a:spcAft>
-              <a:defRPr sz="1400">
+              <a:defRPr sz="1900">
                 <a:solidFill>
                   <a:srgbClr val="1E293B"/>
                 </a:solidFill>
               </a:defRPr>
             </a:pPr>
             <a:r>
-              <a:t>Login wajib — halaman dilindungi middleware</a:t>
-            </a:r>
-          </a:p>
-          <a:p>
-            <a:pPr>
+              <a:t>Dashboard — ringkasan harian CorpSec (agenda, memo, SLA, notifikasi)</a:t>
+            </a:r>
+          </a:p>
+          <a:p>
+            <a:pPr>
+              <a:lnSpc>
+                <a:spcPct val="120000"/>
+              </a:lnSpc>
               <a:spcAft>
-                <a:spcPts val="600"/>
+                <a:spcPts val="1200"/>
               </a:spcAft>
-              <a:defRPr sz="1400">
+              <a:defRPr sz="1900">
                 <a:solidFill>
                   <a:srgbClr val="1E293B"/>
                 </a:solidFill>
               </a:defRPr>
             </a:pPr>
             <a:r>
-              <a:t>Pembagian akses per role (RBAC 7 level)</a:t>
-            </a:r>
-          </a:p>
-          <a:p>
-            <a:pPr>
+              <a:t>Memorandum — upload PDF, tinjauan, workflow 7 level, tanda tangan</a:t>
+            </a:r>
+          </a:p>
+          <a:p>
+            <a:pPr>
+              <a:lnSpc>
+                <a:spcPct val="120000"/>
+              </a:lnSpc>
               <a:spcAft>
-                <a:spcPts val="600"/>
+                <a:spcPts val="1200"/>
               </a:spcAft>
-              <a:defRPr sz="1400">
+              <a:defRPr sz="1900">
                 <a:solidFill>
                   <a:srgbClr val="1E293B"/>
                 </a:solidFill>
               </a:defRPr>
             </a:pPr>
             <a:r>
-              <a:t>Cookie session httpOnly &amp; sameSite=lax</a:t>
-            </a:r>
-          </a:p>
-          <a:p>
-            <a:pPr>
+              <a:t>Agenda Direksi — jadwal kegiatan &amp; catatan persiapan</a:t>
+            </a:r>
+          </a:p>
+          <a:p>
+            <a:pPr>
+              <a:lnSpc>
+                <a:spcPct val="120000"/>
+              </a:lnSpc>
               <a:spcAft>
-                <a:spcPts val="600"/>
+                <a:spcPts val="1200"/>
               </a:spcAft>
-              <a:defRPr sz="1400">
+              <a:defRPr sz="1900">
                 <a:solidFill>
                   <a:srgbClr val="1E293B"/>
                 </a:solidFill>
               </a:defRPr>
             </a:pPr>
             <a:r>
-              <a:t>API memorandum dicek role sebelum aksi (requireApiRole)</a:t>
-            </a:r>
-          </a:p>
-          <a:p>
-            <a:pPr>
+              <a:t>Rapat — notulen &amp; tindak lanjut dengan penanggung jawab</a:t>
+            </a:r>
+          </a:p>
+          <a:p>
+            <a:pPr>
+              <a:lnSpc>
+                <a:spcPct val="120000"/>
+              </a:lnSpc>
               <a:spcAft>
-                <a:spcPts val="600"/>
+                <a:spcPts val="1200"/>
               </a:spcAft>
-              <a:defRPr sz="1400">
+              <a:defRPr sz="1900">
                 <a:solidFill>
                   <a:srgbClr val="1E293B"/>
                 </a:solidFill>
               </a:defRPr>
             </a:pPr>
             <a:r>
-              <a:t>Redirect otomatis jika akses halaman tidak sesuai role</a:t>
-            </a:r>
-          </a:p>
-          <a:p>
-            <a:pPr>
+              <a:t>Media Monitoring — berita Bank Sumut &amp; analisis sentimen</a:t>
+            </a:r>
+          </a:p>
+          <a:p>
+            <a:pPr>
+              <a:lnSpc>
+                <a:spcPct val="120000"/>
+              </a:lnSpc>
               <a:spcAft>
-                <a:spcPts val="600"/>
+                <a:spcPts val="1200"/>
               </a:spcAft>
-              <a:defRPr sz="1400">
+              <a:defRPr sz="1900">
                 <a:solidFill>
                   <a:srgbClr val="1E293B"/>
                 </a:solidFill>
               </a:defRPr>
             </a:pPr>
             <a:r>
-              <a:t>Validasi file upload (format PDF, batas ukuran)</a:t>
-            </a:r>
-          </a:p>
-        </p:txBody>
-      </p:sp>
-      <p:sp>
-        <p:nvSpPr>
-          <p:cNvPr id="8" name="Rounded Rectangle 7"/>
-          <p:cNvSpPr/>
-          <p:nvPr/>
-        </p:nvSpPr>
-        <p:spPr>
-          <a:xfrm>
-            <a:off x="6263640" y="1325880"/>
-            <a:ext cx="5394960" cy="4572000"/>
-          </a:xfrm>
-          <a:prstGeom prst="roundRect">
-            <a:avLst/>
-          </a:prstGeom>
-          <a:solidFill>
-            <a:srgbClr val="FFFFFF"/>
-          </a:solidFill>
-          <a:ln>
-            <a:solidFill>
-              <a:srgbClr val="E2E8F0"/>
-            </a:solidFill>
-          </a:ln>
-        </p:spPr>
-        <p:style>
-          <a:lnRef idx="1">
-            <a:schemeClr val="accent1"/>
-          </a:lnRef>
-          <a:fillRef idx="3">
-            <a:schemeClr val="accent1"/>
-          </a:fillRef>
-          <a:effectRef idx="2">
-            <a:schemeClr val="accent1"/>
-          </a:effectRef>
-          <a:fontRef idx="minor">
-            <a:schemeClr val="lt1"/>
-          </a:fontRef>
-        </p:style>
-        <p:txBody>
-          <a:bodyPr rtlCol="0" anchor="ctr"/>
-          <a:lstStyle/>
-          <a:p>
-            <a:pPr algn="ctr"/>
-          </a:p>
-        </p:txBody>
-      </p:sp>
-      <p:sp>
-        <p:nvSpPr>
-          <p:cNvPr id="9" name="Rectangle 8"/>
-          <p:cNvSpPr/>
-          <p:nvPr/>
-        </p:nvSpPr>
-        <p:spPr>
-          <a:xfrm>
-            <a:off x="6263640" y="1325880"/>
-            <a:ext cx="5394960" cy="475488"/>
-          </a:xfrm>
-          <a:prstGeom prst="rect">
-            <a:avLst/>
-          </a:prstGeom>
-          <a:solidFill>
-            <a:srgbClr val="DC2626"/>
-          </a:solidFill>
-          <a:ln>
-            <a:noFill/>
-          </a:ln>
-        </p:spPr>
-        <p:style>
-          <a:lnRef idx="1">
-            <a:schemeClr val="accent1"/>
-          </a:lnRef>
-          <a:fillRef idx="3">
-            <a:schemeClr val="accent1"/>
-          </a:fillRef>
-          <a:effectRef idx="2">
-            <a:schemeClr val="accent1"/>
-          </a:effectRef>
-          <a:fontRef idx="minor">
-            <a:schemeClr val="lt1"/>
-          </a:fontRef>
-        </p:style>
-        <p:txBody>
-          <a:bodyPr rtlCol="0" anchor="ctr"/>
-          <a:lstStyle/>
-          <a:p>
-            <a:pPr algn="ctr"/>
-          </a:p>
-        </p:txBody>
-      </p:sp>
-      <p:sp>
-        <p:nvSpPr>
-          <p:cNvPr id="10" name="TextBox 9"/>
-          <p:cNvSpPr txBox="1"/>
-          <p:nvPr/>
-        </p:nvSpPr>
-        <p:spPr>
-          <a:xfrm>
-            <a:off x="6446520" y="1399032"/>
-            <a:ext cx="5029200" cy="365760"/>
-          </a:xfrm>
-          <a:prstGeom prst="rect">
-            <a:avLst/>
-          </a:prstGeom>
-          <a:noFill/>
-        </p:spPr>
-        <p:txBody>
-          <a:bodyPr wrap="none">
-            <a:spAutoFit/>
-          </a:bodyPr>
-          <a:lstStyle/>
-          <a:p>
-            <a:pPr>
-              <a:defRPr sz="1600" b="1">
-                <a:solidFill>
-                  <a:srgbClr val="FFFFFF"/>
-                </a:solidFill>
-              </a:defRPr>
-            </a:pPr>
-            <a:r>
-              <a:t>Perlu Ditingkatkan</a:t>
-            </a:r>
-          </a:p>
-        </p:txBody>
-      </p:sp>
-      <p:sp>
-        <p:nvSpPr>
-          <p:cNvPr id="11" name="TextBox 10"/>
-          <p:cNvSpPr txBox="1"/>
-          <p:nvPr/>
-        </p:nvSpPr>
-        <p:spPr>
-          <a:xfrm>
-            <a:off x="6446520" y="1920240"/>
-            <a:ext cx="5029200" cy="3886200"/>
-          </a:xfrm>
-          <a:prstGeom prst="rect">
-            <a:avLst/>
-          </a:prstGeom>
-          <a:noFill/>
-        </p:spPr>
-        <p:txBody>
-          <a:bodyPr wrap="square">
-            <a:spAutoFit/>
-          </a:bodyPr>
-          <a:lstStyle/>
-          <a:p>
-            <a:pPr>
+              <a:t>Knowledge Base — arsip SK/SE/SOP &amp; regulasi OJK/BI</a:t>
+            </a:r>
+          </a:p>
+          <a:p>
+            <a:pPr>
+              <a:lnSpc>
+                <a:spcPct val="120000"/>
+              </a:lnSpc>
               <a:spcAft>
-                <a:spcPts val="600"/>
+                <a:spcPts val="1200"/>
               </a:spcAft>
-              <a:defRPr sz="1400">
+              <a:defRPr sz="1900">
                 <a:solidFill>
                   <a:srgbClr val="1E293B"/>
                 </a:solidFill>
               </a:defRPr>
             </a:pPr>
             <a:r>
-              <a:t>Session cookie perlu ditandatangani (JWT/signed cookie)</a:t>
-            </a:r>
-          </a:p>
-          <a:p>
-            <a:pPr>
+              <a:t>SLA Monitoring — pantau target waktu ≥ 95%</a:t>
+            </a:r>
+          </a:p>
+          <a:p>
+            <a:pPr>
+              <a:lnSpc>
+                <a:spcPct val="120000"/>
+              </a:lnSpc>
               <a:spcAft>
-                <a:spcPts val="600"/>
+                <a:spcPts val="1200"/>
               </a:spcAft>
-              <a:defRPr sz="1400">
+              <a:defRPr sz="1900">
                 <a:solidFill>
                   <a:srgbClr val="1E293B"/>
                 </a:solidFill>
               </a:defRPr>
             </a:pPr>
             <a:r>
-              <a:t>Password disimpan plaintext — perlu bcrypt/hash</a:t>
-            </a:r>
-          </a:p>
-          <a:p>
-            <a:pPr>
-              <a:spcAft>
-                <a:spcPts val="600"/>
-              </a:spcAft>
-              <a:defRPr sz="1400">
-                <a:solidFill>
-                  <a:srgbClr val="1E293B"/>
-                </a:solidFill>
-              </a:defRPr>
-            </a:pPr>
-            <a:r>
-              <a:t>Belum ada rate limiting pada login</a:t>
-            </a:r>
-          </a:p>
-          <a:p>
-            <a:pPr>
-              <a:spcAft>
-                <a:spcPts val="600"/>
-              </a:spcAft>
-              <a:defRPr sz="1400">
-                <a:solidFill>
-                  <a:srgbClr val="1E293B"/>
-                </a:solidFill>
-              </a:defRPr>
-            </a:pPr>
-            <a:r>
-              <a:t>Belum ada security headers (CSP, HSTS, X-Frame)</a:t>
-            </a:r>
-          </a:p>
-          <a:p>
-            <a:pPr>
-              <a:spcAft>
-                <a:spcPts val="600"/>
-              </a:spcAft>
-              <a:defRPr sz="1400">
-                <a:solidFill>
-                  <a:srgbClr val="1E293B"/>
-                </a:solidFill>
-              </a:defRPr>
-            </a:pPr>
-            <a:r>
-              <a:t>Belum ada audit log aktivitas user</a:t>
-            </a:r>
-          </a:p>
-          <a:p>
-            <a:pPr>
-              <a:spcAft>
-                <a:spcPts val="600"/>
-              </a:spcAft>
-              <a:defRPr sz="1400">
-                <a:solidFill>
-                  <a:srgbClr val="1E293B"/>
-                </a:solidFill>
-              </a:defRPr>
-            </a:pPr>
-            <a:r>
-              <a:t>Perlu validasi input lebih ketat di semua API</a:t>
-            </a:r>
-          </a:p>
-          <a:p>
-            <a:pPr>
-              <a:spcAft>
-                <a:spcPts val="600"/>
-              </a:spcAft>
-              <a:defRPr sz="1400">
-                <a:solidFill>
-                  <a:srgbClr val="1E293B"/>
-                </a:solidFill>
-              </a:defRPr>
-            </a:pPr>
-            <a:r>
-              <a:t>Enkripsi file PDF di storage server</a:t>
-            </a:r>
-          </a:p>
-          <a:p>
-            <a:pPr>
-              <a:spcAft>
-                <a:spcPts val="600"/>
-              </a:spcAft>
-              <a:defRPr sz="1400">
-                <a:solidFill>
-                  <a:srgbClr val="1E293B"/>
-                </a:solidFill>
-              </a:defRPr>
-            </a:pPr>
-            <a:r>
-              <a:t>Integrasi SSO Active Directory Bank Sumut</a:t>
-            </a:r>
-          </a:p>
-        </p:txBody>
-      </p:sp>
-      <p:sp>
-        <p:nvSpPr>
-          <p:cNvPr id="12" name="Rectangle 11"/>
+              <a:t>Laporan — statistik &amp; KPI success metrics PRD</a:t>
+            </a:r>
+          </a:p>
+        </p:txBody>
+      </p:sp>
+      <p:sp>
+        <p:nvSpPr>
+          <p:cNvPr id="5" name="Rectangle 4"/>
           <p:cNvSpPr/>
           <p:nvPr/>
         </p:nvSpPr>
@@ -9264,7 +11056,7 @@
       </p:sp>
       <p:sp>
         <p:nvSpPr>
-          <p:cNvPr id="13" name="TextBox 12"/>
+          <p:cNvPr id="6" name="TextBox 5"/>
           <p:cNvSpPr txBox="1"/>
           <p:nvPr/>
         </p:nvSpPr>
@@ -9299,7 +11091,7 @@
       </p:sp>
       <p:sp>
         <p:nvSpPr>
-          <p:cNvPr id="14" name="TextBox 13"/>
+          <p:cNvPr id="7" name="TextBox 6"/>
           <p:cNvSpPr txBox="1"/>
           <p:nvPr/>
         </p:nvSpPr>
@@ -9431,7 +11223,7 @@
               </a:defRPr>
             </a:pPr>
             <a:r>
-              <a:t>Rencana Langkah Selanjutnya</a:t>
+              <a:t>Alur Kerja Memorandum</a:t>
             </a:r>
           </a:p>
           <a:p>
@@ -9446,53 +11238,157 @@
               </a:defRPr>
             </a:pPr>
             <a:r>
-              <a:t>Prioritas pengembangan ke depan</a:t>
-            </a:r>
-          </a:p>
-        </p:txBody>
-      </p:sp>
-      <p:sp>
-        <p:nvSpPr>
-          <p:cNvPr id="4" name="Rounded Rectangle 3"/>
-          <p:cNvSpPr/>
-          <p:nvPr/>
-        </p:nvSpPr>
-        <p:spPr>
-          <a:xfrm>
-            <a:off x="411480" y="1417320"/>
-            <a:ext cx="3657600" cy="4434840"/>
-          </a:xfrm>
-          <a:prstGeom prst="roundRect">
-            <a:avLst/>
-          </a:prstGeom>
-          <a:solidFill>
-            <a:srgbClr val="FFFFFF"/>
-          </a:solidFill>
-          <a:ln>
-            <a:solidFill>
-              <a:srgbClr val="E2E8F0"/>
-            </a:solidFill>
-          </a:ln>
-        </p:spPr>
-        <p:style>
-          <a:lnRef idx="1">
-            <a:schemeClr val="accent1"/>
-          </a:lnRef>
-          <a:fillRef idx="3">
-            <a:schemeClr val="accent1"/>
-          </a:fillRef>
-          <a:effectRef idx="2">
-            <a:schemeClr val="accent1"/>
-          </a:effectRef>
-          <a:fontRef idx="minor">
-            <a:schemeClr val="lt1"/>
-          </a:fontRef>
-        </p:style>
-        <p:txBody>
-          <a:bodyPr rtlCol="0" anchor="ctr"/>
-          <a:lstStyle/>
-          <a:p>
-            <a:pPr algn="ctr"/>
+              <a:t>7 tahap persetujuan sesuai PRD</a:t>
+            </a:r>
+          </a:p>
+        </p:txBody>
+      </p:sp>
+      <p:sp>
+        <p:nvSpPr>
+          <p:cNvPr id="4" name="TextBox 3"/>
+          <p:cNvSpPr txBox="1"/>
+          <p:nvPr/>
+        </p:nvSpPr>
+        <p:spPr>
+          <a:xfrm>
+            <a:off x="502920" y="1371600"/>
+            <a:ext cx="11155680" cy="4846320"/>
+          </a:xfrm>
+          <a:prstGeom prst="rect">
+            <a:avLst/>
+          </a:prstGeom>
+          <a:noFill/>
+        </p:spPr>
+        <p:txBody>
+          <a:bodyPr wrap="square">
+            <a:spAutoFit/>
+          </a:bodyPr>
+          <a:lstStyle/>
+          <a:p>
+            <a:pPr>
+              <a:lnSpc>
+                <a:spcPct val="120000"/>
+              </a:lnSpc>
+              <a:spcAft>
+                <a:spcPts val="1200"/>
+              </a:spcAft>
+              <a:defRPr sz="2000">
+                <a:solidFill>
+                  <a:srgbClr val="1E293B"/>
+                </a:solidFill>
+              </a:defRPr>
+            </a:pPr>
+            <a:r>
+              <a:t>1. Divisi Pengusul — kirim memorandum PDF</a:t>
+            </a:r>
+          </a:p>
+          <a:p>
+            <a:pPr>
+              <a:lnSpc>
+                <a:spcPct val="120000"/>
+              </a:lnSpc>
+              <a:spcAft>
+                <a:spcPts val="1200"/>
+              </a:spcAft>
+              <a:defRPr sz="2000">
+                <a:solidFill>
+                  <a:srgbClr val="1E293B"/>
+                </a:solidFill>
+              </a:defRPr>
+            </a:pPr>
+            <a:r>
+              <a:t>2. Corporate Secretary — terima, rangkum, &amp; tinjau kelengkapan</a:t>
+            </a:r>
+          </a:p>
+          <a:p>
+            <a:pPr>
+              <a:lnSpc>
+                <a:spcPct val="120000"/>
+              </a:lnSpc>
+              <a:spcAft>
+                <a:spcPts val="1200"/>
+              </a:spcAft>
+              <a:defRPr sz="2000">
+                <a:solidFill>
+                  <a:srgbClr val="1E293B"/>
+                </a:solidFill>
+              </a:defRPr>
+            </a:pPr>
+            <a:r>
+              <a:t>3. Pemimpin Bidang — setujui atau tolak + tanda tangan</a:t>
+            </a:r>
+          </a:p>
+          <a:p>
+            <a:pPr>
+              <a:lnSpc>
+                <a:spcPct val="120000"/>
+              </a:lnSpc>
+              <a:spcAft>
+                <a:spcPts val="1200"/>
+              </a:spcAft>
+              <a:defRPr sz="2000">
+                <a:solidFill>
+                  <a:srgbClr val="1E293B"/>
+                </a:solidFill>
+              </a:defRPr>
+            </a:pPr>
+            <a:r>
+              <a:t>4. Sekretaris Direksi/Komisaris — teruskan ke pimpinan</a:t>
+            </a:r>
+          </a:p>
+          <a:p>
+            <a:pPr>
+              <a:lnSpc>
+                <a:spcPct val="120000"/>
+              </a:lnSpc>
+              <a:spcAft>
+                <a:spcPts val="1200"/>
+              </a:spcAft>
+              <a:defRPr sz="2000">
+                <a:solidFill>
+                  <a:srgbClr val="1E293B"/>
+                </a:solidFill>
+              </a:defRPr>
+            </a:pPr>
+            <a:r>
+              <a:t>5. Direksi / Komisaris — beri keputusan</a:t>
+            </a:r>
+          </a:p>
+          <a:p>
+            <a:pPr>
+              <a:lnSpc>
+                <a:spcPct val="120000"/>
+              </a:lnSpc>
+              <a:spcAft>
+                <a:spcPts val="1200"/>
+              </a:spcAft>
+              <a:defRPr sz="2000">
+                <a:solidFill>
+                  <a:srgbClr val="1E293B"/>
+                </a:solidFill>
+              </a:defRPr>
+            </a:pPr>
+            <a:r>
+              <a:t>6. CorpSec — finalisasi sesuai keputusan board</a:t>
+            </a:r>
+          </a:p>
+          <a:p>
+            <a:pPr>
+              <a:lnSpc>
+                <a:spcPct val="120000"/>
+              </a:lnSpc>
+              <a:spcAft>
+                <a:spcPts val="1200"/>
+              </a:spcAft>
+              <a:defRPr sz="2000">
+                <a:solidFill>
+                  <a:srgbClr val="1E293B"/>
+                </a:solidFill>
+              </a:defRPr>
+            </a:pPr>
+            <a:r>
+              <a:t>7. Kembali ke Pengusul — pemberitahuan hasil akhir</a:t>
+            </a:r>
           </a:p>
         </p:txBody>
       </p:sp>
@@ -9504,8 +11400,8 @@
         </p:nvSpPr>
         <p:spPr>
           <a:xfrm>
-            <a:off x="411480" y="1417320"/>
-            <a:ext cx="3657600" cy="475488"/>
+            <a:off x="0" y="6446520"/>
+            <a:ext cx="12191695" cy="411480"/>
           </a:xfrm>
           <a:prstGeom prst="rect">
             <a:avLst/>
@@ -9547,8 +11443,8 @@
         </p:nvSpPr>
         <p:spPr>
           <a:xfrm>
-            <a:off x="594360" y="1490472"/>
-            <a:ext cx="3291840" cy="365760"/>
+            <a:off x="457200" y="6492240"/>
+            <a:ext cx="5486400" cy="320040"/>
           </a:xfrm>
           <a:prstGeom prst="rect">
             <a:avLst/>
@@ -9562,14 +11458,14 @@
           <a:lstStyle/>
           <a:p>
             <a:pPr>
-              <a:defRPr sz="1600" b="1">
-                <a:solidFill>
-                  <a:srgbClr val="FFFFFF"/>
-                </a:solidFill>
-              </a:defRPr>
-            </a:pPr>
-            <a:r>
-              <a:t>Fase 1 — Stabilisasi</a:t>
+              <a:defRPr sz="1100" b="1">
+                <a:solidFill>
+                  <a:srgbClr val="F58220"/>
+                </a:solidFill>
+              </a:defRPr>
+            </a:pPr>
+            <a:r>
+              <a:t>CorpSec Bank Sumut — Business Problem Canvas</a:t>
             </a:r>
           </a:p>
         </p:txBody>
@@ -9577,579 +11473,6 @@
       <p:sp>
         <p:nvSpPr>
           <p:cNvPr id="7" name="TextBox 6"/>
-          <p:cNvSpPr txBox="1"/>
-          <p:nvPr/>
-        </p:nvSpPr>
-        <p:spPr>
-          <a:xfrm>
-            <a:off x="594360" y="2011680"/>
-            <a:ext cx="3291840" cy="3749039"/>
-          </a:xfrm>
-          <a:prstGeom prst="rect">
-            <a:avLst/>
-          </a:prstGeom>
-          <a:noFill/>
-        </p:spPr>
-        <p:txBody>
-          <a:bodyPr wrap="square">
-            <a:spAutoFit/>
-          </a:bodyPr>
-          <a:lstStyle/>
-          <a:p>
-            <a:pPr>
-              <a:spcAft>
-                <a:spcPts val="600"/>
-              </a:spcAft>
-              <a:defRPr sz="1400">
-                <a:solidFill>
-                  <a:srgbClr val="1E293B"/>
-                </a:solidFill>
-              </a:defRPr>
-            </a:pPr>
-            <a:r>
-              <a:t>Perbaiki keamanan: hash password, signed session</a:t>
-            </a:r>
-          </a:p>
-          <a:p>
-            <a:pPr>
-              <a:spcAft>
-                <a:spcPts val="600"/>
-              </a:spcAft>
-              <a:defRPr sz="1400">
-                <a:solidFill>
-                  <a:srgbClr val="1E293B"/>
-                </a:solidFill>
-              </a:defRPr>
-            </a:pPr>
-            <a:r>
-              <a:t>Tambah rate limiting &amp; security headers</a:t>
-            </a:r>
-          </a:p>
-          <a:p>
-            <a:pPr>
-              <a:spcAft>
-                <a:spcPts val="600"/>
-              </a:spcAft>
-              <a:defRPr sz="1400">
-                <a:solidFill>
-                  <a:srgbClr val="1E293B"/>
-                </a:solidFill>
-              </a:defRPr>
-            </a:pPr>
-            <a:r>
-              <a:t>Lengkapi audit log aktivitas</a:t>
-            </a:r>
-          </a:p>
-          <a:p>
-            <a:pPr>
-              <a:spcAft>
-                <a:spcPts val="600"/>
-              </a:spcAft>
-              <a:defRPr sz="1400">
-                <a:solidFill>
-                  <a:srgbClr val="1E293B"/>
-                </a:solidFill>
-              </a:defRPr>
-            </a:pPr>
-            <a:r>
-              <a:t>Uji coba internal dengan user CorpSec</a:t>
-            </a:r>
-          </a:p>
-        </p:txBody>
-      </p:sp>
-      <p:sp>
-        <p:nvSpPr>
-          <p:cNvPr id="8" name="Rounded Rectangle 7"/>
-          <p:cNvSpPr/>
-          <p:nvPr/>
-        </p:nvSpPr>
-        <p:spPr>
-          <a:xfrm>
-            <a:off x="4297680" y="1417320"/>
-            <a:ext cx="3657600" cy="4434840"/>
-          </a:xfrm>
-          <a:prstGeom prst="roundRect">
-            <a:avLst/>
-          </a:prstGeom>
-          <a:solidFill>
-            <a:srgbClr val="FFFFFF"/>
-          </a:solidFill>
-          <a:ln>
-            <a:solidFill>
-              <a:srgbClr val="E2E8F0"/>
-            </a:solidFill>
-          </a:ln>
-        </p:spPr>
-        <p:style>
-          <a:lnRef idx="1">
-            <a:schemeClr val="accent1"/>
-          </a:lnRef>
-          <a:fillRef idx="3">
-            <a:schemeClr val="accent1"/>
-          </a:fillRef>
-          <a:effectRef idx="2">
-            <a:schemeClr val="accent1"/>
-          </a:effectRef>
-          <a:fontRef idx="minor">
-            <a:schemeClr val="lt1"/>
-          </a:fontRef>
-        </p:style>
-        <p:txBody>
-          <a:bodyPr rtlCol="0" anchor="ctr"/>
-          <a:lstStyle/>
-          <a:p>
-            <a:pPr algn="ctr"/>
-          </a:p>
-        </p:txBody>
-      </p:sp>
-      <p:sp>
-        <p:nvSpPr>
-          <p:cNvPr id="9" name="Rectangle 8"/>
-          <p:cNvSpPr/>
-          <p:nvPr/>
-        </p:nvSpPr>
-        <p:spPr>
-          <a:xfrm>
-            <a:off x="4297680" y="1417320"/>
-            <a:ext cx="3657600" cy="475488"/>
-          </a:xfrm>
-          <a:prstGeom prst="rect">
-            <a:avLst/>
-          </a:prstGeom>
-          <a:solidFill>
-            <a:srgbClr val="F58220"/>
-          </a:solidFill>
-          <a:ln>
-            <a:noFill/>
-          </a:ln>
-        </p:spPr>
-        <p:style>
-          <a:lnRef idx="1">
-            <a:schemeClr val="accent1"/>
-          </a:lnRef>
-          <a:fillRef idx="3">
-            <a:schemeClr val="accent1"/>
-          </a:fillRef>
-          <a:effectRef idx="2">
-            <a:schemeClr val="accent1"/>
-          </a:effectRef>
-          <a:fontRef idx="minor">
-            <a:schemeClr val="lt1"/>
-          </a:fontRef>
-        </p:style>
-        <p:txBody>
-          <a:bodyPr rtlCol="0" anchor="ctr"/>
-          <a:lstStyle/>
-          <a:p>
-            <a:pPr algn="ctr"/>
-          </a:p>
-        </p:txBody>
-      </p:sp>
-      <p:sp>
-        <p:nvSpPr>
-          <p:cNvPr id="10" name="TextBox 9"/>
-          <p:cNvSpPr txBox="1"/>
-          <p:nvPr/>
-        </p:nvSpPr>
-        <p:spPr>
-          <a:xfrm>
-            <a:off x="4480560" y="1490472"/>
-            <a:ext cx="3291840" cy="365760"/>
-          </a:xfrm>
-          <a:prstGeom prst="rect">
-            <a:avLst/>
-          </a:prstGeom>
-          <a:noFill/>
-        </p:spPr>
-        <p:txBody>
-          <a:bodyPr wrap="none">
-            <a:spAutoFit/>
-          </a:bodyPr>
-          <a:lstStyle/>
-          <a:p>
-            <a:pPr>
-              <a:defRPr sz="1600" b="1">
-                <a:solidFill>
-                  <a:srgbClr val="FFFFFF"/>
-                </a:solidFill>
-              </a:defRPr>
-            </a:pPr>
-            <a:r>
-              <a:t>Fase 2 — Peningkatan Fitur</a:t>
-            </a:r>
-          </a:p>
-        </p:txBody>
-      </p:sp>
-      <p:sp>
-        <p:nvSpPr>
-          <p:cNvPr id="11" name="TextBox 10"/>
-          <p:cNvSpPr txBox="1"/>
-          <p:nvPr/>
-        </p:nvSpPr>
-        <p:spPr>
-          <a:xfrm>
-            <a:off x="4480560" y="2011680"/>
-            <a:ext cx="3291840" cy="3749039"/>
-          </a:xfrm>
-          <a:prstGeom prst="rect">
-            <a:avLst/>
-          </a:prstGeom>
-          <a:noFill/>
-        </p:spPr>
-        <p:txBody>
-          <a:bodyPr wrap="square">
-            <a:spAutoFit/>
-          </a:bodyPr>
-          <a:lstStyle/>
-          <a:p>
-            <a:pPr>
-              <a:spcAft>
-                <a:spcPts val="600"/>
-              </a:spcAft>
-              <a:defRPr sz="1400">
-                <a:solidFill>
-                  <a:srgbClr val="1E293B"/>
-                </a:solidFill>
-              </a:defRPr>
-            </a:pPr>
-            <a:r>
-              <a:t>Integrasi LLM nyata untuk tinjauan memorandum</a:t>
-            </a:r>
-          </a:p>
-          <a:p>
-            <a:pPr>
-              <a:spcAft>
-                <a:spcPts val="600"/>
-              </a:spcAft>
-              <a:defRPr sz="1400">
-                <a:solidFill>
-                  <a:srgbClr val="1E293B"/>
-                </a:solidFill>
-              </a:defRPr>
-            </a:pPr>
-            <a:r>
-              <a:t>Notifikasi email/SMS saat approval &amp; SLA breach</a:t>
-            </a:r>
-          </a:p>
-          <a:p>
-            <a:pPr>
-              <a:spcAft>
-                <a:spcPts val="600"/>
-              </a:spcAft>
-              <a:defRPr sz="1400">
-                <a:solidFill>
-                  <a:srgbClr val="1E293B"/>
-                </a:solidFill>
-              </a:defRPr>
-            </a:pPr>
-            <a:r>
-              <a:t>Export laporan PDF/Excel</a:t>
-            </a:r>
-          </a:p>
-          <a:p>
-            <a:pPr>
-              <a:spcAft>
-                <a:spcPts val="600"/>
-              </a:spcAft>
-              <a:defRPr sz="1400">
-                <a:solidFill>
-                  <a:srgbClr val="1E293B"/>
-                </a:solidFill>
-              </a:defRPr>
-            </a:pPr>
-            <a:r>
-              <a:t>Koneksi ke SMD Bank Sumut</a:t>
-            </a:r>
-          </a:p>
-        </p:txBody>
-      </p:sp>
-      <p:sp>
-        <p:nvSpPr>
-          <p:cNvPr id="12" name="Rounded Rectangle 11"/>
-          <p:cNvSpPr/>
-          <p:nvPr/>
-        </p:nvSpPr>
-        <p:spPr>
-          <a:xfrm>
-            <a:off x="8183879" y="1417320"/>
-            <a:ext cx="3657600" cy="4434840"/>
-          </a:xfrm>
-          <a:prstGeom prst="roundRect">
-            <a:avLst/>
-          </a:prstGeom>
-          <a:solidFill>
-            <a:srgbClr val="FFFFFF"/>
-          </a:solidFill>
-          <a:ln>
-            <a:solidFill>
-              <a:srgbClr val="E2E8F0"/>
-            </a:solidFill>
-          </a:ln>
-        </p:spPr>
-        <p:style>
-          <a:lnRef idx="1">
-            <a:schemeClr val="accent1"/>
-          </a:lnRef>
-          <a:fillRef idx="3">
-            <a:schemeClr val="accent1"/>
-          </a:fillRef>
-          <a:effectRef idx="2">
-            <a:schemeClr val="accent1"/>
-          </a:effectRef>
-          <a:fontRef idx="minor">
-            <a:schemeClr val="lt1"/>
-          </a:fontRef>
-        </p:style>
-        <p:txBody>
-          <a:bodyPr rtlCol="0" anchor="ctr"/>
-          <a:lstStyle/>
-          <a:p>
-            <a:pPr algn="ctr"/>
-          </a:p>
-        </p:txBody>
-      </p:sp>
-      <p:sp>
-        <p:nvSpPr>
-          <p:cNvPr id="13" name="Rectangle 12"/>
-          <p:cNvSpPr/>
-          <p:nvPr/>
-        </p:nvSpPr>
-        <p:spPr>
-          <a:xfrm>
-            <a:off x="8183879" y="1417320"/>
-            <a:ext cx="3657600" cy="475488"/>
-          </a:xfrm>
-          <a:prstGeom prst="rect">
-            <a:avLst/>
-          </a:prstGeom>
-          <a:solidFill>
-            <a:srgbClr val="059669"/>
-          </a:solidFill>
-          <a:ln>
-            <a:noFill/>
-          </a:ln>
-        </p:spPr>
-        <p:style>
-          <a:lnRef idx="1">
-            <a:schemeClr val="accent1"/>
-          </a:lnRef>
-          <a:fillRef idx="3">
-            <a:schemeClr val="accent1"/>
-          </a:fillRef>
-          <a:effectRef idx="2">
-            <a:schemeClr val="accent1"/>
-          </a:effectRef>
-          <a:fontRef idx="minor">
-            <a:schemeClr val="lt1"/>
-          </a:fontRef>
-        </p:style>
-        <p:txBody>
-          <a:bodyPr rtlCol="0" anchor="ctr"/>
-          <a:lstStyle/>
-          <a:p>
-            <a:pPr algn="ctr"/>
-          </a:p>
-        </p:txBody>
-      </p:sp>
-      <p:sp>
-        <p:nvSpPr>
-          <p:cNvPr id="14" name="TextBox 13"/>
-          <p:cNvSpPr txBox="1"/>
-          <p:nvPr/>
-        </p:nvSpPr>
-        <p:spPr>
-          <a:xfrm>
-            <a:off x="8366759" y="1490472"/>
-            <a:ext cx="3291840" cy="365760"/>
-          </a:xfrm>
-          <a:prstGeom prst="rect">
-            <a:avLst/>
-          </a:prstGeom>
-          <a:noFill/>
-        </p:spPr>
-        <p:txBody>
-          <a:bodyPr wrap="none">
-            <a:spAutoFit/>
-          </a:bodyPr>
-          <a:lstStyle/>
-          <a:p>
-            <a:pPr>
-              <a:defRPr sz="1600" b="1">
-                <a:solidFill>
-                  <a:srgbClr val="FFFFFF"/>
-                </a:solidFill>
-              </a:defRPr>
-            </a:pPr>
-            <a:r>
-              <a:t>Fase 3 — Go Live</a:t>
-            </a:r>
-          </a:p>
-        </p:txBody>
-      </p:sp>
-      <p:sp>
-        <p:nvSpPr>
-          <p:cNvPr id="15" name="TextBox 14"/>
-          <p:cNvSpPr txBox="1"/>
-          <p:nvPr/>
-        </p:nvSpPr>
-        <p:spPr>
-          <a:xfrm>
-            <a:off x="8366759" y="2011680"/>
-            <a:ext cx="3291840" cy="3749039"/>
-          </a:xfrm>
-          <a:prstGeom prst="rect">
-            <a:avLst/>
-          </a:prstGeom>
-          <a:noFill/>
-        </p:spPr>
-        <p:txBody>
-          <a:bodyPr wrap="square">
-            <a:spAutoFit/>
-          </a:bodyPr>
-          <a:lstStyle/>
-          <a:p>
-            <a:pPr>
-              <a:spcAft>
-                <a:spcPts val="600"/>
-              </a:spcAft>
-              <a:defRPr sz="1400">
-                <a:solidFill>
-                  <a:srgbClr val="1E293B"/>
-                </a:solidFill>
-              </a:defRPr>
-            </a:pPr>
-            <a:r>
-              <a:t>Integrasi SSO Active Directory</a:t>
-            </a:r>
-          </a:p>
-          <a:p>
-            <a:pPr>
-              <a:spcAft>
-                <a:spcPts val="600"/>
-              </a:spcAft>
-              <a:defRPr sz="1400">
-                <a:solidFill>
-                  <a:srgbClr val="1E293B"/>
-                </a:solidFill>
-              </a:defRPr>
-            </a:pPr>
-            <a:r>
-              <a:t>Migrasi database ke PostgreSQL production</a:t>
-            </a:r>
-          </a:p>
-          <a:p>
-            <a:pPr>
-              <a:spcAft>
-                <a:spcPts val="600"/>
-              </a:spcAft>
-              <a:defRPr sz="1400">
-                <a:solidFill>
-                  <a:srgbClr val="1E293B"/>
-                </a:solidFill>
-              </a:defRPr>
-            </a:pPr>
-            <a:r>
-              <a:t>Penetration testing &amp; UAT formal</a:t>
-            </a:r>
-          </a:p>
-          <a:p>
-            <a:pPr>
-              <a:spcAft>
-                <a:spcPts val="600"/>
-              </a:spcAft>
-              <a:defRPr sz="1400">
-                <a:solidFill>
-                  <a:srgbClr val="1E293B"/>
-                </a:solidFill>
-              </a:defRPr>
-            </a:pPr>
-            <a:r>
-              <a:t>Pelatihan user &amp; rollout ke seluruh divisi</a:t>
-            </a:r>
-          </a:p>
-        </p:txBody>
-      </p:sp>
-      <p:sp>
-        <p:nvSpPr>
-          <p:cNvPr id="16" name="Rectangle 15"/>
-          <p:cNvSpPr/>
-          <p:nvPr/>
-        </p:nvSpPr>
-        <p:spPr>
-          <a:xfrm>
-            <a:off x="0" y="6446520"/>
-            <a:ext cx="12191695" cy="411480"/>
-          </a:xfrm>
-          <a:prstGeom prst="rect">
-            <a:avLst/>
-          </a:prstGeom>
-          <a:solidFill>
-            <a:srgbClr val="0C2340"/>
-          </a:solidFill>
-          <a:ln>
-            <a:noFill/>
-          </a:ln>
-        </p:spPr>
-        <p:style>
-          <a:lnRef idx="1">
-            <a:schemeClr val="accent1"/>
-          </a:lnRef>
-          <a:fillRef idx="3">
-            <a:schemeClr val="accent1"/>
-          </a:fillRef>
-          <a:effectRef idx="2">
-            <a:schemeClr val="accent1"/>
-          </a:effectRef>
-          <a:fontRef idx="minor">
-            <a:schemeClr val="lt1"/>
-          </a:fontRef>
-        </p:style>
-        <p:txBody>
-          <a:bodyPr rtlCol="0" anchor="ctr"/>
-          <a:lstStyle/>
-          <a:p>
-            <a:pPr algn="ctr"/>
-          </a:p>
-        </p:txBody>
-      </p:sp>
-      <p:sp>
-        <p:nvSpPr>
-          <p:cNvPr id="17" name="TextBox 16"/>
-          <p:cNvSpPr txBox="1"/>
-          <p:nvPr/>
-        </p:nvSpPr>
-        <p:spPr>
-          <a:xfrm>
-            <a:off x="457200" y="6492240"/>
-            <a:ext cx="5486400" cy="320040"/>
-          </a:xfrm>
-          <a:prstGeom prst="rect">
-            <a:avLst/>
-          </a:prstGeom>
-          <a:noFill/>
-        </p:spPr>
-        <p:txBody>
-          <a:bodyPr wrap="none">
-            <a:spAutoFit/>
-          </a:bodyPr>
-          <a:lstStyle/>
-          <a:p>
-            <a:pPr>
-              <a:defRPr sz="1100" b="1">
-                <a:solidFill>
-                  <a:srgbClr val="F58220"/>
-                </a:solidFill>
-              </a:defRPr>
-            </a:pPr>
-            <a:r>
-              <a:t>CorpSec Bank Sumut — Business Problem Canvas</a:t>
-            </a:r>
-          </a:p>
-        </p:txBody>
-      </p:sp>
-      <p:sp>
-        <p:nvSpPr>
-          <p:cNvPr id="18" name="TextBox 17"/>
           <p:cNvSpPr txBox="1"/>
           <p:nvPr/>
         </p:nvSpPr>

--- a/CorpSec-Bank-Sumut-Presentasi.pptx
+++ b/CorpSec-Bank-Sumut-Presentasi.pptx
@@ -18,6 +18,7 @@
     <p:sldId id="266" r:id="rId17"/>
     <p:sldId id="267" r:id="rId18"/>
     <p:sldId id="268" r:id="rId19"/>
+    <p:sldId id="269" r:id="rId20"/>
   </p:sldIdLst>
   <p:sldSz cx="12191695" cy="6858000" type="screen4x3"/>
   <p:notesSz cx="6858000" cy="9144000"/>
@@ -3480,7 +3481,7 @@
               </a:defRPr>
             </a:pPr>
             <a:r>
-              <a:t>Perbaikan Aspek User Experience</a:t>
+              <a:t>Alur Kerja Memorandum</a:t>
             </a:r>
           </a:p>
           <a:p>
@@ -3495,144 +3496,21 @@
               </a:defRPr>
             </a:pPr>
             <a:r>
-              <a:t>Yang sudah diterapkan dan rencana perbaikan</a:t>
-            </a:r>
-          </a:p>
-        </p:txBody>
-      </p:sp>
-      <p:sp>
-        <p:nvSpPr>
-          <p:cNvPr id="4" name="Rounded Rectangle 3"/>
-          <p:cNvSpPr/>
-          <p:nvPr/>
-        </p:nvSpPr>
-        <p:spPr>
-          <a:xfrm>
-            <a:off x="411480" y="1325880"/>
-            <a:ext cx="5394960" cy="4572000"/>
-          </a:xfrm>
-          <a:prstGeom prst="roundRect">
-            <a:avLst/>
-          </a:prstGeom>
-          <a:solidFill>
-            <a:srgbClr val="FFFFFF"/>
-          </a:solidFill>
-          <a:ln>
-            <a:solidFill>
-              <a:srgbClr val="E2E8F0"/>
-            </a:solidFill>
-          </a:ln>
-        </p:spPr>
-        <p:style>
-          <a:lnRef idx="1">
-            <a:schemeClr val="accent1"/>
-          </a:lnRef>
-          <a:fillRef idx="3">
-            <a:schemeClr val="accent1"/>
-          </a:fillRef>
-          <a:effectRef idx="2">
-            <a:schemeClr val="accent1"/>
-          </a:effectRef>
-          <a:fontRef idx="minor">
-            <a:schemeClr val="lt1"/>
-          </a:fontRef>
-        </p:style>
-        <p:txBody>
-          <a:bodyPr rtlCol="0" anchor="ctr"/>
-          <a:lstStyle/>
-          <a:p>
-            <a:pPr algn="ctr"/>
-          </a:p>
-        </p:txBody>
-      </p:sp>
-      <p:sp>
-        <p:nvSpPr>
-          <p:cNvPr id="5" name="Rectangle 4"/>
-          <p:cNvSpPr/>
-          <p:nvPr/>
-        </p:nvSpPr>
-        <p:spPr>
-          <a:xfrm>
-            <a:off x="411480" y="1325880"/>
-            <a:ext cx="5394960" cy="475488"/>
-          </a:xfrm>
-          <a:prstGeom prst="rect">
-            <a:avLst/>
-          </a:prstGeom>
-          <a:solidFill>
-            <a:srgbClr val="059669"/>
-          </a:solidFill>
-          <a:ln>
-            <a:noFill/>
-          </a:ln>
-        </p:spPr>
-        <p:style>
-          <a:lnRef idx="1">
-            <a:schemeClr val="accent1"/>
-          </a:lnRef>
-          <a:fillRef idx="3">
-            <a:schemeClr val="accent1"/>
-          </a:fillRef>
-          <a:effectRef idx="2">
-            <a:schemeClr val="accent1"/>
-          </a:effectRef>
-          <a:fontRef idx="minor">
-            <a:schemeClr val="lt1"/>
-          </a:fontRef>
-        </p:style>
-        <p:txBody>
-          <a:bodyPr rtlCol="0" anchor="ctr"/>
-          <a:lstStyle/>
-          <a:p>
-            <a:pPr algn="ctr"/>
-          </a:p>
-        </p:txBody>
-      </p:sp>
-      <p:sp>
-        <p:nvSpPr>
-          <p:cNvPr id="6" name="TextBox 5"/>
+              <a:t>7 tahap persetujuan sesuai PRD</a:t>
+            </a:r>
+          </a:p>
+        </p:txBody>
+      </p:sp>
+      <p:sp>
+        <p:nvSpPr>
+          <p:cNvPr id="4" name="TextBox 3"/>
           <p:cNvSpPr txBox="1"/>
           <p:nvPr/>
         </p:nvSpPr>
         <p:spPr>
           <a:xfrm>
-            <a:off x="594360" y="1399032"/>
-            <a:ext cx="5029200" cy="365760"/>
-          </a:xfrm>
-          <a:prstGeom prst="rect">
-            <a:avLst/>
-          </a:prstGeom>
-          <a:noFill/>
-        </p:spPr>
-        <p:txBody>
-          <a:bodyPr wrap="none">
-            <a:spAutoFit/>
-          </a:bodyPr>
-          <a:lstStyle/>
-          <a:p>
-            <a:pPr>
-              <a:defRPr sz="1600" b="1">
-                <a:solidFill>
-                  <a:srgbClr val="FFFFFF"/>
-                </a:solidFill>
-              </a:defRPr>
-            </a:pPr>
-            <a:r>
-              <a:t>Sudah Diterapkan</a:t>
-            </a:r>
-          </a:p>
-        </p:txBody>
-      </p:sp>
-      <p:sp>
-        <p:nvSpPr>
-          <p:cNvPr id="7" name="TextBox 6"/>
-          <p:cNvSpPr txBox="1"/>
-          <p:nvPr/>
-        </p:nvSpPr>
-        <p:spPr>
-          <a:xfrm>
-            <a:off x="594360" y="1920240"/>
-            <a:ext cx="5029200" cy="3886200"/>
+            <a:off x="502920" y="1371600"/>
+            <a:ext cx="11155680" cy="4846320"/>
           </a:xfrm>
           <a:prstGeom prst="rect">
             <a:avLst/>
@@ -3646,395 +3524,135 @@
           <a:lstStyle/>
           <a:p>
             <a:pPr>
+              <a:lnSpc>
+                <a:spcPct val="120000"/>
+              </a:lnSpc>
               <a:spcAft>
-                <a:spcPts val="600"/>
+                <a:spcPts val="1200"/>
               </a:spcAft>
-              <a:defRPr sz="1400">
+              <a:defRPr sz="2000">
                 <a:solidFill>
                   <a:srgbClr val="1E293B"/>
                 </a:solidFill>
               </a:defRPr>
             </a:pPr>
             <a:r>
-              <a:t>Desain UI mengikuti identitas Bank Sumut (navy &amp; oranye)</a:t>
-            </a:r>
-          </a:p>
-          <a:p>
-            <a:pPr>
+              <a:t>1. Divisi Pengusul — kirim memorandum PDF</a:t>
+            </a:r>
+          </a:p>
+          <a:p>
+            <a:pPr>
+              <a:lnSpc>
+                <a:spcPct val="120000"/>
+              </a:lnSpc>
               <a:spcAft>
-                <a:spcPts val="600"/>
+                <a:spcPts val="1200"/>
               </a:spcAft>
-              <a:defRPr sz="1400">
+              <a:defRPr sz="2000">
                 <a:solidFill>
                   <a:srgbClr val="1E293B"/>
                 </a:solidFill>
               </a:defRPr>
             </a:pPr>
             <a:r>
-              <a:t>Login page dengan hero image &amp; akun demo cepat</a:t>
-            </a:r>
-          </a:p>
-          <a:p>
-            <a:pPr>
+              <a:t>2. Corporate Secretary — terima, rangkum, &amp; tinjau kelengkapan</a:t>
+            </a:r>
+          </a:p>
+          <a:p>
+            <a:pPr>
+              <a:lnSpc>
+                <a:spcPct val="120000"/>
+              </a:lnSpc>
               <a:spcAft>
-                <a:spcPts val="600"/>
+                <a:spcPts val="1200"/>
               </a:spcAft>
-              <a:defRPr sz="1400">
+              <a:defRPr sz="2000">
                 <a:solidFill>
                   <a:srgbClr val="1E293B"/>
                 </a:solidFill>
               </a:defRPr>
             </a:pPr>
             <a:r>
-              <a:t>Navigasi sidebar per role — tidak membingungkan</a:t>
-            </a:r>
-          </a:p>
-          <a:p>
-            <a:pPr>
+              <a:t>3. Pemimpin Bidang — setujui atau tolak + tanda tangan</a:t>
+            </a:r>
+          </a:p>
+          <a:p>
+            <a:pPr>
+              <a:lnSpc>
+                <a:spcPct val="120000"/>
+              </a:lnSpc>
               <a:spcAft>
-                <a:spcPts val="600"/>
+                <a:spcPts val="1200"/>
               </a:spcAft>
-              <a:defRPr sz="1400">
+              <a:defRPr sz="2000">
                 <a:solidFill>
                   <a:srgbClr val="1E293B"/>
                 </a:solidFill>
               </a:defRPr>
             </a:pPr>
             <a:r>
-              <a:t>Workflow stepper visual di detail memorandum</a:t>
-            </a:r>
-          </a:p>
-          <a:p>
-            <a:pPr>
+              <a:t>4. Sekretaris Direksi/Komisaris — teruskan ke pimpinan</a:t>
+            </a:r>
+          </a:p>
+          <a:p>
+            <a:pPr>
+              <a:lnSpc>
+                <a:spcPct val="120000"/>
+              </a:lnSpc>
               <a:spcAft>
-                <a:spcPts val="600"/>
+                <a:spcPts val="1200"/>
               </a:spcAft>
-              <a:defRPr sz="1400">
+              <a:defRPr sz="2000">
                 <a:solidFill>
                   <a:srgbClr val="1E293B"/>
                 </a:solidFill>
               </a:defRPr>
             </a:pPr>
             <a:r>
-              <a:t>Indikator baca (belum/sudah dibaca) pada daftar memo</a:t>
-            </a:r>
-          </a:p>
-          <a:p>
-            <a:pPr>
+              <a:t>5. Direksi / Komisaris — beri keputusan</a:t>
+            </a:r>
+          </a:p>
+          <a:p>
+            <a:pPr>
+              <a:lnSpc>
+                <a:spcPct val="120000"/>
+              </a:lnSpc>
               <a:spcAft>
-                <a:spcPts val="600"/>
+                <a:spcPts val="1200"/>
               </a:spcAft>
-              <a:defRPr sz="1400">
+              <a:defRPr sz="2000">
                 <a:solidFill>
                   <a:srgbClr val="1E293B"/>
                 </a:solidFill>
               </a:defRPr>
             </a:pPr>
             <a:r>
-              <a:t>Dashboard hero banner &amp; stat cards informatif</a:t>
-            </a:r>
-          </a:p>
-          <a:p>
-            <a:pPr>
+              <a:t>6. CorpSec — finalisasi sesuai keputusan board</a:t>
+            </a:r>
+          </a:p>
+          <a:p>
+            <a:pPr>
+              <a:lnSpc>
+                <a:spcPct val="120000"/>
+              </a:lnSpc>
               <a:spcAft>
-                <a:spcPts val="600"/>
+                <a:spcPts val="1200"/>
               </a:spcAft>
-              <a:defRPr sz="1400">
+              <a:defRPr sz="2000">
                 <a:solidFill>
                   <a:srgbClr val="1E293B"/>
                 </a:solidFill>
               </a:defRPr>
             </a:pPr>
             <a:r>
-              <a:t>Redirect otomatis ke halaman sesuai role setelah login</a:t>
-            </a:r>
-          </a:p>
-          <a:p>
-            <a:pPr>
-              <a:spcAft>
-                <a:spcPts val="600"/>
-              </a:spcAft>
-              <a:defRPr sz="1400">
-                <a:solidFill>
-                  <a:srgbClr val="1E293B"/>
-                </a:solidFill>
-              </a:defRPr>
-            </a:pPr>
-            <a:r>
-              <a:t>Sidebar mobile dengan menu hamburger</a:t>
-            </a:r>
-          </a:p>
-        </p:txBody>
-      </p:sp>
-      <p:sp>
-        <p:nvSpPr>
-          <p:cNvPr id="8" name="Rounded Rectangle 7"/>
-          <p:cNvSpPr/>
-          <p:nvPr/>
-        </p:nvSpPr>
-        <p:spPr>
-          <a:xfrm>
-            <a:off x="6263640" y="1325880"/>
-            <a:ext cx="5394960" cy="4572000"/>
-          </a:xfrm>
-          <a:prstGeom prst="roundRect">
-            <a:avLst/>
-          </a:prstGeom>
-          <a:solidFill>
-            <a:srgbClr val="FFFFFF"/>
-          </a:solidFill>
-          <a:ln>
-            <a:solidFill>
-              <a:srgbClr val="E2E8F0"/>
-            </a:solidFill>
-          </a:ln>
-        </p:spPr>
-        <p:style>
-          <a:lnRef idx="1">
-            <a:schemeClr val="accent1"/>
-          </a:lnRef>
-          <a:fillRef idx="3">
-            <a:schemeClr val="accent1"/>
-          </a:fillRef>
-          <a:effectRef idx="2">
-            <a:schemeClr val="accent1"/>
-          </a:effectRef>
-          <a:fontRef idx="minor">
-            <a:schemeClr val="lt1"/>
-          </a:fontRef>
-        </p:style>
-        <p:txBody>
-          <a:bodyPr rtlCol="0" anchor="ctr"/>
-          <a:lstStyle/>
-          <a:p>
-            <a:pPr algn="ctr"/>
-          </a:p>
-        </p:txBody>
-      </p:sp>
-      <p:sp>
-        <p:nvSpPr>
-          <p:cNvPr id="9" name="Rectangle 8"/>
-          <p:cNvSpPr/>
-          <p:nvPr/>
-        </p:nvSpPr>
-        <p:spPr>
-          <a:xfrm>
-            <a:off x="6263640" y="1325880"/>
-            <a:ext cx="5394960" cy="475488"/>
-          </a:xfrm>
-          <a:prstGeom prst="rect">
-            <a:avLst/>
-          </a:prstGeom>
-          <a:solidFill>
-            <a:srgbClr val="F58220"/>
-          </a:solidFill>
-          <a:ln>
-            <a:noFill/>
-          </a:ln>
-        </p:spPr>
-        <p:style>
-          <a:lnRef idx="1">
-            <a:schemeClr val="accent1"/>
-          </a:lnRef>
-          <a:fillRef idx="3">
-            <a:schemeClr val="accent1"/>
-          </a:fillRef>
-          <a:effectRef idx="2">
-            <a:schemeClr val="accent1"/>
-          </a:effectRef>
-          <a:fontRef idx="minor">
-            <a:schemeClr val="lt1"/>
-          </a:fontRef>
-        </p:style>
-        <p:txBody>
-          <a:bodyPr rtlCol="0" anchor="ctr"/>
-          <a:lstStyle/>
-          <a:p>
-            <a:pPr algn="ctr"/>
-          </a:p>
-        </p:txBody>
-      </p:sp>
-      <p:sp>
-        <p:nvSpPr>
-          <p:cNvPr id="10" name="TextBox 9"/>
-          <p:cNvSpPr txBox="1"/>
-          <p:nvPr/>
-        </p:nvSpPr>
-        <p:spPr>
-          <a:xfrm>
-            <a:off x="6446520" y="1399032"/>
-            <a:ext cx="5029200" cy="365760"/>
-          </a:xfrm>
-          <a:prstGeom prst="rect">
-            <a:avLst/>
-          </a:prstGeom>
-          <a:noFill/>
-        </p:spPr>
-        <p:txBody>
-          <a:bodyPr wrap="none">
-            <a:spAutoFit/>
-          </a:bodyPr>
-          <a:lstStyle/>
-          <a:p>
-            <a:pPr>
-              <a:defRPr sz="1600" b="1">
-                <a:solidFill>
-                  <a:srgbClr val="FFFFFF"/>
-                </a:solidFill>
-              </a:defRPr>
-            </a:pPr>
-            <a:r>
-              <a:t>Rencana Perbaikan UX</a:t>
-            </a:r>
-          </a:p>
-        </p:txBody>
-      </p:sp>
-      <p:sp>
-        <p:nvSpPr>
-          <p:cNvPr id="11" name="TextBox 10"/>
-          <p:cNvSpPr txBox="1"/>
-          <p:nvPr/>
-        </p:nvSpPr>
-        <p:spPr>
-          <a:xfrm>
-            <a:off x="6446520" y="1920240"/>
-            <a:ext cx="5029200" cy="3886200"/>
-          </a:xfrm>
-          <a:prstGeom prst="rect">
-            <a:avLst/>
-          </a:prstGeom>
-          <a:noFill/>
-        </p:spPr>
-        <p:txBody>
-          <a:bodyPr wrap="square">
-            <a:spAutoFit/>
-          </a:bodyPr>
-          <a:lstStyle/>
-          <a:p>
-            <a:pPr>
-              <a:spcAft>
-                <a:spcPts val="600"/>
-              </a:spcAft>
-              <a:defRPr sz="1400">
-                <a:solidFill>
-                  <a:srgbClr val="1E293B"/>
-                </a:solidFill>
-              </a:defRPr>
-            </a:pPr>
-            <a:r>
-              <a:t>Notifikasi real-time (toast &amp; badge) saat ada dokumen baru</a:t>
-            </a:r>
-          </a:p>
-          <a:p>
-            <a:pPr>
-              <a:spcAft>
-                <a:spcPts val="600"/>
-              </a:spcAft>
-              <a:defRPr sz="1400">
-                <a:solidFill>
-                  <a:srgbClr val="1E293B"/>
-                </a:solidFill>
-              </a:defRPr>
-            </a:pPr>
-            <a:r>
-              <a:t>Loading state &amp; feedback saat upload PDF</a:t>
-            </a:r>
-          </a:p>
-          <a:p>
-            <a:pPr>
-              <a:spcAft>
-                <a:spcPts val="600"/>
-              </a:spcAft>
-              <a:defRPr sz="1400">
-                <a:solidFill>
-                  <a:srgbClr val="1E293B"/>
-                </a:solidFill>
-              </a:defRPr>
-            </a:pPr>
-            <a:r>
-              <a:t>Halaman error yang lebih informatif</a:t>
-            </a:r>
-          </a:p>
-          <a:p>
-            <a:pPr>
-              <a:spcAft>
-                <a:spcPts val="600"/>
-              </a:spcAft>
-              <a:defRPr sz="1400">
-                <a:solidFill>
-                  <a:srgbClr val="1E293B"/>
-                </a:solidFill>
-              </a:defRPr>
-            </a:pPr>
-            <a:r>
-              <a:t>Pencarian &amp; filter di daftar memorandum</a:t>
-            </a:r>
-          </a:p>
-          <a:p>
-            <a:pPr>
-              <a:spcAft>
-                <a:spcPts val="600"/>
-              </a:spcAft>
-              <a:defRPr sz="1400">
-                <a:solidFill>
-                  <a:srgbClr val="1E293B"/>
-                </a:solidFill>
-              </a:defRPr>
-            </a:pPr>
-            <a:r>
-              <a:t>Mode gelap (dark mode) opsional</a:t>
-            </a:r>
-          </a:p>
-          <a:p>
-            <a:pPr>
-              <a:spcAft>
-                <a:spcPts val="600"/>
-              </a:spcAft>
-              <a:defRPr sz="1400">
-                <a:solidFill>
-                  <a:srgbClr val="1E293B"/>
-                </a:solidFill>
-              </a:defRPr>
-            </a:pPr>
-            <a:r>
-              <a:t>Panduan singkat (onboarding) untuk user baru</a:t>
-            </a:r>
-          </a:p>
-          <a:p>
-            <a:pPr>
-              <a:spcAft>
-                <a:spcPts val="600"/>
-              </a:spcAft>
-              <a:defRPr sz="1400">
-                <a:solidFill>
-                  <a:srgbClr val="1E293B"/>
-                </a:solidFill>
-              </a:defRPr>
-            </a:pPr>
-            <a:r>
-              <a:t>Optimasi tampilan tablet &amp; HP</a:t>
-            </a:r>
-          </a:p>
-          <a:p>
-            <a:pPr>
-              <a:spcAft>
-                <a:spcPts val="600"/>
-              </a:spcAft>
-              <a:defRPr sz="1400">
-                <a:solidFill>
-                  <a:srgbClr val="1E293B"/>
-                </a:solidFill>
-              </a:defRPr>
-            </a:pPr>
-            <a:r>
-              <a:t>Akses cepat ke rapat &amp; media dari sidebar CorpSec</a:t>
-            </a:r>
-          </a:p>
-        </p:txBody>
-      </p:sp>
-      <p:sp>
-        <p:nvSpPr>
-          <p:cNvPr id="12" name="Rectangle 11"/>
+              <a:t>7. Kembali ke Pengusul — pemberitahuan hasil akhir</a:t>
+            </a:r>
+          </a:p>
+        </p:txBody>
+      </p:sp>
+      <p:sp>
+        <p:nvSpPr>
+          <p:cNvPr id="5" name="Rectangle 4"/>
           <p:cNvSpPr/>
           <p:nvPr/>
         </p:nvSpPr>
@@ -4077,7 +3695,7 @@
       </p:sp>
       <p:sp>
         <p:nvSpPr>
-          <p:cNvPr id="13" name="TextBox 12"/>
+          <p:cNvPr id="6" name="TextBox 5"/>
           <p:cNvSpPr txBox="1"/>
           <p:nvPr/>
         </p:nvSpPr>
@@ -4112,7 +3730,7 @@
       </p:sp>
       <p:sp>
         <p:nvSpPr>
-          <p:cNvPr id="14" name="TextBox 13"/>
+          <p:cNvPr id="7" name="TextBox 6"/>
           <p:cNvSpPr txBox="1"/>
           <p:nvPr/>
         </p:nvSpPr>
@@ -4244,7 +3862,7 @@
               </a:defRPr>
             </a:pPr>
             <a:r>
-              <a:t>Perbaikan Aspek Keamanan</a:t>
+              <a:t>Perbaikan Aspek User Experience</a:t>
             </a:r>
           </a:p>
           <a:p>
@@ -4259,7 +3877,7 @@
               </a:defRPr>
             </a:pPr>
             <a:r>
-              <a:t>Kondisi saat ini dan langkah penguatan</a:t>
+              <a:t>Yang sudah diterapkan dan rencana perbaikan</a:t>
             </a:r>
           </a:p>
         </p:txBody>
@@ -4420,7 +4038,7 @@
               </a:defRPr>
             </a:pPr>
             <a:r>
-              <a:t>Login wajib — halaman dilindungi middleware</a:t>
+              <a:t>Desain UI mengikuti identitas Bank Sumut (navy &amp; oranye)</a:t>
             </a:r>
           </a:p>
           <a:p>
@@ -4435,7 +4053,7 @@
               </a:defRPr>
             </a:pPr>
             <a:r>
-              <a:t>Pembagian akses per role (RBAC 7 level)</a:t>
+              <a:t>Login page dengan hero image &amp; akun demo cepat</a:t>
             </a:r>
           </a:p>
           <a:p>
@@ -4450,7 +4068,7 @@
               </a:defRPr>
             </a:pPr>
             <a:r>
-              <a:t>Cookie session httpOnly &amp; sameSite=lax</a:t>
+              <a:t>Navigasi sidebar per role — tidak membingungkan</a:t>
             </a:r>
           </a:p>
           <a:p>
@@ -4465,7 +4083,7 @@
               </a:defRPr>
             </a:pPr>
             <a:r>
-              <a:t>API memorandum dicek role sebelum aksi (requireApiRole)</a:t>
+              <a:t>Workflow stepper visual di detail memorandum</a:t>
             </a:r>
           </a:p>
           <a:p>
@@ -4480,7 +4098,7 @@
               </a:defRPr>
             </a:pPr>
             <a:r>
-              <a:t>Redirect otomatis jika akses halaman tidak sesuai role</a:t>
+              <a:t>Indikator baca (belum/sudah dibaca) pada daftar memo</a:t>
             </a:r>
           </a:p>
           <a:p>
@@ -4495,7 +4113,37 @@
               </a:defRPr>
             </a:pPr>
             <a:r>
-              <a:t>Validasi file upload (format PDF, batas ukuran)</a:t>
+              <a:t>Dashboard hero banner &amp; stat cards informatif</a:t>
+            </a:r>
+          </a:p>
+          <a:p>
+            <a:pPr>
+              <a:spcAft>
+                <a:spcPts val="600"/>
+              </a:spcAft>
+              <a:defRPr sz="1400">
+                <a:solidFill>
+                  <a:srgbClr val="1E293B"/>
+                </a:solidFill>
+              </a:defRPr>
+            </a:pPr>
+            <a:r>
+              <a:t>Redirect otomatis ke halaman sesuai role setelah login</a:t>
+            </a:r>
+          </a:p>
+          <a:p>
+            <a:pPr>
+              <a:spcAft>
+                <a:spcPts val="600"/>
+              </a:spcAft>
+              <a:defRPr sz="1400">
+                <a:solidFill>
+                  <a:srgbClr val="1E293B"/>
+                </a:solidFill>
+              </a:defRPr>
+            </a:pPr>
+            <a:r>
+              <a:t>Sidebar mobile dengan menu hamburger</a:t>
             </a:r>
           </a:p>
         </p:txBody>
@@ -4560,7 +4208,7 @@
             <a:avLst/>
           </a:prstGeom>
           <a:solidFill>
-            <a:srgbClr val="DC2626"/>
+            <a:srgbClr val="F58220"/>
           </a:solidFill>
           <a:ln>
             <a:noFill/>
@@ -4618,7 +4266,7 @@
               </a:defRPr>
             </a:pPr>
             <a:r>
-              <a:t>Perlu Ditingkatkan</a:t>
+              <a:t>Rencana Perbaikan UX</a:t>
             </a:r>
           </a:p>
         </p:txBody>
@@ -4656,7 +4304,7 @@
               </a:defRPr>
             </a:pPr>
             <a:r>
-              <a:t>Session cookie perlu ditandatangani (JWT/signed cookie)</a:t>
+              <a:t>Notifikasi real-time (toast &amp; badge) saat ada dokumen baru</a:t>
             </a:r>
           </a:p>
           <a:p>
@@ -4671,7 +4319,7 @@
               </a:defRPr>
             </a:pPr>
             <a:r>
-              <a:t>Password disimpan plaintext — perlu bcrypt/hash</a:t>
+              <a:t>Loading state &amp; feedback saat upload PDF</a:t>
             </a:r>
           </a:p>
           <a:p>
@@ -4686,7 +4334,7 @@
               </a:defRPr>
             </a:pPr>
             <a:r>
-              <a:t>Belum ada rate limiting pada login</a:t>
+              <a:t>Halaman error yang lebih informatif</a:t>
             </a:r>
           </a:p>
           <a:p>
@@ -4701,7 +4349,7 @@
               </a:defRPr>
             </a:pPr>
             <a:r>
-              <a:t>Belum ada security headers (CSP, HSTS, X-Frame)</a:t>
+              <a:t>Pencarian &amp; filter di daftar memorandum</a:t>
             </a:r>
           </a:p>
           <a:p>
@@ -4716,7 +4364,7 @@
               </a:defRPr>
             </a:pPr>
             <a:r>
-              <a:t>Belum ada audit log aktivitas user</a:t>
+              <a:t>Mode gelap (dark mode) opsional</a:t>
             </a:r>
           </a:p>
           <a:p>
@@ -4731,7 +4379,7 @@
               </a:defRPr>
             </a:pPr>
             <a:r>
-              <a:t>Perlu validasi input lebih ketat di semua API</a:t>
+              <a:t>Panduan singkat (onboarding) untuk user baru</a:t>
             </a:r>
           </a:p>
           <a:p>
@@ -4746,7 +4394,7 @@
               </a:defRPr>
             </a:pPr>
             <a:r>
-              <a:t>Enkripsi file PDF di storage server</a:t>
+              <a:t>Optimasi tampilan tablet &amp; HP</a:t>
             </a:r>
           </a:p>
           <a:p>
@@ -4761,7 +4409,7 @@
               </a:defRPr>
             </a:pPr>
             <a:r>
-              <a:t>Integrasi SSO Active Directory Bank Sumut</a:t>
+              <a:t>Akses cepat ke rapat &amp; media dari sidebar CorpSec</a:t>
             </a:r>
           </a:p>
         </p:txBody>
@@ -4978,7 +4626,7 @@
               </a:defRPr>
             </a:pPr>
             <a:r>
-              <a:t>Rencana Langkah Selanjutnya</a:t>
+              <a:t>Perbaikan Aspek Keamanan</a:t>
             </a:r>
           </a:p>
           <a:p>
@@ -4993,7 +4641,7 @@
               </a:defRPr>
             </a:pPr>
             <a:r>
-              <a:t>Prioritas pengembangan ke depan</a:t>
+              <a:t>Kondisi saat ini dan langkah penguatan</a:t>
             </a:r>
           </a:p>
         </p:txBody>
@@ -5006,8 +4654,8 @@
         </p:nvSpPr>
         <p:spPr>
           <a:xfrm>
-            <a:off x="411480" y="1417320"/>
-            <a:ext cx="3657600" cy="4434840"/>
+            <a:off x="411480" y="1325880"/>
+            <a:ext cx="5394960" cy="4572000"/>
           </a:xfrm>
           <a:prstGeom prst="roundRect">
             <a:avLst/>
@@ -5051,14 +4699,14 @@
         </p:nvSpPr>
         <p:spPr>
           <a:xfrm>
-            <a:off x="411480" y="1417320"/>
-            <a:ext cx="3657600" cy="475488"/>
+            <a:off x="411480" y="1325880"/>
+            <a:ext cx="5394960" cy="475488"/>
           </a:xfrm>
           <a:prstGeom prst="rect">
             <a:avLst/>
           </a:prstGeom>
           <a:solidFill>
-            <a:srgbClr val="0C2340"/>
+            <a:srgbClr val="059669"/>
           </a:solidFill>
           <a:ln>
             <a:noFill/>
@@ -5094,8 +4742,8 @@
         </p:nvSpPr>
         <p:spPr>
           <a:xfrm>
-            <a:off x="594360" y="1490472"/>
-            <a:ext cx="3291840" cy="365760"/>
+            <a:off x="594360" y="1399032"/>
+            <a:ext cx="5029200" cy="365760"/>
           </a:xfrm>
           <a:prstGeom prst="rect">
             <a:avLst/>
@@ -5116,7 +4764,7 @@
               </a:defRPr>
             </a:pPr>
             <a:r>
-              <a:t>Fase 1 — Stabilisasi</a:t>
+              <a:t>Sudah Diterapkan</a:t>
             </a:r>
           </a:p>
         </p:txBody>
@@ -5129,8 +4777,8 @@
         </p:nvSpPr>
         <p:spPr>
           <a:xfrm>
-            <a:off x="594360" y="2011680"/>
-            <a:ext cx="3291840" cy="3749039"/>
+            <a:off x="594360" y="1920240"/>
+            <a:ext cx="5029200" cy="3886200"/>
           </a:xfrm>
           <a:prstGeom prst="rect">
             <a:avLst/>
@@ -5154,7 +4802,7 @@
               </a:defRPr>
             </a:pPr>
             <a:r>
-              <a:t>Perbaiki keamanan: hash password, signed session</a:t>
+              <a:t>Login wajib — halaman dilindungi middleware</a:t>
             </a:r>
           </a:p>
           <a:p>
@@ -5169,7 +4817,7 @@
               </a:defRPr>
             </a:pPr>
             <a:r>
-              <a:t>Tambah rate limiting &amp; security headers</a:t>
+              <a:t>Pembagian akses per role (RBAC 7 level)</a:t>
             </a:r>
           </a:p>
           <a:p>
@@ -5184,7 +4832,7 @@
               </a:defRPr>
             </a:pPr>
             <a:r>
-              <a:t>Lengkapi audit log aktivitas</a:t>
+              <a:t>Cookie session httpOnly &amp; sameSite=lax</a:t>
             </a:r>
           </a:p>
           <a:p>
@@ -5199,7 +4847,37 @@
               </a:defRPr>
             </a:pPr>
             <a:r>
-              <a:t>Uji coba internal dengan user CorpSec</a:t>
+              <a:t>API memorandum dicek role sebelum aksi (requireApiRole)</a:t>
+            </a:r>
+          </a:p>
+          <a:p>
+            <a:pPr>
+              <a:spcAft>
+                <a:spcPts val="600"/>
+              </a:spcAft>
+              <a:defRPr sz="1400">
+                <a:solidFill>
+                  <a:srgbClr val="1E293B"/>
+                </a:solidFill>
+              </a:defRPr>
+            </a:pPr>
+            <a:r>
+              <a:t>Redirect otomatis jika akses halaman tidak sesuai role</a:t>
+            </a:r>
+          </a:p>
+          <a:p>
+            <a:pPr>
+              <a:spcAft>
+                <a:spcPts val="600"/>
+              </a:spcAft>
+              <a:defRPr sz="1400">
+                <a:solidFill>
+                  <a:srgbClr val="1E293B"/>
+                </a:solidFill>
+              </a:defRPr>
+            </a:pPr>
+            <a:r>
+              <a:t>Validasi file upload (format PDF, batas ukuran)</a:t>
             </a:r>
           </a:p>
         </p:txBody>
@@ -5212,8 +4890,8 @@
         </p:nvSpPr>
         <p:spPr>
           <a:xfrm>
-            <a:off x="4297680" y="1417320"/>
-            <a:ext cx="3657600" cy="4434840"/>
+            <a:off x="6263640" y="1325880"/>
+            <a:ext cx="5394960" cy="4572000"/>
           </a:xfrm>
           <a:prstGeom prst="roundRect">
             <a:avLst/>
@@ -5257,14 +4935,14 @@
         </p:nvSpPr>
         <p:spPr>
           <a:xfrm>
-            <a:off x="4297680" y="1417320"/>
-            <a:ext cx="3657600" cy="475488"/>
+            <a:off x="6263640" y="1325880"/>
+            <a:ext cx="5394960" cy="475488"/>
           </a:xfrm>
           <a:prstGeom prst="rect">
             <a:avLst/>
           </a:prstGeom>
           <a:solidFill>
-            <a:srgbClr val="F58220"/>
+            <a:srgbClr val="DC2626"/>
           </a:solidFill>
           <a:ln>
             <a:noFill/>
@@ -5300,8 +4978,8 @@
         </p:nvSpPr>
         <p:spPr>
           <a:xfrm>
-            <a:off x="4480560" y="1490472"/>
-            <a:ext cx="3291840" cy="365760"/>
+            <a:off x="6446520" y="1399032"/>
+            <a:ext cx="5029200" cy="365760"/>
           </a:xfrm>
           <a:prstGeom prst="rect">
             <a:avLst/>
@@ -5322,7 +5000,7 @@
               </a:defRPr>
             </a:pPr>
             <a:r>
-              <a:t>Fase 2 — Peningkatan Fitur</a:t>
+              <a:t>Perlu Ditingkatkan</a:t>
             </a:r>
           </a:p>
         </p:txBody>
@@ -5335,8 +5013,8 @@
         </p:nvSpPr>
         <p:spPr>
           <a:xfrm>
-            <a:off x="4480560" y="2011680"/>
-            <a:ext cx="3291840" cy="3749039"/>
+            <a:off x="6446520" y="1920240"/>
+            <a:ext cx="5029200" cy="3886200"/>
           </a:xfrm>
           <a:prstGeom prst="rect">
             <a:avLst/>
@@ -5360,7 +5038,7 @@
               </a:defRPr>
             </a:pPr>
             <a:r>
-              <a:t>Integrasi LLM nyata untuk tinjauan memorandum</a:t>
+              <a:t>Session cookie perlu ditandatangani (JWT/signed cookie)</a:t>
             </a:r>
           </a:p>
           <a:p>
@@ -5375,7 +5053,7 @@
               </a:defRPr>
             </a:pPr>
             <a:r>
-              <a:t>Notifikasi email/SMS saat approval &amp; SLA breach</a:t>
+              <a:t>Password disimpan plaintext — perlu bcrypt/hash</a:t>
             </a:r>
           </a:p>
           <a:p>
@@ -5390,7 +5068,7 @@
               </a:defRPr>
             </a:pPr>
             <a:r>
-              <a:t>Export laporan PDF/Excel</a:t>
+              <a:t>Belum ada rate limiting pada login</a:t>
             </a:r>
           </a:p>
           <a:p>
@@ -5405,155 +5083,9 @@
               </a:defRPr>
             </a:pPr>
             <a:r>
-              <a:t>Koneksi ke SMD Bank Sumut</a:t>
-            </a:r>
-          </a:p>
-        </p:txBody>
-      </p:sp>
-      <p:sp>
-        <p:nvSpPr>
-          <p:cNvPr id="12" name="Rounded Rectangle 11"/>
-          <p:cNvSpPr/>
-          <p:nvPr/>
-        </p:nvSpPr>
-        <p:spPr>
-          <a:xfrm>
-            <a:off x="8183879" y="1417320"/>
-            <a:ext cx="3657600" cy="4434840"/>
-          </a:xfrm>
-          <a:prstGeom prst="roundRect">
-            <a:avLst/>
-          </a:prstGeom>
-          <a:solidFill>
-            <a:srgbClr val="FFFFFF"/>
-          </a:solidFill>
-          <a:ln>
-            <a:solidFill>
-              <a:srgbClr val="E2E8F0"/>
-            </a:solidFill>
-          </a:ln>
-        </p:spPr>
-        <p:style>
-          <a:lnRef idx="1">
-            <a:schemeClr val="accent1"/>
-          </a:lnRef>
-          <a:fillRef idx="3">
-            <a:schemeClr val="accent1"/>
-          </a:fillRef>
-          <a:effectRef idx="2">
-            <a:schemeClr val="accent1"/>
-          </a:effectRef>
-          <a:fontRef idx="minor">
-            <a:schemeClr val="lt1"/>
-          </a:fontRef>
-        </p:style>
-        <p:txBody>
-          <a:bodyPr rtlCol="0" anchor="ctr"/>
-          <a:lstStyle/>
-          <a:p>
-            <a:pPr algn="ctr"/>
-          </a:p>
-        </p:txBody>
-      </p:sp>
-      <p:sp>
-        <p:nvSpPr>
-          <p:cNvPr id="13" name="Rectangle 12"/>
-          <p:cNvSpPr/>
-          <p:nvPr/>
-        </p:nvSpPr>
-        <p:spPr>
-          <a:xfrm>
-            <a:off x="8183879" y="1417320"/>
-            <a:ext cx="3657600" cy="475488"/>
-          </a:xfrm>
-          <a:prstGeom prst="rect">
-            <a:avLst/>
-          </a:prstGeom>
-          <a:solidFill>
-            <a:srgbClr val="059669"/>
-          </a:solidFill>
-          <a:ln>
-            <a:noFill/>
-          </a:ln>
-        </p:spPr>
-        <p:style>
-          <a:lnRef idx="1">
-            <a:schemeClr val="accent1"/>
-          </a:lnRef>
-          <a:fillRef idx="3">
-            <a:schemeClr val="accent1"/>
-          </a:fillRef>
-          <a:effectRef idx="2">
-            <a:schemeClr val="accent1"/>
-          </a:effectRef>
-          <a:fontRef idx="minor">
-            <a:schemeClr val="lt1"/>
-          </a:fontRef>
-        </p:style>
-        <p:txBody>
-          <a:bodyPr rtlCol="0" anchor="ctr"/>
-          <a:lstStyle/>
-          <a:p>
-            <a:pPr algn="ctr"/>
-          </a:p>
-        </p:txBody>
-      </p:sp>
-      <p:sp>
-        <p:nvSpPr>
-          <p:cNvPr id="14" name="TextBox 13"/>
-          <p:cNvSpPr txBox="1"/>
-          <p:nvPr/>
-        </p:nvSpPr>
-        <p:spPr>
-          <a:xfrm>
-            <a:off x="8366759" y="1490472"/>
-            <a:ext cx="3291840" cy="365760"/>
-          </a:xfrm>
-          <a:prstGeom prst="rect">
-            <a:avLst/>
-          </a:prstGeom>
-          <a:noFill/>
-        </p:spPr>
-        <p:txBody>
-          <a:bodyPr wrap="none">
-            <a:spAutoFit/>
-          </a:bodyPr>
-          <a:lstStyle/>
-          <a:p>
-            <a:pPr>
-              <a:defRPr sz="1600" b="1">
-                <a:solidFill>
-                  <a:srgbClr val="FFFFFF"/>
-                </a:solidFill>
-              </a:defRPr>
-            </a:pPr>
-            <a:r>
-              <a:t>Fase 3 — Go Live</a:t>
-            </a:r>
-          </a:p>
-        </p:txBody>
-      </p:sp>
-      <p:sp>
-        <p:nvSpPr>
-          <p:cNvPr id="15" name="TextBox 14"/>
-          <p:cNvSpPr txBox="1"/>
-          <p:nvPr/>
-        </p:nvSpPr>
-        <p:spPr>
-          <a:xfrm>
-            <a:off x="8366759" y="2011680"/>
-            <a:ext cx="3291840" cy="3749039"/>
-          </a:xfrm>
-          <a:prstGeom prst="rect">
-            <a:avLst/>
-          </a:prstGeom>
-          <a:noFill/>
-        </p:spPr>
-        <p:txBody>
-          <a:bodyPr wrap="square">
-            <a:spAutoFit/>
-          </a:bodyPr>
-          <a:lstStyle/>
+              <a:t>Belum ada security headers (CSP, HSTS, X-Frame)</a:t>
+            </a:r>
+          </a:p>
           <a:p>
             <a:pPr>
               <a:spcAft>
@@ -5566,7 +5098,7 @@
               </a:defRPr>
             </a:pPr>
             <a:r>
-              <a:t>Integrasi SSO Active Directory</a:t>
+              <a:t>Belum ada audit log aktivitas user</a:t>
             </a:r>
           </a:p>
           <a:p>
@@ -5581,7 +5113,7 @@
               </a:defRPr>
             </a:pPr>
             <a:r>
-              <a:t>Migrasi database ke PostgreSQL production</a:t>
+              <a:t>Perlu validasi input lebih ketat di semua API</a:t>
             </a:r>
           </a:p>
           <a:p>
@@ -5596,7 +5128,7 @@
               </a:defRPr>
             </a:pPr>
             <a:r>
-              <a:t>Penetration testing &amp; UAT formal</a:t>
+              <a:t>Enkripsi file PDF di storage server</a:t>
             </a:r>
           </a:p>
           <a:p>
@@ -5611,14 +5143,14 @@
               </a:defRPr>
             </a:pPr>
             <a:r>
-              <a:t>Pelatihan user &amp; rollout ke seluruh divisi</a:t>
-            </a:r>
-          </a:p>
-        </p:txBody>
-      </p:sp>
-      <p:sp>
-        <p:nvSpPr>
-          <p:cNvPr id="16" name="Rectangle 15"/>
+              <a:t>Integrasi SSO Active Directory Bank Sumut</a:t>
+            </a:r>
+          </a:p>
+        </p:txBody>
+      </p:sp>
+      <p:sp>
+        <p:nvSpPr>
+          <p:cNvPr id="12" name="Rectangle 11"/>
           <p:cNvSpPr/>
           <p:nvPr/>
         </p:nvSpPr>
@@ -5661,7 +5193,7 @@
       </p:sp>
       <p:sp>
         <p:nvSpPr>
-          <p:cNvPr id="17" name="TextBox 16"/>
+          <p:cNvPr id="13" name="TextBox 12"/>
           <p:cNvSpPr txBox="1"/>
           <p:nvPr/>
         </p:nvSpPr>
@@ -5696,7 +5228,7 @@
       </p:sp>
       <p:sp>
         <p:nvSpPr>
-          <p:cNvPr id="18" name="TextBox 17"/>
+          <p:cNvPr id="14" name="TextBox 13"/>
           <p:cNvSpPr txBox="1"/>
           <p:nvPr/>
         </p:nvSpPr>
@@ -5738,6 +5270,856 @@
 </file>
 
 <file path=ppt/slides/slide13.xml><?xml version="1.0" encoding="utf-8"?>
+<p:sld xmlns:a="http://schemas.openxmlformats.org/drawingml/2006/main" xmlns:p="http://schemas.openxmlformats.org/presentationml/2006/main" xmlns:r="http://schemas.openxmlformats.org/officeDocument/2006/relationships">
+  <p:cSld>
+    <p:bg>
+      <p:bgPr>
+        <a:solidFill>
+          <a:srgbClr val="F8FAFC"/>
+        </a:solidFill>
+        <a:effectLst/>
+      </p:bgPr>
+    </p:bg>
+    <p:spTree>
+      <p:nvGrpSpPr>
+        <p:cNvPr id="1" name=""/>
+        <p:cNvGrpSpPr/>
+        <p:nvPr/>
+      </p:nvGrpSpPr>
+      <p:grpSpPr/>
+      <p:sp>
+        <p:nvSpPr>
+          <p:cNvPr id="2" name="Rectangle 1"/>
+          <p:cNvSpPr/>
+          <p:nvPr/>
+        </p:nvSpPr>
+        <p:spPr>
+          <a:xfrm>
+            <a:off x="0" y="0"/>
+            <a:ext cx="164592" cy="6446520"/>
+          </a:xfrm>
+          <a:prstGeom prst="rect">
+            <a:avLst/>
+          </a:prstGeom>
+          <a:solidFill>
+            <a:srgbClr val="F58220"/>
+          </a:solidFill>
+          <a:ln>
+            <a:noFill/>
+          </a:ln>
+        </p:spPr>
+        <p:style>
+          <a:lnRef idx="1">
+            <a:schemeClr val="accent1"/>
+          </a:lnRef>
+          <a:fillRef idx="3">
+            <a:schemeClr val="accent1"/>
+          </a:fillRef>
+          <a:effectRef idx="2">
+            <a:schemeClr val="accent1"/>
+          </a:effectRef>
+          <a:fontRef idx="minor">
+            <a:schemeClr val="lt1"/>
+          </a:fontRef>
+        </p:style>
+        <p:txBody>
+          <a:bodyPr rtlCol="0" anchor="ctr"/>
+          <a:lstStyle/>
+          <a:p>
+            <a:pPr algn="ctr"/>
+          </a:p>
+        </p:txBody>
+      </p:sp>
+      <p:sp>
+        <p:nvSpPr>
+          <p:cNvPr id="3" name="TextBox 2"/>
+          <p:cNvSpPr txBox="1"/>
+          <p:nvPr/>
+        </p:nvSpPr>
+        <p:spPr>
+          <a:xfrm>
+            <a:off x="502920" y="320040"/>
+            <a:ext cx="11155680" cy="914400"/>
+          </a:xfrm>
+          <a:prstGeom prst="rect">
+            <a:avLst/>
+          </a:prstGeom>
+          <a:noFill/>
+        </p:spPr>
+        <p:txBody>
+          <a:bodyPr wrap="none">
+            <a:spAutoFit/>
+          </a:bodyPr>
+          <a:lstStyle/>
+          <a:p>
+            <a:pPr>
+              <a:defRPr sz="3200" b="1">
+                <a:solidFill>
+                  <a:srgbClr val="0C2340"/>
+                </a:solidFill>
+              </a:defRPr>
+            </a:pPr>
+            <a:r>
+              <a:t>Rencana Langkah Selanjutnya</a:t>
+            </a:r>
+          </a:p>
+          <a:p>
+            <a:pPr>
+              <a:spcBef>
+                <a:spcPts val="600"/>
+              </a:spcBef>
+              <a:defRPr sz="1700">
+                <a:solidFill>
+                  <a:srgbClr val="64748B"/>
+                </a:solidFill>
+              </a:defRPr>
+            </a:pPr>
+            <a:r>
+              <a:t>Prioritas pengembangan ke depan</a:t>
+            </a:r>
+          </a:p>
+        </p:txBody>
+      </p:sp>
+      <p:sp>
+        <p:nvSpPr>
+          <p:cNvPr id="4" name="Rounded Rectangle 3"/>
+          <p:cNvSpPr/>
+          <p:nvPr/>
+        </p:nvSpPr>
+        <p:spPr>
+          <a:xfrm>
+            <a:off x="411480" y="1417320"/>
+            <a:ext cx="3657600" cy="4434840"/>
+          </a:xfrm>
+          <a:prstGeom prst="roundRect">
+            <a:avLst/>
+          </a:prstGeom>
+          <a:solidFill>
+            <a:srgbClr val="FFFFFF"/>
+          </a:solidFill>
+          <a:ln>
+            <a:solidFill>
+              <a:srgbClr val="E2E8F0"/>
+            </a:solidFill>
+          </a:ln>
+        </p:spPr>
+        <p:style>
+          <a:lnRef idx="1">
+            <a:schemeClr val="accent1"/>
+          </a:lnRef>
+          <a:fillRef idx="3">
+            <a:schemeClr val="accent1"/>
+          </a:fillRef>
+          <a:effectRef idx="2">
+            <a:schemeClr val="accent1"/>
+          </a:effectRef>
+          <a:fontRef idx="minor">
+            <a:schemeClr val="lt1"/>
+          </a:fontRef>
+        </p:style>
+        <p:txBody>
+          <a:bodyPr rtlCol="0" anchor="ctr"/>
+          <a:lstStyle/>
+          <a:p>
+            <a:pPr algn="ctr"/>
+          </a:p>
+        </p:txBody>
+      </p:sp>
+      <p:sp>
+        <p:nvSpPr>
+          <p:cNvPr id="5" name="Rectangle 4"/>
+          <p:cNvSpPr/>
+          <p:nvPr/>
+        </p:nvSpPr>
+        <p:spPr>
+          <a:xfrm>
+            <a:off x="411480" y="1417320"/>
+            <a:ext cx="3657600" cy="475488"/>
+          </a:xfrm>
+          <a:prstGeom prst="rect">
+            <a:avLst/>
+          </a:prstGeom>
+          <a:solidFill>
+            <a:srgbClr val="0C2340"/>
+          </a:solidFill>
+          <a:ln>
+            <a:noFill/>
+          </a:ln>
+        </p:spPr>
+        <p:style>
+          <a:lnRef idx="1">
+            <a:schemeClr val="accent1"/>
+          </a:lnRef>
+          <a:fillRef idx="3">
+            <a:schemeClr val="accent1"/>
+          </a:fillRef>
+          <a:effectRef idx="2">
+            <a:schemeClr val="accent1"/>
+          </a:effectRef>
+          <a:fontRef idx="minor">
+            <a:schemeClr val="lt1"/>
+          </a:fontRef>
+        </p:style>
+        <p:txBody>
+          <a:bodyPr rtlCol="0" anchor="ctr"/>
+          <a:lstStyle/>
+          <a:p>
+            <a:pPr algn="ctr"/>
+          </a:p>
+        </p:txBody>
+      </p:sp>
+      <p:sp>
+        <p:nvSpPr>
+          <p:cNvPr id="6" name="TextBox 5"/>
+          <p:cNvSpPr txBox="1"/>
+          <p:nvPr/>
+        </p:nvSpPr>
+        <p:spPr>
+          <a:xfrm>
+            <a:off x="594360" y="1490472"/>
+            <a:ext cx="3291840" cy="365760"/>
+          </a:xfrm>
+          <a:prstGeom prst="rect">
+            <a:avLst/>
+          </a:prstGeom>
+          <a:noFill/>
+        </p:spPr>
+        <p:txBody>
+          <a:bodyPr wrap="none">
+            <a:spAutoFit/>
+          </a:bodyPr>
+          <a:lstStyle/>
+          <a:p>
+            <a:pPr>
+              <a:defRPr sz="1600" b="1">
+                <a:solidFill>
+                  <a:srgbClr val="FFFFFF"/>
+                </a:solidFill>
+              </a:defRPr>
+            </a:pPr>
+            <a:r>
+              <a:t>Fase 1 — Stabilisasi</a:t>
+            </a:r>
+          </a:p>
+        </p:txBody>
+      </p:sp>
+      <p:sp>
+        <p:nvSpPr>
+          <p:cNvPr id="7" name="TextBox 6"/>
+          <p:cNvSpPr txBox="1"/>
+          <p:nvPr/>
+        </p:nvSpPr>
+        <p:spPr>
+          <a:xfrm>
+            <a:off x="594360" y="2011680"/>
+            <a:ext cx="3291840" cy="3749039"/>
+          </a:xfrm>
+          <a:prstGeom prst="rect">
+            <a:avLst/>
+          </a:prstGeom>
+          <a:noFill/>
+        </p:spPr>
+        <p:txBody>
+          <a:bodyPr wrap="square">
+            <a:spAutoFit/>
+          </a:bodyPr>
+          <a:lstStyle/>
+          <a:p>
+            <a:pPr>
+              <a:spcAft>
+                <a:spcPts val="600"/>
+              </a:spcAft>
+              <a:defRPr sz="1400">
+                <a:solidFill>
+                  <a:srgbClr val="1E293B"/>
+                </a:solidFill>
+              </a:defRPr>
+            </a:pPr>
+            <a:r>
+              <a:t>Perbaiki keamanan: hash password, signed session</a:t>
+            </a:r>
+          </a:p>
+          <a:p>
+            <a:pPr>
+              <a:spcAft>
+                <a:spcPts val="600"/>
+              </a:spcAft>
+              <a:defRPr sz="1400">
+                <a:solidFill>
+                  <a:srgbClr val="1E293B"/>
+                </a:solidFill>
+              </a:defRPr>
+            </a:pPr>
+            <a:r>
+              <a:t>Tambah rate limiting &amp; security headers</a:t>
+            </a:r>
+          </a:p>
+          <a:p>
+            <a:pPr>
+              <a:spcAft>
+                <a:spcPts val="600"/>
+              </a:spcAft>
+              <a:defRPr sz="1400">
+                <a:solidFill>
+                  <a:srgbClr val="1E293B"/>
+                </a:solidFill>
+              </a:defRPr>
+            </a:pPr>
+            <a:r>
+              <a:t>Lengkapi audit log aktivitas</a:t>
+            </a:r>
+          </a:p>
+          <a:p>
+            <a:pPr>
+              <a:spcAft>
+                <a:spcPts val="600"/>
+              </a:spcAft>
+              <a:defRPr sz="1400">
+                <a:solidFill>
+                  <a:srgbClr val="1E293B"/>
+                </a:solidFill>
+              </a:defRPr>
+            </a:pPr>
+            <a:r>
+              <a:t>Uji coba internal dengan user CorpSec</a:t>
+            </a:r>
+          </a:p>
+        </p:txBody>
+      </p:sp>
+      <p:sp>
+        <p:nvSpPr>
+          <p:cNvPr id="8" name="Rounded Rectangle 7"/>
+          <p:cNvSpPr/>
+          <p:nvPr/>
+        </p:nvSpPr>
+        <p:spPr>
+          <a:xfrm>
+            <a:off x="4297680" y="1417320"/>
+            <a:ext cx="3657600" cy="4434840"/>
+          </a:xfrm>
+          <a:prstGeom prst="roundRect">
+            <a:avLst/>
+          </a:prstGeom>
+          <a:solidFill>
+            <a:srgbClr val="FFFFFF"/>
+          </a:solidFill>
+          <a:ln>
+            <a:solidFill>
+              <a:srgbClr val="E2E8F0"/>
+            </a:solidFill>
+          </a:ln>
+        </p:spPr>
+        <p:style>
+          <a:lnRef idx="1">
+            <a:schemeClr val="accent1"/>
+          </a:lnRef>
+          <a:fillRef idx="3">
+            <a:schemeClr val="accent1"/>
+          </a:fillRef>
+          <a:effectRef idx="2">
+            <a:schemeClr val="accent1"/>
+          </a:effectRef>
+          <a:fontRef idx="minor">
+            <a:schemeClr val="lt1"/>
+          </a:fontRef>
+        </p:style>
+        <p:txBody>
+          <a:bodyPr rtlCol="0" anchor="ctr"/>
+          <a:lstStyle/>
+          <a:p>
+            <a:pPr algn="ctr"/>
+          </a:p>
+        </p:txBody>
+      </p:sp>
+      <p:sp>
+        <p:nvSpPr>
+          <p:cNvPr id="9" name="Rectangle 8"/>
+          <p:cNvSpPr/>
+          <p:nvPr/>
+        </p:nvSpPr>
+        <p:spPr>
+          <a:xfrm>
+            <a:off x="4297680" y="1417320"/>
+            <a:ext cx="3657600" cy="475488"/>
+          </a:xfrm>
+          <a:prstGeom prst="rect">
+            <a:avLst/>
+          </a:prstGeom>
+          <a:solidFill>
+            <a:srgbClr val="F58220"/>
+          </a:solidFill>
+          <a:ln>
+            <a:noFill/>
+          </a:ln>
+        </p:spPr>
+        <p:style>
+          <a:lnRef idx="1">
+            <a:schemeClr val="accent1"/>
+          </a:lnRef>
+          <a:fillRef idx="3">
+            <a:schemeClr val="accent1"/>
+          </a:fillRef>
+          <a:effectRef idx="2">
+            <a:schemeClr val="accent1"/>
+          </a:effectRef>
+          <a:fontRef idx="minor">
+            <a:schemeClr val="lt1"/>
+          </a:fontRef>
+        </p:style>
+        <p:txBody>
+          <a:bodyPr rtlCol="0" anchor="ctr"/>
+          <a:lstStyle/>
+          <a:p>
+            <a:pPr algn="ctr"/>
+          </a:p>
+        </p:txBody>
+      </p:sp>
+      <p:sp>
+        <p:nvSpPr>
+          <p:cNvPr id="10" name="TextBox 9"/>
+          <p:cNvSpPr txBox="1"/>
+          <p:nvPr/>
+        </p:nvSpPr>
+        <p:spPr>
+          <a:xfrm>
+            <a:off x="4480560" y="1490472"/>
+            <a:ext cx="3291840" cy="365760"/>
+          </a:xfrm>
+          <a:prstGeom prst="rect">
+            <a:avLst/>
+          </a:prstGeom>
+          <a:noFill/>
+        </p:spPr>
+        <p:txBody>
+          <a:bodyPr wrap="none">
+            <a:spAutoFit/>
+          </a:bodyPr>
+          <a:lstStyle/>
+          <a:p>
+            <a:pPr>
+              <a:defRPr sz="1600" b="1">
+                <a:solidFill>
+                  <a:srgbClr val="FFFFFF"/>
+                </a:solidFill>
+              </a:defRPr>
+            </a:pPr>
+            <a:r>
+              <a:t>Fase 2 — Peningkatan Fitur</a:t>
+            </a:r>
+          </a:p>
+        </p:txBody>
+      </p:sp>
+      <p:sp>
+        <p:nvSpPr>
+          <p:cNvPr id="11" name="TextBox 10"/>
+          <p:cNvSpPr txBox="1"/>
+          <p:nvPr/>
+        </p:nvSpPr>
+        <p:spPr>
+          <a:xfrm>
+            <a:off x="4480560" y="2011680"/>
+            <a:ext cx="3291840" cy="3749039"/>
+          </a:xfrm>
+          <a:prstGeom prst="rect">
+            <a:avLst/>
+          </a:prstGeom>
+          <a:noFill/>
+        </p:spPr>
+        <p:txBody>
+          <a:bodyPr wrap="square">
+            <a:spAutoFit/>
+          </a:bodyPr>
+          <a:lstStyle/>
+          <a:p>
+            <a:pPr>
+              <a:spcAft>
+                <a:spcPts val="600"/>
+              </a:spcAft>
+              <a:defRPr sz="1400">
+                <a:solidFill>
+                  <a:srgbClr val="1E293B"/>
+                </a:solidFill>
+              </a:defRPr>
+            </a:pPr>
+            <a:r>
+              <a:t>Integrasi LLM nyata untuk tinjauan memorandum</a:t>
+            </a:r>
+          </a:p>
+          <a:p>
+            <a:pPr>
+              <a:spcAft>
+                <a:spcPts val="600"/>
+              </a:spcAft>
+              <a:defRPr sz="1400">
+                <a:solidFill>
+                  <a:srgbClr val="1E293B"/>
+                </a:solidFill>
+              </a:defRPr>
+            </a:pPr>
+            <a:r>
+              <a:t>Notifikasi email/SMS saat approval &amp; SLA breach</a:t>
+            </a:r>
+          </a:p>
+          <a:p>
+            <a:pPr>
+              <a:spcAft>
+                <a:spcPts val="600"/>
+              </a:spcAft>
+              <a:defRPr sz="1400">
+                <a:solidFill>
+                  <a:srgbClr val="1E293B"/>
+                </a:solidFill>
+              </a:defRPr>
+            </a:pPr>
+            <a:r>
+              <a:t>Export laporan PDF/Excel</a:t>
+            </a:r>
+          </a:p>
+          <a:p>
+            <a:pPr>
+              <a:spcAft>
+                <a:spcPts val="600"/>
+              </a:spcAft>
+              <a:defRPr sz="1400">
+                <a:solidFill>
+                  <a:srgbClr val="1E293B"/>
+                </a:solidFill>
+              </a:defRPr>
+            </a:pPr>
+            <a:r>
+              <a:t>Koneksi ke SMD Bank Sumut</a:t>
+            </a:r>
+          </a:p>
+        </p:txBody>
+      </p:sp>
+      <p:sp>
+        <p:nvSpPr>
+          <p:cNvPr id="12" name="Rounded Rectangle 11"/>
+          <p:cNvSpPr/>
+          <p:nvPr/>
+        </p:nvSpPr>
+        <p:spPr>
+          <a:xfrm>
+            <a:off x="8183879" y="1417320"/>
+            <a:ext cx="3657600" cy="4434840"/>
+          </a:xfrm>
+          <a:prstGeom prst="roundRect">
+            <a:avLst/>
+          </a:prstGeom>
+          <a:solidFill>
+            <a:srgbClr val="FFFFFF"/>
+          </a:solidFill>
+          <a:ln>
+            <a:solidFill>
+              <a:srgbClr val="E2E8F0"/>
+            </a:solidFill>
+          </a:ln>
+        </p:spPr>
+        <p:style>
+          <a:lnRef idx="1">
+            <a:schemeClr val="accent1"/>
+          </a:lnRef>
+          <a:fillRef idx="3">
+            <a:schemeClr val="accent1"/>
+          </a:fillRef>
+          <a:effectRef idx="2">
+            <a:schemeClr val="accent1"/>
+          </a:effectRef>
+          <a:fontRef idx="minor">
+            <a:schemeClr val="lt1"/>
+          </a:fontRef>
+        </p:style>
+        <p:txBody>
+          <a:bodyPr rtlCol="0" anchor="ctr"/>
+          <a:lstStyle/>
+          <a:p>
+            <a:pPr algn="ctr"/>
+          </a:p>
+        </p:txBody>
+      </p:sp>
+      <p:sp>
+        <p:nvSpPr>
+          <p:cNvPr id="13" name="Rectangle 12"/>
+          <p:cNvSpPr/>
+          <p:nvPr/>
+        </p:nvSpPr>
+        <p:spPr>
+          <a:xfrm>
+            <a:off x="8183879" y="1417320"/>
+            <a:ext cx="3657600" cy="475488"/>
+          </a:xfrm>
+          <a:prstGeom prst="rect">
+            <a:avLst/>
+          </a:prstGeom>
+          <a:solidFill>
+            <a:srgbClr val="059669"/>
+          </a:solidFill>
+          <a:ln>
+            <a:noFill/>
+          </a:ln>
+        </p:spPr>
+        <p:style>
+          <a:lnRef idx="1">
+            <a:schemeClr val="accent1"/>
+          </a:lnRef>
+          <a:fillRef idx="3">
+            <a:schemeClr val="accent1"/>
+          </a:fillRef>
+          <a:effectRef idx="2">
+            <a:schemeClr val="accent1"/>
+          </a:effectRef>
+          <a:fontRef idx="minor">
+            <a:schemeClr val="lt1"/>
+          </a:fontRef>
+        </p:style>
+        <p:txBody>
+          <a:bodyPr rtlCol="0" anchor="ctr"/>
+          <a:lstStyle/>
+          <a:p>
+            <a:pPr algn="ctr"/>
+          </a:p>
+        </p:txBody>
+      </p:sp>
+      <p:sp>
+        <p:nvSpPr>
+          <p:cNvPr id="14" name="TextBox 13"/>
+          <p:cNvSpPr txBox="1"/>
+          <p:nvPr/>
+        </p:nvSpPr>
+        <p:spPr>
+          <a:xfrm>
+            <a:off x="8366759" y="1490472"/>
+            <a:ext cx="3291840" cy="365760"/>
+          </a:xfrm>
+          <a:prstGeom prst="rect">
+            <a:avLst/>
+          </a:prstGeom>
+          <a:noFill/>
+        </p:spPr>
+        <p:txBody>
+          <a:bodyPr wrap="none">
+            <a:spAutoFit/>
+          </a:bodyPr>
+          <a:lstStyle/>
+          <a:p>
+            <a:pPr>
+              <a:defRPr sz="1600" b="1">
+                <a:solidFill>
+                  <a:srgbClr val="FFFFFF"/>
+                </a:solidFill>
+              </a:defRPr>
+            </a:pPr>
+            <a:r>
+              <a:t>Fase 3 — Go Live</a:t>
+            </a:r>
+          </a:p>
+        </p:txBody>
+      </p:sp>
+      <p:sp>
+        <p:nvSpPr>
+          <p:cNvPr id="15" name="TextBox 14"/>
+          <p:cNvSpPr txBox="1"/>
+          <p:nvPr/>
+        </p:nvSpPr>
+        <p:spPr>
+          <a:xfrm>
+            <a:off x="8366759" y="2011680"/>
+            <a:ext cx="3291840" cy="3749039"/>
+          </a:xfrm>
+          <a:prstGeom prst="rect">
+            <a:avLst/>
+          </a:prstGeom>
+          <a:noFill/>
+        </p:spPr>
+        <p:txBody>
+          <a:bodyPr wrap="square">
+            <a:spAutoFit/>
+          </a:bodyPr>
+          <a:lstStyle/>
+          <a:p>
+            <a:pPr>
+              <a:spcAft>
+                <a:spcPts val="600"/>
+              </a:spcAft>
+              <a:defRPr sz="1400">
+                <a:solidFill>
+                  <a:srgbClr val="1E293B"/>
+                </a:solidFill>
+              </a:defRPr>
+            </a:pPr>
+            <a:r>
+              <a:t>Integrasi SSO Active Directory</a:t>
+            </a:r>
+          </a:p>
+          <a:p>
+            <a:pPr>
+              <a:spcAft>
+                <a:spcPts val="600"/>
+              </a:spcAft>
+              <a:defRPr sz="1400">
+                <a:solidFill>
+                  <a:srgbClr val="1E293B"/>
+                </a:solidFill>
+              </a:defRPr>
+            </a:pPr>
+            <a:r>
+              <a:t>Migrasi database ke PostgreSQL production</a:t>
+            </a:r>
+          </a:p>
+          <a:p>
+            <a:pPr>
+              <a:spcAft>
+                <a:spcPts val="600"/>
+              </a:spcAft>
+              <a:defRPr sz="1400">
+                <a:solidFill>
+                  <a:srgbClr val="1E293B"/>
+                </a:solidFill>
+              </a:defRPr>
+            </a:pPr>
+            <a:r>
+              <a:t>Penetration testing &amp; UAT formal</a:t>
+            </a:r>
+          </a:p>
+          <a:p>
+            <a:pPr>
+              <a:spcAft>
+                <a:spcPts val="600"/>
+              </a:spcAft>
+              <a:defRPr sz="1400">
+                <a:solidFill>
+                  <a:srgbClr val="1E293B"/>
+                </a:solidFill>
+              </a:defRPr>
+            </a:pPr>
+            <a:r>
+              <a:t>Pelatihan user &amp; rollout ke seluruh divisi</a:t>
+            </a:r>
+          </a:p>
+        </p:txBody>
+      </p:sp>
+      <p:sp>
+        <p:nvSpPr>
+          <p:cNvPr id="16" name="Rectangle 15"/>
+          <p:cNvSpPr/>
+          <p:nvPr/>
+        </p:nvSpPr>
+        <p:spPr>
+          <a:xfrm>
+            <a:off x="0" y="6446520"/>
+            <a:ext cx="12191695" cy="411480"/>
+          </a:xfrm>
+          <a:prstGeom prst="rect">
+            <a:avLst/>
+          </a:prstGeom>
+          <a:solidFill>
+            <a:srgbClr val="0C2340"/>
+          </a:solidFill>
+          <a:ln>
+            <a:noFill/>
+          </a:ln>
+        </p:spPr>
+        <p:style>
+          <a:lnRef idx="1">
+            <a:schemeClr val="accent1"/>
+          </a:lnRef>
+          <a:fillRef idx="3">
+            <a:schemeClr val="accent1"/>
+          </a:fillRef>
+          <a:effectRef idx="2">
+            <a:schemeClr val="accent1"/>
+          </a:effectRef>
+          <a:fontRef idx="minor">
+            <a:schemeClr val="lt1"/>
+          </a:fontRef>
+        </p:style>
+        <p:txBody>
+          <a:bodyPr rtlCol="0" anchor="ctr"/>
+          <a:lstStyle/>
+          <a:p>
+            <a:pPr algn="ctr"/>
+          </a:p>
+        </p:txBody>
+      </p:sp>
+      <p:sp>
+        <p:nvSpPr>
+          <p:cNvPr id="17" name="TextBox 16"/>
+          <p:cNvSpPr txBox="1"/>
+          <p:nvPr/>
+        </p:nvSpPr>
+        <p:spPr>
+          <a:xfrm>
+            <a:off x="457200" y="6492240"/>
+            <a:ext cx="5486400" cy="320040"/>
+          </a:xfrm>
+          <a:prstGeom prst="rect">
+            <a:avLst/>
+          </a:prstGeom>
+          <a:noFill/>
+        </p:spPr>
+        <p:txBody>
+          <a:bodyPr wrap="none">
+            <a:spAutoFit/>
+          </a:bodyPr>
+          <a:lstStyle/>
+          <a:p>
+            <a:pPr>
+              <a:defRPr sz="1100" b="1">
+                <a:solidFill>
+                  <a:srgbClr val="F58220"/>
+                </a:solidFill>
+              </a:defRPr>
+            </a:pPr>
+            <a:r>
+              <a:t>CorpSec Bank Sumut — Business Problem Canvas</a:t>
+            </a:r>
+          </a:p>
+        </p:txBody>
+      </p:sp>
+      <p:sp>
+        <p:nvSpPr>
+          <p:cNvPr id="18" name="TextBox 17"/>
+          <p:cNvSpPr txBox="1"/>
+          <p:nvPr/>
+        </p:nvSpPr>
+        <p:spPr>
+          <a:xfrm>
+            <a:off x="10515600" y="6492240"/>
+            <a:ext cx="1371600" cy="320040"/>
+          </a:xfrm>
+          <a:prstGeom prst="rect">
+            <a:avLst/>
+          </a:prstGeom>
+          <a:noFill/>
+        </p:spPr>
+        <p:txBody>
+          <a:bodyPr wrap="none">
+            <a:spAutoFit/>
+          </a:bodyPr>
+          <a:lstStyle/>
+          <a:p>
+            <a:pPr algn="r">
+              <a:defRPr sz="1100">
+                <a:solidFill>
+                  <a:srgbClr val="FFFFFF"/>
+                </a:solidFill>
+              </a:defRPr>
+            </a:pPr>
+            <a:r>
+              <a:t>13</a:t>
+            </a:r>
+          </a:p>
+        </p:txBody>
+      </p:sp>
+    </p:spTree>
+  </p:cSld>
+  <p:clrMapOvr>
+    <a:masterClrMapping/>
+  </p:clrMapOvr>
+</p:sld>
+</file>
+
+<file path=ppt/slides/slide14.xml><?xml version="1.0" encoding="utf-8"?>
 <p:sld xmlns:a="http://schemas.openxmlformats.org/drawingml/2006/main" xmlns:p="http://schemas.openxmlformats.org/presentationml/2006/main" xmlns:r="http://schemas.openxmlformats.org/officeDocument/2006/relationships">
   <p:cSld>
     <p:bg>
@@ -6011,7 +6393,7 @@
               </a:defRPr>
             </a:pPr>
             <a:r>
-              <a:t>13</a:t>
+              <a:t>14</a:t>
             </a:r>
           </a:p>
         </p:txBody>
@@ -8579,7 +8961,7 @@
               </a:defRPr>
             </a:pPr>
             <a:r>
-              <a:t>Aplikasi yang Dibuat</a:t>
+              <a:t>Tampilan Website</a:t>
             </a:r>
           </a:p>
           <a:p>
@@ -8594,7 +8976,7 @@
               </a:defRPr>
             </a:pPr>
             <a:r>
-              <a:t>Platform web CorpSec Bank Sumut — ringkasan singkat</a:t>
+              <a:t>Halaman Login — pintu masuk aplikasi CorpSec Bank Sumut</a:t>
             </a:r>
           </a:p>
         </p:txBody>
@@ -8607,8 +8989,8 @@
         </p:nvSpPr>
         <p:spPr>
           <a:xfrm>
-            <a:off x="411480" y="1325880"/>
-            <a:ext cx="3520440" cy="4480560"/>
+            <a:off x="1042415" y="1179576"/>
+            <a:ext cx="10076688" cy="4544568"/>
           </a:xfrm>
           <a:prstGeom prst="roundRect">
             <a:avLst/>
@@ -8644,16 +9026,75 @@
           </a:p>
         </p:txBody>
       </p:sp>
-      <p:sp>
-        <p:nvSpPr>
-          <p:cNvPr id="5" name="Rectangle 4"/>
+      <p:pic>
+        <p:nvPicPr>
+          <p:cNvPr id="5" name="Picture 4" descr="01-login.png"/>
+          <p:cNvPicPr>
+            <a:picLocks noChangeAspect="1"/>
+          </p:cNvPicPr>
+          <p:nvPr/>
+        </p:nvPicPr>
+        <p:blipFill>
+          <a:blip r:embed="rId2"/>
+          <a:stretch>
+            <a:fillRect/>
+          </a:stretch>
+        </p:blipFill>
+        <p:spPr>
+          <a:xfrm>
+            <a:off x="1097280" y="1234440"/>
+            <a:ext cx="9966960" cy="4160520"/>
+          </a:xfrm>
+          <a:prstGeom prst="rect">
+            <a:avLst/>
+          </a:prstGeom>
+        </p:spPr>
+      </p:pic>
+      <p:sp>
+        <p:nvSpPr>
+          <p:cNvPr id="6" name="TextBox 5"/>
+          <p:cNvSpPr txBox="1"/>
+          <p:nvPr/>
+        </p:nvSpPr>
+        <p:spPr>
+          <a:xfrm>
+            <a:off x="1097280" y="5431536"/>
+            <a:ext cx="9966960" cy="292608"/>
+          </a:xfrm>
+          <a:prstGeom prst="rect">
+            <a:avLst/>
+          </a:prstGeom>
+          <a:noFill/>
+        </p:spPr>
+        <p:txBody>
+          <a:bodyPr wrap="none">
+            <a:spAutoFit/>
+          </a:bodyPr>
+          <a:lstStyle/>
+          <a:p>
+            <a:pPr algn="ctr">
+              <a:defRPr sz="1300" b="1">
+                <a:solidFill>
+                  <a:srgbClr val="0C2340"/>
+                </a:solidFill>
+              </a:defRPr>
+            </a:pPr>
+            <a:r>
+              <a:t>Halaman Login</a:t>
+            </a:r>
+          </a:p>
+        </p:txBody>
+      </p:sp>
+      <p:sp>
+        <p:nvSpPr>
+          <p:cNvPr id="7" name="Rectangle 6"/>
           <p:cNvSpPr/>
           <p:nvPr/>
         </p:nvSpPr>
         <p:spPr>
           <a:xfrm>
-            <a:off x="411480" y="1325880"/>
-            <a:ext cx="3520440" cy="475488"/>
+            <a:off x="0" y="6446520"/>
+            <a:ext cx="12191695" cy="411480"/>
           </a:xfrm>
           <a:prstGeom prst="rect">
             <a:avLst/>
@@ -8689,14 +9130,14 @@
       </p:sp>
       <p:sp>
         <p:nvSpPr>
-          <p:cNvPr id="6" name="TextBox 5"/>
+          <p:cNvPr id="8" name="TextBox 7"/>
           <p:cNvSpPr txBox="1"/>
           <p:nvPr/>
         </p:nvSpPr>
         <p:spPr>
           <a:xfrm>
-            <a:off x="594360" y="1399032"/>
-            <a:ext cx="3154680" cy="365760"/>
+            <a:off x="457200" y="6492240"/>
+            <a:ext cx="5486400" cy="320040"/>
           </a:xfrm>
           <a:prstGeom prst="rect">
             <a:avLst/>
@@ -8710,654 +9151,6 @@
           <a:lstStyle/>
           <a:p>
             <a:pPr>
-              <a:defRPr sz="1600" b="1">
-                <a:solidFill>
-                  <a:srgbClr val="FFFFFF"/>
-                </a:solidFill>
-              </a:defRPr>
-            </a:pPr>
-            <a:r>
-              <a:t>Tampilan Depan</a:t>
-            </a:r>
-          </a:p>
-        </p:txBody>
-      </p:sp>
-      <p:sp>
-        <p:nvSpPr>
-          <p:cNvPr id="7" name="TextBox 6"/>
-          <p:cNvSpPr txBox="1"/>
-          <p:nvPr/>
-        </p:nvSpPr>
-        <p:spPr>
-          <a:xfrm>
-            <a:off x="594360" y="1920240"/>
-            <a:ext cx="3154680" cy="3794760"/>
-          </a:xfrm>
-          <a:prstGeom prst="rect">
-            <a:avLst/>
-          </a:prstGeom>
-          <a:noFill/>
-        </p:spPr>
-        <p:txBody>
-          <a:bodyPr wrap="square">
-            <a:spAutoFit/>
-          </a:bodyPr>
-          <a:lstStyle/>
-          <a:p>
-            <a:pPr>
-              <a:spcAft>
-                <a:spcPts val="600"/>
-              </a:spcAft>
-              <a:defRPr sz="1400">
-                <a:solidFill>
-                  <a:srgbClr val="1E293B"/>
-                </a:solidFill>
-              </a:defRPr>
-            </a:pPr>
-            <a:r>
-              <a:t>Halaman login dengan gambar gedung Bank Sumut</a:t>
-            </a:r>
-          </a:p>
-          <a:p>
-            <a:pPr>
-              <a:spcAft>
-                <a:spcPts val="600"/>
-              </a:spcAft>
-              <a:defRPr sz="1400">
-                <a:solidFill>
-                  <a:srgbClr val="1E293B"/>
-                </a:solidFill>
-              </a:defRPr>
-            </a:pPr>
-            <a:r>
-              <a:t>Warna navy &amp; oranye sesuai branding bank</a:t>
-            </a:r>
-          </a:p>
-          <a:p>
-            <a:pPr>
-              <a:spcAft>
-                <a:spcPts val="600"/>
-              </a:spcAft>
-              <a:defRPr sz="1400">
-                <a:solidFill>
-                  <a:srgbClr val="1E293B"/>
-                </a:solidFill>
-              </a:defRPr>
-            </a:pPr>
-            <a:r>
-              <a:t>Sidebar per role — menu sesuai tugas masing-masing</a:t>
-            </a:r>
-          </a:p>
-          <a:p>
-            <a:pPr>
-              <a:spcAft>
-                <a:spcPts val="600"/>
-              </a:spcAft>
-              <a:defRPr sz="1400">
-                <a:solidFill>
-                  <a:srgbClr val="1E293B"/>
-                </a:solidFill>
-              </a:defRPr>
-            </a:pPr>
-            <a:r>
-              <a:t>Dashboard dengan banner, statistik, &amp; grafik</a:t>
-            </a:r>
-          </a:p>
-          <a:p>
-            <a:pPr>
-              <a:spcAft>
-                <a:spcPts val="600"/>
-              </a:spcAft>
-              <a:defRPr sz="1400">
-                <a:solidFill>
-                  <a:srgbClr val="1E293B"/>
-                </a:solidFill>
-              </a:defRPr>
-            </a:pPr>
-            <a:r>
-              <a:t>Tampilan bersih, mudah dibaca, responsif</a:t>
-            </a:r>
-          </a:p>
-        </p:txBody>
-      </p:sp>
-      <p:sp>
-        <p:nvSpPr>
-          <p:cNvPr id="8" name="Rounded Rectangle 7"/>
-          <p:cNvSpPr/>
-          <p:nvPr/>
-        </p:nvSpPr>
-        <p:spPr>
-          <a:xfrm>
-            <a:off x="4160520" y="1325880"/>
-            <a:ext cx="3520440" cy="4480560"/>
-          </a:xfrm>
-          <a:prstGeom prst="roundRect">
-            <a:avLst/>
-          </a:prstGeom>
-          <a:solidFill>
-            <a:srgbClr val="FFFFFF"/>
-          </a:solidFill>
-          <a:ln>
-            <a:solidFill>
-              <a:srgbClr val="E2E8F0"/>
-            </a:solidFill>
-          </a:ln>
-        </p:spPr>
-        <p:style>
-          <a:lnRef idx="1">
-            <a:schemeClr val="accent1"/>
-          </a:lnRef>
-          <a:fillRef idx="3">
-            <a:schemeClr val="accent1"/>
-          </a:fillRef>
-          <a:effectRef idx="2">
-            <a:schemeClr val="accent1"/>
-          </a:effectRef>
-          <a:fontRef idx="minor">
-            <a:schemeClr val="lt1"/>
-          </a:fontRef>
-        </p:style>
-        <p:txBody>
-          <a:bodyPr rtlCol="0" anchor="ctr"/>
-          <a:lstStyle/>
-          <a:p>
-            <a:pPr algn="ctr"/>
-          </a:p>
-        </p:txBody>
-      </p:sp>
-      <p:sp>
-        <p:nvSpPr>
-          <p:cNvPr id="9" name="Rectangle 8"/>
-          <p:cNvSpPr/>
-          <p:nvPr/>
-        </p:nvSpPr>
-        <p:spPr>
-          <a:xfrm>
-            <a:off x="4160520" y="1325880"/>
-            <a:ext cx="3520440" cy="475488"/>
-          </a:xfrm>
-          <a:prstGeom prst="rect">
-            <a:avLst/>
-          </a:prstGeom>
-          <a:solidFill>
-            <a:srgbClr val="0C2340"/>
-          </a:solidFill>
-          <a:ln>
-            <a:noFill/>
-          </a:ln>
-        </p:spPr>
-        <p:style>
-          <a:lnRef idx="1">
-            <a:schemeClr val="accent1"/>
-          </a:lnRef>
-          <a:fillRef idx="3">
-            <a:schemeClr val="accent1"/>
-          </a:fillRef>
-          <a:effectRef idx="2">
-            <a:schemeClr val="accent1"/>
-          </a:effectRef>
-          <a:fontRef idx="minor">
-            <a:schemeClr val="lt1"/>
-          </a:fontRef>
-        </p:style>
-        <p:txBody>
-          <a:bodyPr rtlCol="0" anchor="ctr"/>
-          <a:lstStyle/>
-          <a:p>
-            <a:pPr algn="ctr"/>
-          </a:p>
-        </p:txBody>
-      </p:sp>
-      <p:sp>
-        <p:nvSpPr>
-          <p:cNvPr id="10" name="TextBox 9"/>
-          <p:cNvSpPr txBox="1"/>
-          <p:nvPr/>
-        </p:nvSpPr>
-        <p:spPr>
-          <a:xfrm>
-            <a:off x="4343400" y="1399032"/>
-            <a:ext cx="3154680" cy="365760"/>
-          </a:xfrm>
-          <a:prstGeom prst="rect">
-            <a:avLst/>
-          </a:prstGeom>
-          <a:noFill/>
-        </p:spPr>
-        <p:txBody>
-          <a:bodyPr wrap="none">
-            <a:spAutoFit/>
-          </a:bodyPr>
-          <a:lstStyle/>
-          <a:p>
-            <a:pPr>
-              <a:defRPr sz="1600" b="1">
-                <a:solidFill>
-                  <a:srgbClr val="FFFFFF"/>
-                </a:solidFill>
-              </a:defRPr>
-            </a:pPr>
-            <a:r>
-              <a:t>Fitur Utama</a:t>
-            </a:r>
-          </a:p>
-        </p:txBody>
-      </p:sp>
-      <p:sp>
-        <p:nvSpPr>
-          <p:cNvPr id="11" name="TextBox 10"/>
-          <p:cNvSpPr txBox="1"/>
-          <p:nvPr/>
-        </p:nvSpPr>
-        <p:spPr>
-          <a:xfrm>
-            <a:off x="4343400" y="1920240"/>
-            <a:ext cx="3154680" cy="3794760"/>
-          </a:xfrm>
-          <a:prstGeom prst="rect">
-            <a:avLst/>
-          </a:prstGeom>
-          <a:noFill/>
-        </p:spPr>
-        <p:txBody>
-          <a:bodyPr wrap="square">
-            <a:spAutoFit/>
-          </a:bodyPr>
-          <a:lstStyle/>
-          <a:p>
-            <a:pPr>
-              <a:spcAft>
-                <a:spcPts val="600"/>
-              </a:spcAft>
-              <a:defRPr sz="1400">
-                <a:solidFill>
-                  <a:srgbClr val="1E293B"/>
-                </a:solidFill>
-              </a:defRPr>
-            </a:pPr>
-            <a:r>
-              <a:t>Upload &amp; kelola memorandum PDF</a:t>
-            </a:r>
-          </a:p>
-          <a:p>
-            <a:pPr>
-              <a:spcAft>
-                <a:spcPts val="600"/>
-              </a:spcAft>
-              <a:defRPr sz="1400">
-                <a:solidFill>
-                  <a:srgbClr val="1E293B"/>
-                </a:solidFill>
-              </a:defRPr>
-            </a:pPr>
-            <a:r>
-              <a:t>Alur persetujuan 7 tahap</a:t>
-            </a:r>
-          </a:p>
-          <a:p>
-            <a:pPr>
-              <a:spcAft>
-                <a:spcPts val="600"/>
-              </a:spcAft>
-              <a:defRPr sz="1400">
-                <a:solidFill>
-                  <a:srgbClr val="1E293B"/>
-                </a:solidFill>
-              </a:defRPr>
-            </a:pPr>
-            <a:r>
-              <a:t>Bantuan rangkum isi memorandum</a:t>
-            </a:r>
-          </a:p>
-          <a:p>
-            <a:pPr>
-              <a:spcAft>
-                <a:spcPts val="600"/>
-              </a:spcAft>
-              <a:defRPr sz="1400">
-                <a:solidFill>
-                  <a:srgbClr val="1E293B"/>
-                </a:solidFill>
-              </a:defRPr>
-            </a:pPr>
-            <a:r>
-              <a:t>Tanda tangan digital saat approval</a:t>
-            </a:r>
-          </a:p>
-          <a:p>
-            <a:pPr>
-              <a:spcAft>
-                <a:spcPts val="600"/>
-              </a:spcAft>
-              <a:defRPr sz="1400">
-                <a:solidFill>
-                  <a:srgbClr val="1E293B"/>
-                </a:solidFill>
-              </a:defRPr>
-            </a:pPr>
-            <a:r>
-              <a:t>Agenda Direksi, rapat, media, arsip dokumen</a:t>
-            </a:r>
-          </a:p>
-          <a:p>
-            <a:pPr>
-              <a:spcAft>
-                <a:spcPts val="600"/>
-              </a:spcAft>
-              <a:defRPr sz="1400">
-                <a:solidFill>
-                  <a:srgbClr val="1E293B"/>
-                </a:solidFill>
-              </a:defRPr>
-            </a:pPr>
-            <a:r>
-              <a:t>Pemantauan SLA &amp; laporan KPI</a:t>
-            </a:r>
-          </a:p>
-        </p:txBody>
-      </p:sp>
-      <p:sp>
-        <p:nvSpPr>
-          <p:cNvPr id="12" name="Rounded Rectangle 11"/>
-          <p:cNvSpPr/>
-          <p:nvPr/>
-        </p:nvSpPr>
-        <p:spPr>
-          <a:xfrm>
-            <a:off x="7909560" y="1325880"/>
-            <a:ext cx="3520440" cy="4480560"/>
-          </a:xfrm>
-          <a:prstGeom prst="roundRect">
-            <a:avLst/>
-          </a:prstGeom>
-          <a:solidFill>
-            <a:srgbClr val="FFFFFF"/>
-          </a:solidFill>
-          <a:ln>
-            <a:solidFill>
-              <a:srgbClr val="E2E8F0"/>
-            </a:solidFill>
-          </a:ln>
-        </p:spPr>
-        <p:style>
-          <a:lnRef idx="1">
-            <a:schemeClr val="accent1"/>
-          </a:lnRef>
-          <a:fillRef idx="3">
-            <a:schemeClr val="accent1"/>
-          </a:fillRef>
-          <a:effectRef idx="2">
-            <a:schemeClr val="accent1"/>
-          </a:effectRef>
-          <a:fontRef idx="minor">
-            <a:schemeClr val="lt1"/>
-          </a:fontRef>
-        </p:style>
-        <p:txBody>
-          <a:bodyPr rtlCol="0" anchor="ctr"/>
-          <a:lstStyle/>
-          <a:p>
-            <a:pPr algn="ctr"/>
-          </a:p>
-        </p:txBody>
-      </p:sp>
-      <p:sp>
-        <p:nvSpPr>
-          <p:cNvPr id="13" name="Rectangle 12"/>
-          <p:cNvSpPr/>
-          <p:nvPr/>
-        </p:nvSpPr>
-        <p:spPr>
-          <a:xfrm>
-            <a:off x="7909560" y="1325880"/>
-            <a:ext cx="3520440" cy="475488"/>
-          </a:xfrm>
-          <a:prstGeom prst="rect">
-            <a:avLst/>
-          </a:prstGeom>
-          <a:solidFill>
-            <a:srgbClr val="0C2340"/>
-          </a:solidFill>
-          <a:ln>
-            <a:noFill/>
-          </a:ln>
-        </p:spPr>
-        <p:style>
-          <a:lnRef idx="1">
-            <a:schemeClr val="accent1"/>
-          </a:lnRef>
-          <a:fillRef idx="3">
-            <a:schemeClr val="accent1"/>
-          </a:fillRef>
-          <a:effectRef idx="2">
-            <a:schemeClr val="accent1"/>
-          </a:effectRef>
-          <a:fontRef idx="minor">
-            <a:schemeClr val="lt1"/>
-          </a:fontRef>
-        </p:style>
-        <p:txBody>
-          <a:bodyPr rtlCol="0" anchor="ctr"/>
-          <a:lstStyle/>
-          <a:p>
-            <a:pPr algn="ctr"/>
-          </a:p>
-        </p:txBody>
-      </p:sp>
-      <p:sp>
-        <p:nvSpPr>
-          <p:cNvPr id="14" name="TextBox 13"/>
-          <p:cNvSpPr txBox="1"/>
-          <p:nvPr/>
-        </p:nvSpPr>
-        <p:spPr>
-          <a:xfrm>
-            <a:off x="8092440" y="1399032"/>
-            <a:ext cx="3154680" cy="365760"/>
-          </a:xfrm>
-          <a:prstGeom prst="rect">
-            <a:avLst/>
-          </a:prstGeom>
-          <a:noFill/>
-        </p:spPr>
-        <p:txBody>
-          <a:bodyPr wrap="none">
-            <a:spAutoFit/>
-          </a:bodyPr>
-          <a:lstStyle/>
-          <a:p>
-            <a:pPr>
-              <a:defRPr sz="1600" b="1">
-                <a:solidFill>
-                  <a:srgbClr val="FFFFFF"/>
-                </a:solidFill>
-              </a:defRPr>
-            </a:pPr>
-            <a:r>
-              <a:t>Nilai Manfaat</a:t>
-            </a:r>
-          </a:p>
-        </p:txBody>
-      </p:sp>
-      <p:sp>
-        <p:nvSpPr>
-          <p:cNvPr id="15" name="TextBox 14"/>
-          <p:cNvSpPr txBox="1"/>
-          <p:nvPr/>
-        </p:nvSpPr>
-        <p:spPr>
-          <a:xfrm>
-            <a:off x="8092440" y="1920240"/>
-            <a:ext cx="3154680" cy="3794760"/>
-          </a:xfrm>
-          <a:prstGeom prst="rect">
-            <a:avLst/>
-          </a:prstGeom>
-          <a:noFill/>
-        </p:spPr>
-        <p:txBody>
-          <a:bodyPr wrap="square">
-            <a:spAutoFit/>
-          </a:bodyPr>
-          <a:lstStyle/>
-          <a:p>
-            <a:pPr>
-              <a:spcAft>
-                <a:spcPts val="600"/>
-              </a:spcAft>
-              <a:defRPr sz="1400">
-                <a:solidFill>
-                  <a:srgbClr val="1E293B"/>
-                </a:solidFill>
-              </a:defRPr>
-            </a:pPr>
-            <a:r>
-              <a:t>Proses lebih cepat &amp; terlacak</a:t>
-            </a:r>
-          </a:p>
-          <a:p>
-            <a:pPr>
-              <a:spcAft>
-                <a:spcPts val="600"/>
-              </a:spcAft>
-              <a:defRPr sz="1400">
-                <a:solidFill>
-                  <a:srgbClr val="1E293B"/>
-                </a:solidFill>
-              </a:defRPr>
-            </a:pPr>
-            <a:r>
-              <a:t>Mengurangi kertas &amp; duplikasi data</a:t>
-            </a:r>
-          </a:p>
-          <a:p>
-            <a:pPr>
-              <a:spcAft>
-                <a:spcPts val="600"/>
-              </a:spcAft>
-              <a:defRPr sz="1400">
-                <a:solidFill>
-                  <a:srgbClr val="1E293B"/>
-                </a:solidFill>
-              </a:defRPr>
-            </a:pPr>
-            <a:r>
-              <a:t>Keputusan lebih terdokumentasi</a:t>
-            </a:r>
-          </a:p>
-          <a:p>
-            <a:pPr>
-              <a:spcAft>
-                <a:spcPts val="600"/>
-              </a:spcAft>
-              <a:defRPr sz="1400">
-                <a:solidFill>
-                  <a:srgbClr val="1E293B"/>
-                </a:solidFill>
-              </a:defRPr>
-            </a:pPr>
-            <a:r>
-              <a:t>CorpSec punya dashboard terpusat</a:t>
-            </a:r>
-          </a:p>
-          <a:p>
-            <a:pPr>
-              <a:spcAft>
-                <a:spcPts val="600"/>
-              </a:spcAft>
-              <a:defRPr sz="1400">
-                <a:solidFill>
-                  <a:srgbClr val="1E293B"/>
-                </a:solidFill>
-              </a:defRPr>
-            </a:pPr>
-            <a:r>
-              <a:t>Setiap role hanya lihat tugasnya</a:t>
-            </a:r>
-          </a:p>
-          <a:p>
-            <a:pPr>
-              <a:spcAft>
-                <a:spcPts val="600"/>
-              </a:spcAft>
-              <a:defRPr sz="1400">
-                <a:solidFill>
-                  <a:srgbClr val="1E293B"/>
-                </a:solidFill>
-              </a:defRPr>
-            </a:pPr>
-            <a:r>
-              <a:t>Siap demo untuk evaluasi internal</a:t>
-            </a:r>
-          </a:p>
-        </p:txBody>
-      </p:sp>
-      <p:sp>
-        <p:nvSpPr>
-          <p:cNvPr id="16" name="Rectangle 15"/>
-          <p:cNvSpPr/>
-          <p:nvPr/>
-        </p:nvSpPr>
-        <p:spPr>
-          <a:xfrm>
-            <a:off x="0" y="6446520"/>
-            <a:ext cx="12191695" cy="411480"/>
-          </a:xfrm>
-          <a:prstGeom prst="rect">
-            <a:avLst/>
-          </a:prstGeom>
-          <a:solidFill>
-            <a:srgbClr val="0C2340"/>
-          </a:solidFill>
-          <a:ln>
-            <a:noFill/>
-          </a:ln>
-        </p:spPr>
-        <p:style>
-          <a:lnRef idx="1">
-            <a:schemeClr val="accent1"/>
-          </a:lnRef>
-          <a:fillRef idx="3">
-            <a:schemeClr val="accent1"/>
-          </a:fillRef>
-          <a:effectRef idx="2">
-            <a:schemeClr val="accent1"/>
-          </a:effectRef>
-          <a:fontRef idx="minor">
-            <a:schemeClr val="lt1"/>
-          </a:fontRef>
-        </p:style>
-        <p:txBody>
-          <a:bodyPr rtlCol="0" anchor="ctr"/>
-          <a:lstStyle/>
-          <a:p>
-            <a:pPr algn="ctr"/>
-          </a:p>
-        </p:txBody>
-      </p:sp>
-      <p:sp>
-        <p:nvSpPr>
-          <p:cNvPr id="17" name="TextBox 16"/>
-          <p:cNvSpPr txBox="1"/>
-          <p:nvPr/>
-        </p:nvSpPr>
-        <p:spPr>
-          <a:xfrm>
-            <a:off x="457200" y="6492240"/>
-            <a:ext cx="5486400" cy="320040"/>
-          </a:xfrm>
-          <a:prstGeom prst="rect">
-            <a:avLst/>
-          </a:prstGeom>
-          <a:noFill/>
-        </p:spPr>
-        <p:txBody>
-          <a:bodyPr wrap="none">
-            <a:spAutoFit/>
-          </a:bodyPr>
-          <a:lstStyle/>
-          <a:p>
-            <a:pPr>
               <a:defRPr sz="1100" b="1">
                 <a:solidFill>
                   <a:srgbClr val="F58220"/>
@@ -9372,7 +9165,7 @@
       </p:sp>
       <p:sp>
         <p:nvSpPr>
-          <p:cNvPr id="18" name="TextBox 17"/>
+          <p:cNvPr id="9" name="TextBox 8"/>
           <p:cNvSpPr txBox="1"/>
           <p:nvPr/>
         </p:nvSpPr>
@@ -9504,7 +9297,7 @@
               </a:defRPr>
             </a:pPr>
             <a:r>
-              <a:t>Mockup — Halaman Login &amp; Dashboard</a:t>
+              <a:t>Tampilan Website</a:t>
             </a:r>
           </a:p>
           <a:p>
@@ -9519,7 +9312,7 @@
               </a:defRPr>
             </a:pPr>
             <a:r>
-              <a:t>Tampilan depan dan pusat kendali CorpSec</a:t>
+              <a:t>Dashboard Corporate Secretary — ringkasan operasional harian</a:t>
             </a:r>
           </a:p>
         </p:txBody>
@@ -9532,8 +9325,8 @@
         </p:nvSpPr>
         <p:spPr>
           <a:xfrm>
-            <a:off x="365760" y="1280160"/>
-            <a:ext cx="5486400" cy="3474720"/>
+            <a:off x="356616" y="1179576"/>
+            <a:ext cx="11265407" cy="4544568"/>
           </a:xfrm>
           <a:prstGeom prst="roundRect">
             <a:avLst/>
@@ -9571,7 +9364,7 @@
       </p:sp>
       <p:pic>
         <p:nvPicPr>
-          <p:cNvPr id="5" name="Picture 4" descr="01-login.png"/>
+          <p:cNvPr id="5" name="Picture 4" descr="02-dashboard.png"/>
           <p:cNvPicPr>
             <a:picLocks noChangeAspect="1"/>
           </p:cNvPicPr>
@@ -9585,8 +9378,8 @@
         </p:blipFill>
         <p:spPr>
           <a:xfrm>
-            <a:off x="411480" y="1325880"/>
-            <a:ext cx="5394960" cy="3063240"/>
+            <a:off x="411480" y="1234440"/>
+            <a:ext cx="11155680" cy="4160520"/>
           </a:xfrm>
           <a:prstGeom prst="rect">
             <a:avLst/>
@@ -9601,8 +9394,8 @@
         </p:nvSpPr>
         <p:spPr>
           <a:xfrm>
-            <a:off x="411480" y="4434840"/>
-            <a:ext cx="5394960" cy="320040"/>
+            <a:off x="411480" y="5431536"/>
+            <a:ext cx="11155680" cy="292608"/>
           </a:xfrm>
           <a:prstGeom prst="rect">
             <a:avLst/>
@@ -9623,118 +9416,14 @@
               </a:defRPr>
             </a:pPr>
             <a:r>
-              <a:t>Halaman Login</a:t>
-            </a:r>
-          </a:p>
-        </p:txBody>
-      </p:sp>
-      <p:sp>
-        <p:nvSpPr>
-          <p:cNvPr id="7" name="Rounded Rectangle 6"/>
-          <p:cNvSpPr/>
-          <p:nvPr/>
-        </p:nvSpPr>
-        <p:spPr>
-          <a:xfrm>
-            <a:off x="6217920" y="1280160"/>
-            <a:ext cx="5486400" cy="3474720"/>
-          </a:xfrm>
-          <a:prstGeom prst="roundRect">
-            <a:avLst/>
-          </a:prstGeom>
-          <a:solidFill>
-            <a:srgbClr val="FFFFFF"/>
-          </a:solidFill>
-          <a:ln>
-            <a:solidFill>
-              <a:srgbClr val="E2E8F0"/>
-            </a:solidFill>
-          </a:ln>
-        </p:spPr>
-        <p:style>
-          <a:lnRef idx="1">
-            <a:schemeClr val="accent1"/>
-          </a:lnRef>
-          <a:fillRef idx="3">
-            <a:schemeClr val="accent1"/>
-          </a:fillRef>
-          <a:effectRef idx="2">
-            <a:schemeClr val="accent1"/>
-          </a:effectRef>
-          <a:fontRef idx="minor">
-            <a:schemeClr val="lt1"/>
-          </a:fontRef>
-        </p:style>
-        <p:txBody>
-          <a:bodyPr rtlCol="0" anchor="ctr"/>
-          <a:lstStyle/>
-          <a:p>
-            <a:pPr algn="ctr"/>
-          </a:p>
-        </p:txBody>
-      </p:sp>
-      <p:pic>
-        <p:nvPicPr>
-          <p:cNvPr id="8" name="Picture 7" descr="02-dashboard.png"/>
-          <p:cNvPicPr>
-            <a:picLocks noChangeAspect="1"/>
-          </p:cNvPicPr>
-          <p:nvPr/>
-        </p:nvPicPr>
-        <p:blipFill>
-          <a:blip r:embed="rId3"/>
-          <a:stretch>
-            <a:fillRect/>
-          </a:stretch>
-        </p:blipFill>
-        <p:spPr>
-          <a:xfrm>
-            <a:off x="6263640" y="1325880"/>
-            <a:ext cx="5394960" cy="3063240"/>
-          </a:xfrm>
-          <a:prstGeom prst="rect">
-            <a:avLst/>
-          </a:prstGeom>
-        </p:spPr>
-      </p:pic>
-      <p:sp>
-        <p:nvSpPr>
-          <p:cNvPr id="9" name="TextBox 8"/>
-          <p:cNvSpPr txBox="1"/>
-          <p:nvPr/>
-        </p:nvSpPr>
-        <p:spPr>
-          <a:xfrm>
-            <a:off x="6263640" y="4434840"/>
-            <a:ext cx="5394960" cy="320040"/>
-          </a:xfrm>
-          <a:prstGeom prst="rect">
-            <a:avLst/>
-          </a:prstGeom>
-          <a:noFill/>
-        </p:spPr>
-        <p:txBody>
-          <a:bodyPr wrap="none">
-            <a:spAutoFit/>
-          </a:bodyPr>
-          <a:lstStyle/>
-          <a:p>
-            <a:pPr algn="ctr">
-              <a:defRPr sz="1300" b="1">
-                <a:solidFill>
-                  <a:srgbClr val="0C2340"/>
-                </a:solidFill>
-              </a:defRPr>
-            </a:pPr>
-            <a:r>
-              <a:t>Dashboard Corporate Secretary</a:t>
-            </a:r>
-          </a:p>
-        </p:txBody>
-      </p:sp>
-      <p:sp>
-        <p:nvSpPr>
-          <p:cNvPr id="10" name="Rectangle 9"/>
+              <a:t>Dashboard CorpSec</a:t>
+            </a:r>
+          </a:p>
+        </p:txBody>
+      </p:sp>
+      <p:sp>
+        <p:nvSpPr>
+          <p:cNvPr id="7" name="Rectangle 6"/>
           <p:cNvSpPr/>
           <p:nvPr/>
         </p:nvSpPr>
@@ -9777,7 +9466,7 @@
       </p:sp>
       <p:sp>
         <p:nvSpPr>
-          <p:cNvPr id="11" name="TextBox 10"/>
+          <p:cNvPr id="8" name="TextBox 7"/>
           <p:cNvSpPr txBox="1"/>
           <p:nvPr/>
         </p:nvSpPr>
@@ -9812,7 +9501,7 @@
       </p:sp>
       <p:sp>
         <p:nvSpPr>
-          <p:cNvPr id="12" name="TextBox 11"/>
+          <p:cNvPr id="9" name="TextBox 8"/>
           <p:cNvSpPr txBox="1"/>
           <p:nvPr/>
         </p:nvSpPr>
@@ -9944,7 +9633,7 @@
               </a:defRPr>
             </a:pPr>
             <a:r>
-              <a:t>Mockup — Memorandum &amp; Divisi Pengusul</a:t>
+              <a:t>Tampilan Website</a:t>
             </a:r>
           </a:p>
           <a:p>
@@ -9959,7 +9648,7 @@
               </a:defRPr>
             </a:pPr>
             <a:r>
-              <a:t>Modul utama pengelolaan dokumen</a:t>
+              <a:t>Modul Memorandum &amp; Portal Divisi Pengusul</a:t>
             </a:r>
           </a:p>
         </p:txBody>
@@ -9972,8 +9661,8 @@
         </p:nvSpPr>
         <p:spPr>
           <a:xfrm>
-            <a:off x="365760" y="1280160"/>
-            <a:ext cx="5486400" cy="3474720"/>
+            <a:off x="356616" y="1179576"/>
+            <a:ext cx="5504688" cy="4544568"/>
           </a:xfrm>
           <a:prstGeom prst="roundRect">
             <a:avLst/>
@@ -10025,8 +9714,8 @@
         </p:blipFill>
         <p:spPr>
           <a:xfrm>
-            <a:off x="411480" y="1325880"/>
-            <a:ext cx="5394960" cy="3063240"/>
+            <a:off x="411480" y="1234440"/>
+            <a:ext cx="5394960" cy="4160520"/>
           </a:xfrm>
           <a:prstGeom prst="rect">
             <a:avLst/>
@@ -10041,8 +9730,8 @@
         </p:nvSpPr>
         <p:spPr>
           <a:xfrm>
-            <a:off x="411480" y="4434840"/>
-            <a:ext cx="5394960" cy="320040"/>
+            <a:off x="411480" y="5431536"/>
+            <a:ext cx="5394960" cy="292608"/>
           </a:xfrm>
           <a:prstGeom prst="rect">
             <a:avLst/>
@@ -10076,8 +9765,8 @@
         </p:nvSpPr>
         <p:spPr>
           <a:xfrm>
-            <a:off x="6217920" y="1280160"/>
-            <a:ext cx="5486400" cy="3474720"/>
+            <a:off x="6208776" y="1179576"/>
+            <a:ext cx="5504688" cy="4544568"/>
           </a:xfrm>
           <a:prstGeom prst="roundRect">
             <a:avLst/>
@@ -10129,8 +9818,8 @@
         </p:blipFill>
         <p:spPr>
           <a:xfrm>
-            <a:off x="6263640" y="1325880"/>
-            <a:ext cx="5394960" cy="3063240"/>
+            <a:off x="6263640" y="1234440"/>
+            <a:ext cx="5394960" cy="4160520"/>
           </a:xfrm>
           <a:prstGeom prst="rect">
             <a:avLst/>
@@ -10145,8 +9834,8 @@
         </p:nvSpPr>
         <p:spPr>
           <a:xfrm>
-            <a:off x="6263640" y="4434840"/>
-            <a:ext cx="5394960" cy="320040"/>
+            <a:off x="6263640" y="5431536"/>
+            <a:ext cx="5394960" cy="292608"/>
           </a:xfrm>
           <a:prstGeom prst="rect">
             <a:avLst/>
@@ -10384,7 +10073,7 @@
               </a:defRPr>
             </a:pPr>
             <a:r>
-              <a:t>Mockup — Review &amp; Agenda</a:t>
+              <a:t>Tampilan Website</a:t>
             </a:r>
           </a:p>
           <a:p>
@@ -10399,7 +10088,7 @@
               </a:defRPr>
             </a:pPr>
             <a:r>
-              <a:t>Tampilan Pemimpin Bidang dan Agenda Direksi</a:t>
+              <a:t>Review Pimpinan Bidang &amp; Agenda Direksi</a:t>
             </a:r>
           </a:p>
         </p:txBody>
@@ -10412,8 +10101,8 @@
         </p:nvSpPr>
         <p:spPr>
           <a:xfrm>
-            <a:off x="365760" y="1280160"/>
-            <a:ext cx="5486400" cy="3474720"/>
+            <a:off x="356616" y="1179576"/>
+            <a:ext cx="5504688" cy="4544568"/>
           </a:xfrm>
           <a:prstGeom prst="roundRect">
             <a:avLst/>
@@ -10465,8 +10154,8 @@
         </p:blipFill>
         <p:spPr>
           <a:xfrm>
-            <a:off x="411480" y="1325880"/>
-            <a:ext cx="5394960" cy="3063240"/>
+            <a:off x="411480" y="1234440"/>
+            <a:ext cx="5394960" cy="4160520"/>
           </a:xfrm>
           <a:prstGeom prst="rect">
             <a:avLst/>
@@ -10481,8 +10170,8 @@
         </p:nvSpPr>
         <p:spPr>
           <a:xfrm>
-            <a:off x="411480" y="4434840"/>
-            <a:ext cx="5394960" cy="320040"/>
+            <a:off x="411480" y="5431536"/>
+            <a:ext cx="5394960" cy="292608"/>
           </a:xfrm>
           <a:prstGeom prst="rect">
             <a:avLst/>
@@ -10516,8 +10205,8 @@
         </p:nvSpPr>
         <p:spPr>
           <a:xfrm>
-            <a:off x="6217920" y="1280160"/>
-            <a:ext cx="5486400" cy="3474720"/>
+            <a:off x="6208776" y="1179576"/>
+            <a:ext cx="5504688" cy="4544568"/>
           </a:xfrm>
           <a:prstGeom prst="roundRect">
             <a:avLst/>
@@ -10569,8 +10258,8 @@
         </p:blipFill>
         <p:spPr>
           <a:xfrm>
-            <a:off x="6263640" y="1325880"/>
-            <a:ext cx="5394960" cy="3063240"/>
+            <a:off x="6263640" y="1234440"/>
+            <a:ext cx="5394960" cy="4160520"/>
           </a:xfrm>
           <a:prstGeom prst="rect">
             <a:avLst/>
@@ -10585,8 +10274,8 @@
         </p:nvSpPr>
         <p:spPr>
           <a:xfrm>
-            <a:off x="6263640" y="4434840"/>
-            <a:ext cx="5394960" cy="320040"/>
+            <a:off x="6263640" y="5431536"/>
+            <a:ext cx="5394960" cy="292608"/>
           </a:xfrm>
           <a:prstGeom prst="rect">
             <a:avLst/>
@@ -10824,7 +10513,7 @@
               </a:defRPr>
             </a:pPr>
             <a:r>
-              <a:t>Modul Sistem</a:t>
+              <a:t>Fitur Utama &amp; Nilai Manfaat</a:t>
             </a:r>
           </a:p>
           <a:p>
@@ -10839,175 +10528,53 @@
               </a:defRPr>
             </a:pPr>
             <a:r>
-              <a:t>Delapan modul operasional dalam satu platform</a:t>
-            </a:r>
-          </a:p>
-        </p:txBody>
-      </p:sp>
-      <p:sp>
-        <p:nvSpPr>
-          <p:cNvPr id="4" name="TextBox 3"/>
-          <p:cNvSpPr txBox="1"/>
-          <p:nvPr/>
-        </p:nvSpPr>
-        <p:spPr>
-          <a:xfrm>
-            <a:off x="502920" y="1371600"/>
-            <a:ext cx="11155680" cy="4846320"/>
-          </a:xfrm>
-          <a:prstGeom prst="rect">
-            <a:avLst/>
-          </a:prstGeom>
-          <a:noFill/>
-        </p:spPr>
-        <p:txBody>
-          <a:bodyPr wrap="square">
-            <a:spAutoFit/>
-          </a:bodyPr>
-          <a:lstStyle/>
-          <a:p>
-            <a:pPr>
-              <a:lnSpc>
-                <a:spcPct val="120000"/>
-              </a:lnSpc>
-              <a:spcAft>
-                <a:spcPts val="1200"/>
-              </a:spcAft>
-              <a:defRPr sz="1900">
-                <a:solidFill>
-                  <a:srgbClr val="1E293B"/>
-                </a:solidFill>
-              </a:defRPr>
-            </a:pPr>
-            <a:r>
-              <a:t>Dashboard — ringkasan harian CorpSec (agenda, memo, SLA, notifikasi)</a:t>
-            </a:r>
-          </a:p>
-          <a:p>
-            <a:pPr>
-              <a:lnSpc>
-                <a:spcPct val="120000"/>
-              </a:lnSpc>
-              <a:spcAft>
-                <a:spcPts val="1200"/>
-              </a:spcAft>
-              <a:defRPr sz="1900">
-                <a:solidFill>
-                  <a:srgbClr val="1E293B"/>
-                </a:solidFill>
-              </a:defRPr>
-            </a:pPr>
-            <a:r>
-              <a:t>Memorandum — upload PDF, tinjauan, workflow 7 level, tanda tangan</a:t>
-            </a:r>
-          </a:p>
-          <a:p>
-            <a:pPr>
-              <a:lnSpc>
-                <a:spcPct val="120000"/>
-              </a:lnSpc>
-              <a:spcAft>
-                <a:spcPts val="1200"/>
-              </a:spcAft>
-              <a:defRPr sz="1900">
-                <a:solidFill>
-                  <a:srgbClr val="1E293B"/>
-                </a:solidFill>
-              </a:defRPr>
-            </a:pPr>
-            <a:r>
-              <a:t>Agenda Direksi — jadwal kegiatan &amp; catatan persiapan</a:t>
-            </a:r>
-          </a:p>
-          <a:p>
-            <a:pPr>
-              <a:lnSpc>
-                <a:spcPct val="120000"/>
-              </a:lnSpc>
-              <a:spcAft>
-                <a:spcPts val="1200"/>
-              </a:spcAft>
-              <a:defRPr sz="1900">
-                <a:solidFill>
-                  <a:srgbClr val="1E293B"/>
-                </a:solidFill>
-              </a:defRPr>
-            </a:pPr>
-            <a:r>
-              <a:t>Rapat — notulen &amp; tindak lanjut dengan penanggung jawab</a:t>
-            </a:r>
-          </a:p>
-          <a:p>
-            <a:pPr>
-              <a:lnSpc>
-                <a:spcPct val="120000"/>
-              </a:lnSpc>
-              <a:spcAft>
-                <a:spcPts val="1200"/>
-              </a:spcAft>
-              <a:defRPr sz="1900">
-                <a:solidFill>
-                  <a:srgbClr val="1E293B"/>
-                </a:solidFill>
-              </a:defRPr>
-            </a:pPr>
-            <a:r>
-              <a:t>Media Monitoring — berita Bank Sumut &amp; analisis sentimen</a:t>
-            </a:r>
-          </a:p>
-          <a:p>
-            <a:pPr>
-              <a:lnSpc>
-                <a:spcPct val="120000"/>
-              </a:lnSpc>
-              <a:spcAft>
-                <a:spcPts val="1200"/>
-              </a:spcAft>
-              <a:defRPr sz="1900">
-                <a:solidFill>
-                  <a:srgbClr val="1E293B"/>
-                </a:solidFill>
-              </a:defRPr>
-            </a:pPr>
-            <a:r>
-              <a:t>Knowledge Base — arsip SK/SE/SOP &amp; regulasi OJK/BI</a:t>
-            </a:r>
-          </a:p>
-          <a:p>
-            <a:pPr>
-              <a:lnSpc>
-                <a:spcPct val="120000"/>
-              </a:lnSpc>
-              <a:spcAft>
-                <a:spcPts val="1200"/>
-              </a:spcAft>
-              <a:defRPr sz="1900">
-                <a:solidFill>
-                  <a:srgbClr val="1E293B"/>
-                </a:solidFill>
-              </a:defRPr>
-            </a:pPr>
-            <a:r>
-              <a:t>SLA Monitoring — pantau target waktu ≥ 95%</a:t>
-            </a:r>
-          </a:p>
-          <a:p>
-            <a:pPr>
-              <a:lnSpc>
-                <a:spcPct val="120000"/>
-              </a:lnSpc>
-              <a:spcAft>
-                <a:spcPts val="1200"/>
-              </a:spcAft>
-              <a:defRPr sz="1900">
-                <a:solidFill>
-                  <a:srgbClr val="1E293B"/>
-                </a:solidFill>
-              </a:defRPr>
-            </a:pPr>
-            <a:r>
-              <a:t>Laporan — statistik &amp; KPI success metrics PRD</a:t>
-            </a:r>
+              <a:t>Ringkasan kemampuan aplikasi CorpSec Bank Sumut</a:t>
+            </a:r>
+          </a:p>
+        </p:txBody>
+      </p:sp>
+      <p:sp>
+        <p:nvSpPr>
+          <p:cNvPr id="4" name="Rounded Rectangle 3"/>
+          <p:cNvSpPr/>
+          <p:nvPr/>
+        </p:nvSpPr>
+        <p:spPr>
+          <a:xfrm>
+            <a:off x="411480" y="1325880"/>
+            <a:ext cx="5394960" cy="4572000"/>
+          </a:xfrm>
+          <a:prstGeom prst="roundRect">
+            <a:avLst/>
+          </a:prstGeom>
+          <a:solidFill>
+            <a:srgbClr val="FFFFFF"/>
+          </a:solidFill>
+          <a:ln>
+            <a:solidFill>
+              <a:srgbClr val="E2E8F0"/>
+            </a:solidFill>
+          </a:ln>
+        </p:spPr>
+        <p:style>
+          <a:lnRef idx="1">
+            <a:schemeClr val="accent1"/>
+          </a:lnRef>
+          <a:fillRef idx="3">
+            <a:schemeClr val="accent1"/>
+          </a:fillRef>
+          <a:effectRef idx="2">
+            <a:schemeClr val="accent1"/>
+          </a:effectRef>
+          <a:fontRef idx="minor">
+            <a:schemeClr val="lt1"/>
+          </a:fontRef>
+        </p:style>
+        <p:txBody>
+          <a:bodyPr rtlCol="0" anchor="ctr"/>
+          <a:lstStyle/>
+          <a:p>
+            <a:pPr algn="ctr"/>
           </a:p>
         </p:txBody>
       </p:sp>
@@ -11019,8 +10586,8 @@
         </p:nvSpPr>
         <p:spPr>
           <a:xfrm>
-            <a:off x="0" y="6446520"/>
-            <a:ext cx="12191695" cy="411480"/>
+            <a:off x="411480" y="1325880"/>
+            <a:ext cx="5394960" cy="475488"/>
           </a:xfrm>
           <a:prstGeom prst="rect">
             <a:avLst/>
@@ -11062,8 +10629,8 @@
         </p:nvSpPr>
         <p:spPr>
           <a:xfrm>
-            <a:off x="457200" y="6492240"/>
-            <a:ext cx="5486400" cy="320040"/>
+            <a:off x="594360" y="1399032"/>
+            <a:ext cx="5029200" cy="365760"/>
           </a:xfrm>
           <a:prstGeom prst="rect">
             <a:avLst/>
@@ -11077,6 +10644,433 @@
           <a:lstStyle/>
           <a:p>
             <a:pPr>
+              <a:defRPr sz="1600" b="1">
+                <a:solidFill>
+                  <a:srgbClr val="FFFFFF"/>
+                </a:solidFill>
+              </a:defRPr>
+            </a:pPr>
+            <a:r>
+              <a:t>Fitur Utama</a:t>
+            </a:r>
+          </a:p>
+        </p:txBody>
+      </p:sp>
+      <p:sp>
+        <p:nvSpPr>
+          <p:cNvPr id="7" name="TextBox 6"/>
+          <p:cNvSpPr txBox="1"/>
+          <p:nvPr/>
+        </p:nvSpPr>
+        <p:spPr>
+          <a:xfrm>
+            <a:off x="594360" y="1920240"/>
+            <a:ext cx="5029200" cy="3886200"/>
+          </a:xfrm>
+          <a:prstGeom prst="rect">
+            <a:avLst/>
+          </a:prstGeom>
+          <a:noFill/>
+        </p:spPr>
+        <p:txBody>
+          <a:bodyPr wrap="square">
+            <a:spAutoFit/>
+          </a:bodyPr>
+          <a:lstStyle/>
+          <a:p>
+            <a:pPr>
+              <a:spcAft>
+                <a:spcPts val="600"/>
+              </a:spcAft>
+              <a:defRPr sz="1400">
+                <a:solidFill>
+                  <a:srgbClr val="1E293B"/>
+                </a:solidFill>
+              </a:defRPr>
+            </a:pPr>
+            <a:r>
+              <a:t>Upload &amp; kelola memorandum PDF</a:t>
+            </a:r>
+          </a:p>
+          <a:p>
+            <a:pPr>
+              <a:spcAft>
+                <a:spcPts val="600"/>
+              </a:spcAft>
+              <a:defRPr sz="1400">
+                <a:solidFill>
+                  <a:srgbClr val="1E293B"/>
+                </a:solidFill>
+              </a:defRPr>
+            </a:pPr>
+            <a:r>
+              <a:t>Alur persetujuan 7 tahap</a:t>
+            </a:r>
+          </a:p>
+          <a:p>
+            <a:pPr>
+              <a:spcAft>
+                <a:spcPts val="600"/>
+              </a:spcAft>
+              <a:defRPr sz="1400">
+                <a:solidFill>
+                  <a:srgbClr val="1E293B"/>
+                </a:solidFill>
+              </a:defRPr>
+            </a:pPr>
+            <a:r>
+              <a:t>Bantuan rangkum isi memorandum</a:t>
+            </a:r>
+          </a:p>
+          <a:p>
+            <a:pPr>
+              <a:spcAft>
+                <a:spcPts val="600"/>
+              </a:spcAft>
+              <a:defRPr sz="1400">
+                <a:solidFill>
+                  <a:srgbClr val="1E293B"/>
+                </a:solidFill>
+              </a:defRPr>
+            </a:pPr>
+            <a:r>
+              <a:t>Tanda tangan digital saat approval</a:t>
+            </a:r>
+          </a:p>
+          <a:p>
+            <a:pPr>
+              <a:spcAft>
+                <a:spcPts val="600"/>
+              </a:spcAft>
+              <a:defRPr sz="1400">
+                <a:solidFill>
+                  <a:srgbClr val="1E293B"/>
+                </a:solidFill>
+              </a:defRPr>
+            </a:pPr>
+            <a:r>
+              <a:t>Agenda Direksi, rapat, media, arsip dokumen</a:t>
+            </a:r>
+          </a:p>
+          <a:p>
+            <a:pPr>
+              <a:spcAft>
+                <a:spcPts val="600"/>
+              </a:spcAft>
+              <a:defRPr sz="1400">
+                <a:solidFill>
+                  <a:srgbClr val="1E293B"/>
+                </a:solidFill>
+              </a:defRPr>
+            </a:pPr>
+            <a:r>
+              <a:t>Pemantauan SLA &amp; laporan KPI</a:t>
+            </a:r>
+          </a:p>
+        </p:txBody>
+      </p:sp>
+      <p:sp>
+        <p:nvSpPr>
+          <p:cNvPr id="8" name="Rounded Rectangle 7"/>
+          <p:cNvSpPr/>
+          <p:nvPr/>
+        </p:nvSpPr>
+        <p:spPr>
+          <a:xfrm>
+            <a:off x="6263640" y="1325880"/>
+            <a:ext cx="5394960" cy="4572000"/>
+          </a:xfrm>
+          <a:prstGeom prst="roundRect">
+            <a:avLst/>
+          </a:prstGeom>
+          <a:solidFill>
+            <a:srgbClr val="FFFFFF"/>
+          </a:solidFill>
+          <a:ln>
+            <a:solidFill>
+              <a:srgbClr val="E2E8F0"/>
+            </a:solidFill>
+          </a:ln>
+        </p:spPr>
+        <p:style>
+          <a:lnRef idx="1">
+            <a:schemeClr val="accent1"/>
+          </a:lnRef>
+          <a:fillRef idx="3">
+            <a:schemeClr val="accent1"/>
+          </a:fillRef>
+          <a:effectRef idx="2">
+            <a:schemeClr val="accent1"/>
+          </a:effectRef>
+          <a:fontRef idx="minor">
+            <a:schemeClr val="lt1"/>
+          </a:fontRef>
+        </p:style>
+        <p:txBody>
+          <a:bodyPr rtlCol="0" anchor="ctr"/>
+          <a:lstStyle/>
+          <a:p>
+            <a:pPr algn="ctr"/>
+          </a:p>
+        </p:txBody>
+      </p:sp>
+      <p:sp>
+        <p:nvSpPr>
+          <p:cNvPr id="9" name="Rectangle 8"/>
+          <p:cNvSpPr/>
+          <p:nvPr/>
+        </p:nvSpPr>
+        <p:spPr>
+          <a:xfrm>
+            <a:off x="6263640" y="1325880"/>
+            <a:ext cx="5394960" cy="475488"/>
+          </a:xfrm>
+          <a:prstGeom prst="rect">
+            <a:avLst/>
+          </a:prstGeom>
+          <a:solidFill>
+            <a:srgbClr val="F58220"/>
+          </a:solidFill>
+          <a:ln>
+            <a:noFill/>
+          </a:ln>
+        </p:spPr>
+        <p:style>
+          <a:lnRef idx="1">
+            <a:schemeClr val="accent1"/>
+          </a:lnRef>
+          <a:fillRef idx="3">
+            <a:schemeClr val="accent1"/>
+          </a:fillRef>
+          <a:effectRef idx="2">
+            <a:schemeClr val="accent1"/>
+          </a:effectRef>
+          <a:fontRef idx="minor">
+            <a:schemeClr val="lt1"/>
+          </a:fontRef>
+        </p:style>
+        <p:txBody>
+          <a:bodyPr rtlCol="0" anchor="ctr"/>
+          <a:lstStyle/>
+          <a:p>
+            <a:pPr algn="ctr"/>
+          </a:p>
+        </p:txBody>
+      </p:sp>
+      <p:sp>
+        <p:nvSpPr>
+          <p:cNvPr id="10" name="TextBox 9"/>
+          <p:cNvSpPr txBox="1"/>
+          <p:nvPr/>
+        </p:nvSpPr>
+        <p:spPr>
+          <a:xfrm>
+            <a:off x="6446520" y="1399032"/>
+            <a:ext cx="5029200" cy="365760"/>
+          </a:xfrm>
+          <a:prstGeom prst="rect">
+            <a:avLst/>
+          </a:prstGeom>
+          <a:noFill/>
+        </p:spPr>
+        <p:txBody>
+          <a:bodyPr wrap="none">
+            <a:spAutoFit/>
+          </a:bodyPr>
+          <a:lstStyle/>
+          <a:p>
+            <a:pPr>
+              <a:defRPr sz="1600" b="1">
+                <a:solidFill>
+                  <a:srgbClr val="FFFFFF"/>
+                </a:solidFill>
+              </a:defRPr>
+            </a:pPr>
+            <a:r>
+              <a:t>Nilai Manfaat</a:t>
+            </a:r>
+          </a:p>
+        </p:txBody>
+      </p:sp>
+      <p:sp>
+        <p:nvSpPr>
+          <p:cNvPr id="11" name="TextBox 10"/>
+          <p:cNvSpPr txBox="1"/>
+          <p:nvPr/>
+        </p:nvSpPr>
+        <p:spPr>
+          <a:xfrm>
+            <a:off x="6446520" y="1920240"/>
+            <a:ext cx="5029200" cy="3886200"/>
+          </a:xfrm>
+          <a:prstGeom prst="rect">
+            <a:avLst/>
+          </a:prstGeom>
+          <a:noFill/>
+        </p:spPr>
+        <p:txBody>
+          <a:bodyPr wrap="square">
+            <a:spAutoFit/>
+          </a:bodyPr>
+          <a:lstStyle/>
+          <a:p>
+            <a:pPr>
+              <a:spcAft>
+                <a:spcPts val="600"/>
+              </a:spcAft>
+              <a:defRPr sz="1400">
+                <a:solidFill>
+                  <a:srgbClr val="1E293B"/>
+                </a:solidFill>
+              </a:defRPr>
+            </a:pPr>
+            <a:r>
+              <a:t>Proses lebih cepat &amp; terlacak</a:t>
+            </a:r>
+          </a:p>
+          <a:p>
+            <a:pPr>
+              <a:spcAft>
+                <a:spcPts val="600"/>
+              </a:spcAft>
+              <a:defRPr sz="1400">
+                <a:solidFill>
+                  <a:srgbClr val="1E293B"/>
+                </a:solidFill>
+              </a:defRPr>
+            </a:pPr>
+            <a:r>
+              <a:t>Mengurangi kertas &amp; duplikasi data</a:t>
+            </a:r>
+          </a:p>
+          <a:p>
+            <a:pPr>
+              <a:spcAft>
+                <a:spcPts val="600"/>
+              </a:spcAft>
+              <a:defRPr sz="1400">
+                <a:solidFill>
+                  <a:srgbClr val="1E293B"/>
+                </a:solidFill>
+              </a:defRPr>
+            </a:pPr>
+            <a:r>
+              <a:t>Keputusan lebih terdokumentasi</a:t>
+            </a:r>
+          </a:p>
+          <a:p>
+            <a:pPr>
+              <a:spcAft>
+                <a:spcPts val="600"/>
+              </a:spcAft>
+              <a:defRPr sz="1400">
+                <a:solidFill>
+                  <a:srgbClr val="1E293B"/>
+                </a:solidFill>
+              </a:defRPr>
+            </a:pPr>
+            <a:r>
+              <a:t>CorpSec punya dashboard terpusat</a:t>
+            </a:r>
+          </a:p>
+          <a:p>
+            <a:pPr>
+              <a:spcAft>
+                <a:spcPts val="600"/>
+              </a:spcAft>
+              <a:defRPr sz="1400">
+                <a:solidFill>
+                  <a:srgbClr val="1E293B"/>
+                </a:solidFill>
+              </a:defRPr>
+            </a:pPr>
+            <a:r>
+              <a:t>Setiap role hanya lihat tugasnya</a:t>
+            </a:r>
+          </a:p>
+          <a:p>
+            <a:pPr>
+              <a:spcAft>
+                <a:spcPts val="600"/>
+              </a:spcAft>
+              <a:defRPr sz="1400">
+                <a:solidFill>
+                  <a:srgbClr val="1E293B"/>
+                </a:solidFill>
+              </a:defRPr>
+            </a:pPr>
+            <a:r>
+              <a:t>Siap demo untuk evaluasi internal</a:t>
+            </a:r>
+          </a:p>
+        </p:txBody>
+      </p:sp>
+      <p:sp>
+        <p:nvSpPr>
+          <p:cNvPr id="12" name="Rectangle 11"/>
+          <p:cNvSpPr/>
+          <p:nvPr/>
+        </p:nvSpPr>
+        <p:spPr>
+          <a:xfrm>
+            <a:off x="0" y="6446520"/>
+            <a:ext cx="12191695" cy="411480"/>
+          </a:xfrm>
+          <a:prstGeom prst="rect">
+            <a:avLst/>
+          </a:prstGeom>
+          <a:solidFill>
+            <a:srgbClr val="0C2340"/>
+          </a:solidFill>
+          <a:ln>
+            <a:noFill/>
+          </a:ln>
+        </p:spPr>
+        <p:style>
+          <a:lnRef idx="1">
+            <a:schemeClr val="accent1"/>
+          </a:lnRef>
+          <a:fillRef idx="3">
+            <a:schemeClr val="accent1"/>
+          </a:fillRef>
+          <a:effectRef idx="2">
+            <a:schemeClr val="accent1"/>
+          </a:effectRef>
+          <a:fontRef idx="minor">
+            <a:schemeClr val="lt1"/>
+          </a:fontRef>
+        </p:style>
+        <p:txBody>
+          <a:bodyPr rtlCol="0" anchor="ctr"/>
+          <a:lstStyle/>
+          <a:p>
+            <a:pPr algn="ctr"/>
+          </a:p>
+        </p:txBody>
+      </p:sp>
+      <p:sp>
+        <p:nvSpPr>
+          <p:cNvPr id="13" name="TextBox 12"/>
+          <p:cNvSpPr txBox="1"/>
+          <p:nvPr/>
+        </p:nvSpPr>
+        <p:spPr>
+          <a:xfrm>
+            <a:off x="457200" y="6492240"/>
+            <a:ext cx="5486400" cy="320040"/>
+          </a:xfrm>
+          <a:prstGeom prst="rect">
+            <a:avLst/>
+          </a:prstGeom>
+          <a:noFill/>
+        </p:spPr>
+        <p:txBody>
+          <a:bodyPr wrap="none">
+            <a:spAutoFit/>
+          </a:bodyPr>
+          <a:lstStyle/>
+          <a:p>
+            <a:pPr>
               <a:defRPr sz="1100" b="1">
                 <a:solidFill>
                   <a:srgbClr val="F58220"/>
@@ -11091,7 +11085,7 @@
       </p:sp>
       <p:sp>
         <p:nvSpPr>
-          <p:cNvPr id="7" name="TextBox 6"/>
+          <p:cNvPr id="14" name="TextBox 13"/>
           <p:cNvSpPr txBox="1"/>
           <p:nvPr/>
         </p:nvSpPr>
@@ -11223,7 +11217,7 @@
               </a:defRPr>
             </a:pPr>
             <a:r>
-              <a:t>Alur Kerja Memorandum</a:t>
+              <a:t>Modul Sistem</a:t>
             </a:r>
           </a:p>
           <a:p>
@@ -11238,7 +11232,7 @@
               </a:defRPr>
             </a:pPr>
             <a:r>
-              <a:t>7 tahap persetujuan sesuai PRD</a:t>
+              <a:t>Delapan modul operasional dalam satu platform</a:t>
             </a:r>
           </a:p>
         </p:txBody>
@@ -11272,14 +11266,14 @@
               <a:spcAft>
                 <a:spcPts val="1200"/>
               </a:spcAft>
-              <a:defRPr sz="2000">
+              <a:defRPr sz="1900">
                 <a:solidFill>
                   <a:srgbClr val="1E293B"/>
                 </a:solidFill>
               </a:defRPr>
             </a:pPr>
             <a:r>
-              <a:t>1. Divisi Pengusul — kirim memorandum PDF</a:t>
+              <a:t>Dashboard — ringkasan harian CorpSec (agenda, memo, SLA, notifikasi)</a:t>
             </a:r>
           </a:p>
           <a:p>
@@ -11290,14 +11284,14 @@
               <a:spcAft>
                 <a:spcPts val="1200"/>
               </a:spcAft>
-              <a:defRPr sz="2000">
+              <a:defRPr sz="1900">
                 <a:solidFill>
                   <a:srgbClr val="1E293B"/>
                 </a:solidFill>
               </a:defRPr>
             </a:pPr>
             <a:r>
-              <a:t>2. Corporate Secretary — terima, rangkum, &amp; tinjau kelengkapan</a:t>
+              <a:t>Memorandum — upload PDF, tinjauan, workflow 7 level, tanda tangan</a:t>
             </a:r>
           </a:p>
           <a:p>
@@ -11308,14 +11302,14 @@
               <a:spcAft>
                 <a:spcPts val="1200"/>
               </a:spcAft>
-              <a:defRPr sz="2000">
+              <a:defRPr sz="1900">
                 <a:solidFill>
                   <a:srgbClr val="1E293B"/>
                 </a:solidFill>
               </a:defRPr>
             </a:pPr>
             <a:r>
-              <a:t>3. Pemimpin Bidang — setujui atau tolak + tanda tangan</a:t>
+              <a:t>Agenda Direksi — jadwal kegiatan &amp; catatan persiapan</a:t>
             </a:r>
           </a:p>
           <a:p>
@@ -11326,14 +11320,14 @@
               <a:spcAft>
                 <a:spcPts val="1200"/>
               </a:spcAft>
-              <a:defRPr sz="2000">
+              <a:defRPr sz="1900">
                 <a:solidFill>
                   <a:srgbClr val="1E293B"/>
                 </a:solidFill>
               </a:defRPr>
             </a:pPr>
             <a:r>
-              <a:t>4. Sekretaris Direksi/Komisaris — teruskan ke pimpinan</a:t>
+              <a:t>Rapat — notulen &amp; tindak lanjut dengan penanggung jawab</a:t>
             </a:r>
           </a:p>
           <a:p>
@@ -11344,14 +11338,14 @@
               <a:spcAft>
                 <a:spcPts val="1200"/>
               </a:spcAft>
-              <a:defRPr sz="2000">
+              <a:defRPr sz="1900">
                 <a:solidFill>
                   <a:srgbClr val="1E293B"/>
                 </a:solidFill>
               </a:defRPr>
             </a:pPr>
             <a:r>
-              <a:t>5. Direksi / Komisaris — beri keputusan</a:t>
+              <a:t>Media Monitoring — berita Bank Sumut &amp; analisis sentimen</a:t>
             </a:r>
           </a:p>
           <a:p>
@@ -11362,14 +11356,14 @@
               <a:spcAft>
                 <a:spcPts val="1200"/>
               </a:spcAft>
-              <a:defRPr sz="2000">
+              <a:defRPr sz="1900">
                 <a:solidFill>
                   <a:srgbClr val="1E293B"/>
                 </a:solidFill>
               </a:defRPr>
             </a:pPr>
             <a:r>
-              <a:t>6. CorpSec — finalisasi sesuai keputusan board</a:t>
+              <a:t>Knowledge Base — arsip SK/SE/SOP &amp; regulasi OJK/BI</a:t>
             </a:r>
           </a:p>
           <a:p>
@@ -11380,14 +11374,32 @@
               <a:spcAft>
                 <a:spcPts val="1200"/>
               </a:spcAft>
-              <a:defRPr sz="2000">
+              <a:defRPr sz="1900">
                 <a:solidFill>
                   <a:srgbClr val="1E293B"/>
                 </a:solidFill>
               </a:defRPr>
             </a:pPr>
             <a:r>
-              <a:t>7. Kembali ke Pengusul — pemberitahuan hasil akhir</a:t>
+              <a:t>SLA Monitoring — pantau target waktu ≥ 95%</a:t>
+            </a:r>
+          </a:p>
+          <a:p>
+            <a:pPr>
+              <a:lnSpc>
+                <a:spcPct val="120000"/>
+              </a:lnSpc>
+              <a:spcAft>
+                <a:spcPts val="1200"/>
+              </a:spcAft>
+              <a:defRPr sz="1900">
+                <a:solidFill>
+                  <a:srgbClr val="1E293B"/>
+                </a:solidFill>
+              </a:defRPr>
+            </a:pPr>
+            <a:r>
+              <a:t>Laporan — statistik &amp; KPI success metrics PRD</a:t>
             </a:r>
           </a:p>
         </p:txBody>

--- a/CorpSec-Bank-Sumut-Presentasi.pptx
+++ b/CorpSec-Bank-Sumut-Presentasi.pptx
@@ -3269,9 +3269,68 @@
           </a:p>
         </p:txBody>
       </p:sp>
-      <p:sp>
-        <p:nvSpPr>
-          <p:cNvPr id="6" name="Rectangle 5"/>
+      <p:pic>
+        <p:nvPicPr>
+          <p:cNvPr id="6" name="Picture 5" descr="logo-banksumut.png"/>
+          <p:cNvPicPr>
+            <a:picLocks noChangeAspect="1"/>
+          </p:cNvPicPr>
+          <p:nvPr/>
+        </p:nvPicPr>
+        <p:blipFill>
+          <a:blip r:embed="rId2"/>
+          <a:stretch>
+            <a:fillRect/>
+          </a:stretch>
+        </p:blipFill>
+        <p:spPr>
+          <a:xfrm>
+            <a:off x="640080" y="502920"/>
+            <a:ext cx="685800" cy="685800"/>
+          </a:xfrm>
+          <a:prstGeom prst="rect">
+            <a:avLst/>
+          </a:prstGeom>
+        </p:spPr>
+      </p:pic>
+      <p:sp>
+        <p:nvSpPr>
+          <p:cNvPr id="7" name="TextBox 6"/>
+          <p:cNvSpPr txBox="1"/>
+          <p:nvPr/>
+        </p:nvSpPr>
+        <p:spPr>
+          <a:xfrm>
+            <a:off x="1463040" y="566928"/>
+            <a:ext cx="3657600" cy="548640"/>
+          </a:xfrm>
+          <a:prstGeom prst="rect">
+            <a:avLst/>
+          </a:prstGeom>
+          <a:noFill/>
+        </p:spPr>
+        <p:txBody>
+          <a:bodyPr wrap="none">
+            <a:spAutoFit/>
+          </a:bodyPr>
+          <a:lstStyle/>
+          <a:p>
+            <a:pPr>
+              <a:defRPr sz="1800" b="1">
+                <a:solidFill>
+                  <a:srgbClr val="FFFFFF"/>
+                </a:solidFill>
+              </a:defRPr>
+            </a:pPr>
+            <a:r>
+              <a:t>Bank Sumut</a:t>
+            </a:r>
+          </a:p>
+        </p:txBody>
+      </p:sp>
+      <p:sp>
+        <p:nvSpPr>
+          <p:cNvPr id="8" name="Rectangle 7"/>
           <p:cNvSpPr/>
           <p:nvPr/>
         </p:nvSpPr>
@@ -3312,15 +3371,39 @@
           </a:p>
         </p:txBody>
       </p:sp>
-      <p:sp>
-        <p:nvSpPr>
-          <p:cNvPr id="7" name="TextBox 6"/>
+      <p:pic>
+        <p:nvPicPr>
+          <p:cNvPr id="9" name="Picture 8" descr="logo-banksumut.png"/>
+          <p:cNvPicPr>
+            <a:picLocks noChangeAspect="1"/>
+          </p:cNvPicPr>
+          <p:nvPr/>
+        </p:nvPicPr>
+        <p:blipFill>
+          <a:blip r:embed="rId2"/>
+          <a:stretch>
+            <a:fillRect/>
+          </a:stretch>
+        </p:blipFill>
+        <p:spPr>
+          <a:xfrm>
+            <a:off x="164592" y="6455664"/>
+            <a:ext cx="310896" cy="310896"/>
+          </a:xfrm>
+          <a:prstGeom prst="rect">
+            <a:avLst/>
+          </a:prstGeom>
+        </p:spPr>
+      </p:pic>
+      <p:sp>
+        <p:nvSpPr>
+          <p:cNvPr id="10" name="TextBox 9"/>
           <p:cNvSpPr txBox="1"/>
           <p:nvPr/>
         </p:nvSpPr>
         <p:spPr>
           <a:xfrm>
-            <a:off x="457200" y="6492240"/>
+            <a:off x="530352" y="6492240"/>
             <a:ext cx="5486400" cy="320040"/>
           </a:xfrm>
           <a:prstGeom prst="rect">
@@ -3349,7 +3432,7 @@
       </p:sp>
       <p:sp>
         <p:nvSpPr>
-          <p:cNvPr id="8" name="TextBox 7"/>
+          <p:cNvPr id="11" name="TextBox 10"/>
           <p:cNvSpPr txBox="1"/>
           <p:nvPr/>
         </p:nvSpPr>
@@ -3382,6 +3465,30 @@
           </a:p>
         </p:txBody>
       </p:sp>
+      <p:pic>
+        <p:nvPicPr>
+          <p:cNvPr id="12" name="Picture 11" descr="logo-banksumut.png"/>
+          <p:cNvPicPr>
+            <a:picLocks noChangeAspect="1"/>
+          </p:cNvPicPr>
+          <p:nvPr/>
+        </p:nvPicPr>
+        <p:blipFill>
+          <a:blip r:embed="rId2"/>
+          <a:stretch>
+            <a:fillRect/>
+          </a:stretch>
+        </p:blipFill>
+        <p:spPr>
+          <a:xfrm>
+            <a:off x="11350447" y="201168"/>
+            <a:ext cx="475488" cy="475488"/>
+          </a:xfrm>
+          <a:prstGeom prst="rect">
+            <a:avLst/>
+          </a:prstGeom>
+        </p:spPr>
+      </p:pic>
     </p:spTree>
   </p:cSld>
   <p:clrMapOvr>
@@ -3693,15 +3800,39 @@
           </a:p>
         </p:txBody>
       </p:sp>
-      <p:sp>
-        <p:nvSpPr>
-          <p:cNvPr id="6" name="TextBox 5"/>
+      <p:pic>
+        <p:nvPicPr>
+          <p:cNvPr id="6" name="Picture 5" descr="logo-banksumut.png"/>
+          <p:cNvPicPr>
+            <a:picLocks noChangeAspect="1"/>
+          </p:cNvPicPr>
+          <p:nvPr/>
+        </p:nvPicPr>
+        <p:blipFill>
+          <a:blip r:embed="rId2"/>
+          <a:stretch>
+            <a:fillRect/>
+          </a:stretch>
+        </p:blipFill>
+        <p:spPr>
+          <a:xfrm>
+            <a:off x="164592" y="6455664"/>
+            <a:ext cx="310896" cy="310896"/>
+          </a:xfrm>
+          <a:prstGeom prst="rect">
+            <a:avLst/>
+          </a:prstGeom>
+        </p:spPr>
+      </p:pic>
+      <p:sp>
+        <p:nvSpPr>
+          <p:cNvPr id="7" name="TextBox 6"/>
           <p:cNvSpPr txBox="1"/>
           <p:nvPr/>
         </p:nvSpPr>
         <p:spPr>
           <a:xfrm>
-            <a:off x="457200" y="6492240"/>
+            <a:off x="530352" y="6492240"/>
             <a:ext cx="5486400" cy="320040"/>
           </a:xfrm>
           <a:prstGeom prst="rect">
@@ -3730,7 +3861,7 @@
       </p:sp>
       <p:sp>
         <p:nvSpPr>
-          <p:cNvPr id="7" name="TextBox 6"/>
+          <p:cNvPr id="8" name="TextBox 7"/>
           <p:cNvSpPr txBox="1"/>
           <p:nvPr/>
         </p:nvSpPr>
@@ -3763,6 +3894,30 @@
           </a:p>
         </p:txBody>
       </p:sp>
+      <p:pic>
+        <p:nvPicPr>
+          <p:cNvPr id="9" name="Picture 8" descr="logo-banksumut.png"/>
+          <p:cNvPicPr>
+            <a:picLocks noChangeAspect="1"/>
+          </p:cNvPicPr>
+          <p:nvPr/>
+        </p:nvPicPr>
+        <p:blipFill>
+          <a:blip r:embed="rId2"/>
+          <a:stretch>
+            <a:fillRect/>
+          </a:stretch>
+        </p:blipFill>
+        <p:spPr>
+          <a:xfrm>
+            <a:off x="11350447" y="201168"/>
+            <a:ext cx="475488" cy="475488"/>
+          </a:xfrm>
+          <a:prstGeom prst="rect">
+            <a:avLst/>
+          </a:prstGeom>
+        </p:spPr>
+      </p:pic>
     </p:spTree>
   </p:cSld>
   <p:clrMapOvr>
@@ -4457,15 +4612,39 @@
           </a:p>
         </p:txBody>
       </p:sp>
-      <p:sp>
-        <p:nvSpPr>
-          <p:cNvPr id="13" name="TextBox 12"/>
+      <p:pic>
+        <p:nvPicPr>
+          <p:cNvPr id="13" name="Picture 12" descr="logo-banksumut.png"/>
+          <p:cNvPicPr>
+            <a:picLocks noChangeAspect="1"/>
+          </p:cNvPicPr>
+          <p:nvPr/>
+        </p:nvPicPr>
+        <p:blipFill>
+          <a:blip r:embed="rId2"/>
+          <a:stretch>
+            <a:fillRect/>
+          </a:stretch>
+        </p:blipFill>
+        <p:spPr>
+          <a:xfrm>
+            <a:off x="164592" y="6455664"/>
+            <a:ext cx="310896" cy="310896"/>
+          </a:xfrm>
+          <a:prstGeom prst="rect">
+            <a:avLst/>
+          </a:prstGeom>
+        </p:spPr>
+      </p:pic>
+      <p:sp>
+        <p:nvSpPr>
+          <p:cNvPr id="14" name="TextBox 13"/>
           <p:cNvSpPr txBox="1"/>
           <p:nvPr/>
         </p:nvSpPr>
         <p:spPr>
           <a:xfrm>
-            <a:off x="457200" y="6492240"/>
+            <a:off x="530352" y="6492240"/>
             <a:ext cx="5486400" cy="320040"/>
           </a:xfrm>
           <a:prstGeom prst="rect">
@@ -4494,7 +4673,7 @@
       </p:sp>
       <p:sp>
         <p:nvSpPr>
-          <p:cNvPr id="14" name="TextBox 13"/>
+          <p:cNvPr id="15" name="TextBox 14"/>
           <p:cNvSpPr txBox="1"/>
           <p:nvPr/>
         </p:nvSpPr>
@@ -4527,6 +4706,30 @@
           </a:p>
         </p:txBody>
       </p:sp>
+      <p:pic>
+        <p:nvPicPr>
+          <p:cNvPr id="16" name="Picture 15" descr="logo-banksumut.png"/>
+          <p:cNvPicPr>
+            <a:picLocks noChangeAspect="1"/>
+          </p:cNvPicPr>
+          <p:nvPr/>
+        </p:nvPicPr>
+        <p:blipFill>
+          <a:blip r:embed="rId2"/>
+          <a:stretch>
+            <a:fillRect/>
+          </a:stretch>
+        </p:blipFill>
+        <p:spPr>
+          <a:xfrm>
+            <a:off x="11350447" y="201168"/>
+            <a:ext cx="475488" cy="475488"/>
+          </a:xfrm>
+          <a:prstGeom prst="rect">
+            <a:avLst/>
+          </a:prstGeom>
+        </p:spPr>
+      </p:pic>
     </p:spTree>
   </p:cSld>
   <p:clrMapOvr>
@@ -5191,15 +5394,39 @@
           </a:p>
         </p:txBody>
       </p:sp>
-      <p:sp>
-        <p:nvSpPr>
-          <p:cNvPr id="13" name="TextBox 12"/>
+      <p:pic>
+        <p:nvPicPr>
+          <p:cNvPr id="13" name="Picture 12" descr="logo-banksumut.png"/>
+          <p:cNvPicPr>
+            <a:picLocks noChangeAspect="1"/>
+          </p:cNvPicPr>
+          <p:nvPr/>
+        </p:nvPicPr>
+        <p:blipFill>
+          <a:blip r:embed="rId2"/>
+          <a:stretch>
+            <a:fillRect/>
+          </a:stretch>
+        </p:blipFill>
+        <p:spPr>
+          <a:xfrm>
+            <a:off x="164592" y="6455664"/>
+            <a:ext cx="310896" cy="310896"/>
+          </a:xfrm>
+          <a:prstGeom prst="rect">
+            <a:avLst/>
+          </a:prstGeom>
+        </p:spPr>
+      </p:pic>
+      <p:sp>
+        <p:nvSpPr>
+          <p:cNvPr id="14" name="TextBox 13"/>
           <p:cNvSpPr txBox="1"/>
           <p:nvPr/>
         </p:nvSpPr>
         <p:spPr>
           <a:xfrm>
-            <a:off x="457200" y="6492240"/>
+            <a:off x="530352" y="6492240"/>
             <a:ext cx="5486400" cy="320040"/>
           </a:xfrm>
           <a:prstGeom prst="rect">
@@ -5228,7 +5455,7 @@
       </p:sp>
       <p:sp>
         <p:nvSpPr>
-          <p:cNvPr id="14" name="TextBox 13"/>
+          <p:cNvPr id="15" name="TextBox 14"/>
           <p:cNvSpPr txBox="1"/>
           <p:nvPr/>
         </p:nvSpPr>
@@ -5261,6 +5488,30 @@
           </a:p>
         </p:txBody>
       </p:sp>
+      <p:pic>
+        <p:nvPicPr>
+          <p:cNvPr id="16" name="Picture 15" descr="logo-banksumut.png"/>
+          <p:cNvPicPr>
+            <a:picLocks noChangeAspect="1"/>
+          </p:cNvPicPr>
+          <p:nvPr/>
+        </p:nvPicPr>
+        <p:blipFill>
+          <a:blip r:embed="rId2"/>
+          <a:stretch>
+            <a:fillRect/>
+          </a:stretch>
+        </p:blipFill>
+        <p:spPr>
+          <a:xfrm>
+            <a:off x="11350447" y="201168"/>
+            <a:ext cx="475488" cy="475488"/>
+          </a:xfrm>
+          <a:prstGeom prst="rect">
+            <a:avLst/>
+          </a:prstGeom>
+        </p:spPr>
+      </p:pic>
     </p:spTree>
   </p:cSld>
   <p:clrMapOvr>
@@ -6041,15 +6292,39 @@
           </a:p>
         </p:txBody>
       </p:sp>
-      <p:sp>
-        <p:nvSpPr>
-          <p:cNvPr id="17" name="TextBox 16"/>
+      <p:pic>
+        <p:nvPicPr>
+          <p:cNvPr id="17" name="Picture 16" descr="logo-banksumut.png"/>
+          <p:cNvPicPr>
+            <a:picLocks noChangeAspect="1"/>
+          </p:cNvPicPr>
+          <p:nvPr/>
+        </p:nvPicPr>
+        <p:blipFill>
+          <a:blip r:embed="rId2"/>
+          <a:stretch>
+            <a:fillRect/>
+          </a:stretch>
+        </p:blipFill>
+        <p:spPr>
+          <a:xfrm>
+            <a:off x="164592" y="6455664"/>
+            <a:ext cx="310896" cy="310896"/>
+          </a:xfrm>
+          <a:prstGeom prst="rect">
+            <a:avLst/>
+          </a:prstGeom>
+        </p:spPr>
+      </p:pic>
+      <p:sp>
+        <p:nvSpPr>
+          <p:cNvPr id="18" name="TextBox 17"/>
           <p:cNvSpPr txBox="1"/>
           <p:nvPr/>
         </p:nvSpPr>
         <p:spPr>
           <a:xfrm>
-            <a:off x="457200" y="6492240"/>
+            <a:off x="530352" y="6492240"/>
             <a:ext cx="5486400" cy="320040"/>
           </a:xfrm>
           <a:prstGeom prst="rect">
@@ -6078,7 +6353,7 @@
       </p:sp>
       <p:sp>
         <p:nvSpPr>
-          <p:cNvPr id="18" name="TextBox 17"/>
+          <p:cNvPr id="19" name="TextBox 18"/>
           <p:cNvSpPr txBox="1"/>
           <p:nvPr/>
         </p:nvSpPr>
@@ -6111,6 +6386,30 @@
           </a:p>
         </p:txBody>
       </p:sp>
+      <p:pic>
+        <p:nvPicPr>
+          <p:cNvPr id="20" name="Picture 19" descr="logo-banksumut.png"/>
+          <p:cNvPicPr>
+            <a:picLocks noChangeAspect="1"/>
+          </p:cNvPicPr>
+          <p:nvPr/>
+        </p:nvPicPr>
+        <p:blipFill>
+          <a:blip r:embed="rId2"/>
+          <a:stretch>
+            <a:fillRect/>
+          </a:stretch>
+        </p:blipFill>
+        <p:spPr>
+          <a:xfrm>
+            <a:off x="11350447" y="201168"/>
+            <a:ext cx="475488" cy="475488"/>
+          </a:xfrm>
+          <a:prstGeom prst="rect">
+            <a:avLst/>
+          </a:prstGeom>
+        </p:spPr>
+      </p:pic>
     </p:spTree>
   </p:cSld>
   <p:clrMapOvr>
@@ -6285,9 +6584,68 @@
           </a:p>
         </p:txBody>
       </p:sp>
-      <p:sp>
-        <p:nvSpPr>
-          <p:cNvPr id="6" name="Rectangle 5"/>
+      <p:pic>
+        <p:nvPicPr>
+          <p:cNvPr id="6" name="Picture 5" descr="logo-banksumut.png"/>
+          <p:cNvPicPr>
+            <a:picLocks noChangeAspect="1"/>
+          </p:cNvPicPr>
+          <p:nvPr/>
+        </p:nvPicPr>
+        <p:blipFill>
+          <a:blip r:embed="rId2"/>
+          <a:stretch>
+            <a:fillRect/>
+          </a:stretch>
+        </p:blipFill>
+        <p:spPr>
+          <a:xfrm>
+            <a:off x="640080" y="502920"/>
+            <a:ext cx="685800" cy="685800"/>
+          </a:xfrm>
+          <a:prstGeom prst="rect">
+            <a:avLst/>
+          </a:prstGeom>
+        </p:spPr>
+      </p:pic>
+      <p:sp>
+        <p:nvSpPr>
+          <p:cNvPr id="7" name="TextBox 6"/>
+          <p:cNvSpPr txBox="1"/>
+          <p:nvPr/>
+        </p:nvSpPr>
+        <p:spPr>
+          <a:xfrm>
+            <a:off x="1463040" y="566928"/>
+            <a:ext cx="3657600" cy="548640"/>
+          </a:xfrm>
+          <a:prstGeom prst="rect">
+            <a:avLst/>
+          </a:prstGeom>
+          <a:noFill/>
+        </p:spPr>
+        <p:txBody>
+          <a:bodyPr wrap="none">
+            <a:spAutoFit/>
+          </a:bodyPr>
+          <a:lstStyle/>
+          <a:p>
+            <a:pPr>
+              <a:defRPr sz="1800" b="1">
+                <a:solidFill>
+                  <a:srgbClr val="FFFFFF"/>
+                </a:solidFill>
+              </a:defRPr>
+            </a:pPr>
+            <a:r>
+              <a:t>Bank Sumut</a:t>
+            </a:r>
+          </a:p>
+        </p:txBody>
+      </p:sp>
+      <p:sp>
+        <p:nvSpPr>
+          <p:cNvPr id="8" name="Rectangle 7"/>
           <p:cNvSpPr/>
           <p:nvPr/>
         </p:nvSpPr>
@@ -6328,15 +6686,39 @@
           </a:p>
         </p:txBody>
       </p:sp>
-      <p:sp>
-        <p:nvSpPr>
-          <p:cNvPr id="7" name="TextBox 6"/>
+      <p:pic>
+        <p:nvPicPr>
+          <p:cNvPr id="9" name="Picture 8" descr="logo-banksumut.png"/>
+          <p:cNvPicPr>
+            <a:picLocks noChangeAspect="1"/>
+          </p:cNvPicPr>
+          <p:nvPr/>
+        </p:nvPicPr>
+        <p:blipFill>
+          <a:blip r:embed="rId2"/>
+          <a:stretch>
+            <a:fillRect/>
+          </a:stretch>
+        </p:blipFill>
+        <p:spPr>
+          <a:xfrm>
+            <a:off x="164592" y="6455664"/>
+            <a:ext cx="310896" cy="310896"/>
+          </a:xfrm>
+          <a:prstGeom prst="rect">
+            <a:avLst/>
+          </a:prstGeom>
+        </p:spPr>
+      </p:pic>
+      <p:sp>
+        <p:nvSpPr>
+          <p:cNvPr id="10" name="TextBox 9"/>
           <p:cNvSpPr txBox="1"/>
           <p:nvPr/>
         </p:nvSpPr>
         <p:spPr>
           <a:xfrm>
-            <a:off x="457200" y="6492240"/>
+            <a:off x="530352" y="6492240"/>
             <a:ext cx="5486400" cy="320040"/>
           </a:xfrm>
           <a:prstGeom prst="rect">
@@ -6365,7 +6747,7 @@
       </p:sp>
       <p:sp>
         <p:nvSpPr>
-          <p:cNvPr id="8" name="TextBox 7"/>
+          <p:cNvPr id="11" name="TextBox 10"/>
           <p:cNvSpPr txBox="1"/>
           <p:nvPr/>
         </p:nvSpPr>
@@ -6398,6 +6780,30 @@
           </a:p>
         </p:txBody>
       </p:sp>
+      <p:pic>
+        <p:nvPicPr>
+          <p:cNvPr id="12" name="Picture 11" descr="logo-banksumut.png"/>
+          <p:cNvPicPr>
+            <a:picLocks noChangeAspect="1"/>
+          </p:cNvPicPr>
+          <p:nvPr/>
+        </p:nvPicPr>
+        <p:blipFill>
+          <a:blip r:embed="rId2"/>
+          <a:stretch>
+            <a:fillRect/>
+          </a:stretch>
+        </p:blipFill>
+        <p:spPr>
+          <a:xfrm>
+            <a:off x="11350447" y="201168"/>
+            <a:ext cx="475488" cy="475488"/>
+          </a:xfrm>
+          <a:prstGeom prst="rect">
+            <a:avLst/>
+          </a:prstGeom>
+        </p:spPr>
+      </p:pic>
     </p:spTree>
   </p:cSld>
   <p:clrMapOvr>
@@ -7706,15 +8112,39 @@
           </a:p>
         </p:txBody>
       </p:sp>
-      <p:sp>
-        <p:nvSpPr>
-          <p:cNvPr id="29" name="TextBox 28"/>
+      <p:pic>
+        <p:nvPicPr>
+          <p:cNvPr id="29" name="Picture 28" descr="logo-banksumut.png"/>
+          <p:cNvPicPr>
+            <a:picLocks noChangeAspect="1"/>
+          </p:cNvPicPr>
+          <p:nvPr/>
+        </p:nvPicPr>
+        <p:blipFill>
+          <a:blip r:embed="rId2"/>
+          <a:stretch>
+            <a:fillRect/>
+          </a:stretch>
+        </p:blipFill>
+        <p:spPr>
+          <a:xfrm>
+            <a:off x="164592" y="6455664"/>
+            <a:ext cx="310896" cy="310896"/>
+          </a:xfrm>
+          <a:prstGeom prst="rect">
+            <a:avLst/>
+          </a:prstGeom>
+        </p:spPr>
+      </p:pic>
+      <p:sp>
+        <p:nvSpPr>
+          <p:cNvPr id="30" name="TextBox 29"/>
           <p:cNvSpPr txBox="1"/>
           <p:nvPr/>
         </p:nvSpPr>
         <p:spPr>
           <a:xfrm>
-            <a:off x="457200" y="6492240"/>
+            <a:off x="530352" y="6492240"/>
             <a:ext cx="5486400" cy="320040"/>
           </a:xfrm>
           <a:prstGeom prst="rect">
@@ -7743,7 +8173,7 @@
       </p:sp>
       <p:sp>
         <p:nvSpPr>
-          <p:cNvPr id="30" name="TextBox 29"/>
+          <p:cNvPr id="31" name="TextBox 30"/>
           <p:cNvSpPr txBox="1"/>
           <p:nvPr/>
         </p:nvSpPr>
@@ -7776,6 +8206,30 @@
           </a:p>
         </p:txBody>
       </p:sp>
+      <p:pic>
+        <p:nvPicPr>
+          <p:cNvPr id="32" name="Picture 31" descr="logo-banksumut.png"/>
+          <p:cNvPicPr>
+            <a:picLocks noChangeAspect="1"/>
+          </p:cNvPicPr>
+          <p:nvPr/>
+        </p:nvPicPr>
+        <p:blipFill>
+          <a:blip r:embed="rId2"/>
+          <a:stretch>
+            <a:fillRect/>
+          </a:stretch>
+        </p:blipFill>
+        <p:spPr>
+          <a:xfrm>
+            <a:off x="11350447" y="201168"/>
+            <a:ext cx="475488" cy="475488"/>
+          </a:xfrm>
+          <a:prstGeom prst="rect">
+            <a:avLst/>
+          </a:prstGeom>
+        </p:spPr>
+      </p:pic>
     </p:spTree>
   </p:cSld>
   <p:clrMapOvr>
@@ -8792,15 +9246,39 @@
           </a:p>
         </p:txBody>
       </p:sp>
-      <p:sp>
-        <p:nvSpPr>
-          <p:cNvPr id="21" name="TextBox 20"/>
+      <p:pic>
+        <p:nvPicPr>
+          <p:cNvPr id="21" name="Picture 20" descr="logo-banksumut.png"/>
+          <p:cNvPicPr>
+            <a:picLocks noChangeAspect="1"/>
+          </p:cNvPicPr>
+          <p:nvPr/>
+        </p:nvPicPr>
+        <p:blipFill>
+          <a:blip r:embed="rId2"/>
+          <a:stretch>
+            <a:fillRect/>
+          </a:stretch>
+        </p:blipFill>
+        <p:spPr>
+          <a:xfrm>
+            <a:off x="164592" y="6455664"/>
+            <a:ext cx="310896" cy="310896"/>
+          </a:xfrm>
+          <a:prstGeom prst="rect">
+            <a:avLst/>
+          </a:prstGeom>
+        </p:spPr>
+      </p:pic>
+      <p:sp>
+        <p:nvSpPr>
+          <p:cNvPr id="22" name="TextBox 21"/>
           <p:cNvSpPr txBox="1"/>
           <p:nvPr/>
         </p:nvSpPr>
         <p:spPr>
           <a:xfrm>
-            <a:off x="457200" y="6492240"/>
+            <a:off x="530352" y="6492240"/>
             <a:ext cx="5486400" cy="320040"/>
           </a:xfrm>
           <a:prstGeom prst="rect">
@@ -8829,7 +9307,7 @@
       </p:sp>
       <p:sp>
         <p:nvSpPr>
-          <p:cNvPr id="22" name="TextBox 21"/>
+          <p:cNvPr id="23" name="TextBox 22"/>
           <p:cNvSpPr txBox="1"/>
           <p:nvPr/>
         </p:nvSpPr>
@@ -8862,6 +9340,30 @@
           </a:p>
         </p:txBody>
       </p:sp>
+      <p:pic>
+        <p:nvPicPr>
+          <p:cNvPr id="24" name="Picture 23" descr="logo-banksumut.png"/>
+          <p:cNvPicPr>
+            <a:picLocks noChangeAspect="1"/>
+          </p:cNvPicPr>
+          <p:nvPr/>
+        </p:nvPicPr>
+        <p:blipFill>
+          <a:blip r:embed="rId2"/>
+          <a:stretch>
+            <a:fillRect/>
+          </a:stretch>
+        </p:blipFill>
+        <p:spPr>
+          <a:xfrm>
+            <a:off x="11350447" y="201168"/>
+            <a:ext cx="475488" cy="475488"/>
+          </a:xfrm>
+          <a:prstGeom prst="rect">
+            <a:avLst/>
+          </a:prstGeom>
+        </p:spPr>
+      </p:pic>
     </p:spTree>
   </p:cSld>
   <p:clrMapOvr>
@@ -9128,15 +9630,39 @@
           </a:p>
         </p:txBody>
       </p:sp>
-      <p:sp>
-        <p:nvSpPr>
-          <p:cNvPr id="8" name="TextBox 7"/>
+      <p:pic>
+        <p:nvPicPr>
+          <p:cNvPr id="8" name="Picture 7" descr="logo-banksumut.png"/>
+          <p:cNvPicPr>
+            <a:picLocks noChangeAspect="1"/>
+          </p:cNvPicPr>
+          <p:nvPr/>
+        </p:nvPicPr>
+        <p:blipFill>
+          <a:blip r:embed="rId3"/>
+          <a:stretch>
+            <a:fillRect/>
+          </a:stretch>
+        </p:blipFill>
+        <p:spPr>
+          <a:xfrm>
+            <a:off x="164592" y="6455664"/>
+            <a:ext cx="310896" cy="310896"/>
+          </a:xfrm>
+          <a:prstGeom prst="rect">
+            <a:avLst/>
+          </a:prstGeom>
+        </p:spPr>
+      </p:pic>
+      <p:sp>
+        <p:nvSpPr>
+          <p:cNvPr id="9" name="TextBox 8"/>
           <p:cNvSpPr txBox="1"/>
           <p:nvPr/>
         </p:nvSpPr>
         <p:spPr>
           <a:xfrm>
-            <a:off x="457200" y="6492240"/>
+            <a:off x="530352" y="6492240"/>
             <a:ext cx="5486400" cy="320040"/>
           </a:xfrm>
           <a:prstGeom prst="rect">
@@ -9165,7 +9691,7 @@
       </p:sp>
       <p:sp>
         <p:nvSpPr>
-          <p:cNvPr id="9" name="TextBox 8"/>
+          <p:cNvPr id="10" name="TextBox 9"/>
           <p:cNvSpPr txBox="1"/>
           <p:nvPr/>
         </p:nvSpPr>
@@ -9198,6 +9724,30 @@
           </a:p>
         </p:txBody>
       </p:sp>
+      <p:pic>
+        <p:nvPicPr>
+          <p:cNvPr id="11" name="Picture 10" descr="logo-banksumut.png"/>
+          <p:cNvPicPr>
+            <a:picLocks noChangeAspect="1"/>
+          </p:cNvPicPr>
+          <p:nvPr/>
+        </p:nvPicPr>
+        <p:blipFill>
+          <a:blip r:embed="rId3"/>
+          <a:stretch>
+            <a:fillRect/>
+          </a:stretch>
+        </p:blipFill>
+        <p:spPr>
+          <a:xfrm>
+            <a:off x="11350447" y="201168"/>
+            <a:ext cx="475488" cy="475488"/>
+          </a:xfrm>
+          <a:prstGeom prst="rect">
+            <a:avLst/>
+          </a:prstGeom>
+        </p:spPr>
+      </p:pic>
     </p:spTree>
   </p:cSld>
   <p:clrMapOvr>
@@ -9464,15 +10014,39 @@
           </a:p>
         </p:txBody>
       </p:sp>
-      <p:sp>
-        <p:nvSpPr>
-          <p:cNvPr id="8" name="TextBox 7"/>
+      <p:pic>
+        <p:nvPicPr>
+          <p:cNvPr id="8" name="Picture 7" descr="logo-banksumut.png"/>
+          <p:cNvPicPr>
+            <a:picLocks noChangeAspect="1"/>
+          </p:cNvPicPr>
+          <p:nvPr/>
+        </p:nvPicPr>
+        <p:blipFill>
+          <a:blip r:embed="rId3"/>
+          <a:stretch>
+            <a:fillRect/>
+          </a:stretch>
+        </p:blipFill>
+        <p:spPr>
+          <a:xfrm>
+            <a:off x="164592" y="6455664"/>
+            <a:ext cx="310896" cy="310896"/>
+          </a:xfrm>
+          <a:prstGeom prst="rect">
+            <a:avLst/>
+          </a:prstGeom>
+        </p:spPr>
+      </p:pic>
+      <p:sp>
+        <p:nvSpPr>
+          <p:cNvPr id="9" name="TextBox 8"/>
           <p:cNvSpPr txBox="1"/>
           <p:nvPr/>
         </p:nvSpPr>
         <p:spPr>
           <a:xfrm>
-            <a:off x="457200" y="6492240"/>
+            <a:off x="530352" y="6492240"/>
             <a:ext cx="5486400" cy="320040"/>
           </a:xfrm>
           <a:prstGeom prst="rect">
@@ -9501,7 +10075,7 @@
       </p:sp>
       <p:sp>
         <p:nvSpPr>
-          <p:cNvPr id="9" name="TextBox 8"/>
+          <p:cNvPr id="10" name="TextBox 9"/>
           <p:cNvSpPr txBox="1"/>
           <p:nvPr/>
         </p:nvSpPr>
@@ -9534,6 +10108,30 @@
           </a:p>
         </p:txBody>
       </p:sp>
+      <p:pic>
+        <p:nvPicPr>
+          <p:cNvPr id="11" name="Picture 10" descr="logo-banksumut.png"/>
+          <p:cNvPicPr>
+            <a:picLocks noChangeAspect="1"/>
+          </p:cNvPicPr>
+          <p:nvPr/>
+        </p:nvPicPr>
+        <p:blipFill>
+          <a:blip r:embed="rId3"/>
+          <a:stretch>
+            <a:fillRect/>
+          </a:stretch>
+        </p:blipFill>
+        <p:spPr>
+          <a:xfrm>
+            <a:off x="11350447" y="201168"/>
+            <a:ext cx="475488" cy="475488"/>
+          </a:xfrm>
+          <a:prstGeom prst="rect">
+            <a:avLst/>
+          </a:prstGeom>
+        </p:spPr>
+      </p:pic>
     </p:spTree>
   </p:cSld>
   <p:clrMapOvr>
@@ -9904,15 +10502,39 @@
           </a:p>
         </p:txBody>
       </p:sp>
-      <p:sp>
-        <p:nvSpPr>
-          <p:cNvPr id="11" name="TextBox 10"/>
+      <p:pic>
+        <p:nvPicPr>
+          <p:cNvPr id="11" name="Picture 10" descr="logo-banksumut.png"/>
+          <p:cNvPicPr>
+            <a:picLocks noChangeAspect="1"/>
+          </p:cNvPicPr>
+          <p:nvPr/>
+        </p:nvPicPr>
+        <p:blipFill>
+          <a:blip r:embed="rId4"/>
+          <a:stretch>
+            <a:fillRect/>
+          </a:stretch>
+        </p:blipFill>
+        <p:spPr>
+          <a:xfrm>
+            <a:off x="164592" y="6455664"/>
+            <a:ext cx="310896" cy="310896"/>
+          </a:xfrm>
+          <a:prstGeom prst="rect">
+            <a:avLst/>
+          </a:prstGeom>
+        </p:spPr>
+      </p:pic>
+      <p:sp>
+        <p:nvSpPr>
+          <p:cNvPr id="12" name="TextBox 11"/>
           <p:cNvSpPr txBox="1"/>
           <p:nvPr/>
         </p:nvSpPr>
         <p:spPr>
           <a:xfrm>
-            <a:off x="457200" y="6492240"/>
+            <a:off x="530352" y="6492240"/>
             <a:ext cx="5486400" cy="320040"/>
           </a:xfrm>
           <a:prstGeom prst="rect">
@@ -9941,7 +10563,7 @@
       </p:sp>
       <p:sp>
         <p:nvSpPr>
-          <p:cNvPr id="12" name="TextBox 11"/>
+          <p:cNvPr id="13" name="TextBox 12"/>
           <p:cNvSpPr txBox="1"/>
           <p:nvPr/>
         </p:nvSpPr>
@@ -9974,6 +10596,30 @@
           </a:p>
         </p:txBody>
       </p:sp>
+      <p:pic>
+        <p:nvPicPr>
+          <p:cNvPr id="14" name="Picture 13" descr="logo-banksumut.png"/>
+          <p:cNvPicPr>
+            <a:picLocks noChangeAspect="1"/>
+          </p:cNvPicPr>
+          <p:nvPr/>
+        </p:nvPicPr>
+        <p:blipFill>
+          <a:blip r:embed="rId4"/>
+          <a:stretch>
+            <a:fillRect/>
+          </a:stretch>
+        </p:blipFill>
+        <p:spPr>
+          <a:xfrm>
+            <a:off x="11350447" y="201168"/>
+            <a:ext cx="475488" cy="475488"/>
+          </a:xfrm>
+          <a:prstGeom prst="rect">
+            <a:avLst/>
+          </a:prstGeom>
+        </p:spPr>
+      </p:pic>
     </p:spTree>
   </p:cSld>
   <p:clrMapOvr>
@@ -10344,15 +10990,39 @@
           </a:p>
         </p:txBody>
       </p:sp>
-      <p:sp>
-        <p:nvSpPr>
-          <p:cNvPr id="11" name="TextBox 10"/>
+      <p:pic>
+        <p:nvPicPr>
+          <p:cNvPr id="11" name="Picture 10" descr="logo-banksumut.png"/>
+          <p:cNvPicPr>
+            <a:picLocks noChangeAspect="1"/>
+          </p:cNvPicPr>
+          <p:nvPr/>
+        </p:nvPicPr>
+        <p:blipFill>
+          <a:blip r:embed="rId4"/>
+          <a:stretch>
+            <a:fillRect/>
+          </a:stretch>
+        </p:blipFill>
+        <p:spPr>
+          <a:xfrm>
+            <a:off x="164592" y="6455664"/>
+            <a:ext cx="310896" cy="310896"/>
+          </a:xfrm>
+          <a:prstGeom prst="rect">
+            <a:avLst/>
+          </a:prstGeom>
+        </p:spPr>
+      </p:pic>
+      <p:sp>
+        <p:nvSpPr>
+          <p:cNvPr id="12" name="TextBox 11"/>
           <p:cNvSpPr txBox="1"/>
           <p:nvPr/>
         </p:nvSpPr>
         <p:spPr>
           <a:xfrm>
-            <a:off x="457200" y="6492240"/>
+            <a:off x="530352" y="6492240"/>
             <a:ext cx="5486400" cy="320040"/>
           </a:xfrm>
           <a:prstGeom prst="rect">
@@ -10381,7 +11051,7 @@
       </p:sp>
       <p:sp>
         <p:nvSpPr>
-          <p:cNvPr id="12" name="TextBox 11"/>
+          <p:cNvPr id="13" name="TextBox 12"/>
           <p:cNvSpPr txBox="1"/>
           <p:nvPr/>
         </p:nvSpPr>
@@ -10414,6 +11084,30 @@
           </a:p>
         </p:txBody>
       </p:sp>
+      <p:pic>
+        <p:nvPicPr>
+          <p:cNvPr id="14" name="Picture 13" descr="logo-banksumut.png"/>
+          <p:cNvPicPr>
+            <a:picLocks noChangeAspect="1"/>
+          </p:cNvPicPr>
+          <p:nvPr/>
+        </p:nvPicPr>
+        <p:blipFill>
+          <a:blip r:embed="rId4"/>
+          <a:stretch>
+            <a:fillRect/>
+          </a:stretch>
+        </p:blipFill>
+        <p:spPr>
+          <a:xfrm>
+            <a:off x="11350447" y="201168"/>
+            <a:ext cx="475488" cy="475488"/>
+          </a:xfrm>
+          <a:prstGeom prst="rect">
+            <a:avLst/>
+          </a:prstGeom>
+        </p:spPr>
+      </p:pic>
     </p:spTree>
   </p:cSld>
   <p:clrMapOvr>
@@ -11048,15 +11742,39 @@
           </a:p>
         </p:txBody>
       </p:sp>
-      <p:sp>
-        <p:nvSpPr>
-          <p:cNvPr id="13" name="TextBox 12"/>
+      <p:pic>
+        <p:nvPicPr>
+          <p:cNvPr id="13" name="Picture 12" descr="logo-banksumut.png"/>
+          <p:cNvPicPr>
+            <a:picLocks noChangeAspect="1"/>
+          </p:cNvPicPr>
+          <p:nvPr/>
+        </p:nvPicPr>
+        <p:blipFill>
+          <a:blip r:embed="rId2"/>
+          <a:stretch>
+            <a:fillRect/>
+          </a:stretch>
+        </p:blipFill>
+        <p:spPr>
+          <a:xfrm>
+            <a:off x="164592" y="6455664"/>
+            <a:ext cx="310896" cy="310896"/>
+          </a:xfrm>
+          <a:prstGeom prst="rect">
+            <a:avLst/>
+          </a:prstGeom>
+        </p:spPr>
+      </p:pic>
+      <p:sp>
+        <p:nvSpPr>
+          <p:cNvPr id="14" name="TextBox 13"/>
           <p:cNvSpPr txBox="1"/>
           <p:nvPr/>
         </p:nvSpPr>
         <p:spPr>
           <a:xfrm>
-            <a:off x="457200" y="6492240"/>
+            <a:off x="530352" y="6492240"/>
             <a:ext cx="5486400" cy="320040"/>
           </a:xfrm>
           <a:prstGeom prst="rect">
@@ -11085,7 +11803,7 @@
       </p:sp>
       <p:sp>
         <p:nvSpPr>
-          <p:cNvPr id="14" name="TextBox 13"/>
+          <p:cNvPr id="15" name="TextBox 14"/>
           <p:cNvSpPr txBox="1"/>
           <p:nvPr/>
         </p:nvSpPr>
@@ -11118,6 +11836,30 @@
           </a:p>
         </p:txBody>
       </p:sp>
+      <p:pic>
+        <p:nvPicPr>
+          <p:cNvPr id="16" name="Picture 15" descr="logo-banksumut.png"/>
+          <p:cNvPicPr>
+            <a:picLocks noChangeAspect="1"/>
+          </p:cNvPicPr>
+          <p:nvPr/>
+        </p:nvPicPr>
+        <p:blipFill>
+          <a:blip r:embed="rId2"/>
+          <a:stretch>
+            <a:fillRect/>
+          </a:stretch>
+        </p:blipFill>
+        <p:spPr>
+          <a:xfrm>
+            <a:off x="11350447" y="201168"/>
+            <a:ext cx="475488" cy="475488"/>
+          </a:xfrm>
+          <a:prstGeom prst="rect">
+            <a:avLst/>
+          </a:prstGeom>
+        </p:spPr>
+      </p:pic>
     </p:spTree>
   </p:cSld>
   <p:clrMapOvr>
@@ -11447,15 +12189,39 @@
           </a:p>
         </p:txBody>
       </p:sp>
-      <p:sp>
-        <p:nvSpPr>
-          <p:cNvPr id="6" name="TextBox 5"/>
+      <p:pic>
+        <p:nvPicPr>
+          <p:cNvPr id="6" name="Picture 5" descr="logo-banksumut.png"/>
+          <p:cNvPicPr>
+            <a:picLocks noChangeAspect="1"/>
+          </p:cNvPicPr>
+          <p:nvPr/>
+        </p:nvPicPr>
+        <p:blipFill>
+          <a:blip r:embed="rId2"/>
+          <a:stretch>
+            <a:fillRect/>
+          </a:stretch>
+        </p:blipFill>
+        <p:spPr>
+          <a:xfrm>
+            <a:off x="164592" y="6455664"/>
+            <a:ext cx="310896" cy="310896"/>
+          </a:xfrm>
+          <a:prstGeom prst="rect">
+            <a:avLst/>
+          </a:prstGeom>
+        </p:spPr>
+      </p:pic>
+      <p:sp>
+        <p:nvSpPr>
+          <p:cNvPr id="7" name="TextBox 6"/>
           <p:cNvSpPr txBox="1"/>
           <p:nvPr/>
         </p:nvSpPr>
         <p:spPr>
           <a:xfrm>
-            <a:off x="457200" y="6492240"/>
+            <a:off x="530352" y="6492240"/>
             <a:ext cx="5486400" cy="320040"/>
           </a:xfrm>
           <a:prstGeom prst="rect">
@@ -11484,7 +12250,7 @@
       </p:sp>
       <p:sp>
         <p:nvSpPr>
-          <p:cNvPr id="7" name="TextBox 6"/>
+          <p:cNvPr id="8" name="TextBox 7"/>
           <p:cNvSpPr txBox="1"/>
           <p:nvPr/>
         </p:nvSpPr>
@@ -11517,6 +12283,30 @@
           </a:p>
         </p:txBody>
       </p:sp>
+      <p:pic>
+        <p:nvPicPr>
+          <p:cNvPr id="9" name="Picture 8" descr="logo-banksumut.png"/>
+          <p:cNvPicPr>
+            <a:picLocks noChangeAspect="1"/>
+          </p:cNvPicPr>
+          <p:nvPr/>
+        </p:nvPicPr>
+        <p:blipFill>
+          <a:blip r:embed="rId2"/>
+          <a:stretch>
+            <a:fillRect/>
+          </a:stretch>
+        </p:blipFill>
+        <p:spPr>
+          <a:xfrm>
+            <a:off x="11350447" y="201168"/>
+            <a:ext cx="475488" cy="475488"/>
+          </a:xfrm>
+          <a:prstGeom prst="rect">
+            <a:avLst/>
+          </a:prstGeom>
+        </p:spPr>
+      </p:pic>
     </p:spTree>
   </p:cSld>
   <p:clrMapOvr>

--- a/CorpSec-Bank-Sumut-Presentasi.pptx
+++ b/CorpSec-Bank-Sumut-Presentasi.pptx
@@ -3271,7 +3271,7 @@
       </p:sp>
       <p:pic>
         <p:nvPicPr>
-          <p:cNvPr id="6" name="Picture 5" descr="logo-banksumut.png"/>
+          <p:cNvPr id="6" name="Picture 5" descr="logo-banksumut-official.png"/>
           <p:cNvPicPr>
             <a:picLocks noChangeAspect="1"/>
           </p:cNvPicPr>
@@ -3285,8 +3285,8 @@
         </p:blipFill>
         <p:spPr>
           <a:xfrm>
-            <a:off x="640080" y="502920"/>
-            <a:ext cx="685800" cy="685800"/>
+            <a:off x="502920" y="411480"/>
+            <a:ext cx="800295" cy="292608"/>
           </a:xfrm>
           <a:prstGeom prst="rect">
             <a:avLst/>
@@ -3295,42 +3295,7 @@
       </p:pic>
       <p:sp>
         <p:nvSpPr>
-          <p:cNvPr id="7" name="TextBox 6"/>
-          <p:cNvSpPr txBox="1"/>
-          <p:nvPr/>
-        </p:nvSpPr>
-        <p:spPr>
-          <a:xfrm>
-            <a:off x="1463040" y="566928"/>
-            <a:ext cx="3657600" cy="548640"/>
-          </a:xfrm>
-          <a:prstGeom prst="rect">
-            <a:avLst/>
-          </a:prstGeom>
-          <a:noFill/>
-        </p:spPr>
-        <p:txBody>
-          <a:bodyPr wrap="none">
-            <a:spAutoFit/>
-          </a:bodyPr>
-          <a:lstStyle/>
-          <a:p>
-            <a:pPr>
-              <a:defRPr sz="1800" b="1">
-                <a:solidFill>
-                  <a:srgbClr val="FFFFFF"/>
-                </a:solidFill>
-              </a:defRPr>
-            </a:pPr>
-            <a:r>
-              <a:t>Bank Sumut</a:t>
-            </a:r>
-          </a:p>
-        </p:txBody>
-      </p:sp>
-      <p:sp>
-        <p:nvSpPr>
-          <p:cNvPr id="8" name="Rectangle 7"/>
+          <p:cNvPr id="7" name="Rectangle 6"/>
           <p:cNvSpPr/>
           <p:nvPr/>
         </p:nvSpPr>
@@ -3373,7 +3338,7 @@
       </p:sp>
       <p:pic>
         <p:nvPicPr>
-          <p:cNvPr id="9" name="Picture 8" descr="logo-banksumut.png"/>
+          <p:cNvPr id="8" name="Picture 7" descr="logo-banksumut-official.png"/>
           <p:cNvPicPr>
             <a:picLocks noChangeAspect="1"/>
           </p:cNvPicPr>
@@ -3387,8 +3352,8 @@
         </p:blipFill>
         <p:spPr>
           <a:xfrm>
-            <a:off x="164592" y="6455664"/>
-            <a:ext cx="310896" cy="310896"/>
+            <a:off x="164592" y="6483096"/>
+            <a:ext cx="550203" cy="201168"/>
           </a:xfrm>
           <a:prstGeom prst="rect">
             <a:avLst/>
@@ -3397,13 +3362,13 @@
       </p:pic>
       <p:sp>
         <p:nvSpPr>
-          <p:cNvPr id="10" name="TextBox 9"/>
+          <p:cNvPr id="9" name="TextBox 8"/>
           <p:cNvSpPr txBox="1"/>
           <p:nvPr/>
         </p:nvSpPr>
         <p:spPr>
           <a:xfrm>
-            <a:off x="530352" y="6492240"/>
+            <a:off x="868680" y="6492240"/>
             <a:ext cx="5486400" cy="320040"/>
           </a:xfrm>
           <a:prstGeom prst="rect">
@@ -3432,7 +3397,7 @@
       </p:sp>
       <p:sp>
         <p:nvSpPr>
-          <p:cNvPr id="11" name="TextBox 10"/>
+          <p:cNvPr id="10" name="TextBox 9"/>
           <p:cNvSpPr txBox="1"/>
           <p:nvPr/>
         </p:nvSpPr>
@@ -3467,7 +3432,7 @@
       </p:sp>
       <p:pic>
         <p:nvPicPr>
-          <p:cNvPr id="12" name="Picture 11" descr="logo-banksumut.png"/>
+          <p:cNvPr id="11" name="Picture 10" descr="logo-banksumut-official.png"/>
           <p:cNvPicPr>
             <a:picLocks noChangeAspect="1"/>
           </p:cNvPicPr>
@@ -3481,8 +3446,8 @@
         </p:blipFill>
         <p:spPr>
           <a:xfrm>
-            <a:off x="11350447" y="201168"/>
-            <a:ext cx="475488" cy="475488"/>
+            <a:off x="11221415" y="228600"/>
+            <a:ext cx="650240" cy="237744"/>
           </a:xfrm>
           <a:prstGeom prst="rect">
             <a:avLst/>
@@ -3802,7 +3767,7 @@
       </p:sp>
       <p:pic>
         <p:nvPicPr>
-          <p:cNvPr id="6" name="Picture 5" descr="logo-banksumut.png"/>
+          <p:cNvPr id="6" name="Picture 5" descr="logo-banksumut-official.png"/>
           <p:cNvPicPr>
             <a:picLocks noChangeAspect="1"/>
           </p:cNvPicPr>
@@ -3816,8 +3781,8 @@
         </p:blipFill>
         <p:spPr>
           <a:xfrm>
-            <a:off x="164592" y="6455664"/>
-            <a:ext cx="310896" cy="310896"/>
+            <a:off x="164592" y="6483096"/>
+            <a:ext cx="550203" cy="201168"/>
           </a:xfrm>
           <a:prstGeom prst="rect">
             <a:avLst/>
@@ -3832,7 +3797,7 @@
         </p:nvSpPr>
         <p:spPr>
           <a:xfrm>
-            <a:off x="530352" y="6492240"/>
+            <a:off x="868680" y="6492240"/>
             <a:ext cx="5486400" cy="320040"/>
           </a:xfrm>
           <a:prstGeom prst="rect">
@@ -3896,7 +3861,7 @@
       </p:sp>
       <p:pic>
         <p:nvPicPr>
-          <p:cNvPr id="9" name="Picture 8" descr="logo-banksumut.png"/>
+          <p:cNvPr id="9" name="Picture 8" descr="logo-banksumut-official.png"/>
           <p:cNvPicPr>
             <a:picLocks noChangeAspect="1"/>
           </p:cNvPicPr>
@@ -3910,8 +3875,8 @@
         </p:blipFill>
         <p:spPr>
           <a:xfrm>
-            <a:off x="11350447" y="201168"/>
-            <a:ext cx="475488" cy="475488"/>
+            <a:off x="11221415" y="228600"/>
+            <a:ext cx="650240" cy="237744"/>
           </a:xfrm>
           <a:prstGeom prst="rect">
             <a:avLst/>
@@ -4614,7 +4579,7 @@
       </p:sp>
       <p:pic>
         <p:nvPicPr>
-          <p:cNvPr id="13" name="Picture 12" descr="logo-banksumut.png"/>
+          <p:cNvPr id="13" name="Picture 12" descr="logo-banksumut-official.png"/>
           <p:cNvPicPr>
             <a:picLocks noChangeAspect="1"/>
           </p:cNvPicPr>
@@ -4628,8 +4593,8 @@
         </p:blipFill>
         <p:spPr>
           <a:xfrm>
-            <a:off x="164592" y="6455664"/>
-            <a:ext cx="310896" cy="310896"/>
+            <a:off x="164592" y="6483096"/>
+            <a:ext cx="550203" cy="201168"/>
           </a:xfrm>
           <a:prstGeom prst="rect">
             <a:avLst/>
@@ -4644,7 +4609,7 @@
         </p:nvSpPr>
         <p:spPr>
           <a:xfrm>
-            <a:off x="530352" y="6492240"/>
+            <a:off x="868680" y="6492240"/>
             <a:ext cx="5486400" cy="320040"/>
           </a:xfrm>
           <a:prstGeom prst="rect">
@@ -4708,7 +4673,7 @@
       </p:sp>
       <p:pic>
         <p:nvPicPr>
-          <p:cNvPr id="16" name="Picture 15" descr="logo-banksumut.png"/>
+          <p:cNvPr id="16" name="Picture 15" descr="logo-banksumut-official.png"/>
           <p:cNvPicPr>
             <a:picLocks noChangeAspect="1"/>
           </p:cNvPicPr>
@@ -4722,8 +4687,8 @@
         </p:blipFill>
         <p:spPr>
           <a:xfrm>
-            <a:off x="11350447" y="201168"/>
-            <a:ext cx="475488" cy="475488"/>
+            <a:off x="11221415" y="228600"/>
+            <a:ext cx="650240" cy="237744"/>
           </a:xfrm>
           <a:prstGeom prst="rect">
             <a:avLst/>
@@ -5396,7 +5361,7 @@
       </p:sp>
       <p:pic>
         <p:nvPicPr>
-          <p:cNvPr id="13" name="Picture 12" descr="logo-banksumut.png"/>
+          <p:cNvPr id="13" name="Picture 12" descr="logo-banksumut-official.png"/>
           <p:cNvPicPr>
             <a:picLocks noChangeAspect="1"/>
           </p:cNvPicPr>
@@ -5410,8 +5375,8 @@
         </p:blipFill>
         <p:spPr>
           <a:xfrm>
-            <a:off x="164592" y="6455664"/>
-            <a:ext cx="310896" cy="310896"/>
+            <a:off x="164592" y="6483096"/>
+            <a:ext cx="550203" cy="201168"/>
           </a:xfrm>
           <a:prstGeom prst="rect">
             <a:avLst/>
@@ -5426,7 +5391,7 @@
         </p:nvSpPr>
         <p:spPr>
           <a:xfrm>
-            <a:off x="530352" y="6492240"/>
+            <a:off x="868680" y="6492240"/>
             <a:ext cx="5486400" cy="320040"/>
           </a:xfrm>
           <a:prstGeom prst="rect">
@@ -5490,7 +5455,7 @@
       </p:sp>
       <p:pic>
         <p:nvPicPr>
-          <p:cNvPr id="16" name="Picture 15" descr="logo-banksumut.png"/>
+          <p:cNvPr id="16" name="Picture 15" descr="logo-banksumut-official.png"/>
           <p:cNvPicPr>
             <a:picLocks noChangeAspect="1"/>
           </p:cNvPicPr>
@@ -5504,8 +5469,8 @@
         </p:blipFill>
         <p:spPr>
           <a:xfrm>
-            <a:off x="11350447" y="201168"/>
-            <a:ext cx="475488" cy="475488"/>
+            <a:off x="11221415" y="228600"/>
+            <a:ext cx="650240" cy="237744"/>
           </a:xfrm>
           <a:prstGeom prst="rect">
             <a:avLst/>
@@ -6294,7 +6259,7 @@
       </p:sp>
       <p:pic>
         <p:nvPicPr>
-          <p:cNvPr id="17" name="Picture 16" descr="logo-banksumut.png"/>
+          <p:cNvPr id="17" name="Picture 16" descr="logo-banksumut-official.png"/>
           <p:cNvPicPr>
             <a:picLocks noChangeAspect="1"/>
           </p:cNvPicPr>
@@ -6308,8 +6273,8 @@
         </p:blipFill>
         <p:spPr>
           <a:xfrm>
-            <a:off x="164592" y="6455664"/>
-            <a:ext cx="310896" cy="310896"/>
+            <a:off x="164592" y="6483096"/>
+            <a:ext cx="550203" cy="201168"/>
           </a:xfrm>
           <a:prstGeom prst="rect">
             <a:avLst/>
@@ -6324,7 +6289,7 @@
         </p:nvSpPr>
         <p:spPr>
           <a:xfrm>
-            <a:off x="530352" y="6492240"/>
+            <a:off x="868680" y="6492240"/>
             <a:ext cx="5486400" cy="320040"/>
           </a:xfrm>
           <a:prstGeom prst="rect">
@@ -6388,7 +6353,7 @@
       </p:sp>
       <p:pic>
         <p:nvPicPr>
-          <p:cNvPr id="20" name="Picture 19" descr="logo-banksumut.png"/>
+          <p:cNvPr id="20" name="Picture 19" descr="logo-banksumut-official.png"/>
           <p:cNvPicPr>
             <a:picLocks noChangeAspect="1"/>
           </p:cNvPicPr>
@@ -6402,8 +6367,8 @@
         </p:blipFill>
         <p:spPr>
           <a:xfrm>
-            <a:off x="11350447" y="201168"/>
-            <a:ext cx="475488" cy="475488"/>
+            <a:off x="11221415" y="228600"/>
+            <a:ext cx="650240" cy="237744"/>
           </a:xfrm>
           <a:prstGeom prst="rect">
             <a:avLst/>
@@ -6586,7 +6551,7 @@
       </p:sp>
       <p:pic>
         <p:nvPicPr>
-          <p:cNvPr id="6" name="Picture 5" descr="logo-banksumut.png"/>
+          <p:cNvPr id="6" name="Picture 5" descr="logo-banksumut-official.png"/>
           <p:cNvPicPr>
             <a:picLocks noChangeAspect="1"/>
           </p:cNvPicPr>
@@ -6600,8 +6565,8 @@
         </p:blipFill>
         <p:spPr>
           <a:xfrm>
-            <a:off x="640080" y="502920"/>
-            <a:ext cx="685800" cy="685800"/>
+            <a:off x="502920" y="411480"/>
+            <a:ext cx="800295" cy="292608"/>
           </a:xfrm>
           <a:prstGeom prst="rect">
             <a:avLst/>
@@ -6610,42 +6575,7 @@
       </p:pic>
       <p:sp>
         <p:nvSpPr>
-          <p:cNvPr id="7" name="TextBox 6"/>
-          <p:cNvSpPr txBox="1"/>
-          <p:nvPr/>
-        </p:nvSpPr>
-        <p:spPr>
-          <a:xfrm>
-            <a:off x="1463040" y="566928"/>
-            <a:ext cx="3657600" cy="548640"/>
-          </a:xfrm>
-          <a:prstGeom prst="rect">
-            <a:avLst/>
-          </a:prstGeom>
-          <a:noFill/>
-        </p:spPr>
-        <p:txBody>
-          <a:bodyPr wrap="none">
-            <a:spAutoFit/>
-          </a:bodyPr>
-          <a:lstStyle/>
-          <a:p>
-            <a:pPr>
-              <a:defRPr sz="1800" b="1">
-                <a:solidFill>
-                  <a:srgbClr val="FFFFFF"/>
-                </a:solidFill>
-              </a:defRPr>
-            </a:pPr>
-            <a:r>
-              <a:t>Bank Sumut</a:t>
-            </a:r>
-          </a:p>
-        </p:txBody>
-      </p:sp>
-      <p:sp>
-        <p:nvSpPr>
-          <p:cNvPr id="8" name="Rectangle 7"/>
+          <p:cNvPr id="7" name="Rectangle 6"/>
           <p:cNvSpPr/>
           <p:nvPr/>
         </p:nvSpPr>
@@ -6688,7 +6618,7 @@
       </p:sp>
       <p:pic>
         <p:nvPicPr>
-          <p:cNvPr id="9" name="Picture 8" descr="logo-banksumut.png"/>
+          <p:cNvPr id="8" name="Picture 7" descr="logo-banksumut-official.png"/>
           <p:cNvPicPr>
             <a:picLocks noChangeAspect="1"/>
           </p:cNvPicPr>
@@ -6702,8 +6632,8 @@
         </p:blipFill>
         <p:spPr>
           <a:xfrm>
-            <a:off x="164592" y="6455664"/>
-            <a:ext cx="310896" cy="310896"/>
+            <a:off x="164592" y="6483096"/>
+            <a:ext cx="550203" cy="201168"/>
           </a:xfrm>
           <a:prstGeom prst="rect">
             <a:avLst/>
@@ -6712,13 +6642,13 @@
       </p:pic>
       <p:sp>
         <p:nvSpPr>
-          <p:cNvPr id="10" name="TextBox 9"/>
+          <p:cNvPr id="9" name="TextBox 8"/>
           <p:cNvSpPr txBox="1"/>
           <p:nvPr/>
         </p:nvSpPr>
         <p:spPr>
           <a:xfrm>
-            <a:off x="530352" y="6492240"/>
+            <a:off x="868680" y="6492240"/>
             <a:ext cx="5486400" cy="320040"/>
           </a:xfrm>
           <a:prstGeom prst="rect">
@@ -6747,7 +6677,7 @@
       </p:sp>
       <p:sp>
         <p:nvSpPr>
-          <p:cNvPr id="11" name="TextBox 10"/>
+          <p:cNvPr id="10" name="TextBox 9"/>
           <p:cNvSpPr txBox="1"/>
           <p:nvPr/>
         </p:nvSpPr>
@@ -6782,7 +6712,7 @@
       </p:sp>
       <p:pic>
         <p:nvPicPr>
-          <p:cNvPr id="12" name="Picture 11" descr="logo-banksumut.png"/>
+          <p:cNvPr id="11" name="Picture 10" descr="logo-banksumut-official.png"/>
           <p:cNvPicPr>
             <a:picLocks noChangeAspect="1"/>
           </p:cNvPicPr>
@@ -6796,8 +6726,8 @@
         </p:blipFill>
         <p:spPr>
           <a:xfrm>
-            <a:off x="11350447" y="201168"/>
-            <a:ext cx="475488" cy="475488"/>
+            <a:off x="11221415" y="228600"/>
+            <a:ext cx="650240" cy="237744"/>
           </a:xfrm>
           <a:prstGeom prst="rect">
             <a:avLst/>
@@ -8114,7 +8044,7 @@
       </p:sp>
       <p:pic>
         <p:nvPicPr>
-          <p:cNvPr id="29" name="Picture 28" descr="logo-banksumut.png"/>
+          <p:cNvPr id="29" name="Picture 28" descr="logo-banksumut-official.png"/>
           <p:cNvPicPr>
             <a:picLocks noChangeAspect="1"/>
           </p:cNvPicPr>
@@ -8128,8 +8058,8 @@
         </p:blipFill>
         <p:spPr>
           <a:xfrm>
-            <a:off x="164592" y="6455664"/>
-            <a:ext cx="310896" cy="310896"/>
+            <a:off x="164592" y="6483096"/>
+            <a:ext cx="550203" cy="201168"/>
           </a:xfrm>
           <a:prstGeom prst="rect">
             <a:avLst/>
@@ -8144,7 +8074,7 @@
         </p:nvSpPr>
         <p:spPr>
           <a:xfrm>
-            <a:off x="530352" y="6492240"/>
+            <a:off x="868680" y="6492240"/>
             <a:ext cx="5486400" cy="320040"/>
           </a:xfrm>
           <a:prstGeom prst="rect">
@@ -8208,7 +8138,7 @@
       </p:sp>
       <p:pic>
         <p:nvPicPr>
-          <p:cNvPr id="32" name="Picture 31" descr="logo-banksumut.png"/>
+          <p:cNvPr id="32" name="Picture 31" descr="logo-banksumut-official.png"/>
           <p:cNvPicPr>
             <a:picLocks noChangeAspect="1"/>
           </p:cNvPicPr>
@@ -8222,8 +8152,8 @@
         </p:blipFill>
         <p:spPr>
           <a:xfrm>
-            <a:off x="11350447" y="201168"/>
-            <a:ext cx="475488" cy="475488"/>
+            <a:off x="11221415" y="228600"/>
+            <a:ext cx="650240" cy="237744"/>
           </a:xfrm>
           <a:prstGeom prst="rect">
             <a:avLst/>
@@ -9248,7 +9178,7 @@
       </p:sp>
       <p:pic>
         <p:nvPicPr>
-          <p:cNvPr id="21" name="Picture 20" descr="logo-banksumut.png"/>
+          <p:cNvPr id="21" name="Picture 20" descr="logo-banksumut-official.png"/>
           <p:cNvPicPr>
             <a:picLocks noChangeAspect="1"/>
           </p:cNvPicPr>
@@ -9262,8 +9192,8 @@
         </p:blipFill>
         <p:spPr>
           <a:xfrm>
-            <a:off x="164592" y="6455664"/>
-            <a:ext cx="310896" cy="310896"/>
+            <a:off x="164592" y="6483096"/>
+            <a:ext cx="550203" cy="201168"/>
           </a:xfrm>
           <a:prstGeom prst="rect">
             <a:avLst/>
@@ -9278,7 +9208,7 @@
         </p:nvSpPr>
         <p:spPr>
           <a:xfrm>
-            <a:off x="530352" y="6492240"/>
+            <a:off x="868680" y="6492240"/>
             <a:ext cx="5486400" cy="320040"/>
           </a:xfrm>
           <a:prstGeom prst="rect">
@@ -9342,7 +9272,7 @@
       </p:sp>
       <p:pic>
         <p:nvPicPr>
-          <p:cNvPr id="24" name="Picture 23" descr="logo-banksumut.png"/>
+          <p:cNvPr id="24" name="Picture 23" descr="logo-banksumut-official.png"/>
           <p:cNvPicPr>
             <a:picLocks noChangeAspect="1"/>
           </p:cNvPicPr>
@@ -9356,8 +9286,8 @@
         </p:blipFill>
         <p:spPr>
           <a:xfrm>
-            <a:off x="11350447" y="201168"/>
-            <a:ext cx="475488" cy="475488"/>
+            <a:off x="11221415" y="228600"/>
+            <a:ext cx="650240" cy="237744"/>
           </a:xfrm>
           <a:prstGeom prst="rect">
             <a:avLst/>
@@ -9632,7 +9562,7 @@
       </p:sp>
       <p:pic>
         <p:nvPicPr>
-          <p:cNvPr id="8" name="Picture 7" descr="logo-banksumut.png"/>
+          <p:cNvPr id="8" name="Picture 7" descr="logo-banksumut-official.png"/>
           <p:cNvPicPr>
             <a:picLocks noChangeAspect="1"/>
           </p:cNvPicPr>
@@ -9646,8 +9576,8 @@
         </p:blipFill>
         <p:spPr>
           <a:xfrm>
-            <a:off x="164592" y="6455664"/>
-            <a:ext cx="310896" cy="310896"/>
+            <a:off x="164592" y="6483096"/>
+            <a:ext cx="550203" cy="201168"/>
           </a:xfrm>
           <a:prstGeom prst="rect">
             <a:avLst/>
@@ -9662,7 +9592,7 @@
         </p:nvSpPr>
         <p:spPr>
           <a:xfrm>
-            <a:off x="530352" y="6492240"/>
+            <a:off x="868680" y="6492240"/>
             <a:ext cx="5486400" cy="320040"/>
           </a:xfrm>
           <a:prstGeom prst="rect">
@@ -9726,7 +9656,7 @@
       </p:sp>
       <p:pic>
         <p:nvPicPr>
-          <p:cNvPr id="11" name="Picture 10" descr="logo-banksumut.png"/>
+          <p:cNvPr id="11" name="Picture 10" descr="logo-banksumut-official.png"/>
           <p:cNvPicPr>
             <a:picLocks noChangeAspect="1"/>
           </p:cNvPicPr>
@@ -9740,8 +9670,8 @@
         </p:blipFill>
         <p:spPr>
           <a:xfrm>
-            <a:off x="11350447" y="201168"/>
-            <a:ext cx="475488" cy="475488"/>
+            <a:off x="11221415" y="228600"/>
+            <a:ext cx="650240" cy="237744"/>
           </a:xfrm>
           <a:prstGeom prst="rect">
             <a:avLst/>
@@ -10016,7 +9946,7 @@
       </p:sp>
       <p:pic>
         <p:nvPicPr>
-          <p:cNvPr id="8" name="Picture 7" descr="logo-banksumut.png"/>
+          <p:cNvPr id="8" name="Picture 7" descr="logo-banksumut-official.png"/>
           <p:cNvPicPr>
             <a:picLocks noChangeAspect="1"/>
           </p:cNvPicPr>
@@ -10030,8 +9960,8 @@
         </p:blipFill>
         <p:spPr>
           <a:xfrm>
-            <a:off x="164592" y="6455664"/>
-            <a:ext cx="310896" cy="310896"/>
+            <a:off x="164592" y="6483096"/>
+            <a:ext cx="550203" cy="201168"/>
           </a:xfrm>
           <a:prstGeom prst="rect">
             <a:avLst/>
@@ -10046,7 +9976,7 @@
         </p:nvSpPr>
         <p:spPr>
           <a:xfrm>
-            <a:off x="530352" y="6492240"/>
+            <a:off x="868680" y="6492240"/>
             <a:ext cx="5486400" cy="320040"/>
           </a:xfrm>
           <a:prstGeom prst="rect">
@@ -10110,7 +10040,7 @@
       </p:sp>
       <p:pic>
         <p:nvPicPr>
-          <p:cNvPr id="11" name="Picture 10" descr="logo-banksumut.png"/>
+          <p:cNvPr id="11" name="Picture 10" descr="logo-banksumut-official.png"/>
           <p:cNvPicPr>
             <a:picLocks noChangeAspect="1"/>
           </p:cNvPicPr>
@@ -10124,8 +10054,8 @@
         </p:blipFill>
         <p:spPr>
           <a:xfrm>
-            <a:off x="11350447" y="201168"/>
-            <a:ext cx="475488" cy="475488"/>
+            <a:off x="11221415" y="228600"/>
+            <a:ext cx="650240" cy="237744"/>
           </a:xfrm>
           <a:prstGeom prst="rect">
             <a:avLst/>
@@ -10504,7 +10434,7 @@
       </p:sp>
       <p:pic>
         <p:nvPicPr>
-          <p:cNvPr id="11" name="Picture 10" descr="logo-banksumut.png"/>
+          <p:cNvPr id="11" name="Picture 10" descr="logo-banksumut-official.png"/>
           <p:cNvPicPr>
             <a:picLocks noChangeAspect="1"/>
           </p:cNvPicPr>
@@ -10518,8 +10448,8 @@
         </p:blipFill>
         <p:spPr>
           <a:xfrm>
-            <a:off x="164592" y="6455664"/>
-            <a:ext cx="310896" cy="310896"/>
+            <a:off x="164592" y="6483096"/>
+            <a:ext cx="550203" cy="201168"/>
           </a:xfrm>
           <a:prstGeom prst="rect">
             <a:avLst/>
@@ -10534,7 +10464,7 @@
         </p:nvSpPr>
         <p:spPr>
           <a:xfrm>
-            <a:off x="530352" y="6492240"/>
+            <a:off x="868680" y="6492240"/>
             <a:ext cx="5486400" cy="320040"/>
           </a:xfrm>
           <a:prstGeom prst="rect">
@@ -10598,7 +10528,7 @@
       </p:sp>
       <p:pic>
         <p:nvPicPr>
-          <p:cNvPr id="14" name="Picture 13" descr="logo-banksumut.png"/>
+          <p:cNvPr id="14" name="Picture 13" descr="logo-banksumut-official.png"/>
           <p:cNvPicPr>
             <a:picLocks noChangeAspect="1"/>
           </p:cNvPicPr>
@@ -10612,8 +10542,8 @@
         </p:blipFill>
         <p:spPr>
           <a:xfrm>
-            <a:off x="11350447" y="201168"/>
-            <a:ext cx="475488" cy="475488"/>
+            <a:off x="11221415" y="228600"/>
+            <a:ext cx="650240" cy="237744"/>
           </a:xfrm>
           <a:prstGeom prst="rect">
             <a:avLst/>
@@ -10992,7 +10922,7 @@
       </p:sp>
       <p:pic>
         <p:nvPicPr>
-          <p:cNvPr id="11" name="Picture 10" descr="logo-banksumut.png"/>
+          <p:cNvPr id="11" name="Picture 10" descr="logo-banksumut-official.png"/>
           <p:cNvPicPr>
             <a:picLocks noChangeAspect="1"/>
           </p:cNvPicPr>
@@ -11006,8 +10936,8 @@
         </p:blipFill>
         <p:spPr>
           <a:xfrm>
-            <a:off x="164592" y="6455664"/>
-            <a:ext cx="310896" cy="310896"/>
+            <a:off x="164592" y="6483096"/>
+            <a:ext cx="550203" cy="201168"/>
           </a:xfrm>
           <a:prstGeom prst="rect">
             <a:avLst/>
@@ -11022,7 +10952,7 @@
         </p:nvSpPr>
         <p:spPr>
           <a:xfrm>
-            <a:off x="530352" y="6492240"/>
+            <a:off x="868680" y="6492240"/>
             <a:ext cx="5486400" cy="320040"/>
           </a:xfrm>
           <a:prstGeom prst="rect">
@@ -11086,7 +11016,7 @@
       </p:sp>
       <p:pic>
         <p:nvPicPr>
-          <p:cNvPr id="14" name="Picture 13" descr="logo-banksumut.png"/>
+          <p:cNvPr id="14" name="Picture 13" descr="logo-banksumut-official.png"/>
           <p:cNvPicPr>
             <a:picLocks noChangeAspect="1"/>
           </p:cNvPicPr>
@@ -11100,8 +11030,8 @@
         </p:blipFill>
         <p:spPr>
           <a:xfrm>
-            <a:off x="11350447" y="201168"/>
-            <a:ext cx="475488" cy="475488"/>
+            <a:off x="11221415" y="228600"/>
+            <a:ext cx="650240" cy="237744"/>
           </a:xfrm>
           <a:prstGeom prst="rect">
             <a:avLst/>
@@ -11744,7 +11674,7 @@
       </p:sp>
       <p:pic>
         <p:nvPicPr>
-          <p:cNvPr id="13" name="Picture 12" descr="logo-banksumut.png"/>
+          <p:cNvPr id="13" name="Picture 12" descr="logo-banksumut-official.png"/>
           <p:cNvPicPr>
             <a:picLocks noChangeAspect="1"/>
           </p:cNvPicPr>
@@ -11758,8 +11688,8 @@
         </p:blipFill>
         <p:spPr>
           <a:xfrm>
-            <a:off x="164592" y="6455664"/>
-            <a:ext cx="310896" cy="310896"/>
+            <a:off x="164592" y="6483096"/>
+            <a:ext cx="550203" cy="201168"/>
           </a:xfrm>
           <a:prstGeom prst="rect">
             <a:avLst/>
@@ -11774,7 +11704,7 @@
         </p:nvSpPr>
         <p:spPr>
           <a:xfrm>
-            <a:off x="530352" y="6492240"/>
+            <a:off x="868680" y="6492240"/>
             <a:ext cx="5486400" cy="320040"/>
           </a:xfrm>
           <a:prstGeom prst="rect">
@@ -11838,7 +11768,7 @@
       </p:sp>
       <p:pic>
         <p:nvPicPr>
-          <p:cNvPr id="16" name="Picture 15" descr="logo-banksumut.png"/>
+          <p:cNvPr id="16" name="Picture 15" descr="logo-banksumut-official.png"/>
           <p:cNvPicPr>
             <a:picLocks noChangeAspect="1"/>
           </p:cNvPicPr>
@@ -11852,8 +11782,8 @@
         </p:blipFill>
         <p:spPr>
           <a:xfrm>
-            <a:off x="11350447" y="201168"/>
-            <a:ext cx="475488" cy="475488"/>
+            <a:off x="11221415" y="228600"/>
+            <a:ext cx="650240" cy="237744"/>
           </a:xfrm>
           <a:prstGeom prst="rect">
             <a:avLst/>
@@ -12191,7 +12121,7 @@
       </p:sp>
       <p:pic>
         <p:nvPicPr>
-          <p:cNvPr id="6" name="Picture 5" descr="logo-banksumut.png"/>
+          <p:cNvPr id="6" name="Picture 5" descr="logo-banksumut-official.png"/>
           <p:cNvPicPr>
             <a:picLocks noChangeAspect="1"/>
           </p:cNvPicPr>
@@ -12205,8 +12135,8 @@
         </p:blipFill>
         <p:spPr>
           <a:xfrm>
-            <a:off x="164592" y="6455664"/>
-            <a:ext cx="310896" cy="310896"/>
+            <a:off x="164592" y="6483096"/>
+            <a:ext cx="550203" cy="201168"/>
           </a:xfrm>
           <a:prstGeom prst="rect">
             <a:avLst/>
@@ -12221,7 +12151,7 @@
         </p:nvSpPr>
         <p:spPr>
           <a:xfrm>
-            <a:off x="530352" y="6492240"/>
+            <a:off x="868680" y="6492240"/>
             <a:ext cx="5486400" cy="320040"/>
           </a:xfrm>
           <a:prstGeom prst="rect">
@@ -12285,7 +12215,7 @@
       </p:sp>
       <p:pic>
         <p:nvPicPr>
-          <p:cNvPr id="9" name="Picture 8" descr="logo-banksumut.png"/>
+          <p:cNvPr id="9" name="Picture 8" descr="logo-banksumut-official.png"/>
           <p:cNvPicPr>
             <a:picLocks noChangeAspect="1"/>
           </p:cNvPicPr>
@@ -12299,8 +12229,8 @@
         </p:blipFill>
         <p:spPr>
           <a:xfrm>
-            <a:off x="11350447" y="201168"/>
-            <a:ext cx="475488" cy="475488"/>
+            <a:off x="11221415" y="228600"/>
+            <a:ext cx="650240" cy="237744"/>
           </a:xfrm>
           <a:prstGeom prst="rect">
             <a:avLst/>

--- a/CorpSec-Bank-Sumut-Presentasi.pptx
+++ b/CorpSec-Bank-Sumut-Presentasi.pptx
@@ -3271,7 +3271,7 @@
       </p:sp>
       <p:pic>
         <p:nvPicPr>
-          <p:cNvPr id="6" name="Picture 5" descr="logo-banksumut-official.png"/>
+          <p:cNvPr id="6" name="Picture 5" descr="logo-banksumut-light.png"/>
           <p:cNvPicPr>
             <a:picLocks noChangeAspect="1"/>
           </p:cNvPicPr>
@@ -3286,7 +3286,7 @@
         <p:spPr>
           <a:xfrm>
             <a:off x="502920" y="411480"/>
-            <a:ext cx="800295" cy="292608"/>
+            <a:ext cx="1041167" cy="292608"/>
           </a:xfrm>
           <a:prstGeom prst="rect">
             <a:avLst/>
@@ -3338,7 +3338,7 @@
       </p:sp>
       <p:pic>
         <p:nvPicPr>
-          <p:cNvPr id="8" name="Picture 7" descr="logo-banksumut-official.png"/>
+          <p:cNvPr id="8" name="Picture 7" descr="logo-banksumut-light.png"/>
           <p:cNvPicPr>
             <a:picLocks noChangeAspect="1"/>
           </p:cNvPicPr>
@@ -3353,7 +3353,7 @@
         <p:spPr>
           <a:xfrm>
             <a:off x="164592" y="6483096"/>
-            <a:ext cx="550203" cy="201168"/>
+            <a:ext cx="715802" cy="201168"/>
           </a:xfrm>
           <a:prstGeom prst="rect">
             <a:avLst/>
@@ -3432,7 +3432,7 @@
       </p:sp>
       <p:pic>
         <p:nvPicPr>
-          <p:cNvPr id="11" name="Picture 10" descr="logo-banksumut-official.png"/>
+          <p:cNvPr id="11" name="Picture 10" descr="logo-banksumut-light.png"/>
           <p:cNvPicPr>
             <a:picLocks noChangeAspect="1"/>
           </p:cNvPicPr>
@@ -3446,8 +3446,8 @@
         </p:blipFill>
         <p:spPr>
           <a:xfrm>
-            <a:off x="11221415" y="228600"/>
-            <a:ext cx="650240" cy="237744"/>
+            <a:off x="11025706" y="228600"/>
+            <a:ext cx="845948" cy="237744"/>
           </a:xfrm>
           <a:prstGeom prst="rect">
             <a:avLst/>
@@ -3767,7 +3767,7 @@
       </p:sp>
       <p:pic>
         <p:nvPicPr>
-          <p:cNvPr id="6" name="Picture 5" descr="logo-banksumut-official.png"/>
+          <p:cNvPr id="6" name="Picture 5" descr="logo-banksumut-light.png"/>
           <p:cNvPicPr>
             <a:picLocks noChangeAspect="1"/>
           </p:cNvPicPr>
@@ -3782,7 +3782,7 @@
         <p:spPr>
           <a:xfrm>
             <a:off x="164592" y="6483096"/>
-            <a:ext cx="550203" cy="201168"/>
+            <a:ext cx="715802" cy="201168"/>
           </a:xfrm>
           <a:prstGeom prst="rect">
             <a:avLst/>
@@ -3861,7 +3861,7 @@
       </p:sp>
       <p:pic>
         <p:nvPicPr>
-          <p:cNvPr id="9" name="Picture 8" descr="logo-banksumut-official.png"/>
+          <p:cNvPr id="9" name="Picture 8" descr="logo-banksumut-light.png"/>
           <p:cNvPicPr>
             <a:picLocks noChangeAspect="1"/>
           </p:cNvPicPr>
@@ -3875,8 +3875,8 @@
         </p:blipFill>
         <p:spPr>
           <a:xfrm>
-            <a:off x="11221415" y="228600"/>
-            <a:ext cx="650240" cy="237744"/>
+            <a:off x="11025706" y="228600"/>
+            <a:ext cx="845948" cy="237744"/>
           </a:xfrm>
           <a:prstGeom prst="rect">
             <a:avLst/>
@@ -4579,7 +4579,7 @@
       </p:sp>
       <p:pic>
         <p:nvPicPr>
-          <p:cNvPr id="13" name="Picture 12" descr="logo-banksumut-official.png"/>
+          <p:cNvPr id="13" name="Picture 12" descr="logo-banksumut-light.png"/>
           <p:cNvPicPr>
             <a:picLocks noChangeAspect="1"/>
           </p:cNvPicPr>
@@ -4594,7 +4594,7 @@
         <p:spPr>
           <a:xfrm>
             <a:off x="164592" y="6483096"/>
-            <a:ext cx="550203" cy="201168"/>
+            <a:ext cx="715802" cy="201168"/>
           </a:xfrm>
           <a:prstGeom prst="rect">
             <a:avLst/>
@@ -4673,7 +4673,7 @@
       </p:sp>
       <p:pic>
         <p:nvPicPr>
-          <p:cNvPr id="16" name="Picture 15" descr="logo-banksumut-official.png"/>
+          <p:cNvPr id="16" name="Picture 15" descr="logo-banksumut-light.png"/>
           <p:cNvPicPr>
             <a:picLocks noChangeAspect="1"/>
           </p:cNvPicPr>
@@ -4687,8 +4687,8 @@
         </p:blipFill>
         <p:spPr>
           <a:xfrm>
-            <a:off x="11221415" y="228600"/>
-            <a:ext cx="650240" cy="237744"/>
+            <a:off x="11025706" y="228600"/>
+            <a:ext cx="845948" cy="237744"/>
           </a:xfrm>
           <a:prstGeom prst="rect">
             <a:avLst/>
@@ -5361,7 +5361,7 @@
       </p:sp>
       <p:pic>
         <p:nvPicPr>
-          <p:cNvPr id="13" name="Picture 12" descr="logo-banksumut-official.png"/>
+          <p:cNvPr id="13" name="Picture 12" descr="logo-banksumut-light.png"/>
           <p:cNvPicPr>
             <a:picLocks noChangeAspect="1"/>
           </p:cNvPicPr>
@@ -5376,7 +5376,7 @@
         <p:spPr>
           <a:xfrm>
             <a:off x="164592" y="6483096"/>
-            <a:ext cx="550203" cy="201168"/>
+            <a:ext cx="715802" cy="201168"/>
           </a:xfrm>
           <a:prstGeom prst="rect">
             <a:avLst/>
@@ -5455,7 +5455,7 @@
       </p:sp>
       <p:pic>
         <p:nvPicPr>
-          <p:cNvPr id="16" name="Picture 15" descr="logo-banksumut-official.png"/>
+          <p:cNvPr id="16" name="Picture 15" descr="logo-banksumut-light.png"/>
           <p:cNvPicPr>
             <a:picLocks noChangeAspect="1"/>
           </p:cNvPicPr>
@@ -5469,8 +5469,8 @@
         </p:blipFill>
         <p:spPr>
           <a:xfrm>
-            <a:off x="11221415" y="228600"/>
-            <a:ext cx="650240" cy="237744"/>
+            <a:off x="11025706" y="228600"/>
+            <a:ext cx="845948" cy="237744"/>
           </a:xfrm>
           <a:prstGeom prst="rect">
             <a:avLst/>
@@ -6259,7 +6259,7 @@
       </p:sp>
       <p:pic>
         <p:nvPicPr>
-          <p:cNvPr id="17" name="Picture 16" descr="logo-banksumut-official.png"/>
+          <p:cNvPr id="17" name="Picture 16" descr="logo-banksumut-light.png"/>
           <p:cNvPicPr>
             <a:picLocks noChangeAspect="1"/>
           </p:cNvPicPr>
@@ -6274,7 +6274,7 @@
         <p:spPr>
           <a:xfrm>
             <a:off x="164592" y="6483096"/>
-            <a:ext cx="550203" cy="201168"/>
+            <a:ext cx="715802" cy="201168"/>
           </a:xfrm>
           <a:prstGeom prst="rect">
             <a:avLst/>
@@ -6353,7 +6353,7 @@
       </p:sp>
       <p:pic>
         <p:nvPicPr>
-          <p:cNvPr id="20" name="Picture 19" descr="logo-banksumut-official.png"/>
+          <p:cNvPr id="20" name="Picture 19" descr="logo-banksumut-light.png"/>
           <p:cNvPicPr>
             <a:picLocks noChangeAspect="1"/>
           </p:cNvPicPr>
@@ -6367,8 +6367,8 @@
         </p:blipFill>
         <p:spPr>
           <a:xfrm>
-            <a:off x="11221415" y="228600"/>
-            <a:ext cx="650240" cy="237744"/>
+            <a:off x="11025706" y="228600"/>
+            <a:ext cx="845948" cy="237744"/>
           </a:xfrm>
           <a:prstGeom prst="rect">
             <a:avLst/>
@@ -6551,7 +6551,7 @@
       </p:sp>
       <p:pic>
         <p:nvPicPr>
-          <p:cNvPr id="6" name="Picture 5" descr="logo-banksumut-official.png"/>
+          <p:cNvPr id="6" name="Picture 5" descr="logo-banksumut-light.png"/>
           <p:cNvPicPr>
             <a:picLocks noChangeAspect="1"/>
           </p:cNvPicPr>
@@ -6566,7 +6566,7 @@
         <p:spPr>
           <a:xfrm>
             <a:off x="502920" y="411480"/>
-            <a:ext cx="800295" cy="292608"/>
+            <a:ext cx="1041167" cy="292608"/>
           </a:xfrm>
           <a:prstGeom prst="rect">
             <a:avLst/>
@@ -6618,7 +6618,7 @@
       </p:sp>
       <p:pic>
         <p:nvPicPr>
-          <p:cNvPr id="8" name="Picture 7" descr="logo-banksumut-official.png"/>
+          <p:cNvPr id="8" name="Picture 7" descr="logo-banksumut-light.png"/>
           <p:cNvPicPr>
             <a:picLocks noChangeAspect="1"/>
           </p:cNvPicPr>
@@ -6633,7 +6633,7 @@
         <p:spPr>
           <a:xfrm>
             <a:off x="164592" y="6483096"/>
-            <a:ext cx="550203" cy="201168"/>
+            <a:ext cx="715802" cy="201168"/>
           </a:xfrm>
           <a:prstGeom prst="rect">
             <a:avLst/>
@@ -6712,7 +6712,7 @@
       </p:sp>
       <p:pic>
         <p:nvPicPr>
-          <p:cNvPr id="11" name="Picture 10" descr="logo-banksumut-official.png"/>
+          <p:cNvPr id="11" name="Picture 10" descr="logo-banksumut-light.png"/>
           <p:cNvPicPr>
             <a:picLocks noChangeAspect="1"/>
           </p:cNvPicPr>
@@ -6726,8 +6726,8 @@
         </p:blipFill>
         <p:spPr>
           <a:xfrm>
-            <a:off x="11221415" y="228600"/>
-            <a:ext cx="650240" cy="237744"/>
+            <a:off x="11025706" y="228600"/>
+            <a:ext cx="845948" cy="237744"/>
           </a:xfrm>
           <a:prstGeom prst="rect">
             <a:avLst/>
@@ -8044,7 +8044,7 @@
       </p:sp>
       <p:pic>
         <p:nvPicPr>
-          <p:cNvPr id="29" name="Picture 28" descr="logo-banksumut-official.png"/>
+          <p:cNvPr id="29" name="Picture 28" descr="logo-banksumut-light.png"/>
           <p:cNvPicPr>
             <a:picLocks noChangeAspect="1"/>
           </p:cNvPicPr>
@@ -8059,7 +8059,7 @@
         <p:spPr>
           <a:xfrm>
             <a:off x="164592" y="6483096"/>
-            <a:ext cx="550203" cy="201168"/>
+            <a:ext cx="715802" cy="201168"/>
           </a:xfrm>
           <a:prstGeom prst="rect">
             <a:avLst/>
@@ -8138,7 +8138,7 @@
       </p:sp>
       <p:pic>
         <p:nvPicPr>
-          <p:cNvPr id="32" name="Picture 31" descr="logo-banksumut-official.png"/>
+          <p:cNvPr id="32" name="Picture 31" descr="logo-banksumut-light.png"/>
           <p:cNvPicPr>
             <a:picLocks noChangeAspect="1"/>
           </p:cNvPicPr>
@@ -8152,8 +8152,8 @@
         </p:blipFill>
         <p:spPr>
           <a:xfrm>
-            <a:off x="11221415" y="228600"/>
-            <a:ext cx="650240" cy="237744"/>
+            <a:off x="11025706" y="228600"/>
+            <a:ext cx="845948" cy="237744"/>
           </a:xfrm>
           <a:prstGeom prst="rect">
             <a:avLst/>
@@ -9178,7 +9178,7 @@
       </p:sp>
       <p:pic>
         <p:nvPicPr>
-          <p:cNvPr id="21" name="Picture 20" descr="logo-banksumut-official.png"/>
+          <p:cNvPr id="21" name="Picture 20" descr="logo-banksumut-light.png"/>
           <p:cNvPicPr>
             <a:picLocks noChangeAspect="1"/>
           </p:cNvPicPr>
@@ -9193,7 +9193,7 @@
         <p:spPr>
           <a:xfrm>
             <a:off x="164592" y="6483096"/>
-            <a:ext cx="550203" cy="201168"/>
+            <a:ext cx="715802" cy="201168"/>
           </a:xfrm>
           <a:prstGeom prst="rect">
             <a:avLst/>
@@ -9272,7 +9272,7 @@
       </p:sp>
       <p:pic>
         <p:nvPicPr>
-          <p:cNvPr id="24" name="Picture 23" descr="logo-banksumut-official.png"/>
+          <p:cNvPr id="24" name="Picture 23" descr="logo-banksumut-light.png"/>
           <p:cNvPicPr>
             <a:picLocks noChangeAspect="1"/>
           </p:cNvPicPr>
@@ -9286,8 +9286,8 @@
         </p:blipFill>
         <p:spPr>
           <a:xfrm>
-            <a:off x="11221415" y="228600"/>
-            <a:ext cx="650240" cy="237744"/>
+            <a:off x="11025706" y="228600"/>
+            <a:ext cx="845948" cy="237744"/>
           </a:xfrm>
           <a:prstGeom prst="rect">
             <a:avLst/>
@@ -9562,7 +9562,7 @@
       </p:sp>
       <p:pic>
         <p:nvPicPr>
-          <p:cNvPr id="8" name="Picture 7" descr="logo-banksumut-official.png"/>
+          <p:cNvPr id="8" name="Picture 7" descr="logo-banksumut-light.png"/>
           <p:cNvPicPr>
             <a:picLocks noChangeAspect="1"/>
           </p:cNvPicPr>
@@ -9577,7 +9577,7 @@
         <p:spPr>
           <a:xfrm>
             <a:off x="164592" y="6483096"/>
-            <a:ext cx="550203" cy="201168"/>
+            <a:ext cx="715802" cy="201168"/>
           </a:xfrm>
           <a:prstGeom prst="rect">
             <a:avLst/>
@@ -9656,7 +9656,7 @@
       </p:sp>
       <p:pic>
         <p:nvPicPr>
-          <p:cNvPr id="11" name="Picture 10" descr="logo-banksumut-official.png"/>
+          <p:cNvPr id="11" name="Picture 10" descr="logo-banksumut-light.png"/>
           <p:cNvPicPr>
             <a:picLocks noChangeAspect="1"/>
           </p:cNvPicPr>
@@ -9670,8 +9670,8 @@
         </p:blipFill>
         <p:spPr>
           <a:xfrm>
-            <a:off x="11221415" y="228600"/>
-            <a:ext cx="650240" cy="237744"/>
+            <a:off x="11025706" y="228600"/>
+            <a:ext cx="845948" cy="237744"/>
           </a:xfrm>
           <a:prstGeom prst="rect">
             <a:avLst/>
@@ -9946,7 +9946,7 @@
       </p:sp>
       <p:pic>
         <p:nvPicPr>
-          <p:cNvPr id="8" name="Picture 7" descr="logo-banksumut-official.png"/>
+          <p:cNvPr id="8" name="Picture 7" descr="logo-banksumut-light.png"/>
           <p:cNvPicPr>
             <a:picLocks noChangeAspect="1"/>
           </p:cNvPicPr>
@@ -9961,7 +9961,7 @@
         <p:spPr>
           <a:xfrm>
             <a:off x="164592" y="6483096"/>
-            <a:ext cx="550203" cy="201168"/>
+            <a:ext cx="715802" cy="201168"/>
           </a:xfrm>
           <a:prstGeom prst="rect">
             <a:avLst/>
@@ -10040,7 +10040,7 @@
       </p:sp>
       <p:pic>
         <p:nvPicPr>
-          <p:cNvPr id="11" name="Picture 10" descr="logo-banksumut-official.png"/>
+          <p:cNvPr id="11" name="Picture 10" descr="logo-banksumut-light.png"/>
           <p:cNvPicPr>
             <a:picLocks noChangeAspect="1"/>
           </p:cNvPicPr>
@@ -10054,8 +10054,8 @@
         </p:blipFill>
         <p:spPr>
           <a:xfrm>
-            <a:off x="11221415" y="228600"/>
-            <a:ext cx="650240" cy="237744"/>
+            <a:off x="11025706" y="228600"/>
+            <a:ext cx="845948" cy="237744"/>
           </a:xfrm>
           <a:prstGeom prst="rect">
             <a:avLst/>
@@ -10434,7 +10434,7 @@
       </p:sp>
       <p:pic>
         <p:nvPicPr>
-          <p:cNvPr id="11" name="Picture 10" descr="logo-banksumut-official.png"/>
+          <p:cNvPr id="11" name="Picture 10" descr="logo-banksumut-light.png"/>
           <p:cNvPicPr>
             <a:picLocks noChangeAspect="1"/>
           </p:cNvPicPr>
@@ -10449,7 +10449,7 @@
         <p:spPr>
           <a:xfrm>
             <a:off x="164592" y="6483096"/>
-            <a:ext cx="550203" cy="201168"/>
+            <a:ext cx="715802" cy="201168"/>
           </a:xfrm>
           <a:prstGeom prst="rect">
             <a:avLst/>
@@ -10528,7 +10528,7 @@
       </p:sp>
       <p:pic>
         <p:nvPicPr>
-          <p:cNvPr id="14" name="Picture 13" descr="logo-banksumut-official.png"/>
+          <p:cNvPr id="14" name="Picture 13" descr="logo-banksumut-light.png"/>
           <p:cNvPicPr>
             <a:picLocks noChangeAspect="1"/>
           </p:cNvPicPr>
@@ -10542,8 +10542,8 @@
         </p:blipFill>
         <p:spPr>
           <a:xfrm>
-            <a:off x="11221415" y="228600"/>
-            <a:ext cx="650240" cy="237744"/>
+            <a:off x="11025706" y="228600"/>
+            <a:ext cx="845948" cy="237744"/>
           </a:xfrm>
           <a:prstGeom prst="rect">
             <a:avLst/>
@@ -10922,7 +10922,7 @@
       </p:sp>
       <p:pic>
         <p:nvPicPr>
-          <p:cNvPr id="11" name="Picture 10" descr="logo-banksumut-official.png"/>
+          <p:cNvPr id="11" name="Picture 10" descr="logo-banksumut-light.png"/>
           <p:cNvPicPr>
             <a:picLocks noChangeAspect="1"/>
           </p:cNvPicPr>
@@ -10937,7 +10937,7 @@
         <p:spPr>
           <a:xfrm>
             <a:off x="164592" y="6483096"/>
-            <a:ext cx="550203" cy="201168"/>
+            <a:ext cx="715802" cy="201168"/>
           </a:xfrm>
           <a:prstGeom prst="rect">
             <a:avLst/>
@@ -11016,7 +11016,7 @@
       </p:sp>
       <p:pic>
         <p:nvPicPr>
-          <p:cNvPr id="14" name="Picture 13" descr="logo-banksumut-official.png"/>
+          <p:cNvPr id="14" name="Picture 13" descr="logo-banksumut-light.png"/>
           <p:cNvPicPr>
             <a:picLocks noChangeAspect="1"/>
           </p:cNvPicPr>
@@ -11030,8 +11030,8 @@
         </p:blipFill>
         <p:spPr>
           <a:xfrm>
-            <a:off x="11221415" y="228600"/>
-            <a:ext cx="650240" cy="237744"/>
+            <a:off x="11025706" y="228600"/>
+            <a:ext cx="845948" cy="237744"/>
           </a:xfrm>
           <a:prstGeom prst="rect">
             <a:avLst/>
@@ -11674,7 +11674,7 @@
       </p:sp>
       <p:pic>
         <p:nvPicPr>
-          <p:cNvPr id="13" name="Picture 12" descr="logo-banksumut-official.png"/>
+          <p:cNvPr id="13" name="Picture 12" descr="logo-banksumut-light.png"/>
           <p:cNvPicPr>
             <a:picLocks noChangeAspect="1"/>
           </p:cNvPicPr>
@@ -11689,7 +11689,7 @@
         <p:spPr>
           <a:xfrm>
             <a:off x="164592" y="6483096"/>
-            <a:ext cx="550203" cy="201168"/>
+            <a:ext cx="715802" cy="201168"/>
           </a:xfrm>
           <a:prstGeom prst="rect">
             <a:avLst/>
@@ -11768,7 +11768,7 @@
       </p:sp>
       <p:pic>
         <p:nvPicPr>
-          <p:cNvPr id="16" name="Picture 15" descr="logo-banksumut-official.png"/>
+          <p:cNvPr id="16" name="Picture 15" descr="logo-banksumut-light.png"/>
           <p:cNvPicPr>
             <a:picLocks noChangeAspect="1"/>
           </p:cNvPicPr>
@@ -11782,8 +11782,8 @@
         </p:blipFill>
         <p:spPr>
           <a:xfrm>
-            <a:off x="11221415" y="228600"/>
-            <a:ext cx="650240" cy="237744"/>
+            <a:off x="11025706" y="228600"/>
+            <a:ext cx="845948" cy="237744"/>
           </a:xfrm>
           <a:prstGeom prst="rect">
             <a:avLst/>
@@ -12121,7 +12121,7 @@
       </p:sp>
       <p:pic>
         <p:nvPicPr>
-          <p:cNvPr id="6" name="Picture 5" descr="logo-banksumut-official.png"/>
+          <p:cNvPr id="6" name="Picture 5" descr="logo-banksumut-light.png"/>
           <p:cNvPicPr>
             <a:picLocks noChangeAspect="1"/>
           </p:cNvPicPr>
@@ -12136,7 +12136,7 @@
         <p:spPr>
           <a:xfrm>
             <a:off x="164592" y="6483096"/>
-            <a:ext cx="550203" cy="201168"/>
+            <a:ext cx="715802" cy="201168"/>
           </a:xfrm>
           <a:prstGeom prst="rect">
             <a:avLst/>
@@ -12215,7 +12215,7 @@
       </p:sp>
       <p:pic>
         <p:nvPicPr>
-          <p:cNvPr id="9" name="Picture 8" descr="logo-banksumut-official.png"/>
+          <p:cNvPr id="9" name="Picture 8" descr="logo-banksumut-light.png"/>
           <p:cNvPicPr>
             <a:picLocks noChangeAspect="1"/>
           </p:cNvPicPr>
@@ -12229,8 +12229,8 @@
         </p:blipFill>
         <p:spPr>
           <a:xfrm>
-            <a:off x="11221415" y="228600"/>
-            <a:ext cx="650240" cy="237744"/>
+            <a:off x="11025706" y="228600"/>
+            <a:ext cx="845948" cy="237744"/>
           </a:xfrm>
           <a:prstGeom prst="rect">
             <a:avLst/>
